--- a/files/demo-presentation.pptx
+++ b/files/demo-presentation.pptx
@@ -4,17 +4,21 @@
   <p:sldMasterIdLst>
     <p:sldMasterId id="2147483648" r:id="rId1"/>
   </p:sldMasterIdLst>
+  <p:notesMasterIdLst>
+    <p:notesMasterId r:id="rId4"/>
+  </p:notesMasterIdLst>
   <p:sldIdLst>
-    <p:sldId id="256" r:id="rId7"/>
+    <p:sldId id="257" r:id="rId2"/>
+    <p:sldId id="256" r:id="rId3"/>
   </p:sldIdLst>
-  <p:sldSz cx="9144000" cy="6858000" type="screen4x3"/>
+  <p:sldSz cx="9144000" cy="5143500" type="screen16x9"/>
   <p:notesSz cx="6858000" cy="9144000"/>
   <p:defaultTextStyle>
     <a:defPPr>
       <a:defRPr lang="en-US"/>
     </a:defPPr>
-    <a:lvl1pPr marL="0" algn="l" defTabSz="457200" rtl="0" eaLnBrk="1" latinLnBrk="0" hangingPunct="1">
-      <a:defRPr sz="1800" kern="1200">
+    <a:lvl1pPr marL="0" algn="l" defTabSz="342900" rtl="0" eaLnBrk="1" latinLnBrk="0" hangingPunct="1">
+      <a:defRPr sz="1350" kern="1200">
         <a:solidFill>
           <a:schemeClr val="tx1"/>
         </a:solidFill>
@@ -23,8 +27,8 @@
         <a:cs typeface="+mn-cs"/>
       </a:defRPr>
     </a:lvl1pPr>
-    <a:lvl2pPr marL="457200" algn="l" defTabSz="457200" rtl="0" eaLnBrk="1" latinLnBrk="0" hangingPunct="1">
-      <a:defRPr sz="1800" kern="1200">
+    <a:lvl2pPr marL="342900" algn="l" defTabSz="342900" rtl="0" eaLnBrk="1" latinLnBrk="0" hangingPunct="1">
+      <a:defRPr sz="1350" kern="1200">
         <a:solidFill>
           <a:schemeClr val="tx1"/>
         </a:solidFill>
@@ -33,8 +37,8 @@
         <a:cs typeface="+mn-cs"/>
       </a:defRPr>
     </a:lvl2pPr>
-    <a:lvl3pPr marL="914400" algn="l" defTabSz="457200" rtl="0" eaLnBrk="1" latinLnBrk="0" hangingPunct="1">
-      <a:defRPr sz="1800" kern="1200">
+    <a:lvl3pPr marL="685800" algn="l" defTabSz="342900" rtl="0" eaLnBrk="1" latinLnBrk="0" hangingPunct="1">
+      <a:defRPr sz="1350" kern="1200">
         <a:solidFill>
           <a:schemeClr val="tx1"/>
         </a:solidFill>
@@ -43,8 +47,8 @@
         <a:cs typeface="+mn-cs"/>
       </a:defRPr>
     </a:lvl3pPr>
-    <a:lvl4pPr marL="1371600" algn="l" defTabSz="457200" rtl="0" eaLnBrk="1" latinLnBrk="0" hangingPunct="1">
-      <a:defRPr sz="1800" kern="1200">
+    <a:lvl4pPr marL="1028700" algn="l" defTabSz="342900" rtl="0" eaLnBrk="1" latinLnBrk="0" hangingPunct="1">
+      <a:defRPr sz="1350" kern="1200">
         <a:solidFill>
           <a:schemeClr val="tx1"/>
         </a:solidFill>
@@ -53,8 +57,8 @@
         <a:cs typeface="+mn-cs"/>
       </a:defRPr>
     </a:lvl4pPr>
-    <a:lvl5pPr marL="1828800" algn="l" defTabSz="457200" rtl="0" eaLnBrk="1" latinLnBrk="0" hangingPunct="1">
-      <a:defRPr sz="1800" kern="1200">
+    <a:lvl5pPr marL="1371600" algn="l" defTabSz="342900" rtl="0" eaLnBrk="1" latinLnBrk="0" hangingPunct="1">
+      <a:defRPr sz="1350" kern="1200">
         <a:solidFill>
           <a:schemeClr val="tx1"/>
         </a:solidFill>
@@ -63,8 +67,8 @@
         <a:cs typeface="+mn-cs"/>
       </a:defRPr>
     </a:lvl5pPr>
-    <a:lvl6pPr marL="2286000" algn="l" defTabSz="457200" rtl="0" eaLnBrk="1" latinLnBrk="0" hangingPunct="1">
-      <a:defRPr sz="1800" kern="1200">
+    <a:lvl6pPr marL="1714500" algn="l" defTabSz="342900" rtl="0" eaLnBrk="1" latinLnBrk="0" hangingPunct="1">
+      <a:defRPr sz="1350" kern="1200">
         <a:solidFill>
           <a:schemeClr val="tx1"/>
         </a:solidFill>
@@ -73,8 +77,8 @@
         <a:cs typeface="+mn-cs"/>
       </a:defRPr>
     </a:lvl6pPr>
-    <a:lvl7pPr marL="2743200" algn="l" defTabSz="457200" rtl="0" eaLnBrk="1" latinLnBrk="0" hangingPunct="1">
-      <a:defRPr sz="1800" kern="1200">
+    <a:lvl7pPr marL="2057400" algn="l" defTabSz="342900" rtl="0" eaLnBrk="1" latinLnBrk="0" hangingPunct="1">
+      <a:defRPr sz="1350" kern="1200">
         <a:solidFill>
           <a:schemeClr val="tx1"/>
         </a:solidFill>
@@ -83,8 +87,8 @@
         <a:cs typeface="+mn-cs"/>
       </a:defRPr>
     </a:lvl7pPr>
-    <a:lvl8pPr marL="3200400" algn="l" defTabSz="457200" rtl="0" eaLnBrk="1" latinLnBrk="0" hangingPunct="1">
-      <a:defRPr sz="1800" kern="1200">
+    <a:lvl8pPr marL="2400300" algn="l" defTabSz="342900" rtl="0" eaLnBrk="1" latinLnBrk="0" hangingPunct="1">
+      <a:defRPr sz="1350" kern="1200">
         <a:solidFill>
           <a:schemeClr val="tx1"/>
         </a:solidFill>
@@ -93,8 +97,8 @@
         <a:cs typeface="+mn-cs"/>
       </a:defRPr>
     </a:lvl8pPr>
-    <a:lvl9pPr marL="3657600" algn="l" defTabSz="457200" rtl="0" eaLnBrk="1" latinLnBrk="0" hangingPunct="1">
-      <a:defRPr sz="1800" kern="1200">
+    <a:lvl9pPr marL="2743200" algn="l" defTabSz="342900" rtl="0" eaLnBrk="1" latinLnBrk="0" hangingPunct="1">
+      <a:defRPr sz="1350" kern="1200">
         <a:solidFill>
           <a:schemeClr val="tx1"/>
         </a:solidFill>
@@ -104,7 +108,541 @@
       </a:defRPr>
     </a:lvl9pPr>
   </p:defaultTextStyle>
+  <p:extLst>
+    <p:ext uri="{EFAFB233-063F-42B5-8137-9DF3F51BA10A}">
+      <p15:sldGuideLst xmlns:p15="http://schemas.microsoft.com/office/powerpoint/2012/main">
+        <p15:guide id="1" orient="horz" pos="1620" userDrawn="1">
+          <p15:clr>
+            <a:srgbClr val="A4A3A4"/>
+          </p15:clr>
+        </p15:guide>
+        <p15:guide id="2" pos="2880" userDrawn="1">
+          <p15:clr>
+            <a:srgbClr val="A4A3A4"/>
+          </p15:clr>
+        </p15:guide>
+      </p15:sldGuideLst>
+    </p:ext>
+  </p:extLst>
 </p:presentation>
+</file>
+
+<file path=ppt/notesMasters/notesMaster1.xml><?xml version="1.0" encoding="utf-8"?>
+<p:notesMaster xmlns:a="http://schemas.openxmlformats.org/drawingml/2006/main" xmlns:r="http://schemas.openxmlformats.org/officeDocument/2006/relationships" xmlns:p="http://schemas.openxmlformats.org/presentationml/2006/main">
+  <p:cSld>
+    <p:bg>
+      <p:bgRef idx="1001">
+        <a:schemeClr val="bg1"/>
+      </p:bgRef>
+    </p:bg>
+    <p:spTree>
+      <p:nvGrpSpPr>
+        <p:cNvPr id="1" name=""/>
+        <p:cNvGrpSpPr/>
+        <p:nvPr/>
+      </p:nvGrpSpPr>
+      <p:grpSpPr>
+        <a:xfrm>
+          <a:off x="0" y="0"/>
+          <a:ext cx="0" cy="0"/>
+          <a:chOff x="0" y="0"/>
+          <a:chExt cx="0" cy="0"/>
+        </a:xfrm>
+      </p:grpSpPr>
+      <p:sp>
+        <p:nvSpPr>
+          <p:cNvPr id="2" name="Header Placeholder 1"/>
+          <p:cNvSpPr>
+            <a:spLocks noGrp="1"/>
+          </p:cNvSpPr>
+          <p:nvPr>
+            <p:ph type="hdr" sz="quarter"/>
+          </p:nvPr>
+        </p:nvSpPr>
+        <p:spPr>
+          <a:xfrm>
+            <a:off x="0" y="0"/>
+            <a:ext cx="2971800" cy="458788"/>
+          </a:xfrm>
+          <a:prstGeom prst="rect">
+            <a:avLst/>
+          </a:prstGeom>
+        </p:spPr>
+        <p:txBody>
+          <a:bodyPr vert="horz" lIns="91440" tIns="45720" rIns="91440" bIns="45720" rtlCol="0"/>
+          <a:lstStyle>
+            <a:lvl1pPr algn="l">
+              <a:defRPr sz="1200"/>
+            </a:lvl1pPr>
+          </a:lstStyle>
+          <a:p>
+            <a:endParaRPr lang="en-US"/>
+          </a:p>
+        </p:txBody>
+      </p:sp>
+      <p:sp>
+        <p:nvSpPr>
+          <p:cNvPr id="3" name="Date Placeholder 2"/>
+          <p:cNvSpPr>
+            <a:spLocks noGrp="1"/>
+          </p:cNvSpPr>
+          <p:nvPr>
+            <p:ph type="dt" idx="1"/>
+          </p:nvPr>
+        </p:nvSpPr>
+        <p:spPr>
+          <a:xfrm>
+            <a:off x="3884613" y="0"/>
+            <a:ext cx="2971800" cy="458788"/>
+          </a:xfrm>
+          <a:prstGeom prst="rect">
+            <a:avLst/>
+          </a:prstGeom>
+        </p:spPr>
+        <p:txBody>
+          <a:bodyPr vert="horz" lIns="91440" tIns="45720" rIns="91440" bIns="45720" rtlCol="0"/>
+          <a:lstStyle>
+            <a:lvl1pPr algn="r">
+              <a:defRPr sz="1200"/>
+            </a:lvl1pPr>
+          </a:lstStyle>
+          <a:p>
+            <a:fld id="{FD65ADB7-7410-3445-AF9C-1CE71E165676}" type="datetimeFigureOut">
+              <a:rPr lang="en-US" smtClean="0"/>
+              <a:t>3/19/26</a:t>
+            </a:fld>
+            <a:endParaRPr lang="en-US"/>
+          </a:p>
+        </p:txBody>
+      </p:sp>
+      <p:sp>
+        <p:nvSpPr>
+          <p:cNvPr id="4" name="Slide Image Placeholder 3"/>
+          <p:cNvSpPr>
+            <a:spLocks noGrp="1" noRot="1" noChangeAspect="1"/>
+          </p:cNvSpPr>
+          <p:nvPr>
+            <p:ph type="sldImg" idx="2"/>
+          </p:nvPr>
+        </p:nvSpPr>
+        <p:spPr>
+          <a:xfrm>
+            <a:off x="685800" y="1143000"/>
+            <a:ext cx="5486400" cy="3086100"/>
+          </a:xfrm>
+          <a:prstGeom prst="rect">
+            <a:avLst/>
+          </a:prstGeom>
+          <a:noFill/>
+          <a:ln w="12700">
+            <a:solidFill>
+              <a:prstClr val="black"/>
+            </a:solidFill>
+          </a:ln>
+        </p:spPr>
+        <p:txBody>
+          <a:bodyPr vert="horz" lIns="91440" tIns="45720" rIns="91440" bIns="45720" rtlCol="0" anchor="ctr"/>
+          <a:lstStyle/>
+          <a:p>
+            <a:endParaRPr lang="en-US"/>
+          </a:p>
+        </p:txBody>
+      </p:sp>
+      <p:sp>
+        <p:nvSpPr>
+          <p:cNvPr id="5" name="Notes Placeholder 4"/>
+          <p:cNvSpPr>
+            <a:spLocks noGrp="1"/>
+          </p:cNvSpPr>
+          <p:nvPr>
+            <p:ph type="body" sz="quarter" idx="3"/>
+          </p:nvPr>
+        </p:nvSpPr>
+        <p:spPr>
+          <a:xfrm>
+            <a:off x="685800" y="4400550"/>
+            <a:ext cx="5486400" cy="3600450"/>
+          </a:xfrm>
+          <a:prstGeom prst="rect">
+            <a:avLst/>
+          </a:prstGeom>
+        </p:spPr>
+        <p:txBody>
+          <a:bodyPr vert="horz" lIns="91440" tIns="45720" rIns="91440" bIns="45720" rtlCol="0"/>
+          <a:lstStyle/>
+          <a:p>
+            <a:pPr lvl="0"/>
+            <a:r>
+              <a:rPr lang="en-GB"/>
+              <a:t>Click to edit Master text styles</a:t>
+            </a:r>
+          </a:p>
+          <a:p>
+            <a:pPr lvl="1"/>
+            <a:r>
+              <a:rPr lang="en-GB"/>
+              <a:t>Second level</a:t>
+            </a:r>
+          </a:p>
+          <a:p>
+            <a:pPr lvl="2"/>
+            <a:r>
+              <a:rPr lang="en-GB"/>
+              <a:t>Third level</a:t>
+            </a:r>
+          </a:p>
+          <a:p>
+            <a:pPr lvl="3"/>
+            <a:r>
+              <a:rPr lang="en-GB"/>
+              <a:t>Fourth level</a:t>
+            </a:r>
+          </a:p>
+          <a:p>
+            <a:pPr lvl="4"/>
+            <a:r>
+              <a:rPr lang="en-GB"/>
+              <a:t>Fifth level</a:t>
+            </a:r>
+            <a:endParaRPr lang="en-US"/>
+          </a:p>
+        </p:txBody>
+      </p:sp>
+      <p:sp>
+        <p:nvSpPr>
+          <p:cNvPr id="6" name="Footer Placeholder 5"/>
+          <p:cNvSpPr>
+            <a:spLocks noGrp="1"/>
+          </p:cNvSpPr>
+          <p:nvPr>
+            <p:ph type="ftr" sz="quarter" idx="4"/>
+          </p:nvPr>
+        </p:nvSpPr>
+        <p:spPr>
+          <a:xfrm>
+            <a:off x="0" y="8685213"/>
+            <a:ext cx="2971800" cy="458787"/>
+          </a:xfrm>
+          <a:prstGeom prst="rect">
+            <a:avLst/>
+          </a:prstGeom>
+        </p:spPr>
+        <p:txBody>
+          <a:bodyPr vert="horz" lIns="91440" tIns="45720" rIns="91440" bIns="45720" rtlCol="0" anchor="b"/>
+          <a:lstStyle>
+            <a:lvl1pPr algn="l">
+              <a:defRPr sz="1200"/>
+            </a:lvl1pPr>
+          </a:lstStyle>
+          <a:p>
+            <a:endParaRPr lang="en-US"/>
+          </a:p>
+        </p:txBody>
+      </p:sp>
+      <p:sp>
+        <p:nvSpPr>
+          <p:cNvPr id="7" name="Slide Number Placeholder 6"/>
+          <p:cNvSpPr>
+            <a:spLocks noGrp="1"/>
+          </p:cNvSpPr>
+          <p:nvPr>
+            <p:ph type="sldNum" sz="quarter" idx="5"/>
+          </p:nvPr>
+        </p:nvSpPr>
+        <p:spPr>
+          <a:xfrm>
+            <a:off x="3884613" y="8685213"/>
+            <a:ext cx="2971800" cy="458787"/>
+          </a:xfrm>
+          <a:prstGeom prst="rect">
+            <a:avLst/>
+          </a:prstGeom>
+        </p:spPr>
+        <p:txBody>
+          <a:bodyPr vert="horz" lIns="91440" tIns="45720" rIns="91440" bIns="45720" rtlCol="0" anchor="b"/>
+          <a:lstStyle>
+            <a:lvl1pPr algn="r">
+              <a:defRPr sz="1200"/>
+            </a:lvl1pPr>
+          </a:lstStyle>
+          <a:p>
+            <a:fld id="{02CE8620-84B8-444D-AB48-33C73ACB79DA}" type="slidenum">
+              <a:rPr lang="en-US" smtClean="0"/>
+              <a:t>‹#›</a:t>
+            </a:fld>
+            <a:endParaRPr lang="en-US"/>
+          </a:p>
+        </p:txBody>
+      </p:sp>
+    </p:spTree>
+    <p:extLst>
+      <p:ext uri="{BB962C8B-B14F-4D97-AF65-F5344CB8AC3E}">
+        <p14:creationId xmlns:p14="http://schemas.microsoft.com/office/powerpoint/2010/main" val="538450050"/>
+      </p:ext>
+    </p:extLst>
+  </p:cSld>
+  <p:clrMap bg1="lt1" tx1="dk1" bg2="lt2" tx2="dk2" accent1="accent1" accent2="accent2" accent3="accent3" accent4="accent4" accent5="accent5" accent6="accent6" hlink="hlink" folHlink="folHlink"/>
+  <p:notesStyle>
+    <a:lvl1pPr marL="0" algn="l" defTabSz="914400" rtl="0" eaLnBrk="1" latinLnBrk="0" hangingPunct="1">
+      <a:defRPr sz="1200" kern="1200">
+        <a:solidFill>
+          <a:schemeClr val="tx1"/>
+        </a:solidFill>
+        <a:latin typeface="+mn-lt"/>
+        <a:ea typeface="+mn-ea"/>
+        <a:cs typeface="+mn-cs"/>
+      </a:defRPr>
+    </a:lvl1pPr>
+    <a:lvl2pPr marL="457200" algn="l" defTabSz="914400" rtl="0" eaLnBrk="1" latinLnBrk="0" hangingPunct="1">
+      <a:defRPr sz="1200" kern="1200">
+        <a:solidFill>
+          <a:schemeClr val="tx1"/>
+        </a:solidFill>
+        <a:latin typeface="+mn-lt"/>
+        <a:ea typeface="+mn-ea"/>
+        <a:cs typeface="+mn-cs"/>
+      </a:defRPr>
+    </a:lvl2pPr>
+    <a:lvl3pPr marL="914400" algn="l" defTabSz="914400" rtl="0" eaLnBrk="1" latinLnBrk="0" hangingPunct="1">
+      <a:defRPr sz="1200" kern="1200">
+        <a:solidFill>
+          <a:schemeClr val="tx1"/>
+        </a:solidFill>
+        <a:latin typeface="+mn-lt"/>
+        <a:ea typeface="+mn-ea"/>
+        <a:cs typeface="+mn-cs"/>
+      </a:defRPr>
+    </a:lvl3pPr>
+    <a:lvl4pPr marL="1371600" algn="l" defTabSz="914400" rtl="0" eaLnBrk="1" latinLnBrk="0" hangingPunct="1">
+      <a:defRPr sz="1200" kern="1200">
+        <a:solidFill>
+          <a:schemeClr val="tx1"/>
+        </a:solidFill>
+        <a:latin typeface="+mn-lt"/>
+        <a:ea typeface="+mn-ea"/>
+        <a:cs typeface="+mn-cs"/>
+      </a:defRPr>
+    </a:lvl4pPr>
+    <a:lvl5pPr marL="1828800" algn="l" defTabSz="914400" rtl="0" eaLnBrk="1" latinLnBrk="0" hangingPunct="1">
+      <a:defRPr sz="1200" kern="1200">
+        <a:solidFill>
+          <a:schemeClr val="tx1"/>
+        </a:solidFill>
+        <a:latin typeface="+mn-lt"/>
+        <a:ea typeface="+mn-ea"/>
+        <a:cs typeface="+mn-cs"/>
+      </a:defRPr>
+    </a:lvl5pPr>
+    <a:lvl6pPr marL="2286000" algn="l" defTabSz="914400" rtl="0" eaLnBrk="1" latinLnBrk="0" hangingPunct="1">
+      <a:defRPr sz="1200" kern="1200">
+        <a:solidFill>
+          <a:schemeClr val="tx1"/>
+        </a:solidFill>
+        <a:latin typeface="+mn-lt"/>
+        <a:ea typeface="+mn-ea"/>
+        <a:cs typeface="+mn-cs"/>
+      </a:defRPr>
+    </a:lvl6pPr>
+    <a:lvl7pPr marL="2743200" algn="l" defTabSz="914400" rtl="0" eaLnBrk="1" latinLnBrk="0" hangingPunct="1">
+      <a:defRPr sz="1200" kern="1200">
+        <a:solidFill>
+          <a:schemeClr val="tx1"/>
+        </a:solidFill>
+        <a:latin typeface="+mn-lt"/>
+        <a:ea typeface="+mn-ea"/>
+        <a:cs typeface="+mn-cs"/>
+      </a:defRPr>
+    </a:lvl7pPr>
+    <a:lvl8pPr marL="3200400" algn="l" defTabSz="914400" rtl="0" eaLnBrk="1" latinLnBrk="0" hangingPunct="1">
+      <a:defRPr sz="1200" kern="1200">
+        <a:solidFill>
+          <a:schemeClr val="tx1"/>
+        </a:solidFill>
+        <a:latin typeface="+mn-lt"/>
+        <a:ea typeface="+mn-ea"/>
+        <a:cs typeface="+mn-cs"/>
+      </a:defRPr>
+    </a:lvl8pPr>
+    <a:lvl9pPr marL="3657600" algn="l" defTabSz="914400" rtl="0" eaLnBrk="1" latinLnBrk="0" hangingPunct="1">
+      <a:defRPr sz="1200" kern="1200">
+        <a:solidFill>
+          <a:schemeClr val="tx1"/>
+        </a:solidFill>
+        <a:latin typeface="+mn-lt"/>
+        <a:ea typeface="+mn-ea"/>
+        <a:cs typeface="+mn-cs"/>
+      </a:defRPr>
+    </a:lvl9pPr>
+  </p:notesStyle>
+</p:notesMaster>
+</file>
+
+<file path=ppt/notesSlides/notesSlide1.xml><?xml version="1.0" encoding="utf-8"?>
+<p:notes xmlns:a="http://schemas.openxmlformats.org/drawingml/2006/main" xmlns:r="http://schemas.openxmlformats.org/officeDocument/2006/relationships" xmlns:p="http://schemas.openxmlformats.org/presentationml/2006/main">
+  <p:cSld>
+    <p:spTree>
+      <p:nvGrpSpPr>
+        <p:cNvPr id="1" name=""/>
+        <p:cNvGrpSpPr/>
+        <p:nvPr/>
+      </p:nvGrpSpPr>
+      <p:grpSpPr>
+        <a:xfrm>
+          <a:off x="0" y="0"/>
+          <a:ext cx="0" cy="0"/>
+          <a:chOff x="0" y="0"/>
+          <a:chExt cx="0" cy="0"/>
+        </a:xfrm>
+      </p:grpSpPr>
+      <p:sp>
+        <p:nvSpPr>
+          <p:cNvPr id="2" name="Slide Image Placeholder 1"/>
+          <p:cNvSpPr>
+            <a:spLocks noGrp="1" noRot="1" noChangeAspect="1"/>
+          </p:cNvSpPr>
+          <p:nvPr>
+            <p:ph type="sldImg"/>
+          </p:nvPr>
+        </p:nvSpPr>
+        <p:spPr/>
+      </p:sp>
+      <p:sp>
+        <p:nvSpPr>
+          <p:cNvPr id="3" name="Notes Placeholder 2"/>
+          <p:cNvSpPr>
+            <a:spLocks noGrp="1"/>
+          </p:cNvSpPr>
+          <p:nvPr>
+            <p:ph type="body" idx="1"/>
+          </p:nvPr>
+        </p:nvSpPr>
+        <p:spPr/>
+        <p:txBody>
+          <a:bodyPr/>
+          <a:lstStyle/>
+          <a:p>
+            <a:endParaRPr lang="en-US" dirty="0"/>
+          </a:p>
+        </p:txBody>
+      </p:sp>
+      <p:sp>
+        <p:nvSpPr>
+          <p:cNvPr id="4" name="Slide Number Placeholder 3"/>
+          <p:cNvSpPr>
+            <a:spLocks noGrp="1"/>
+          </p:cNvSpPr>
+          <p:nvPr>
+            <p:ph type="sldNum" sz="quarter" idx="10"/>
+          </p:nvPr>
+        </p:nvSpPr>
+        <p:spPr/>
+        <p:txBody>
+          <a:bodyPr/>
+          <a:lstStyle/>
+          <a:p>
+            <a:fld id="{F7021451-1387-4CA6-816F-3879F97B5CBC}" type="slidenum">
+              <a:rPr lang="en-US"/>
+              <a:t>1</a:t>
+            </a:fld>
+            <a:endParaRPr lang="en-US"/>
+          </a:p>
+        </p:txBody>
+      </p:sp>
+    </p:spTree>
+    <p:extLst>
+      <p:ext uri="{BB962C8B-B14F-4D97-AF65-F5344CB8AC3E}">
+        <p14:creationId xmlns:p14="http://schemas.microsoft.com/office/powerpoint/2010/main" val="1024086991"/>
+      </p:ext>
+    </p:extLst>
+  </p:cSld>
+  <p:clrMapOvr>
+    <a:masterClrMapping/>
+  </p:clrMapOvr>
+</p:notes>
+</file>
+
+<file path=ppt/notesSlides/notesSlide2.xml><?xml version="1.0" encoding="utf-8"?>
+<p:notes xmlns:a="http://schemas.openxmlformats.org/drawingml/2006/main" xmlns:r="http://schemas.openxmlformats.org/officeDocument/2006/relationships" xmlns:p="http://schemas.openxmlformats.org/presentationml/2006/main">
+  <p:cSld>
+    <p:spTree>
+      <p:nvGrpSpPr>
+        <p:cNvPr id="1" name=""/>
+        <p:cNvGrpSpPr/>
+        <p:nvPr/>
+      </p:nvGrpSpPr>
+      <p:grpSpPr>
+        <a:xfrm>
+          <a:off x="0" y="0"/>
+          <a:ext cx="0" cy="0"/>
+          <a:chOff x="0" y="0"/>
+          <a:chExt cx="0" cy="0"/>
+        </a:xfrm>
+      </p:grpSpPr>
+      <p:sp>
+        <p:nvSpPr>
+          <p:cNvPr id="2" name="Slide Image Placeholder 1"/>
+          <p:cNvSpPr>
+            <a:spLocks noGrp="1" noRot="1" noChangeAspect="1"/>
+          </p:cNvSpPr>
+          <p:nvPr>
+            <p:ph type="sldImg"/>
+          </p:nvPr>
+        </p:nvSpPr>
+        <p:spPr/>
+      </p:sp>
+      <p:sp>
+        <p:nvSpPr>
+          <p:cNvPr id="3" name="Notes Placeholder 2"/>
+          <p:cNvSpPr>
+            <a:spLocks noGrp="1"/>
+          </p:cNvSpPr>
+          <p:nvPr>
+            <p:ph type="body" idx="1"/>
+          </p:nvPr>
+        </p:nvSpPr>
+        <p:spPr/>
+        <p:txBody>
+          <a:bodyPr/>
+          <a:lstStyle/>
+          <a:p>
+            <a:endParaRPr lang="en-US" dirty="0"/>
+          </a:p>
+        </p:txBody>
+      </p:sp>
+      <p:sp>
+        <p:nvSpPr>
+          <p:cNvPr id="4" name="Slide Number Placeholder 3"/>
+          <p:cNvSpPr>
+            <a:spLocks noGrp="1"/>
+          </p:cNvSpPr>
+          <p:nvPr>
+            <p:ph type="sldNum" sz="quarter" idx="10"/>
+          </p:nvPr>
+        </p:nvSpPr>
+        <p:spPr/>
+        <p:txBody>
+          <a:bodyPr/>
+          <a:lstStyle/>
+          <a:p>
+            <a:fld id="{F7021451-1387-4CA6-816F-3879F97B5CBC}" type="slidenum">
+              <a:rPr lang="en-US"/>
+              <a:t>2</a:t>
+            </a:fld>
+            <a:endParaRPr lang="en-US"/>
+          </a:p>
+        </p:txBody>
+      </p:sp>
+    </p:spTree>
+    <p:extLst>
+      <p:ext uri="{BB962C8B-B14F-4D97-AF65-F5344CB8AC3E}">
+        <p14:creationId xmlns:p14="http://schemas.microsoft.com/office/powerpoint/2010/main" val="1024086991"/>
+      </p:ext>
+    </p:extLst>
+  </p:cSld>
+  <p:clrMapOvr>
+    <a:masterClrMapping/>
+  </p:clrMapOvr>
+</p:notes>
 </file>
 
 <file path=ppt/slideLayouts/slideLayout1.xml><?xml version="1.0" encoding="utf-8"?>
@@ -136,19 +674,18 @@
         </p:nvSpPr>
         <p:spPr>
           <a:xfrm>
-            <a:off x="685800" y="2130425"/>
-            <a:ext cx="7772400" cy="1470025"/>
-          </a:xfrm>
-        </p:spPr>
-        <p:txBody>
-          <a:bodyPr/>
-          <a:lstStyle/>
-          <a:p>
-            <a:r>
-              <a:rPr lang="en-US" smtClean="0"/>
+            <a:off x="685800" y="1597820"/>
+            <a:ext cx="7772400" cy="1102519"/>
+          </a:xfrm>
+        </p:spPr>
+        <p:txBody>
+          <a:bodyPr/>
+          <a:lstStyle/>
+          <a:p>
+            <a:r>
+              <a:rPr lang="en-US"/>
               <a:t>Click to edit Master title style</a:t>
             </a:r>
-            <a:endParaRPr lang="en-US"/>
           </a:p>
         </p:txBody>
       </p:sp>
@@ -164,8 +701,8 @@
         </p:nvSpPr>
         <p:spPr>
           <a:xfrm>
-            <a:off x="1371600" y="3886200"/>
-            <a:ext cx="6400800" cy="1752600"/>
+            <a:off x="1371600" y="2914650"/>
+            <a:ext cx="6400800" cy="1314450"/>
           </a:xfrm>
         </p:spPr>
         <p:txBody>
@@ -181,7 +718,7 @@
                 </a:solidFill>
               </a:defRPr>
             </a:lvl1pPr>
-            <a:lvl2pPr marL="457200" indent="0" algn="ctr">
+            <a:lvl2pPr marL="342900" indent="0" algn="ctr">
               <a:buNone/>
               <a:defRPr>
                 <a:solidFill>
@@ -191,7 +728,7 @@
                 </a:solidFill>
               </a:defRPr>
             </a:lvl2pPr>
-            <a:lvl3pPr marL="914400" indent="0" algn="ctr">
+            <a:lvl3pPr marL="685800" indent="0" algn="ctr">
               <a:buNone/>
               <a:defRPr>
                 <a:solidFill>
@@ -201,7 +738,7 @@
                 </a:solidFill>
               </a:defRPr>
             </a:lvl3pPr>
-            <a:lvl4pPr marL="1371600" indent="0" algn="ctr">
+            <a:lvl4pPr marL="1028700" indent="0" algn="ctr">
               <a:buNone/>
               <a:defRPr>
                 <a:solidFill>
@@ -211,7 +748,7 @@
                 </a:solidFill>
               </a:defRPr>
             </a:lvl4pPr>
-            <a:lvl5pPr marL="1828800" indent="0" algn="ctr">
+            <a:lvl5pPr marL="1371600" indent="0" algn="ctr">
               <a:buNone/>
               <a:defRPr>
                 <a:solidFill>
@@ -221,7 +758,7 @@
                 </a:solidFill>
               </a:defRPr>
             </a:lvl5pPr>
-            <a:lvl6pPr marL="2286000" indent="0" algn="ctr">
+            <a:lvl6pPr marL="1714500" indent="0" algn="ctr">
               <a:buNone/>
               <a:defRPr>
                 <a:solidFill>
@@ -231,7 +768,7 @@
                 </a:solidFill>
               </a:defRPr>
             </a:lvl6pPr>
-            <a:lvl7pPr marL="2743200" indent="0" algn="ctr">
+            <a:lvl7pPr marL="2057400" indent="0" algn="ctr">
               <a:buNone/>
               <a:defRPr>
                 <a:solidFill>
@@ -241,7 +778,7 @@
                 </a:solidFill>
               </a:defRPr>
             </a:lvl7pPr>
-            <a:lvl8pPr marL="3200400" indent="0" algn="ctr">
+            <a:lvl8pPr marL="2400300" indent="0" algn="ctr">
               <a:buNone/>
               <a:defRPr>
                 <a:solidFill>
@@ -251,7 +788,7 @@
                 </a:solidFill>
               </a:defRPr>
             </a:lvl8pPr>
-            <a:lvl9pPr marL="3657600" indent="0" algn="ctr">
+            <a:lvl9pPr marL="2743200" indent="0" algn="ctr">
               <a:buNone/>
               <a:defRPr>
                 <a:solidFill>
@@ -264,10 +801,9 @@
           </a:lstStyle>
           <a:p>
             <a:r>
-              <a:rPr lang="en-US" smtClean="0"/>
+              <a:rPr lang="en-US"/>
               <a:t>Click to edit Master subtitle style</a:t>
             </a:r>
-            <a:endParaRPr lang="en-US"/>
           </a:p>
         </p:txBody>
       </p:sp>
@@ -288,7 +824,7 @@
           <a:p>
             <a:fld id="{5BCAD085-E8A6-8845-BD4E-CB4CCA059FC4}" type="datetimeFigureOut">
               <a:rPr lang="en-US" smtClean="0"/>
-              <a:t>1/27/13</a:t>
+              <a:t>3/19/26</a:t>
             </a:fld>
             <a:endParaRPr lang="en-US"/>
           </a:p>
@@ -382,10 +918,9 @@
           <a:lstStyle/>
           <a:p>
             <a:r>
-              <a:rPr lang="en-US" smtClean="0"/>
+              <a:rPr lang="en-US"/>
               <a:t>Click to edit Master title style</a:t>
             </a:r>
-            <a:endParaRPr lang="en-US"/>
           </a:p>
         </p:txBody>
       </p:sp>
@@ -406,38 +941,37 @@
           <a:p>
             <a:pPr lvl="0"/>
             <a:r>
-              <a:rPr lang="en-US" smtClean="0"/>
+              <a:rPr lang="en-US"/>
               <a:t>Click to edit Master text styles</a:t>
             </a:r>
           </a:p>
           <a:p>
             <a:pPr lvl="1"/>
             <a:r>
-              <a:rPr lang="en-US" smtClean="0"/>
+              <a:rPr lang="en-US"/>
               <a:t>Second level</a:t>
             </a:r>
           </a:p>
           <a:p>
             <a:pPr lvl="2"/>
             <a:r>
-              <a:rPr lang="en-US" smtClean="0"/>
+              <a:rPr lang="en-US"/>
               <a:t>Third level</a:t>
             </a:r>
           </a:p>
           <a:p>
             <a:pPr lvl="3"/>
             <a:r>
-              <a:rPr lang="en-US" smtClean="0"/>
+              <a:rPr lang="en-US"/>
               <a:t>Fourth level</a:t>
             </a:r>
           </a:p>
           <a:p>
             <a:pPr lvl="4"/>
             <a:r>
-              <a:rPr lang="en-US" smtClean="0"/>
+              <a:rPr lang="en-US"/>
               <a:t>Fifth level</a:t>
             </a:r>
-            <a:endParaRPr lang="en-US"/>
           </a:p>
         </p:txBody>
       </p:sp>
@@ -458,7 +992,7 @@
           <a:p>
             <a:fld id="{5BCAD085-E8A6-8845-BD4E-CB4CCA059FC4}" type="datetimeFigureOut">
               <a:rPr lang="en-US" smtClean="0"/>
-              <a:t>1/27/13</a:t>
+              <a:t>3/19/26</a:t>
             </a:fld>
             <a:endParaRPr lang="en-US"/>
           </a:p>
@@ -548,8 +1082,8 @@
         </p:nvSpPr>
         <p:spPr>
           <a:xfrm>
-            <a:off x="6629400" y="274638"/>
-            <a:ext cx="2057400" cy="5851525"/>
+            <a:off x="6629400" y="205979"/>
+            <a:ext cx="2057400" cy="4388644"/>
           </a:xfrm>
         </p:spPr>
         <p:txBody>
@@ -557,10 +1091,9 @@
           <a:lstStyle/>
           <a:p>
             <a:r>
-              <a:rPr lang="en-US" smtClean="0"/>
+              <a:rPr lang="en-US"/>
               <a:t>Click to edit Master title style</a:t>
             </a:r>
-            <a:endParaRPr lang="en-US"/>
           </a:p>
         </p:txBody>
       </p:sp>
@@ -576,8 +1109,8 @@
         </p:nvSpPr>
         <p:spPr>
           <a:xfrm>
-            <a:off x="457200" y="274638"/>
-            <a:ext cx="6019800" cy="5851525"/>
+            <a:off x="457200" y="205979"/>
+            <a:ext cx="6019800" cy="4388644"/>
           </a:xfrm>
         </p:spPr>
         <p:txBody>
@@ -586,38 +1119,37 @@
           <a:p>
             <a:pPr lvl="0"/>
             <a:r>
-              <a:rPr lang="en-US" smtClean="0"/>
+              <a:rPr lang="en-US"/>
               <a:t>Click to edit Master text styles</a:t>
             </a:r>
           </a:p>
           <a:p>
             <a:pPr lvl="1"/>
             <a:r>
-              <a:rPr lang="en-US" smtClean="0"/>
+              <a:rPr lang="en-US"/>
               <a:t>Second level</a:t>
             </a:r>
           </a:p>
           <a:p>
             <a:pPr lvl="2"/>
             <a:r>
-              <a:rPr lang="en-US" smtClean="0"/>
+              <a:rPr lang="en-US"/>
               <a:t>Third level</a:t>
             </a:r>
           </a:p>
           <a:p>
             <a:pPr lvl="3"/>
             <a:r>
-              <a:rPr lang="en-US" smtClean="0"/>
+              <a:rPr lang="en-US"/>
               <a:t>Fourth level</a:t>
             </a:r>
           </a:p>
           <a:p>
             <a:pPr lvl="4"/>
             <a:r>
-              <a:rPr lang="en-US" smtClean="0"/>
+              <a:rPr lang="en-US"/>
               <a:t>Fifth level</a:t>
             </a:r>
-            <a:endParaRPr lang="en-US"/>
           </a:p>
         </p:txBody>
       </p:sp>
@@ -638,7 +1170,7 @@
           <a:p>
             <a:fld id="{5BCAD085-E8A6-8845-BD4E-CB4CCA059FC4}" type="datetimeFigureOut">
               <a:rPr lang="en-US" smtClean="0"/>
-              <a:t>1/27/13</a:t>
+              <a:t>3/19/26</a:t>
             </a:fld>
             <a:endParaRPr lang="en-US"/>
           </a:p>
@@ -690,6 +1222,41 @@
     <p:extLst>
       <p:ext uri="{BB962C8B-B14F-4D97-AF65-F5344CB8AC3E}">
         <p14:creationId xmlns:p14="http://schemas.microsoft.com/office/powerpoint/2010/main" val="3612223792"/>
+      </p:ext>
+    </p:extLst>
+  </p:cSld>
+  <p:clrMapOvr>
+    <a:masterClrMapping/>
+  </p:clrMapOvr>
+</p:sldLayout>
+</file>
+
+<file path=ppt/slideLayouts/slideLayout12.xml><?xml version="1.0" encoding="utf-8"?>
+<p:sldLayout xmlns:a="http://schemas.openxmlformats.org/drawingml/2006/main" xmlns:r="http://schemas.openxmlformats.org/officeDocument/2006/relationships" xmlns:p="http://schemas.openxmlformats.org/presentationml/2006/main" preserve="1">
+  <p:cSld name="DEFAULT">
+    <p:bg>
+      <p:bgRef idx="1001">
+        <a:schemeClr val="bg1"/>
+      </p:bgRef>
+    </p:bg>
+    <p:spTree>
+      <p:nvGrpSpPr>
+        <p:cNvPr id="1" name=""/>
+        <p:cNvGrpSpPr/>
+        <p:nvPr/>
+      </p:nvGrpSpPr>
+      <p:grpSpPr>
+        <a:xfrm>
+          <a:off x="0" y="0"/>
+          <a:ext cx="0" cy="0"/>
+          <a:chOff x="0" y="0"/>
+          <a:chExt cx="0" cy="0"/>
+        </a:xfrm>
+      </p:grpSpPr>
+    </p:spTree>
+    <p:extLst>
+      <p:ext uri="{BB962C8B-B14F-4D97-AF65-F5344CB8AC3E}">
+        <p14:creationId xmlns:p14="http://schemas.microsoft.com/office/powerpoint/2010/main" val="1777229089"/>
       </p:ext>
     </p:extLst>
   </p:cSld>
@@ -732,10 +1299,9 @@
           <a:lstStyle/>
           <a:p>
             <a:r>
-              <a:rPr lang="en-US" smtClean="0"/>
+              <a:rPr lang="en-US"/>
               <a:t>Click to edit Master title style</a:t>
             </a:r>
-            <a:endParaRPr lang="en-US"/>
           </a:p>
         </p:txBody>
       </p:sp>
@@ -756,38 +1322,37 @@
           <a:p>
             <a:pPr lvl="0"/>
             <a:r>
-              <a:rPr lang="en-US" smtClean="0"/>
+              <a:rPr lang="en-US"/>
               <a:t>Click to edit Master text styles</a:t>
             </a:r>
           </a:p>
           <a:p>
             <a:pPr lvl="1"/>
             <a:r>
-              <a:rPr lang="en-US" smtClean="0"/>
+              <a:rPr lang="en-US"/>
               <a:t>Second level</a:t>
             </a:r>
           </a:p>
           <a:p>
             <a:pPr lvl="2"/>
             <a:r>
-              <a:rPr lang="en-US" smtClean="0"/>
+              <a:rPr lang="en-US"/>
               <a:t>Third level</a:t>
             </a:r>
           </a:p>
           <a:p>
             <a:pPr lvl="3"/>
             <a:r>
-              <a:rPr lang="en-US" smtClean="0"/>
+              <a:rPr lang="en-US"/>
               <a:t>Fourth level</a:t>
             </a:r>
           </a:p>
           <a:p>
             <a:pPr lvl="4"/>
             <a:r>
-              <a:rPr lang="en-US" smtClean="0"/>
+              <a:rPr lang="en-US"/>
               <a:t>Fifth level</a:t>
             </a:r>
-            <a:endParaRPr lang="en-US"/>
           </a:p>
         </p:txBody>
       </p:sp>
@@ -808,7 +1373,7 @@
           <a:p>
             <a:fld id="{5BCAD085-E8A6-8845-BD4E-CB4CCA059FC4}" type="datetimeFigureOut">
               <a:rPr lang="en-US" smtClean="0"/>
-              <a:t>1/27/13</a:t>
+              <a:t>3/19/26</a:t>
             </a:fld>
             <a:endParaRPr lang="en-US"/>
           </a:p>
@@ -898,23 +1463,22 @@
         </p:nvSpPr>
         <p:spPr>
           <a:xfrm>
-            <a:off x="722313" y="4406900"/>
-            <a:ext cx="7772400" cy="1362075"/>
+            <a:off x="722313" y="3305176"/>
+            <a:ext cx="7772400" cy="1021556"/>
           </a:xfrm>
         </p:spPr>
         <p:txBody>
           <a:bodyPr anchor="t"/>
           <a:lstStyle>
             <a:lvl1pPr algn="l">
-              <a:defRPr sz="4000" b="1" cap="all"/>
+              <a:defRPr sz="3000" b="1" cap="all"/>
             </a:lvl1pPr>
           </a:lstStyle>
           <a:p>
             <a:r>
-              <a:rPr lang="en-US" smtClean="0"/>
+              <a:rPr lang="en-US"/>
               <a:t>Click to edit Master title style</a:t>
             </a:r>
-            <a:endParaRPr lang="en-US"/>
           </a:p>
         </p:txBody>
       </p:sp>
@@ -930,8 +1494,8 @@
         </p:nvSpPr>
         <p:spPr>
           <a:xfrm>
-            <a:off x="722313" y="2906713"/>
-            <a:ext cx="7772400" cy="1500187"/>
+            <a:off x="722313" y="2180035"/>
+            <a:ext cx="7772400" cy="1125140"/>
           </a:xfrm>
         </p:spPr>
         <p:txBody>
@@ -939,7 +1503,7 @@
           <a:lstStyle>
             <a:lvl1pPr marL="0" indent="0">
               <a:buNone/>
-              <a:defRPr sz="2000">
+              <a:defRPr sz="1500">
                 <a:solidFill>
                   <a:schemeClr val="tx1">
                     <a:tint val="75000"/>
@@ -947,9 +1511,9 @@
                 </a:solidFill>
               </a:defRPr>
             </a:lvl1pPr>
-            <a:lvl2pPr marL="457200" indent="0">
-              <a:buNone/>
-              <a:defRPr sz="1800">
+            <a:lvl2pPr marL="342900" indent="0">
+              <a:buNone/>
+              <a:defRPr sz="1350">
                 <a:solidFill>
                   <a:schemeClr val="tx1">
                     <a:tint val="75000"/>
@@ -957,9 +1521,9 @@
                 </a:solidFill>
               </a:defRPr>
             </a:lvl2pPr>
-            <a:lvl3pPr marL="914400" indent="0">
-              <a:buNone/>
-              <a:defRPr sz="1600">
+            <a:lvl3pPr marL="685800" indent="0">
+              <a:buNone/>
+              <a:defRPr sz="1200">
                 <a:solidFill>
                   <a:schemeClr val="tx1">
                     <a:tint val="75000"/>
@@ -967,9 +1531,9 @@
                 </a:solidFill>
               </a:defRPr>
             </a:lvl3pPr>
-            <a:lvl4pPr marL="1371600" indent="0">
-              <a:buNone/>
-              <a:defRPr sz="1400">
+            <a:lvl4pPr marL="1028700" indent="0">
+              <a:buNone/>
+              <a:defRPr sz="1050">
                 <a:solidFill>
                   <a:schemeClr val="tx1">
                     <a:tint val="75000"/>
@@ -977,9 +1541,9 @@
                 </a:solidFill>
               </a:defRPr>
             </a:lvl4pPr>
-            <a:lvl5pPr marL="1828800" indent="0">
-              <a:buNone/>
-              <a:defRPr sz="1400">
+            <a:lvl5pPr marL="1371600" indent="0">
+              <a:buNone/>
+              <a:defRPr sz="1050">
                 <a:solidFill>
                   <a:schemeClr val="tx1">
                     <a:tint val="75000"/>
@@ -987,9 +1551,9 @@
                 </a:solidFill>
               </a:defRPr>
             </a:lvl5pPr>
-            <a:lvl6pPr marL="2286000" indent="0">
-              <a:buNone/>
-              <a:defRPr sz="1400">
+            <a:lvl6pPr marL="1714500" indent="0">
+              <a:buNone/>
+              <a:defRPr sz="1050">
                 <a:solidFill>
                   <a:schemeClr val="tx1">
                     <a:tint val="75000"/>
@@ -997,9 +1561,9 @@
                 </a:solidFill>
               </a:defRPr>
             </a:lvl6pPr>
-            <a:lvl7pPr marL="2743200" indent="0">
-              <a:buNone/>
-              <a:defRPr sz="1400">
+            <a:lvl7pPr marL="2057400" indent="0">
+              <a:buNone/>
+              <a:defRPr sz="1050">
                 <a:solidFill>
                   <a:schemeClr val="tx1">
                     <a:tint val="75000"/>
@@ -1007,9 +1571,9 @@
                 </a:solidFill>
               </a:defRPr>
             </a:lvl7pPr>
-            <a:lvl8pPr marL="3200400" indent="0">
-              <a:buNone/>
-              <a:defRPr sz="1400">
+            <a:lvl8pPr marL="2400300" indent="0">
+              <a:buNone/>
+              <a:defRPr sz="1050">
                 <a:solidFill>
                   <a:schemeClr val="tx1">
                     <a:tint val="75000"/>
@@ -1017,9 +1581,9 @@
                 </a:solidFill>
               </a:defRPr>
             </a:lvl8pPr>
-            <a:lvl9pPr marL="3657600" indent="0">
-              <a:buNone/>
-              <a:defRPr sz="1400">
+            <a:lvl9pPr marL="2743200" indent="0">
+              <a:buNone/>
+              <a:defRPr sz="1050">
                 <a:solidFill>
                   <a:schemeClr val="tx1">
                     <a:tint val="75000"/>
@@ -1031,7 +1595,7 @@
           <a:p>
             <a:pPr lvl="0"/>
             <a:r>
-              <a:rPr lang="en-US" smtClean="0"/>
+              <a:rPr lang="en-US"/>
               <a:t>Click to edit Master text styles</a:t>
             </a:r>
           </a:p>
@@ -1054,7 +1618,7 @@
           <a:p>
             <a:fld id="{5BCAD085-E8A6-8845-BD4E-CB4CCA059FC4}" type="datetimeFigureOut">
               <a:rPr lang="en-US" smtClean="0"/>
-              <a:t>1/27/13</a:t>
+              <a:t>3/19/26</a:t>
             </a:fld>
             <a:endParaRPr lang="en-US"/>
           </a:p>
@@ -1148,10 +1712,9 @@
           <a:lstStyle/>
           <a:p>
             <a:r>
-              <a:rPr lang="en-US" smtClean="0"/>
+              <a:rPr lang="en-US"/>
               <a:t>Click to edit Master title style</a:t>
             </a:r>
-            <a:endParaRPr lang="en-US"/>
           </a:p>
         </p:txBody>
       </p:sp>
@@ -1167,76 +1730,75 @@
         </p:nvSpPr>
         <p:spPr>
           <a:xfrm>
-            <a:off x="457200" y="1600200"/>
-            <a:ext cx="4038600" cy="4525963"/>
+            <a:off x="457200" y="1200151"/>
+            <a:ext cx="4038600" cy="3394472"/>
           </a:xfrm>
         </p:spPr>
         <p:txBody>
           <a:bodyPr/>
           <a:lstStyle>
             <a:lvl1pPr>
-              <a:defRPr sz="2800"/>
+              <a:defRPr sz="2100"/>
             </a:lvl1pPr>
             <a:lvl2pPr>
-              <a:defRPr sz="2400"/>
+              <a:defRPr sz="1800"/>
             </a:lvl2pPr>
             <a:lvl3pPr>
-              <a:defRPr sz="2000"/>
+              <a:defRPr sz="1500"/>
             </a:lvl3pPr>
             <a:lvl4pPr>
-              <a:defRPr sz="1800"/>
+              <a:defRPr sz="1350"/>
             </a:lvl4pPr>
             <a:lvl5pPr>
-              <a:defRPr sz="1800"/>
+              <a:defRPr sz="1350"/>
             </a:lvl5pPr>
             <a:lvl6pPr>
-              <a:defRPr sz="1800"/>
+              <a:defRPr sz="1350"/>
             </a:lvl6pPr>
             <a:lvl7pPr>
-              <a:defRPr sz="1800"/>
+              <a:defRPr sz="1350"/>
             </a:lvl7pPr>
             <a:lvl8pPr>
-              <a:defRPr sz="1800"/>
+              <a:defRPr sz="1350"/>
             </a:lvl8pPr>
             <a:lvl9pPr>
-              <a:defRPr sz="1800"/>
+              <a:defRPr sz="1350"/>
             </a:lvl9pPr>
           </a:lstStyle>
           <a:p>
             <a:pPr lvl="0"/>
             <a:r>
-              <a:rPr lang="en-US" smtClean="0"/>
+              <a:rPr lang="en-US"/>
               <a:t>Click to edit Master text styles</a:t>
             </a:r>
           </a:p>
           <a:p>
             <a:pPr lvl="1"/>
             <a:r>
-              <a:rPr lang="en-US" smtClean="0"/>
+              <a:rPr lang="en-US"/>
               <a:t>Second level</a:t>
             </a:r>
           </a:p>
           <a:p>
             <a:pPr lvl="2"/>
             <a:r>
-              <a:rPr lang="en-US" smtClean="0"/>
+              <a:rPr lang="en-US"/>
               <a:t>Third level</a:t>
             </a:r>
           </a:p>
           <a:p>
             <a:pPr lvl="3"/>
             <a:r>
-              <a:rPr lang="en-US" smtClean="0"/>
+              <a:rPr lang="en-US"/>
               <a:t>Fourth level</a:t>
             </a:r>
           </a:p>
           <a:p>
             <a:pPr lvl="4"/>
             <a:r>
-              <a:rPr lang="en-US" smtClean="0"/>
+              <a:rPr lang="en-US"/>
               <a:t>Fifth level</a:t>
             </a:r>
-            <a:endParaRPr lang="en-US"/>
           </a:p>
         </p:txBody>
       </p:sp>
@@ -1252,76 +1814,75 @@
         </p:nvSpPr>
         <p:spPr>
           <a:xfrm>
-            <a:off x="4648200" y="1600200"/>
-            <a:ext cx="4038600" cy="4525963"/>
+            <a:off x="4648200" y="1200151"/>
+            <a:ext cx="4038600" cy="3394472"/>
           </a:xfrm>
         </p:spPr>
         <p:txBody>
           <a:bodyPr/>
           <a:lstStyle>
             <a:lvl1pPr>
-              <a:defRPr sz="2800"/>
+              <a:defRPr sz="2100"/>
             </a:lvl1pPr>
             <a:lvl2pPr>
-              <a:defRPr sz="2400"/>
+              <a:defRPr sz="1800"/>
             </a:lvl2pPr>
             <a:lvl3pPr>
-              <a:defRPr sz="2000"/>
+              <a:defRPr sz="1500"/>
             </a:lvl3pPr>
             <a:lvl4pPr>
-              <a:defRPr sz="1800"/>
+              <a:defRPr sz="1350"/>
             </a:lvl4pPr>
             <a:lvl5pPr>
-              <a:defRPr sz="1800"/>
+              <a:defRPr sz="1350"/>
             </a:lvl5pPr>
             <a:lvl6pPr>
-              <a:defRPr sz="1800"/>
+              <a:defRPr sz="1350"/>
             </a:lvl6pPr>
             <a:lvl7pPr>
-              <a:defRPr sz="1800"/>
+              <a:defRPr sz="1350"/>
             </a:lvl7pPr>
             <a:lvl8pPr>
-              <a:defRPr sz="1800"/>
+              <a:defRPr sz="1350"/>
             </a:lvl8pPr>
             <a:lvl9pPr>
-              <a:defRPr sz="1800"/>
+              <a:defRPr sz="1350"/>
             </a:lvl9pPr>
           </a:lstStyle>
           <a:p>
             <a:pPr lvl="0"/>
             <a:r>
-              <a:rPr lang="en-US" smtClean="0"/>
+              <a:rPr lang="en-US"/>
               <a:t>Click to edit Master text styles</a:t>
             </a:r>
           </a:p>
           <a:p>
             <a:pPr lvl="1"/>
             <a:r>
-              <a:rPr lang="en-US" smtClean="0"/>
+              <a:rPr lang="en-US"/>
               <a:t>Second level</a:t>
             </a:r>
           </a:p>
           <a:p>
             <a:pPr lvl="2"/>
             <a:r>
-              <a:rPr lang="en-US" smtClean="0"/>
+              <a:rPr lang="en-US"/>
               <a:t>Third level</a:t>
             </a:r>
           </a:p>
           <a:p>
             <a:pPr lvl="3"/>
             <a:r>
-              <a:rPr lang="en-US" smtClean="0"/>
+              <a:rPr lang="en-US"/>
               <a:t>Fourth level</a:t>
             </a:r>
           </a:p>
           <a:p>
             <a:pPr lvl="4"/>
             <a:r>
-              <a:rPr lang="en-US" smtClean="0"/>
+              <a:rPr lang="en-US"/>
               <a:t>Fifth level</a:t>
             </a:r>
-            <a:endParaRPr lang="en-US"/>
           </a:p>
         </p:txBody>
       </p:sp>
@@ -1342,7 +1903,7 @@
           <a:p>
             <a:fld id="{5BCAD085-E8A6-8845-BD4E-CB4CCA059FC4}" type="datetimeFigureOut">
               <a:rPr lang="en-US" smtClean="0"/>
-              <a:t>1/27/13</a:t>
+              <a:t>3/19/26</a:t>
             </a:fld>
             <a:endParaRPr lang="en-US"/>
           </a:p>
@@ -1440,10 +2001,9 @@
           </a:lstStyle>
           <a:p>
             <a:r>
-              <a:rPr lang="en-US" smtClean="0"/>
+              <a:rPr lang="en-US"/>
               <a:t>Click to edit Master title style</a:t>
             </a:r>
-            <a:endParaRPr lang="en-US"/>
           </a:p>
         </p:txBody>
       </p:sp>
@@ -1459,8 +2019,8 @@
         </p:nvSpPr>
         <p:spPr>
           <a:xfrm>
-            <a:off x="457200" y="1535113"/>
-            <a:ext cx="4040188" cy="639762"/>
+            <a:off x="457200" y="1151335"/>
+            <a:ext cx="4040188" cy="479822"/>
           </a:xfrm>
         </p:spPr>
         <p:txBody>
@@ -1468,45 +2028,45 @@
           <a:lstStyle>
             <a:lvl1pPr marL="0" indent="0">
               <a:buNone/>
-              <a:defRPr sz="2400" b="1"/>
+              <a:defRPr sz="1800" b="1"/>
             </a:lvl1pPr>
-            <a:lvl2pPr marL="457200" indent="0">
-              <a:buNone/>
-              <a:defRPr sz="2000" b="1"/>
+            <a:lvl2pPr marL="342900" indent="0">
+              <a:buNone/>
+              <a:defRPr sz="1500" b="1"/>
             </a:lvl2pPr>
-            <a:lvl3pPr marL="914400" indent="0">
-              <a:buNone/>
-              <a:defRPr sz="1800" b="1"/>
+            <a:lvl3pPr marL="685800" indent="0">
+              <a:buNone/>
+              <a:defRPr sz="1350" b="1"/>
             </a:lvl3pPr>
-            <a:lvl4pPr marL="1371600" indent="0">
-              <a:buNone/>
-              <a:defRPr sz="1600" b="1"/>
+            <a:lvl4pPr marL="1028700" indent="0">
+              <a:buNone/>
+              <a:defRPr sz="1200" b="1"/>
             </a:lvl4pPr>
-            <a:lvl5pPr marL="1828800" indent="0">
-              <a:buNone/>
-              <a:defRPr sz="1600" b="1"/>
+            <a:lvl5pPr marL="1371600" indent="0">
+              <a:buNone/>
+              <a:defRPr sz="1200" b="1"/>
             </a:lvl5pPr>
-            <a:lvl6pPr marL="2286000" indent="0">
-              <a:buNone/>
-              <a:defRPr sz="1600" b="1"/>
+            <a:lvl6pPr marL="1714500" indent="0">
+              <a:buNone/>
+              <a:defRPr sz="1200" b="1"/>
             </a:lvl6pPr>
-            <a:lvl7pPr marL="2743200" indent="0">
-              <a:buNone/>
-              <a:defRPr sz="1600" b="1"/>
+            <a:lvl7pPr marL="2057400" indent="0">
+              <a:buNone/>
+              <a:defRPr sz="1200" b="1"/>
             </a:lvl7pPr>
-            <a:lvl8pPr marL="3200400" indent="0">
-              <a:buNone/>
-              <a:defRPr sz="1600" b="1"/>
+            <a:lvl8pPr marL="2400300" indent="0">
+              <a:buNone/>
+              <a:defRPr sz="1200" b="1"/>
             </a:lvl8pPr>
-            <a:lvl9pPr marL="3657600" indent="0">
-              <a:buNone/>
-              <a:defRPr sz="1600" b="1"/>
+            <a:lvl9pPr marL="2743200" indent="0">
+              <a:buNone/>
+              <a:defRPr sz="1200" b="1"/>
             </a:lvl9pPr>
           </a:lstStyle>
           <a:p>
             <a:pPr lvl="0"/>
             <a:r>
-              <a:rPr lang="en-US" smtClean="0"/>
+              <a:rPr lang="en-US"/>
               <a:t>Click to edit Master text styles</a:t>
             </a:r>
           </a:p>
@@ -1524,76 +2084,75 @@
         </p:nvSpPr>
         <p:spPr>
           <a:xfrm>
-            <a:off x="457200" y="2174875"/>
-            <a:ext cx="4040188" cy="3951288"/>
+            <a:off x="457200" y="1631156"/>
+            <a:ext cx="4040188" cy="2963466"/>
           </a:xfrm>
         </p:spPr>
         <p:txBody>
           <a:bodyPr/>
           <a:lstStyle>
             <a:lvl1pPr>
-              <a:defRPr sz="2400"/>
+              <a:defRPr sz="1800"/>
             </a:lvl1pPr>
             <a:lvl2pPr>
-              <a:defRPr sz="2000"/>
+              <a:defRPr sz="1500"/>
             </a:lvl2pPr>
             <a:lvl3pPr>
-              <a:defRPr sz="1800"/>
+              <a:defRPr sz="1350"/>
             </a:lvl3pPr>
             <a:lvl4pPr>
-              <a:defRPr sz="1600"/>
+              <a:defRPr sz="1200"/>
             </a:lvl4pPr>
             <a:lvl5pPr>
-              <a:defRPr sz="1600"/>
+              <a:defRPr sz="1200"/>
             </a:lvl5pPr>
             <a:lvl6pPr>
-              <a:defRPr sz="1600"/>
+              <a:defRPr sz="1200"/>
             </a:lvl6pPr>
             <a:lvl7pPr>
-              <a:defRPr sz="1600"/>
+              <a:defRPr sz="1200"/>
             </a:lvl7pPr>
             <a:lvl8pPr>
-              <a:defRPr sz="1600"/>
+              <a:defRPr sz="1200"/>
             </a:lvl8pPr>
             <a:lvl9pPr>
-              <a:defRPr sz="1600"/>
+              <a:defRPr sz="1200"/>
             </a:lvl9pPr>
           </a:lstStyle>
           <a:p>
             <a:pPr lvl="0"/>
             <a:r>
-              <a:rPr lang="en-US" smtClean="0"/>
+              <a:rPr lang="en-US"/>
               <a:t>Click to edit Master text styles</a:t>
             </a:r>
           </a:p>
           <a:p>
             <a:pPr lvl="1"/>
             <a:r>
-              <a:rPr lang="en-US" smtClean="0"/>
+              <a:rPr lang="en-US"/>
               <a:t>Second level</a:t>
             </a:r>
           </a:p>
           <a:p>
             <a:pPr lvl="2"/>
             <a:r>
-              <a:rPr lang="en-US" smtClean="0"/>
+              <a:rPr lang="en-US"/>
               <a:t>Third level</a:t>
             </a:r>
           </a:p>
           <a:p>
             <a:pPr lvl="3"/>
             <a:r>
-              <a:rPr lang="en-US" smtClean="0"/>
+              <a:rPr lang="en-US"/>
               <a:t>Fourth level</a:t>
             </a:r>
           </a:p>
           <a:p>
             <a:pPr lvl="4"/>
             <a:r>
-              <a:rPr lang="en-US" smtClean="0"/>
+              <a:rPr lang="en-US"/>
               <a:t>Fifth level</a:t>
             </a:r>
-            <a:endParaRPr lang="en-US"/>
           </a:p>
         </p:txBody>
       </p:sp>
@@ -1609,8 +2168,8 @@
         </p:nvSpPr>
         <p:spPr>
           <a:xfrm>
-            <a:off x="4645025" y="1535113"/>
-            <a:ext cx="4041775" cy="639762"/>
+            <a:off x="4645026" y="1151335"/>
+            <a:ext cx="4041775" cy="479822"/>
           </a:xfrm>
         </p:spPr>
         <p:txBody>
@@ -1618,45 +2177,45 @@
           <a:lstStyle>
             <a:lvl1pPr marL="0" indent="0">
               <a:buNone/>
-              <a:defRPr sz="2400" b="1"/>
+              <a:defRPr sz="1800" b="1"/>
             </a:lvl1pPr>
-            <a:lvl2pPr marL="457200" indent="0">
-              <a:buNone/>
-              <a:defRPr sz="2000" b="1"/>
+            <a:lvl2pPr marL="342900" indent="0">
+              <a:buNone/>
+              <a:defRPr sz="1500" b="1"/>
             </a:lvl2pPr>
-            <a:lvl3pPr marL="914400" indent="0">
-              <a:buNone/>
-              <a:defRPr sz="1800" b="1"/>
+            <a:lvl3pPr marL="685800" indent="0">
+              <a:buNone/>
+              <a:defRPr sz="1350" b="1"/>
             </a:lvl3pPr>
-            <a:lvl4pPr marL="1371600" indent="0">
-              <a:buNone/>
-              <a:defRPr sz="1600" b="1"/>
+            <a:lvl4pPr marL="1028700" indent="0">
+              <a:buNone/>
+              <a:defRPr sz="1200" b="1"/>
             </a:lvl4pPr>
-            <a:lvl5pPr marL="1828800" indent="0">
-              <a:buNone/>
-              <a:defRPr sz="1600" b="1"/>
+            <a:lvl5pPr marL="1371600" indent="0">
+              <a:buNone/>
+              <a:defRPr sz="1200" b="1"/>
             </a:lvl5pPr>
-            <a:lvl6pPr marL="2286000" indent="0">
-              <a:buNone/>
-              <a:defRPr sz="1600" b="1"/>
+            <a:lvl6pPr marL="1714500" indent="0">
+              <a:buNone/>
+              <a:defRPr sz="1200" b="1"/>
             </a:lvl6pPr>
-            <a:lvl7pPr marL="2743200" indent="0">
-              <a:buNone/>
-              <a:defRPr sz="1600" b="1"/>
+            <a:lvl7pPr marL="2057400" indent="0">
+              <a:buNone/>
+              <a:defRPr sz="1200" b="1"/>
             </a:lvl7pPr>
-            <a:lvl8pPr marL="3200400" indent="0">
-              <a:buNone/>
-              <a:defRPr sz="1600" b="1"/>
+            <a:lvl8pPr marL="2400300" indent="0">
+              <a:buNone/>
+              <a:defRPr sz="1200" b="1"/>
             </a:lvl8pPr>
-            <a:lvl9pPr marL="3657600" indent="0">
-              <a:buNone/>
-              <a:defRPr sz="1600" b="1"/>
+            <a:lvl9pPr marL="2743200" indent="0">
+              <a:buNone/>
+              <a:defRPr sz="1200" b="1"/>
             </a:lvl9pPr>
           </a:lstStyle>
           <a:p>
             <a:pPr lvl="0"/>
             <a:r>
-              <a:rPr lang="en-US" smtClean="0"/>
+              <a:rPr lang="en-US"/>
               <a:t>Click to edit Master text styles</a:t>
             </a:r>
           </a:p>
@@ -1674,76 +2233,75 @@
         </p:nvSpPr>
         <p:spPr>
           <a:xfrm>
-            <a:off x="4645025" y="2174875"/>
-            <a:ext cx="4041775" cy="3951288"/>
+            <a:off x="4645026" y="1631156"/>
+            <a:ext cx="4041775" cy="2963466"/>
           </a:xfrm>
         </p:spPr>
         <p:txBody>
           <a:bodyPr/>
           <a:lstStyle>
             <a:lvl1pPr>
-              <a:defRPr sz="2400"/>
+              <a:defRPr sz="1800"/>
             </a:lvl1pPr>
             <a:lvl2pPr>
-              <a:defRPr sz="2000"/>
+              <a:defRPr sz="1500"/>
             </a:lvl2pPr>
             <a:lvl3pPr>
-              <a:defRPr sz="1800"/>
+              <a:defRPr sz="1350"/>
             </a:lvl3pPr>
             <a:lvl4pPr>
-              <a:defRPr sz="1600"/>
+              <a:defRPr sz="1200"/>
             </a:lvl4pPr>
             <a:lvl5pPr>
-              <a:defRPr sz="1600"/>
+              <a:defRPr sz="1200"/>
             </a:lvl5pPr>
             <a:lvl6pPr>
-              <a:defRPr sz="1600"/>
+              <a:defRPr sz="1200"/>
             </a:lvl6pPr>
             <a:lvl7pPr>
-              <a:defRPr sz="1600"/>
+              <a:defRPr sz="1200"/>
             </a:lvl7pPr>
             <a:lvl8pPr>
-              <a:defRPr sz="1600"/>
+              <a:defRPr sz="1200"/>
             </a:lvl8pPr>
             <a:lvl9pPr>
-              <a:defRPr sz="1600"/>
+              <a:defRPr sz="1200"/>
             </a:lvl9pPr>
           </a:lstStyle>
           <a:p>
             <a:pPr lvl="0"/>
             <a:r>
-              <a:rPr lang="en-US" smtClean="0"/>
+              <a:rPr lang="en-US"/>
               <a:t>Click to edit Master text styles</a:t>
             </a:r>
           </a:p>
           <a:p>
             <a:pPr lvl="1"/>
             <a:r>
-              <a:rPr lang="en-US" smtClean="0"/>
+              <a:rPr lang="en-US"/>
               <a:t>Second level</a:t>
             </a:r>
           </a:p>
           <a:p>
             <a:pPr lvl="2"/>
             <a:r>
-              <a:rPr lang="en-US" smtClean="0"/>
+              <a:rPr lang="en-US"/>
               <a:t>Third level</a:t>
             </a:r>
           </a:p>
           <a:p>
             <a:pPr lvl="3"/>
             <a:r>
-              <a:rPr lang="en-US" smtClean="0"/>
+              <a:rPr lang="en-US"/>
               <a:t>Fourth level</a:t>
             </a:r>
           </a:p>
           <a:p>
             <a:pPr lvl="4"/>
             <a:r>
-              <a:rPr lang="en-US" smtClean="0"/>
+              <a:rPr lang="en-US"/>
               <a:t>Fifth level</a:t>
             </a:r>
-            <a:endParaRPr lang="en-US"/>
           </a:p>
         </p:txBody>
       </p:sp>
@@ -1764,7 +2322,7 @@
           <a:p>
             <a:fld id="{5BCAD085-E8A6-8845-BD4E-CB4CCA059FC4}" type="datetimeFigureOut">
               <a:rPr lang="en-US" smtClean="0"/>
-              <a:t>1/27/13</a:t>
+              <a:t>3/19/26</a:t>
             </a:fld>
             <a:endParaRPr lang="en-US"/>
           </a:p>
@@ -1858,10 +2416,9 @@
           <a:lstStyle/>
           <a:p>
             <a:r>
-              <a:rPr lang="en-US" smtClean="0"/>
+              <a:rPr lang="en-US"/>
               <a:t>Click to edit Master title style</a:t>
             </a:r>
-            <a:endParaRPr lang="en-US"/>
           </a:p>
         </p:txBody>
       </p:sp>
@@ -1882,7 +2439,7 @@
           <a:p>
             <a:fld id="{5BCAD085-E8A6-8845-BD4E-CB4CCA059FC4}" type="datetimeFigureOut">
               <a:rPr lang="en-US" smtClean="0"/>
-              <a:t>1/27/13</a:t>
+              <a:t>3/19/26</a:t>
             </a:fld>
             <a:endParaRPr lang="en-US"/>
           </a:p>
@@ -1977,7 +2534,7 @@
           <a:p>
             <a:fld id="{5BCAD085-E8A6-8845-BD4E-CB4CCA059FC4}" type="datetimeFigureOut">
               <a:rPr lang="en-US" smtClean="0"/>
-              <a:t>1/27/13</a:t>
+              <a:t>3/19/26</a:t>
             </a:fld>
             <a:endParaRPr lang="en-US"/>
           </a:p>
@@ -2067,23 +2624,22 @@
         </p:nvSpPr>
         <p:spPr>
           <a:xfrm>
-            <a:off x="457200" y="273050"/>
-            <a:ext cx="3008313" cy="1162050"/>
+            <a:off x="457201" y="204787"/>
+            <a:ext cx="3008313" cy="871538"/>
           </a:xfrm>
         </p:spPr>
         <p:txBody>
           <a:bodyPr anchor="b"/>
           <a:lstStyle>
             <a:lvl1pPr algn="l">
-              <a:defRPr sz="2000" b="1"/>
+              <a:defRPr sz="1500" b="1"/>
             </a:lvl1pPr>
           </a:lstStyle>
           <a:p>
             <a:r>
-              <a:rPr lang="en-US" smtClean="0"/>
+              <a:rPr lang="en-US"/>
               <a:t>Click to edit Master title style</a:t>
             </a:r>
-            <a:endParaRPr lang="en-US"/>
           </a:p>
         </p:txBody>
       </p:sp>
@@ -2099,76 +2655,75 @@
         </p:nvSpPr>
         <p:spPr>
           <a:xfrm>
-            <a:off x="3575050" y="273050"/>
-            <a:ext cx="5111750" cy="5853113"/>
+            <a:off x="3575050" y="204789"/>
+            <a:ext cx="5111750" cy="4389835"/>
           </a:xfrm>
         </p:spPr>
         <p:txBody>
           <a:bodyPr/>
           <a:lstStyle>
             <a:lvl1pPr>
-              <a:defRPr sz="3200"/>
+              <a:defRPr sz="2400"/>
             </a:lvl1pPr>
             <a:lvl2pPr>
-              <a:defRPr sz="2800"/>
+              <a:defRPr sz="2100"/>
             </a:lvl2pPr>
             <a:lvl3pPr>
-              <a:defRPr sz="2400"/>
+              <a:defRPr sz="1800"/>
             </a:lvl3pPr>
             <a:lvl4pPr>
-              <a:defRPr sz="2000"/>
+              <a:defRPr sz="1500"/>
             </a:lvl4pPr>
             <a:lvl5pPr>
-              <a:defRPr sz="2000"/>
+              <a:defRPr sz="1500"/>
             </a:lvl5pPr>
             <a:lvl6pPr>
-              <a:defRPr sz="2000"/>
+              <a:defRPr sz="1500"/>
             </a:lvl6pPr>
             <a:lvl7pPr>
-              <a:defRPr sz="2000"/>
+              <a:defRPr sz="1500"/>
             </a:lvl7pPr>
             <a:lvl8pPr>
-              <a:defRPr sz="2000"/>
+              <a:defRPr sz="1500"/>
             </a:lvl8pPr>
             <a:lvl9pPr>
-              <a:defRPr sz="2000"/>
+              <a:defRPr sz="1500"/>
             </a:lvl9pPr>
           </a:lstStyle>
           <a:p>
             <a:pPr lvl="0"/>
             <a:r>
-              <a:rPr lang="en-US" smtClean="0"/>
+              <a:rPr lang="en-US"/>
               <a:t>Click to edit Master text styles</a:t>
             </a:r>
           </a:p>
           <a:p>
             <a:pPr lvl="1"/>
             <a:r>
-              <a:rPr lang="en-US" smtClean="0"/>
+              <a:rPr lang="en-US"/>
               <a:t>Second level</a:t>
             </a:r>
           </a:p>
           <a:p>
             <a:pPr lvl="2"/>
             <a:r>
-              <a:rPr lang="en-US" smtClean="0"/>
+              <a:rPr lang="en-US"/>
               <a:t>Third level</a:t>
             </a:r>
           </a:p>
           <a:p>
             <a:pPr lvl="3"/>
             <a:r>
-              <a:rPr lang="en-US" smtClean="0"/>
+              <a:rPr lang="en-US"/>
               <a:t>Fourth level</a:t>
             </a:r>
           </a:p>
           <a:p>
             <a:pPr lvl="4"/>
             <a:r>
-              <a:rPr lang="en-US" smtClean="0"/>
+              <a:rPr lang="en-US"/>
               <a:t>Fifth level</a:t>
             </a:r>
-            <a:endParaRPr lang="en-US"/>
           </a:p>
         </p:txBody>
       </p:sp>
@@ -2184,8 +2739,8 @@
         </p:nvSpPr>
         <p:spPr>
           <a:xfrm>
-            <a:off x="457200" y="1435100"/>
-            <a:ext cx="3008313" cy="4691063"/>
+            <a:off x="457201" y="1076326"/>
+            <a:ext cx="3008313" cy="3518297"/>
           </a:xfrm>
         </p:spPr>
         <p:txBody>
@@ -2193,45 +2748,45 @@
           <a:lstStyle>
             <a:lvl1pPr marL="0" indent="0">
               <a:buNone/>
-              <a:defRPr sz="1400"/>
+              <a:defRPr sz="1050"/>
             </a:lvl1pPr>
-            <a:lvl2pPr marL="457200" indent="0">
-              <a:buNone/>
-              <a:defRPr sz="1200"/>
+            <a:lvl2pPr marL="342900" indent="0">
+              <a:buNone/>
+              <a:defRPr sz="900"/>
             </a:lvl2pPr>
-            <a:lvl3pPr marL="914400" indent="0">
-              <a:buNone/>
-              <a:defRPr sz="1000"/>
+            <a:lvl3pPr marL="685800" indent="0">
+              <a:buNone/>
+              <a:defRPr sz="750"/>
             </a:lvl3pPr>
-            <a:lvl4pPr marL="1371600" indent="0">
-              <a:buNone/>
-              <a:defRPr sz="900"/>
+            <a:lvl4pPr marL="1028700" indent="0">
+              <a:buNone/>
+              <a:defRPr sz="675"/>
             </a:lvl4pPr>
-            <a:lvl5pPr marL="1828800" indent="0">
-              <a:buNone/>
-              <a:defRPr sz="900"/>
+            <a:lvl5pPr marL="1371600" indent="0">
+              <a:buNone/>
+              <a:defRPr sz="675"/>
             </a:lvl5pPr>
-            <a:lvl6pPr marL="2286000" indent="0">
-              <a:buNone/>
-              <a:defRPr sz="900"/>
+            <a:lvl6pPr marL="1714500" indent="0">
+              <a:buNone/>
+              <a:defRPr sz="675"/>
             </a:lvl6pPr>
-            <a:lvl7pPr marL="2743200" indent="0">
-              <a:buNone/>
-              <a:defRPr sz="900"/>
+            <a:lvl7pPr marL="2057400" indent="0">
+              <a:buNone/>
+              <a:defRPr sz="675"/>
             </a:lvl7pPr>
-            <a:lvl8pPr marL="3200400" indent="0">
-              <a:buNone/>
-              <a:defRPr sz="900"/>
+            <a:lvl8pPr marL="2400300" indent="0">
+              <a:buNone/>
+              <a:defRPr sz="675"/>
             </a:lvl8pPr>
-            <a:lvl9pPr marL="3657600" indent="0">
-              <a:buNone/>
-              <a:defRPr sz="900"/>
+            <a:lvl9pPr marL="2743200" indent="0">
+              <a:buNone/>
+              <a:defRPr sz="675"/>
             </a:lvl9pPr>
           </a:lstStyle>
           <a:p>
             <a:pPr lvl="0"/>
             <a:r>
-              <a:rPr lang="en-US" smtClean="0"/>
+              <a:rPr lang="en-US"/>
               <a:t>Click to edit Master text styles</a:t>
             </a:r>
           </a:p>
@@ -2254,7 +2809,7 @@
           <a:p>
             <a:fld id="{5BCAD085-E8A6-8845-BD4E-CB4CCA059FC4}" type="datetimeFigureOut">
               <a:rPr lang="en-US" smtClean="0"/>
-              <a:t>1/27/13</a:t>
+              <a:t>3/19/26</a:t>
             </a:fld>
             <a:endParaRPr lang="en-US"/>
           </a:p>
@@ -2344,23 +2899,22 @@
         </p:nvSpPr>
         <p:spPr>
           <a:xfrm>
-            <a:off x="1792288" y="4800600"/>
-            <a:ext cx="5486400" cy="566738"/>
+            <a:off x="1792288" y="3600450"/>
+            <a:ext cx="5486400" cy="425054"/>
           </a:xfrm>
         </p:spPr>
         <p:txBody>
           <a:bodyPr anchor="b"/>
           <a:lstStyle>
             <a:lvl1pPr algn="l">
-              <a:defRPr sz="2000" b="1"/>
+              <a:defRPr sz="1500" b="1"/>
             </a:lvl1pPr>
           </a:lstStyle>
           <a:p>
             <a:r>
-              <a:rPr lang="en-US" smtClean="0"/>
+              <a:rPr lang="en-US"/>
               <a:t>Click to edit Master title style</a:t>
             </a:r>
-            <a:endParaRPr lang="en-US"/>
           </a:p>
         </p:txBody>
       </p:sp>
@@ -2376,8 +2930,8 @@
         </p:nvSpPr>
         <p:spPr>
           <a:xfrm>
-            <a:off x="1792288" y="612775"/>
-            <a:ext cx="5486400" cy="4114800"/>
+            <a:off x="1792288" y="459581"/>
+            <a:ext cx="5486400" cy="3086100"/>
           </a:xfrm>
         </p:spPr>
         <p:txBody>
@@ -2385,39 +2939,39 @@
           <a:lstStyle>
             <a:lvl1pPr marL="0" indent="0">
               <a:buNone/>
-              <a:defRPr sz="3200"/>
+              <a:defRPr sz="2400"/>
             </a:lvl1pPr>
-            <a:lvl2pPr marL="457200" indent="0">
-              <a:buNone/>
-              <a:defRPr sz="2800"/>
+            <a:lvl2pPr marL="342900" indent="0">
+              <a:buNone/>
+              <a:defRPr sz="2100"/>
             </a:lvl2pPr>
-            <a:lvl3pPr marL="914400" indent="0">
-              <a:buNone/>
-              <a:defRPr sz="2400"/>
+            <a:lvl3pPr marL="685800" indent="0">
+              <a:buNone/>
+              <a:defRPr sz="1800"/>
             </a:lvl3pPr>
-            <a:lvl4pPr marL="1371600" indent="0">
-              <a:buNone/>
-              <a:defRPr sz="2000"/>
+            <a:lvl4pPr marL="1028700" indent="0">
+              <a:buNone/>
+              <a:defRPr sz="1500"/>
             </a:lvl4pPr>
-            <a:lvl5pPr marL="1828800" indent="0">
-              <a:buNone/>
-              <a:defRPr sz="2000"/>
+            <a:lvl5pPr marL="1371600" indent="0">
+              <a:buNone/>
+              <a:defRPr sz="1500"/>
             </a:lvl5pPr>
-            <a:lvl6pPr marL="2286000" indent="0">
-              <a:buNone/>
-              <a:defRPr sz="2000"/>
+            <a:lvl6pPr marL="1714500" indent="0">
+              <a:buNone/>
+              <a:defRPr sz="1500"/>
             </a:lvl6pPr>
-            <a:lvl7pPr marL="2743200" indent="0">
-              <a:buNone/>
-              <a:defRPr sz="2000"/>
+            <a:lvl7pPr marL="2057400" indent="0">
+              <a:buNone/>
+              <a:defRPr sz="1500"/>
             </a:lvl7pPr>
-            <a:lvl8pPr marL="3200400" indent="0">
-              <a:buNone/>
-              <a:defRPr sz="2000"/>
+            <a:lvl8pPr marL="2400300" indent="0">
+              <a:buNone/>
+              <a:defRPr sz="1500"/>
             </a:lvl8pPr>
-            <a:lvl9pPr marL="3657600" indent="0">
-              <a:buNone/>
-              <a:defRPr sz="2000"/>
+            <a:lvl9pPr marL="2743200" indent="0">
+              <a:buNone/>
+              <a:defRPr sz="1500"/>
             </a:lvl9pPr>
           </a:lstStyle>
           <a:p>
@@ -2437,8 +2991,8 @@
         </p:nvSpPr>
         <p:spPr>
           <a:xfrm>
-            <a:off x="1792288" y="5367338"/>
-            <a:ext cx="5486400" cy="804862"/>
+            <a:off x="1792288" y="4025503"/>
+            <a:ext cx="5486400" cy="603647"/>
           </a:xfrm>
         </p:spPr>
         <p:txBody>
@@ -2446,45 +3000,45 @@
           <a:lstStyle>
             <a:lvl1pPr marL="0" indent="0">
               <a:buNone/>
-              <a:defRPr sz="1400"/>
+              <a:defRPr sz="1050"/>
             </a:lvl1pPr>
-            <a:lvl2pPr marL="457200" indent="0">
-              <a:buNone/>
-              <a:defRPr sz="1200"/>
+            <a:lvl2pPr marL="342900" indent="0">
+              <a:buNone/>
+              <a:defRPr sz="900"/>
             </a:lvl2pPr>
-            <a:lvl3pPr marL="914400" indent="0">
-              <a:buNone/>
-              <a:defRPr sz="1000"/>
+            <a:lvl3pPr marL="685800" indent="0">
+              <a:buNone/>
+              <a:defRPr sz="750"/>
             </a:lvl3pPr>
-            <a:lvl4pPr marL="1371600" indent="0">
-              <a:buNone/>
-              <a:defRPr sz="900"/>
+            <a:lvl4pPr marL="1028700" indent="0">
+              <a:buNone/>
+              <a:defRPr sz="675"/>
             </a:lvl4pPr>
-            <a:lvl5pPr marL="1828800" indent="0">
-              <a:buNone/>
-              <a:defRPr sz="900"/>
+            <a:lvl5pPr marL="1371600" indent="0">
+              <a:buNone/>
+              <a:defRPr sz="675"/>
             </a:lvl5pPr>
-            <a:lvl6pPr marL="2286000" indent="0">
-              <a:buNone/>
-              <a:defRPr sz="900"/>
+            <a:lvl6pPr marL="1714500" indent="0">
+              <a:buNone/>
+              <a:defRPr sz="675"/>
             </a:lvl6pPr>
-            <a:lvl7pPr marL="2743200" indent="0">
-              <a:buNone/>
-              <a:defRPr sz="900"/>
+            <a:lvl7pPr marL="2057400" indent="0">
+              <a:buNone/>
+              <a:defRPr sz="675"/>
             </a:lvl7pPr>
-            <a:lvl8pPr marL="3200400" indent="0">
-              <a:buNone/>
-              <a:defRPr sz="900"/>
+            <a:lvl8pPr marL="2400300" indent="0">
+              <a:buNone/>
+              <a:defRPr sz="675"/>
             </a:lvl8pPr>
-            <a:lvl9pPr marL="3657600" indent="0">
-              <a:buNone/>
-              <a:defRPr sz="900"/>
+            <a:lvl9pPr marL="2743200" indent="0">
+              <a:buNone/>
+              <a:defRPr sz="675"/>
             </a:lvl9pPr>
           </a:lstStyle>
           <a:p>
             <a:pPr lvl="0"/>
             <a:r>
-              <a:rPr lang="en-US" smtClean="0"/>
+              <a:rPr lang="en-US"/>
               <a:t>Click to edit Master text styles</a:t>
             </a:r>
           </a:p>
@@ -2507,7 +3061,7 @@
           <a:p>
             <a:fld id="{5BCAD085-E8A6-8845-BD4E-CB4CCA059FC4}" type="datetimeFigureOut">
               <a:rPr lang="en-US" smtClean="0"/>
-              <a:t>1/27/13</a:t>
+              <a:t>3/19/26</a:t>
             </a:fld>
             <a:endParaRPr lang="en-US"/>
           </a:p>
@@ -2602,8 +3156,8 @@
         </p:nvSpPr>
         <p:spPr>
           <a:xfrm>
-            <a:off x="457200" y="274638"/>
-            <a:ext cx="8229600" cy="1143000"/>
+            <a:off x="457200" y="205978"/>
+            <a:ext cx="8229600" cy="857250"/>
           </a:xfrm>
           <a:prstGeom prst="rect">
             <a:avLst/>
@@ -2616,10 +3170,9 @@
           <a:lstStyle/>
           <a:p>
             <a:r>
-              <a:rPr lang="en-US" smtClean="0"/>
+              <a:rPr lang="en-US"/>
               <a:t>Click to edit Master title style</a:t>
             </a:r>
-            <a:endParaRPr lang="en-US"/>
           </a:p>
         </p:txBody>
       </p:sp>
@@ -2635,8 +3188,8 @@
         </p:nvSpPr>
         <p:spPr>
           <a:xfrm>
-            <a:off x="457200" y="1600200"/>
-            <a:ext cx="8229600" cy="4525963"/>
+            <a:off x="457200" y="1200151"/>
+            <a:ext cx="8229600" cy="3394472"/>
           </a:xfrm>
           <a:prstGeom prst="rect">
             <a:avLst/>
@@ -2650,38 +3203,37 @@
           <a:p>
             <a:pPr lvl="0"/>
             <a:r>
-              <a:rPr lang="en-US" smtClean="0"/>
+              <a:rPr lang="en-US"/>
               <a:t>Click to edit Master text styles</a:t>
             </a:r>
           </a:p>
           <a:p>
             <a:pPr lvl="1"/>
             <a:r>
-              <a:rPr lang="en-US" smtClean="0"/>
+              <a:rPr lang="en-US"/>
               <a:t>Second level</a:t>
             </a:r>
           </a:p>
           <a:p>
             <a:pPr lvl="2"/>
             <a:r>
-              <a:rPr lang="en-US" smtClean="0"/>
+              <a:rPr lang="en-US"/>
               <a:t>Third level</a:t>
             </a:r>
           </a:p>
           <a:p>
             <a:pPr lvl="3"/>
             <a:r>
-              <a:rPr lang="en-US" smtClean="0"/>
+              <a:rPr lang="en-US"/>
               <a:t>Fourth level</a:t>
             </a:r>
           </a:p>
           <a:p>
             <a:pPr lvl="4"/>
             <a:r>
-              <a:rPr lang="en-US" smtClean="0"/>
+              <a:rPr lang="en-US"/>
               <a:t>Fifth level</a:t>
             </a:r>
-            <a:endParaRPr lang="en-US"/>
           </a:p>
         </p:txBody>
       </p:sp>
@@ -2697,8 +3249,8 @@
         </p:nvSpPr>
         <p:spPr>
           <a:xfrm>
-            <a:off x="457200" y="6356350"/>
-            <a:ext cx="2133600" cy="365125"/>
+            <a:off x="457200" y="4767264"/>
+            <a:ext cx="2133600" cy="273844"/>
           </a:xfrm>
           <a:prstGeom prst="rect">
             <a:avLst/>
@@ -2708,7 +3260,7 @@
           <a:bodyPr vert="horz" lIns="91440" tIns="45720" rIns="91440" bIns="45720" rtlCol="0" anchor="ctr"/>
           <a:lstStyle>
             <a:lvl1pPr algn="l">
-              <a:defRPr sz="1200">
+              <a:defRPr sz="900">
                 <a:solidFill>
                   <a:schemeClr val="tx1">
                     <a:tint val="75000"/>
@@ -2720,7 +3272,7 @@
           <a:p>
             <a:fld id="{5BCAD085-E8A6-8845-BD4E-CB4CCA059FC4}" type="datetimeFigureOut">
               <a:rPr lang="en-US" smtClean="0"/>
-              <a:t>1/27/13</a:t>
+              <a:t>3/19/26</a:t>
             </a:fld>
             <a:endParaRPr lang="en-US"/>
           </a:p>
@@ -2738,8 +3290,8 @@
         </p:nvSpPr>
         <p:spPr>
           <a:xfrm>
-            <a:off x="3124200" y="6356350"/>
-            <a:ext cx="2895600" cy="365125"/>
+            <a:off x="3124200" y="4767264"/>
+            <a:ext cx="2895600" cy="273844"/>
           </a:xfrm>
           <a:prstGeom prst="rect">
             <a:avLst/>
@@ -2749,7 +3301,7 @@
           <a:bodyPr vert="horz" lIns="91440" tIns="45720" rIns="91440" bIns="45720" rtlCol="0" anchor="ctr"/>
           <a:lstStyle>
             <a:lvl1pPr algn="ctr">
-              <a:defRPr sz="1200">
+              <a:defRPr sz="900">
                 <a:solidFill>
                   <a:schemeClr val="tx1">
                     <a:tint val="75000"/>
@@ -2775,8 +3327,8 @@
         </p:nvSpPr>
         <p:spPr>
           <a:xfrm>
-            <a:off x="6553200" y="6356350"/>
-            <a:ext cx="2133600" cy="365125"/>
+            <a:off x="6553200" y="4767264"/>
+            <a:ext cx="2133600" cy="273844"/>
           </a:xfrm>
           <a:prstGeom prst="rect">
             <a:avLst/>
@@ -2786,7 +3338,7 @@
           <a:bodyPr vert="horz" lIns="91440" tIns="45720" rIns="91440" bIns="45720" rtlCol="0" anchor="ctr"/>
           <a:lstStyle>
             <a:lvl1pPr algn="r">
-              <a:defRPr sz="1200">
+              <a:defRPr sz="900">
                 <a:solidFill>
                   <a:schemeClr val="tx1">
                     <a:tint val="75000"/>
@@ -2824,15 +3376,16 @@
     <p:sldLayoutId id="2147483657" r:id="rId9"/>
     <p:sldLayoutId id="2147483658" r:id="rId10"/>
     <p:sldLayoutId id="2147483659" r:id="rId11"/>
+    <p:sldLayoutId id="2147483660" r:id="rId12"/>
   </p:sldLayoutIdLst>
   <p:txStyles>
     <p:titleStyle>
-      <a:lvl1pPr algn="ctr" defTabSz="457200" rtl="0" eaLnBrk="1" latinLnBrk="0" hangingPunct="1">
+      <a:lvl1pPr algn="ctr" defTabSz="342900" rtl="0" eaLnBrk="1" latinLnBrk="0" hangingPunct="1">
         <a:spcBef>
           <a:spcPct val="0"/>
         </a:spcBef>
         <a:buNone/>
-        <a:defRPr sz="4400" kern="1200">
+        <a:defRPr sz="3300" kern="1200">
           <a:solidFill>
             <a:schemeClr val="tx1"/>
           </a:solidFill>
@@ -2843,37 +3396,7 @@
       </a:lvl1pPr>
     </p:titleStyle>
     <p:bodyStyle>
-      <a:lvl1pPr marL="342900" indent="-342900" algn="l" defTabSz="457200" rtl="0" eaLnBrk="1" latinLnBrk="0" hangingPunct="1">
-        <a:spcBef>
-          <a:spcPct val="20000"/>
-        </a:spcBef>
-        <a:buFont typeface="Arial"/>
-        <a:buChar char="•"/>
-        <a:defRPr sz="3200" kern="1200">
-          <a:solidFill>
-            <a:schemeClr val="tx1"/>
-          </a:solidFill>
-          <a:latin typeface="+mn-lt"/>
-          <a:ea typeface="+mn-ea"/>
-          <a:cs typeface="+mn-cs"/>
-        </a:defRPr>
-      </a:lvl1pPr>
-      <a:lvl2pPr marL="742950" indent="-285750" algn="l" defTabSz="457200" rtl="0" eaLnBrk="1" latinLnBrk="0" hangingPunct="1">
-        <a:spcBef>
-          <a:spcPct val="20000"/>
-        </a:spcBef>
-        <a:buFont typeface="Arial"/>
-        <a:buChar char="–"/>
-        <a:defRPr sz="2800" kern="1200">
-          <a:solidFill>
-            <a:schemeClr val="tx1"/>
-          </a:solidFill>
-          <a:latin typeface="+mn-lt"/>
-          <a:ea typeface="+mn-ea"/>
-          <a:cs typeface="+mn-cs"/>
-        </a:defRPr>
-      </a:lvl2pPr>
-      <a:lvl3pPr marL="1143000" indent="-228600" algn="l" defTabSz="457200" rtl="0" eaLnBrk="1" latinLnBrk="0" hangingPunct="1">
+      <a:lvl1pPr marL="257175" indent="-257175" algn="l" defTabSz="342900" rtl="0" eaLnBrk="1" latinLnBrk="0" hangingPunct="1">
         <a:spcBef>
           <a:spcPct val="20000"/>
         </a:spcBef>
@@ -2887,14 +3410,44 @@
           <a:ea typeface="+mn-ea"/>
           <a:cs typeface="+mn-cs"/>
         </a:defRPr>
-      </a:lvl3pPr>
-      <a:lvl4pPr marL="1600200" indent="-228600" algn="l" defTabSz="457200" rtl="0" eaLnBrk="1" latinLnBrk="0" hangingPunct="1">
+      </a:lvl1pPr>
+      <a:lvl2pPr marL="557213" indent="-214313" algn="l" defTabSz="342900" rtl="0" eaLnBrk="1" latinLnBrk="0" hangingPunct="1">
         <a:spcBef>
           <a:spcPct val="20000"/>
         </a:spcBef>
         <a:buFont typeface="Arial"/>
         <a:buChar char="–"/>
-        <a:defRPr sz="2000" kern="1200">
+        <a:defRPr sz="2100" kern="1200">
+          <a:solidFill>
+            <a:schemeClr val="tx1"/>
+          </a:solidFill>
+          <a:latin typeface="+mn-lt"/>
+          <a:ea typeface="+mn-ea"/>
+          <a:cs typeface="+mn-cs"/>
+        </a:defRPr>
+      </a:lvl2pPr>
+      <a:lvl3pPr marL="857250" indent="-171450" algn="l" defTabSz="342900" rtl="0" eaLnBrk="1" latinLnBrk="0" hangingPunct="1">
+        <a:spcBef>
+          <a:spcPct val="20000"/>
+        </a:spcBef>
+        <a:buFont typeface="Arial"/>
+        <a:buChar char="•"/>
+        <a:defRPr sz="1800" kern="1200">
+          <a:solidFill>
+            <a:schemeClr val="tx1"/>
+          </a:solidFill>
+          <a:latin typeface="+mn-lt"/>
+          <a:ea typeface="+mn-ea"/>
+          <a:cs typeface="+mn-cs"/>
+        </a:defRPr>
+      </a:lvl3pPr>
+      <a:lvl4pPr marL="1200150" indent="-171450" algn="l" defTabSz="342900" rtl="0" eaLnBrk="1" latinLnBrk="0" hangingPunct="1">
+        <a:spcBef>
+          <a:spcPct val="20000"/>
+        </a:spcBef>
+        <a:buFont typeface="Arial"/>
+        <a:buChar char="–"/>
+        <a:defRPr sz="1500" kern="1200">
           <a:solidFill>
             <a:schemeClr val="tx1"/>
           </a:solidFill>
@@ -2903,13 +3456,13 @@
           <a:cs typeface="+mn-cs"/>
         </a:defRPr>
       </a:lvl4pPr>
-      <a:lvl5pPr marL="2057400" indent="-228600" algn="l" defTabSz="457200" rtl="0" eaLnBrk="1" latinLnBrk="0" hangingPunct="1">
+      <a:lvl5pPr marL="1543050" indent="-171450" algn="l" defTabSz="342900" rtl="0" eaLnBrk="1" latinLnBrk="0" hangingPunct="1">
         <a:spcBef>
           <a:spcPct val="20000"/>
         </a:spcBef>
         <a:buFont typeface="Arial"/>
         <a:buChar char="»"/>
-        <a:defRPr sz="2000" kern="1200">
+        <a:defRPr sz="1500" kern="1200">
           <a:solidFill>
             <a:schemeClr val="tx1"/>
           </a:solidFill>
@@ -2918,13 +3471,13 @@
           <a:cs typeface="+mn-cs"/>
         </a:defRPr>
       </a:lvl5pPr>
-      <a:lvl6pPr marL="2514600" indent="-228600" algn="l" defTabSz="457200" rtl="0" eaLnBrk="1" latinLnBrk="0" hangingPunct="1">
+      <a:lvl6pPr marL="1885950" indent="-171450" algn="l" defTabSz="342900" rtl="0" eaLnBrk="1" latinLnBrk="0" hangingPunct="1">
         <a:spcBef>
           <a:spcPct val="20000"/>
         </a:spcBef>
         <a:buFont typeface="Arial"/>
         <a:buChar char="•"/>
-        <a:defRPr sz="2000" kern="1200">
+        <a:defRPr sz="1500" kern="1200">
           <a:solidFill>
             <a:schemeClr val="tx1"/>
           </a:solidFill>
@@ -2933,13 +3486,13 @@
           <a:cs typeface="+mn-cs"/>
         </a:defRPr>
       </a:lvl6pPr>
-      <a:lvl7pPr marL="2971800" indent="-228600" algn="l" defTabSz="457200" rtl="0" eaLnBrk="1" latinLnBrk="0" hangingPunct="1">
+      <a:lvl7pPr marL="2228850" indent="-171450" algn="l" defTabSz="342900" rtl="0" eaLnBrk="1" latinLnBrk="0" hangingPunct="1">
         <a:spcBef>
           <a:spcPct val="20000"/>
         </a:spcBef>
         <a:buFont typeface="Arial"/>
         <a:buChar char="•"/>
-        <a:defRPr sz="2000" kern="1200">
+        <a:defRPr sz="1500" kern="1200">
           <a:solidFill>
             <a:schemeClr val="tx1"/>
           </a:solidFill>
@@ -2948,13 +3501,13 @@
           <a:cs typeface="+mn-cs"/>
         </a:defRPr>
       </a:lvl7pPr>
-      <a:lvl8pPr marL="3429000" indent="-228600" algn="l" defTabSz="457200" rtl="0" eaLnBrk="1" latinLnBrk="0" hangingPunct="1">
+      <a:lvl8pPr marL="2571750" indent="-171450" algn="l" defTabSz="342900" rtl="0" eaLnBrk="1" latinLnBrk="0" hangingPunct="1">
         <a:spcBef>
           <a:spcPct val="20000"/>
         </a:spcBef>
         <a:buFont typeface="Arial"/>
         <a:buChar char="•"/>
-        <a:defRPr sz="2000" kern="1200">
+        <a:defRPr sz="1500" kern="1200">
           <a:solidFill>
             <a:schemeClr val="tx1"/>
           </a:solidFill>
@@ -2963,13 +3516,13 @@
           <a:cs typeface="+mn-cs"/>
         </a:defRPr>
       </a:lvl8pPr>
-      <a:lvl9pPr marL="3886200" indent="-228600" algn="l" defTabSz="457200" rtl="0" eaLnBrk="1" latinLnBrk="0" hangingPunct="1">
+      <a:lvl9pPr marL="2914650" indent="-171450" algn="l" defTabSz="342900" rtl="0" eaLnBrk="1" latinLnBrk="0" hangingPunct="1">
         <a:spcBef>
           <a:spcPct val="20000"/>
         </a:spcBef>
         <a:buFont typeface="Arial"/>
         <a:buChar char="•"/>
-        <a:defRPr sz="2000" kern="1200">
+        <a:defRPr sz="1500" kern="1200">
           <a:solidFill>
             <a:schemeClr val="tx1"/>
           </a:solidFill>
@@ -2983,8 +3536,8 @@
       <a:defPPr>
         <a:defRPr lang="en-US"/>
       </a:defPPr>
-      <a:lvl1pPr marL="0" algn="l" defTabSz="457200" rtl="0" eaLnBrk="1" latinLnBrk="0" hangingPunct="1">
-        <a:defRPr sz="1800" kern="1200">
+      <a:lvl1pPr marL="0" algn="l" defTabSz="342900" rtl="0" eaLnBrk="1" latinLnBrk="0" hangingPunct="1">
+        <a:defRPr sz="1350" kern="1200">
           <a:solidFill>
             <a:schemeClr val="tx1"/>
           </a:solidFill>
@@ -2993,8 +3546,8 @@
           <a:cs typeface="+mn-cs"/>
         </a:defRPr>
       </a:lvl1pPr>
-      <a:lvl2pPr marL="457200" algn="l" defTabSz="457200" rtl="0" eaLnBrk="1" latinLnBrk="0" hangingPunct="1">
-        <a:defRPr sz="1800" kern="1200">
+      <a:lvl2pPr marL="342900" algn="l" defTabSz="342900" rtl="0" eaLnBrk="1" latinLnBrk="0" hangingPunct="1">
+        <a:defRPr sz="1350" kern="1200">
           <a:solidFill>
             <a:schemeClr val="tx1"/>
           </a:solidFill>
@@ -3003,8 +3556,8 @@
           <a:cs typeface="+mn-cs"/>
         </a:defRPr>
       </a:lvl2pPr>
-      <a:lvl3pPr marL="914400" algn="l" defTabSz="457200" rtl="0" eaLnBrk="1" latinLnBrk="0" hangingPunct="1">
-        <a:defRPr sz="1800" kern="1200">
+      <a:lvl3pPr marL="685800" algn="l" defTabSz="342900" rtl="0" eaLnBrk="1" latinLnBrk="0" hangingPunct="1">
+        <a:defRPr sz="1350" kern="1200">
           <a:solidFill>
             <a:schemeClr val="tx1"/>
           </a:solidFill>
@@ -3013,8 +3566,8 @@
           <a:cs typeface="+mn-cs"/>
         </a:defRPr>
       </a:lvl3pPr>
-      <a:lvl4pPr marL="1371600" algn="l" defTabSz="457200" rtl="0" eaLnBrk="1" latinLnBrk="0" hangingPunct="1">
-        <a:defRPr sz="1800" kern="1200">
+      <a:lvl4pPr marL="1028700" algn="l" defTabSz="342900" rtl="0" eaLnBrk="1" latinLnBrk="0" hangingPunct="1">
+        <a:defRPr sz="1350" kern="1200">
           <a:solidFill>
             <a:schemeClr val="tx1"/>
           </a:solidFill>
@@ -3023,8 +3576,8 @@
           <a:cs typeface="+mn-cs"/>
         </a:defRPr>
       </a:lvl4pPr>
-      <a:lvl5pPr marL="1828800" algn="l" defTabSz="457200" rtl="0" eaLnBrk="1" latinLnBrk="0" hangingPunct="1">
-        <a:defRPr sz="1800" kern="1200">
+      <a:lvl5pPr marL="1371600" algn="l" defTabSz="342900" rtl="0" eaLnBrk="1" latinLnBrk="0" hangingPunct="1">
+        <a:defRPr sz="1350" kern="1200">
           <a:solidFill>
             <a:schemeClr val="tx1"/>
           </a:solidFill>
@@ -3033,8 +3586,8 @@
           <a:cs typeface="+mn-cs"/>
         </a:defRPr>
       </a:lvl5pPr>
-      <a:lvl6pPr marL="2286000" algn="l" defTabSz="457200" rtl="0" eaLnBrk="1" latinLnBrk="0" hangingPunct="1">
-        <a:defRPr sz="1800" kern="1200">
+      <a:lvl6pPr marL="1714500" algn="l" defTabSz="342900" rtl="0" eaLnBrk="1" latinLnBrk="0" hangingPunct="1">
+        <a:defRPr sz="1350" kern="1200">
           <a:solidFill>
             <a:schemeClr val="tx1"/>
           </a:solidFill>
@@ -3043,8 +3596,8 @@
           <a:cs typeface="+mn-cs"/>
         </a:defRPr>
       </a:lvl6pPr>
-      <a:lvl7pPr marL="2743200" algn="l" defTabSz="457200" rtl="0" eaLnBrk="1" latinLnBrk="0" hangingPunct="1">
-        <a:defRPr sz="1800" kern="1200">
+      <a:lvl7pPr marL="2057400" algn="l" defTabSz="342900" rtl="0" eaLnBrk="1" latinLnBrk="0" hangingPunct="1">
+        <a:defRPr sz="1350" kern="1200">
           <a:solidFill>
             <a:schemeClr val="tx1"/>
           </a:solidFill>
@@ -3053,8 +3606,8 @@
           <a:cs typeface="+mn-cs"/>
         </a:defRPr>
       </a:lvl7pPr>
-      <a:lvl8pPr marL="3200400" algn="l" defTabSz="457200" rtl="0" eaLnBrk="1" latinLnBrk="0" hangingPunct="1">
-        <a:defRPr sz="1800" kern="1200">
+      <a:lvl8pPr marL="2400300" algn="l" defTabSz="342900" rtl="0" eaLnBrk="1" latinLnBrk="0" hangingPunct="1">
+        <a:defRPr sz="1350" kern="1200">
           <a:solidFill>
             <a:schemeClr val="tx1"/>
           </a:solidFill>
@@ -3063,8 +3616,8 @@
           <a:cs typeface="+mn-cs"/>
         </a:defRPr>
       </a:lvl8pPr>
-      <a:lvl9pPr marL="3657600" algn="l" defTabSz="457200" rtl="0" eaLnBrk="1" latinLnBrk="0" hangingPunct="1">
-        <a:defRPr sz="1800" kern="1200">
+      <a:lvl9pPr marL="2743200" algn="l" defTabSz="342900" rtl="0" eaLnBrk="1" latinLnBrk="0" hangingPunct="1">
+        <a:defRPr sz="1350" kern="1200">
           <a:solidFill>
             <a:schemeClr val="tx1"/>
           </a:solidFill>
@@ -3079,54 +3632,3791 @@
 </file>
 
 <file path=ppt/slides/slide1.xml><?xml version="1.0" encoding="utf-8"?>
-<p:sld xmlns:a="http://schemas.openxmlformats.org/drawingml/2006/main" xmlns:p="http://schemas.openxmlformats.org/presentationml/2006/main" xmlns:r="http://schemas.openxmlformats.org/officeDocument/2006/relationships">
-  <p:cSld>
+<p:sld xmlns:a="http://schemas.openxmlformats.org/drawingml/2006/main" xmlns:r="http://schemas.openxmlformats.org/officeDocument/2006/relationships" xmlns:p="http://schemas.openxmlformats.org/presentationml/2006/main">
+  <p:cSld name="Slide 1">
     <p:spTree>
       <p:nvGrpSpPr>
         <p:cNvPr id="1" name=""/>
         <p:cNvGrpSpPr/>
         <p:nvPr/>
       </p:nvGrpSpPr>
-      <p:grpSpPr/>
-      <p:sp>
-        <p:nvSpPr>
-          <p:cNvPr id="2" name="Title 1"/>
-          <p:cNvSpPr>
-            <a:spLocks noGrp="1"/>
-          </p:cNvSpPr>
-          <p:nvPr>
-            <p:ph type="ctrTitle"/>
-          </p:nvPr>
-        </p:nvSpPr>
-        <p:spPr/>
-        <p:txBody>
-          <a:bodyPr/>
-          <a:lstStyle/>
-          <a:p>
-            <a:r>
+      <p:grpSpPr>
+        <a:xfrm>
+          <a:off x="0" y="0"/>
+          <a:ext cx="0" cy="0"/>
+          <a:chOff x="0" y="0"/>
+          <a:chExt cx="0" cy="0"/>
+        </a:xfrm>
+      </p:grpSpPr>
+      <p:sp>
+        <p:nvSpPr>
+          <p:cNvPr id="2" name="Shape 0"/>
+          <p:cNvSpPr/>
+          <p:nvPr/>
+        </p:nvSpPr>
+        <p:spPr>
+          <a:xfrm>
+            <a:off x="0" y="0"/>
+            <a:ext cx="9144000" cy="6858000"/>
+          </a:xfrm>
+          <a:prstGeom prst="rect">
+            <a:avLst/>
+          </a:prstGeom>
+          <a:solidFill>
+            <a:srgbClr val="0D1117"/>
+          </a:solidFill>
+          <a:ln/>
+        </p:spPr>
+        <p:txBody>
+          <a:bodyPr/>
+          <a:lstStyle/>
+          <a:p>
+            <a:endParaRPr lang="en-US"/>
+          </a:p>
+        </p:txBody>
+      </p:sp>
+      <p:sp>
+        <p:nvSpPr>
+          <p:cNvPr id="3" name="Shape 1"/>
+          <p:cNvSpPr/>
+          <p:nvPr/>
+        </p:nvSpPr>
+        <p:spPr>
+          <a:xfrm>
+            <a:off x="0" y="0"/>
+            <a:ext cx="9144000" cy="54864"/>
+          </a:xfrm>
+          <a:prstGeom prst="rect">
+            <a:avLst/>
+          </a:prstGeom>
+          <a:solidFill>
+            <a:srgbClr val="3FB950"/>
+          </a:solidFill>
+          <a:ln/>
+        </p:spPr>
+        <p:txBody>
+          <a:bodyPr/>
+          <a:lstStyle/>
+          <a:p>
+            <a:endParaRPr lang="en-US"/>
+          </a:p>
+        </p:txBody>
+      </p:sp>
+      <p:sp>
+        <p:nvSpPr>
+          <p:cNvPr id="4" name="Shape 2"/>
+          <p:cNvSpPr/>
+          <p:nvPr/>
+        </p:nvSpPr>
+        <p:spPr>
+          <a:xfrm>
+            <a:off x="640080" y="1645920"/>
+            <a:ext cx="36576" cy="2926080"/>
+          </a:xfrm>
+          <a:prstGeom prst="rect">
+            <a:avLst/>
+          </a:prstGeom>
+          <a:solidFill>
+            <a:srgbClr val="30363D"/>
+          </a:solidFill>
+          <a:ln/>
+        </p:spPr>
+        <p:txBody>
+          <a:bodyPr/>
+          <a:lstStyle/>
+          <a:p>
+            <a:endParaRPr lang="en-US"/>
+          </a:p>
+        </p:txBody>
+      </p:sp>
+      <p:pic>
+        <p:nvPicPr>
+          <p:cNvPr id="5" name="Image 0" descr="https://github.githubassets.com/images/modules/logos_page/GitHub-Mark.png"/>
+          <p:cNvPicPr>
+            <a:picLocks noChangeAspect="1"/>
+          </p:cNvPicPr>
+          <p:nvPr/>
+        </p:nvPicPr>
+        <p:blipFill>
+          <a:blip r:embed="rId3"/>
+          <a:stretch>
+            <a:fillRect/>
+          </a:stretch>
+        </p:blipFill>
+        <p:spPr>
+          <a:xfrm>
+            <a:off x="3886200" y="914400"/>
+            <a:ext cx="1371600" cy="1371600"/>
+          </a:xfrm>
+          <a:prstGeom prst="rect">
+            <a:avLst/>
+          </a:prstGeom>
+        </p:spPr>
+      </p:pic>
+      <p:sp>
+        <p:nvSpPr>
+          <p:cNvPr id="6" name="Text 3"/>
+          <p:cNvSpPr/>
+          <p:nvPr/>
+        </p:nvSpPr>
+        <p:spPr>
+          <a:xfrm>
+            <a:off x="457200" y="2651760"/>
+            <a:ext cx="8229600" cy="914400"/>
+          </a:xfrm>
+          <a:prstGeom prst="rect">
+            <a:avLst/>
+          </a:prstGeom>
+          <a:noFill/>
+          <a:ln/>
+        </p:spPr>
+        <p:txBody>
+          <a:bodyPr wrap="square" rtlCol="0" anchor="ctr"/>
+          <a:lstStyle/>
+          <a:p>
+            <a:pPr marL="0" indent="0" algn="ctr">
+              <a:buNone/>
+            </a:pPr>
+            <a:r>
+              <a:rPr lang="en-US" sz="3600" b="1" dirty="0">
+                <a:solidFill>
+                  <a:srgbClr val="F0F6FC"/>
+                </a:solidFill>
+                <a:latin typeface="Segoe UI" pitchFamily="34" charset="0"/>
+                <a:ea typeface="Segoe UI" pitchFamily="34" charset="-122"/>
+                <a:cs typeface="Segoe UI" pitchFamily="34" charset="-120"/>
+              </a:rPr>
               <a:t>GitHub SDK Demo Presentation</a:t>
             </a:r>
-          </a:p>
-        </p:txBody>
-      </p:sp>
-      <p:sp>
-        <p:nvSpPr>
-          <p:cNvPr id="3" name="Subtitle 2"/>
-          <p:cNvSpPr>
-            <a:spLocks noGrp="1"/>
-          </p:cNvSpPr>
-          <p:nvPr>
-            <p:ph type="subTitle" idx="1"/>
-          </p:nvPr>
-        </p:nvSpPr>
-        <p:spPr/>
-        <p:txBody>
-          <a:bodyPr/>
-          <a:lstStyle/>
-          <a:p>
-            <a:r>
+            <a:endParaRPr lang="en-US" sz="3600" dirty="0"/>
+          </a:p>
+        </p:txBody>
+      </p:sp>
+      <p:sp>
+        <p:nvSpPr>
+          <p:cNvPr id="7" name="Text 4"/>
+          <p:cNvSpPr/>
+          <p:nvPr/>
+        </p:nvSpPr>
+        <p:spPr>
+          <a:xfrm>
+            <a:off x="457200" y="3474720"/>
+            <a:ext cx="8229600" cy="548640"/>
+          </a:xfrm>
+          <a:prstGeom prst="rect">
+            <a:avLst/>
+          </a:prstGeom>
+          <a:noFill/>
+          <a:ln/>
+        </p:spPr>
+        <p:txBody>
+          <a:bodyPr wrap="square" rtlCol="0" anchor="ctr"/>
+          <a:lstStyle/>
+          <a:p>
+            <a:pPr marL="0" indent="0" algn="ctr">
+              <a:buNone/>
+            </a:pPr>
+            <a:r>
+              <a:rPr lang="en-US" sz="1800" dirty="0">
+                <a:solidFill>
+                  <a:srgbClr val="8B949E"/>
+                </a:solidFill>
+                <a:latin typeface="Segoe UI" pitchFamily="34" charset="0"/>
+                <a:ea typeface="Segoe UI" pitchFamily="34" charset="-122"/>
+                <a:cs typeface="Segoe UI" pitchFamily="34" charset="-120"/>
+              </a:rPr>
               <a:t>Demo Presentation</a:t>
             </a:r>
+            <a:endParaRPr lang="en-US" sz="1800" dirty="0"/>
+          </a:p>
+        </p:txBody>
+      </p:sp>
+      <p:sp>
+        <p:nvSpPr>
+          <p:cNvPr id="8" name="Shape 5"/>
+          <p:cNvSpPr/>
+          <p:nvPr/>
+        </p:nvSpPr>
+        <p:spPr>
+          <a:xfrm>
+            <a:off x="3291840" y="4389120"/>
+            <a:ext cx="2560320" cy="502920"/>
+          </a:xfrm>
+          <a:prstGeom prst="roundRect">
+            <a:avLst>
+              <a:gd name="adj" fmla="val 27273"/>
+            </a:avLst>
+          </a:prstGeom>
+          <a:solidFill>
+            <a:srgbClr val="238636"/>
+          </a:solidFill>
+          <a:ln/>
+        </p:spPr>
+        <p:txBody>
+          <a:bodyPr/>
+          <a:lstStyle/>
+          <a:p>
+            <a:endParaRPr lang="en-US"/>
+          </a:p>
+        </p:txBody>
+      </p:sp>
+      <p:sp>
+        <p:nvSpPr>
+          <p:cNvPr id="9" name="Text 6"/>
+          <p:cNvSpPr/>
+          <p:nvPr/>
+        </p:nvSpPr>
+        <p:spPr>
+          <a:xfrm>
+            <a:off x="3291840" y="4389120"/>
+            <a:ext cx="2560320" cy="502920"/>
+          </a:xfrm>
+          <a:prstGeom prst="rect">
+            <a:avLst/>
+          </a:prstGeom>
+          <a:noFill/>
+          <a:ln/>
+        </p:spPr>
+        <p:txBody>
+          <a:bodyPr wrap="square" rtlCol="0" anchor="ctr"/>
+          <a:lstStyle/>
+          <a:p>
+            <a:pPr marL="0" indent="0" algn="ctr">
+              <a:buNone/>
+            </a:pPr>
+            <a:r>
+              <a:rPr lang="en-US" sz="1400" b="1" dirty="0">
+                <a:solidFill>
+                  <a:srgbClr val="FFFFFF"/>
+                </a:solidFill>
+                <a:latin typeface="Segoe UI" pitchFamily="34" charset="0"/>
+                <a:ea typeface="Segoe UI" pitchFamily="34" charset="-122"/>
+                <a:cs typeface="Segoe UI" pitchFamily="34" charset="-120"/>
+              </a:rPr>
+              <a:t>Get Started →</a:t>
+            </a:r>
+            <a:endParaRPr lang="en-US" sz="1400" dirty="0"/>
+          </a:p>
+        </p:txBody>
+      </p:sp>
+      <p:sp>
+        <p:nvSpPr>
+          <p:cNvPr id="10" name="Shape 7"/>
+          <p:cNvSpPr/>
+          <p:nvPr/>
+        </p:nvSpPr>
+        <p:spPr>
+          <a:xfrm>
+            <a:off x="1828800" y="5669280"/>
+            <a:ext cx="54864" cy="54864"/>
+          </a:xfrm>
+          <a:prstGeom prst="ellipse">
+            <a:avLst/>
+          </a:prstGeom>
+          <a:solidFill>
+            <a:srgbClr val="21262D"/>
+          </a:solidFill>
+          <a:ln/>
+        </p:spPr>
+        <p:txBody>
+          <a:bodyPr/>
+          <a:lstStyle/>
+          <a:p>
+            <a:endParaRPr lang="en-US"/>
+          </a:p>
+        </p:txBody>
+      </p:sp>
+      <p:sp>
+        <p:nvSpPr>
+          <p:cNvPr id="11" name="Shape 8"/>
+          <p:cNvSpPr/>
+          <p:nvPr/>
+        </p:nvSpPr>
+        <p:spPr>
+          <a:xfrm>
+            <a:off x="2103120" y="5669280"/>
+            <a:ext cx="54864" cy="54864"/>
+          </a:xfrm>
+          <a:prstGeom prst="ellipse">
+            <a:avLst/>
+          </a:prstGeom>
+          <a:solidFill>
+            <a:srgbClr val="21262D"/>
+          </a:solidFill>
+          <a:ln/>
+        </p:spPr>
+        <p:txBody>
+          <a:bodyPr/>
+          <a:lstStyle/>
+          <a:p>
+            <a:endParaRPr lang="en-US"/>
+          </a:p>
+        </p:txBody>
+      </p:sp>
+      <p:sp>
+        <p:nvSpPr>
+          <p:cNvPr id="12" name="Shape 9"/>
+          <p:cNvSpPr/>
+          <p:nvPr/>
+        </p:nvSpPr>
+        <p:spPr>
+          <a:xfrm>
+            <a:off x="2377440" y="5669280"/>
+            <a:ext cx="54864" cy="54864"/>
+          </a:xfrm>
+          <a:prstGeom prst="ellipse">
+            <a:avLst/>
+          </a:prstGeom>
+          <a:solidFill>
+            <a:srgbClr val="21262D"/>
+          </a:solidFill>
+          <a:ln/>
+        </p:spPr>
+        <p:txBody>
+          <a:bodyPr/>
+          <a:lstStyle/>
+          <a:p>
+            <a:endParaRPr lang="en-US"/>
+          </a:p>
+        </p:txBody>
+      </p:sp>
+      <p:sp>
+        <p:nvSpPr>
+          <p:cNvPr id="13" name="Shape 10"/>
+          <p:cNvSpPr/>
+          <p:nvPr/>
+        </p:nvSpPr>
+        <p:spPr>
+          <a:xfrm>
+            <a:off x="2651760" y="5669280"/>
+            <a:ext cx="54864" cy="54864"/>
+          </a:xfrm>
+          <a:prstGeom prst="ellipse">
+            <a:avLst/>
+          </a:prstGeom>
+          <a:solidFill>
+            <a:srgbClr val="21262D"/>
+          </a:solidFill>
+          <a:ln/>
+        </p:spPr>
+        <p:txBody>
+          <a:bodyPr/>
+          <a:lstStyle/>
+          <a:p>
+            <a:endParaRPr lang="en-US"/>
+          </a:p>
+        </p:txBody>
+      </p:sp>
+      <p:sp>
+        <p:nvSpPr>
+          <p:cNvPr id="14" name="Shape 11"/>
+          <p:cNvSpPr/>
+          <p:nvPr/>
+        </p:nvSpPr>
+        <p:spPr>
+          <a:xfrm>
+            <a:off x="2926080" y="5669280"/>
+            <a:ext cx="54864" cy="54864"/>
+          </a:xfrm>
+          <a:prstGeom prst="ellipse">
+            <a:avLst/>
+          </a:prstGeom>
+          <a:solidFill>
+            <a:srgbClr val="21262D"/>
+          </a:solidFill>
+          <a:ln/>
+        </p:spPr>
+        <p:txBody>
+          <a:bodyPr/>
+          <a:lstStyle/>
+          <a:p>
+            <a:endParaRPr lang="en-US"/>
+          </a:p>
+        </p:txBody>
+      </p:sp>
+      <p:sp>
+        <p:nvSpPr>
+          <p:cNvPr id="15" name="Shape 12"/>
+          <p:cNvSpPr/>
+          <p:nvPr/>
+        </p:nvSpPr>
+        <p:spPr>
+          <a:xfrm>
+            <a:off x="3200400" y="5669280"/>
+            <a:ext cx="54864" cy="54864"/>
+          </a:xfrm>
+          <a:prstGeom prst="ellipse">
+            <a:avLst/>
+          </a:prstGeom>
+          <a:solidFill>
+            <a:srgbClr val="21262D"/>
+          </a:solidFill>
+          <a:ln/>
+        </p:spPr>
+        <p:txBody>
+          <a:bodyPr/>
+          <a:lstStyle/>
+          <a:p>
+            <a:endParaRPr lang="en-US"/>
+          </a:p>
+        </p:txBody>
+      </p:sp>
+      <p:sp>
+        <p:nvSpPr>
+          <p:cNvPr id="16" name="Shape 13"/>
+          <p:cNvSpPr/>
+          <p:nvPr/>
+        </p:nvSpPr>
+        <p:spPr>
+          <a:xfrm>
+            <a:off x="3474720" y="5669280"/>
+            <a:ext cx="54864" cy="54864"/>
+          </a:xfrm>
+          <a:prstGeom prst="ellipse">
+            <a:avLst/>
+          </a:prstGeom>
+          <a:solidFill>
+            <a:srgbClr val="21262D"/>
+          </a:solidFill>
+          <a:ln/>
+        </p:spPr>
+        <p:txBody>
+          <a:bodyPr/>
+          <a:lstStyle/>
+          <a:p>
+            <a:endParaRPr lang="en-US"/>
+          </a:p>
+        </p:txBody>
+      </p:sp>
+      <p:sp>
+        <p:nvSpPr>
+          <p:cNvPr id="17" name="Shape 14"/>
+          <p:cNvSpPr/>
+          <p:nvPr/>
+        </p:nvSpPr>
+        <p:spPr>
+          <a:xfrm>
+            <a:off x="3749040" y="5669280"/>
+            <a:ext cx="54864" cy="54864"/>
+          </a:xfrm>
+          <a:prstGeom prst="ellipse">
+            <a:avLst/>
+          </a:prstGeom>
+          <a:solidFill>
+            <a:srgbClr val="21262D"/>
+          </a:solidFill>
+          <a:ln/>
+        </p:spPr>
+        <p:txBody>
+          <a:bodyPr/>
+          <a:lstStyle/>
+          <a:p>
+            <a:endParaRPr lang="en-US"/>
+          </a:p>
+        </p:txBody>
+      </p:sp>
+      <p:sp>
+        <p:nvSpPr>
+          <p:cNvPr id="18" name="Shape 15"/>
+          <p:cNvSpPr/>
+          <p:nvPr/>
+        </p:nvSpPr>
+        <p:spPr>
+          <a:xfrm>
+            <a:off x="4023360" y="5669280"/>
+            <a:ext cx="54864" cy="54864"/>
+          </a:xfrm>
+          <a:prstGeom prst="ellipse">
+            <a:avLst/>
+          </a:prstGeom>
+          <a:solidFill>
+            <a:srgbClr val="21262D"/>
+          </a:solidFill>
+          <a:ln/>
+        </p:spPr>
+        <p:txBody>
+          <a:bodyPr/>
+          <a:lstStyle/>
+          <a:p>
+            <a:endParaRPr lang="en-US"/>
+          </a:p>
+        </p:txBody>
+      </p:sp>
+      <p:sp>
+        <p:nvSpPr>
+          <p:cNvPr id="19" name="Shape 16"/>
+          <p:cNvSpPr/>
+          <p:nvPr/>
+        </p:nvSpPr>
+        <p:spPr>
+          <a:xfrm>
+            <a:off x="4297680" y="5669280"/>
+            <a:ext cx="54864" cy="54864"/>
+          </a:xfrm>
+          <a:prstGeom prst="ellipse">
+            <a:avLst/>
+          </a:prstGeom>
+          <a:solidFill>
+            <a:srgbClr val="21262D"/>
+          </a:solidFill>
+          <a:ln/>
+        </p:spPr>
+        <p:txBody>
+          <a:bodyPr/>
+          <a:lstStyle/>
+          <a:p>
+            <a:endParaRPr lang="en-US"/>
+          </a:p>
+        </p:txBody>
+      </p:sp>
+      <p:sp>
+        <p:nvSpPr>
+          <p:cNvPr id="20" name="Shape 17"/>
+          <p:cNvSpPr/>
+          <p:nvPr/>
+        </p:nvSpPr>
+        <p:spPr>
+          <a:xfrm>
+            <a:off x="4572000" y="5669280"/>
+            <a:ext cx="54864" cy="54864"/>
+          </a:xfrm>
+          <a:prstGeom prst="ellipse">
+            <a:avLst/>
+          </a:prstGeom>
+          <a:solidFill>
+            <a:srgbClr val="21262D"/>
+          </a:solidFill>
+          <a:ln/>
+        </p:spPr>
+        <p:txBody>
+          <a:bodyPr/>
+          <a:lstStyle/>
+          <a:p>
+            <a:endParaRPr lang="en-US"/>
+          </a:p>
+        </p:txBody>
+      </p:sp>
+      <p:sp>
+        <p:nvSpPr>
+          <p:cNvPr id="21" name="Shape 18"/>
+          <p:cNvSpPr/>
+          <p:nvPr/>
+        </p:nvSpPr>
+        <p:spPr>
+          <a:xfrm>
+            <a:off x="4846320" y="5669280"/>
+            <a:ext cx="54864" cy="54864"/>
+          </a:xfrm>
+          <a:prstGeom prst="ellipse">
+            <a:avLst/>
+          </a:prstGeom>
+          <a:solidFill>
+            <a:srgbClr val="21262D"/>
+          </a:solidFill>
+          <a:ln/>
+        </p:spPr>
+        <p:txBody>
+          <a:bodyPr/>
+          <a:lstStyle/>
+          <a:p>
+            <a:endParaRPr lang="en-US"/>
+          </a:p>
+        </p:txBody>
+      </p:sp>
+      <p:sp>
+        <p:nvSpPr>
+          <p:cNvPr id="22" name="Shape 19"/>
+          <p:cNvSpPr/>
+          <p:nvPr/>
+        </p:nvSpPr>
+        <p:spPr>
+          <a:xfrm>
+            <a:off x="5120640" y="5669280"/>
+            <a:ext cx="54864" cy="54864"/>
+          </a:xfrm>
+          <a:prstGeom prst="ellipse">
+            <a:avLst/>
+          </a:prstGeom>
+          <a:solidFill>
+            <a:srgbClr val="21262D"/>
+          </a:solidFill>
+          <a:ln/>
+        </p:spPr>
+        <p:txBody>
+          <a:bodyPr/>
+          <a:lstStyle/>
+          <a:p>
+            <a:endParaRPr lang="en-US"/>
+          </a:p>
+        </p:txBody>
+      </p:sp>
+      <p:sp>
+        <p:nvSpPr>
+          <p:cNvPr id="23" name="Shape 20"/>
+          <p:cNvSpPr/>
+          <p:nvPr/>
+        </p:nvSpPr>
+        <p:spPr>
+          <a:xfrm>
+            <a:off x="5394960" y="5669280"/>
+            <a:ext cx="54864" cy="54864"/>
+          </a:xfrm>
+          <a:prstGeom prst="ellipse">
+            <a:avLst/>
+          </a:prstGeom>
+          <a:solidFill>
+            <a:srgbClr val="21262D"/>
+          </a:solidFill>
+          <a:ln/>
+        </p:spPr>
+        <p:txBody>
+          <a:bodyPr/>
+          <a:lstStyle/>
+          <a:p>
+            <a:endParaRPr lang="en-US"/>
+          </a:p>
+        </p:txBody>
+      </p:sp>
+      <p:sp>
+        <p:nvSpPr>
+          <p:cNvPr id="24" name="Shape 21"/>
+          <p:cNvSpPr/>
+          <p:nvPr/>
+        </p:nvSpPr>
+        <p:spPr>
+          <a:xfrm>
+            <a:off x="5669280" y="5669280"/>
+            <a:ext cx="54864" cy="54864"/>
+          </a:xfrm>
+          <a:prstGeom prst="ellipse">
+            <a:avLst/>
+          </a:prstGeom>
+          <a:solidFill>
+            <a:srgbClr val="21262D"/>
+          </a:solidFill>
+          <a:ln/>
+        </p:spPr>
+        <p:txBody>
+          <a:bodyPr/>
+          <a:lstStyle/>
+          <a:p>
+            <a:endParaRPr lang="en-US"/>
+          </a:p>
+        </p:txBody>
+      </p:sp>
+      <p:sp>
+        <p:nvSpPr>
+          <p:cNvPr id="25" name="Shape 22"/>
+          <p:cNvSpPr/>
+          <p:nvPr/>
+        </p:nvSpPr>
+        <p:spPr>
+          <a:xfrm>
+            <a:off x="5943600" y="5669280"/>
+            <a:ext cx="54864" cy="54864"/>
+          </a:xfrm>
+          <a:prstGeom prst="ellipse">
+            <a:avLst/>
+          </a:prstGeom>
+          <a:solidFill>
+            <a:srgbClr val="21262D"/>
+          </a:solidFill>
+          <a:ln/>
+        </p:spPr>
+        <p:txBody>
+          <a:bodyPr/>
+          <a:lstStyle/>
+          <a:p>
+            <a:endParaRPr lang="en-US"/>
+          </a:p>
+        </p:txBody>
+      </p:sp>
+      <p:sp>
+        <p:nvSpPr>
+          <p:cNvPr id="26" name="Shape 23"/>
+          <p:cNvSpPr/>
+          <p:nvPr/>
+        </p:nvSpPr>
+        <p:spPr>
+          <a:xfrm>
+            <a:off x="6217920" y="5669280"/>
+            <a:ext cx="54864" cy="54864"/>
+          </a:xfrm>
+          <a:prstGeom prst="ellipse">
+            <a:avLst/>
+          </a:prstGeom>
+          <a:solidFill>
+            <a:srgbClr val="21262D"/>
+          </a:solidFill>
+          <a:ln/>
+        </p:spPr>
+        <p:txBody>
+          <a:bodyPr/>
+          <a:lstStyle/>
+          <a:p>
+            <a:endParaRPr lang="en-US"/>
+          </a:p>
+        </p:txBody>
+      </p:sp>
+      <p:sp>
+        <p:nvSpPr>
+          <p:cNvPr id="27" name="Shape 24"/>
+          <p:cNvSpPr/>
+          <p:nvPr/>
+        </p:nvSpPr>
+        <p:spPr>
+          <a:xfrm>
+            <a:off x="6492240" y="5669280"/>
+            <a:ext cx="54864" cy="54864"/>
+          </a:xfrm>
+          <a:prstGeom prst="ellipse">
+            <a:avLst/>
+          </a:prstGeom>
+          <a:solidFill>
+            <a:srgbClr val="21262D"/>
+          </a:solidFill>
+          <a:ln/>
+        </p:spPr>
+        <p:txBody>
+          <a:bodyPr/>
+          <a:lstStyle/>
+          <a:p>
+            <a:endParaRPr lang="en-US"/>
+          </a:p>
+        </p:txBody>
+      </p:sp>
+      <p:sp>
+        <p:nvSpPr>
+          <p:cNvPr id="28" name="Shape 25"/>
+          <p:cNvSpPr/>
+          <p:nvPr/>
+        </p:nvSpPr>
+        <p:spPr>
+          <a:xfrm>
+            <a:off x="6766560" y="5669280"/>
+            <a:ext cx="54864" cy="54864"/>
+          </a:xfrm>
+          <a:prstGeom prst="ellipse">
+            <a:avLst/>
+          </a:prstGeom>
+          <a:solidFill>
+            <a:srgbClr val="21262D"/>
+          </a:solidFill>
+          <a:ln/>
+        </p:spPr>
+        <p:txBody>
+          <a:bodyPr/>
+          <a:lstStyle/>
+          <a:p>
+            <a:endParaRPr lang="en-US"/>
+          </a:p>
+        </p:txBody>
+      </p:sp>
+      <p:sp>
+        <p:nvSpPr>
+          <p:cNvPr id="29" name="Shape 26"/>
+          <p:cNvSpPr/>
+          <p:nvPr/>
+        </p:nvSpPr>
+        <p:spPr>
+          <a:xfrm>
+            <a:off x="7040880" y="5669280"/>
+            <a:ext cx="54864" cy="54864"/>
+          </a:xfrm>
+          <a:prstGeom prst="ellipse">
+            <a:avLst/>
+          </a:prstGeom>
+          <a:solidFill>
+            <a:srgbClr val="21262D"/>
+          </a:solidFill>
+          <a:ln/>
+        </p:spPr>
+        <p:txBody>
+          <a:bodyPr/>
+          <a:lstStyle/>
+          <a:p>
+            <a:endParaRPr lang="en-US"/>
+          </a:p>
+        </p:txBody>
+      </p:sp>
+      <p:sp>
+        <p:nvSpPr>
+          <p:cNvPr id="30" name="Shape 27"/>
+          <p:cNvSpPr/>
+          <p:nvPr/>
+        </p:nvSpPr>
+        <p:spPr>
+          <a:xfrm>
+            <a:off x="1828800" y="5897880"/>
+            <a:ext cx="54864" cy="54864"/>
+          </a:xfrm>
+          <a:prstGeom prst="ellipse">
+            <a:avLst/>
+          </a:prstGeom>
+          <a:solidFill>
+            <a:srgbClr val="21262D"/>
+          </a:solidFill>
+          <a:ln/>
+        </p:spPr>
+        <p:txBody>
+          <a:bodyPr/>
+          <a:lstStyle/>
+          <a:p>
+            <a:endParaRPr lang="en-US"/>
+          </a:p>
+        </p:txBody>
+      </p:sp>
+      <p:sp>
+        <p:nvSpPr>
+          <p:cNvPr id="31" name="Shape 28"/>
+          <p:cNvSpPr/>
+          <p:nvPr/>
+        </p:nvSpPr>
+        <p:spPr>
+          <a:xfrm>
+            <a:off x="2103120" y="5897880"/>
+            <a:ext cx="54864" cy="54864"/>
+          </a:xfrm>
+          <a:prstGeom prst="ellipse">
+            <a:avLst/>
+          </a:prstGeom>
+          <a:solidFill>
+            <a:srgbClr val="21262D"/>
+          </a:solidFill>
+          <a:ln/>
+        </p:spPr>
+        <p:txBody>
+          <a:bodyPr/>
+          <a:lstStyle/>
+          <a:p>
+            <a:endParaRPr lang="en-US"/>
+          </a:p>
+        </p:txBody>
+      </p:sp>
+      <p:sp>
+        <p:nvSpPr>
+          <p:cNvPr id="32" name="Shape 29"/>
+          <p:cNvSpPr/>
+          <p:nvPr/>
+        </p:nvSpPr>
+        <p:spPr>
+          <a:xfrm>
+            <a:off x="2377440" y="5897880"/>
+            <a:ext cx="54864" cy="54864"/>
+          </a:xfrm>
+          <a:prstGeom prst="ellipse">
+            <a:avLst/>
+          </a:prstGeom>
+          <a:solidFill>
+            <a:srgbClr val="21262D"/>
+          </a:solidFill>
+          <a:ln/>
+        </p:spPr>
+        <p:txBody>
+          <a:bodyPr/>
+          <a:lstStyle/>
+          <a:p>
+            <a:endParaRPr lang="en-US"/>
+          </a:p>
+        </p:txBody>
+      </p:sp>
+      <p:sp>
+        <p:nvSpPr>
+          <p:cNvPr id="33" name="Shape 30"/>
+          <p:cNvSpPr/>
+          <p:nvPr/>
+        </p:nvSpPr>
+        <p:spPr>
+          <a:xfrm>
+            <a:off x="2651760" y="5897880"/>
+            <a:ext cx="54864" cy="54864"/>
+          </a:xfrm>
+          <a:prstGeom prst="ellipse">
+            <a:avLst/>
+          </a:prstGeom>
+          <a:solidFill>
+            <a:srgbClr val="21262D"/>
+          </a:solidFill>
+          <a:ln/>
+        </p:spPr>
+        <p:txBody>
+          <a:bodyPr/>
+          <a:lstStyle/>
+          <a:p>
+            <a:endParaRPr lang="en-US"/>
+          </a:p>
+        </p:txBody>
+      </p:sp>
+      <p:sp>
+        <p:nvSpPr>
+          <p:cNvPr id="34" name="Shape 31"/>
+          <p:cNvSpPr/>
+          <p:nvPr/>
+        </p:nvSpPr>
+        <p:spPr>
+          <a:xfrm>
+            <a:off x="2926080" y="5897880"/>
+            <a:ext cx="54864" cy="54864"/>
+          </a:xfrm>
+          <a:prstGeom prst="ellipse">
+            <a:avLst/>
+          </a:prstGeom>
+          <a:solidFill>
+            <a:srgbClr val="21262D"/>
+          </a:solidFill>
+          <a:ln/>
+        </p:spPr>
+        <p:txBody>
+          <a:bodyPr/>
+          <a:lstStyle/>
+          <a:p>
+            <a:endParaRPr lang="en-US"/>
+          </a:p>
+        </p:txBody>
+      </p:sp>
+      <p:sp>
+        <p:nvSpPr>
+          <p:cNvPr id="35" name="Shape 32"/>
+          <p:cNvSpPr/>
+          <p:nvPr/>
+        </p:nvSpPr>
+        <p:spPr>
+          <a:xfrm>
+            <a:off x="3200400" y="5897880"/>
+            <a:ext cx="54864" cy="54864"/>
+          </a:xfrm>
+          <a:prstGeom prst="ellipse">
+            <a:avLst/>
+          </a:prstGeom>
+          <a:solidFill>
+            <a:srgbClr val="21262D"/>
+          </a:solidFill>
+          <a:ln/>
+        </p:spPr>
+        <p:txBody>
+          <a:bodyPr/>
+          <a:lstStyle/>
+          <a:p>
+            <a:endParaRPr lang="en-US"/>
+          </a:p>
+        </p:txBody>
+      </p:sp>
+      <p:sp>
+        <p:nvSpPr>
+          <p:cNvPr id="36" name="Shape 33"/>
+          <p:cNvSpPr/>
+          <p:nvPr/>
+        </p:nvSpPr>
+        <p:spPr>
+          <a:xfrm>
+            <a:off x="3474720" y="5897880"/>
+            <a:ext cx="54864" cy="54864"/>
+          </a:xfrm>
+          <a:prstGeom prst="ellipse">
+            <a:avLst/>
+          </a:prstGeom>
+          <a:solidFill>
+            <a:srgbClr val="21262D"/>
+          </a:solidFill>
+          <a:ln/>
+        </p:spPr>
+        <p:txBody>
+          <a:bodyPr/>
+          <a:lstStyle/>
+          <a:p>
+            <a:endParaRPr lang="en-US"/>
+          </a:p>
+        </p:txBody>
+      </p:sp>
+      <p:sp>
+        <p:nvSpPr>
+          <p:cNvPr id="37" name="Shape 34"/>
+          <p:cNvSpPr/>
+          <p:nvPr/>
+        </p:nvSpPr>
+        <p:spPr>
+          <a:xfrm>
+            <a:off x="3749040" y="5897880"/>
+            <a:ext cx="54864" cy="54864"/>
+          </a:xfrm>
+          <a:prstGeom prst="ellipse">
+            <a:avLst/>
+          </a:prstGeom>
+          <a:solidFill>
+            <a:srgbClr val="21262D"/>
+          </a:solidFill>
+          <a:ln/>
+        </p:spPr>
+        <p:txBody>
+          <a:bodyPr/>
+          <a:lstStyle/>
+          <a:p>
+            <a:endParaRPr lang="en-US"/>
+          </a:p>
+        </p:txBody>
+      </p:sp>
+      <p:sp>
+        <p:nvSpPr>
+          <p:cNvPr id="38" name="Shape 35"/>
+          <p:cNvSpPr/>
+          <p:nvPr/>
+        </p:nvSpPr>
+        <p:spPr>
+          <a:xfrm>
+            <a:off x="4023360" y="5897880"/>
+            <a:ext cx="54864" cy="54864"/>
+          </a:xfrm>
+          <a:prstGeom prst="ellipse">
+            <a:avLst/>
+          </a:prstGeom>
+          <a:solidFill>
+            <a:srgbClr val="21262D"/>
+          </a:solidFill>
+          <a:ln/>
+        </p:spPr>
+        <p:txBody>
+          <a:bodyPr/>
+          <a:lstStyle/>
+          <a:p>
+            <a:endParaRPr lang="en-US"/>
+          </a:p>
+        </p:txBody>
+      </p:sp>
+      <p:sp>
+        <p:nvSpPr>
+          <p:cNvPr id="39" name="Shape 36"/>
+          <p:cNvSpPr/>
+          <p:nvPr/>
+        </p:nvSpPr>
+        <p:spPr>
+          <a:xfrm>
+            <a:off x="4297680" y="5897880"/>
+            <a:ext cx="54864" cy="54864"/>
+          </a:xfrm>
+          <a:prstGeom prst="ellipse">
+            <a:avLst/>
+          </a:prstGeom>
+          <a:solidFill>
+            <a:srgbClr val="21262D"/>
+          </a:solidFill>
+          <a:ln/>
+        </p:spPr>
+        <p:txBody>
+          <a:bodyPr/>
+          <a:lstStyle/>
+          <a:p>
+            <a:endParaRPr lang="en-US"/>
+          </a:p>
+        </p:txBody>
+      </p:sp>
+      <p:sp>
+        <p:nvSpPr>
+          <p:cNvPr id="40" name="Shape 37"/>
+          <p:cNvSpPr/>
+          <p:nvPr/>
+        </p:nvSpPr>
+        <p:spPr>
+          <a:xfrm>
+            <a:off x="4572000" y="5897880"/>
+            <a:ext cx="54864" cy="54864"/>
+          </a:xfrm>
+          <a:prstGeom prst="ellipse">
+            <a:avLst/>
+          </a:prstGeom>
+          <a:solidFill>
+            <a:srgbClr val="21262D"/>
+          </a:solidFill>
+          <a:ln/>
+        </p:spPr>
+        <p:txBody>
+          <a:bodyPr/>
+          <a:lstStyle/>
+          <a:p>
+            <a:endParaRPr lang="en-US"/>
+          </a:p>
+        </p:txBody>
+      </p:sp>
+      <p:sp>
+        <p:nvSpPr>
+          <p:cNvPr id="41" name="Shape 38"/>
+          <p:cNvSpPr/>
+          <p:nvPr/>
+        </p:nvSpPr>
+        <p:spPr>
+          <a:xfrm>
+            <a:off x="4846320" y="5897880"/>
+            <a:ext cx="54864" cy="54864"/>
+          </a:xfrm>
+          <a:prstGeom prst="ellipse">
+            <a:avLst/>
+          </a:prstGeom>
+          <a:solidFill>
+            <a:srgbClr val="21262D"/>
+          </a:solidFill>
+          <a:ln/>
+        </p:spPr>
+        <p:txBody>
+          <a:bodyPr/>
+          <a:lstStyle/>
+          <a:p>
+            <a:endParaRPr lang="en-US"/>
+          </a:p>
+        </p:txBody>
+      </p:sp>
+      <p:sp>
+        <p:nvSpPr>
+          <p:cNvPr id="42" name="Shape 39"/>
+          <p:cNvSpPr/>
+          <p:nvPr/>
+        </p:nvSpPr>
+        <p:spPr>
+          <a:xfrm>
+            <a:off x="5120640" y="5897880"/>
+            <a:ext cx="54864" cy="54864"/>
+          </a:xfrm>
+          <a:prstGeom prst="ellipse">
+            <a:avLst/>
+          </a:prstGeom>
+          <a:solidFill>
+            <a:srgbClr val="21262D"/>
+          </a:solidFill>
+          <a:ln/>
+        </p:spPr>
+        <p:txBody>
+          <a:bodyPr/>
+          <a:lstStyle/>
+          <a:p>
+            <a:endParaRPr lang="en-US"/>
+          </a:p>
+        </p:txBody>
+      </p:sp>
+      <p:sp>
+        <p:nvSpPr>
+          <p:cNvPr id="43" name="Shape 40"/>
+          <p:cNvSpPr/>
+          <p:nvPr/>
+        </p:nvSpPr>
+        <p:spPr>
+          <a:xfrm>
+            <a:off x="5394960" y="5897880"/>
+            <a:ext cx="54864" cy="54864"/>
+          </a:xfrm>
+          <a:prstGeom prst="ellipse">
+            <a:avLst/>
+          </a:prstGeom>
+          <a:solidFill>
+            <a:srgbClr val="21262D"/>
+          </a:solidFill>
+          <a:ln/>
+        </p:spPr>
+        <p:txBody>
+          <a:bodyPr/>
+          <a:lstStyle/>
+          <a:p>
+            <a:endParaRPr lang="en-US"/>
+          </a:p>
+        </p:txBody>
+      </p:sp>
+      <p:sp>
+        <p:nvSpPr>
+          <p:cNvPr id="44" name="Shape 41"/>
+          <p:cNvSpPr/>
+          <p:nvPr/>
+        </p:nvSpPr>
+        <p:spPr>
+          <a:xfrm>
+            <a:off x="5669280" y="5897880"/>
+            <a:ext cx="54864" cy="54864"/>
+          </a:xfrm>
+          <a:prstGeom prst="ellipse">
+            <a:avLst/>
+          </a:prstGeom>
+          <a:solidFill>
+            <a:srgbClr val="21262D"/>
+          </a:solidFill>
+          <a:ln/>
+        </p:spPr>
+        <p:txBody>
+          <a:bodyPr/>
+          <a:lstStyle/>
+          <a:p>
+            <a:endParaRPr lang="en-US"/>
+          </a:p>
+        </p:txBody>
+      </p:sp>
+      <p:sp>
+        <p:nvSpPr>
+          <p:cNvPr id="45" name="Shape 42"/>
+          <p:cNvSpPr/>
+          <p:nvPr/>
+        </p:nvSpPr>
+        <p:spPr>
+          <a:xfrm>
+            <a:off x="5943600" y="5897880"/>
+            <a:ext cx="54864" cy="54864"/>
+          </a:xfrm>
+          <a:prstGeom prst="ellipse">
+            <a:avLst/>
+          </a:prstGeom>
+          <a:solidFill>
+            <a:srgbClr val="21262D"/>
+          </a:solidFill>
+          <a:ln/>
+        </p:spPr>
+        <p:txBody>
+          <a:bodyPr/>
+          <a:lstStyle/>
+          <a:p>
+            <a:endParaRPr lang="en-US"/>
+          </a:p>
+        </p:txBody>
+      </p:sp>
+      <p:sp>
+        <p:nvSpPr>
+          <p:cNvPr id="46" name="Shape 43"/>
+          <p:cNvSpPr/>
+          <p:nvPr/>
+        </p:nvSpPr>
+        <p:spPr>
+          <a:xfrm>
+            <a:off x="6217920" y="5897880"/>
+            <a:ext cx="54864" cy="54864"/>
+          </a:xfrm>
+          <a:prstGeom prst="ellipse">
+            <a:avLst/>
+          </a:prstGeom>
+          <a:solidFill>
+            <a:srgbClr val="21262D"/>
+          </a:solidFill>
+          <a:ln/>
+        </p:spPr>
+        <p:txBody>
+          <a:bodyPr/>
+          <a:lstStyle/>
+          <a:p>
+            <a:endParaRPr lang="en-US"/>
+          </a:p>
+        </p:txBody>
+      </p:sp>
+      <p:sp>
+        <p:nvSpPr>
+          <p:cNvPr id="47" name="Shape 44"/>
+          <p:cNvSpPr/>
+          <p:nvPr/>
+        </p:nvSpPr>
+        <p:spPr>
+          <a:xfrm>
+            <a:off x="6492240" y="5897880"/>
+            <a:ext cx="54864" cy="54864"/>
+          </a:xfrm>
+          <a:prstGeom prst="ellipse">
+            <a:avLst/>
+          </a:prstGeom>
+          <a:solidFill>
+            <a:srgbClr val="21262D"/>
+          </a:solidFill>
+          <a:ln/>
+        </p:spPr>
+        <p:txBody>
+          <a:bodyPr/>
+          <a:lstStyle/>
+          <a:p>
+            <a:endParaRPr lang="en-US"/>
+          </a:p>
+        </p:txBody>
+      </p:sp>
+      <p:sp>
+        <p:nvSpPr>
+          <p:cNvPr id="48" name="Shape 45"/>
+          <p:cNvSpPr/>
+          <p:nvPr/>
+        </p:nvSpPr>
+        <p:spPr>
+          <a:xfrm>
+            <a:off x="6766560" y="5897880"/>
+            <a:ext cx="54864" cy="54864"/>
+          </a:xfrm>
+          <a:prstGeom prst="ellipse">
+            <a:avLst/>
+          </a:prstGeom>
+          <a:solidFill>
+            <a:srgbClr val="21262D"/>
+          </a:solidFill>
+          <a:ln/>
+        </p:spPr>
+        <p:txBody>
+          <a:bodyPr/>
+          <a:lstStyle/>
+          <a:p>
+            <a:endParaRPr lang="en-US"/>
+          </a:p>
+        </p:txBody>
+      </p:sp>
+      <p:sp>
+        <p:nvSpPr>
+          <p:cNvPr id="49" name="Shape 46"/>
+          <p:cNvSpPr/>
+          <p:nvPr/>
+        </p:nvSpPr>
+        <p:spPr>
+          <a:xfrm>
+            <a:off x="7040880" y="5897880"/>
+            <a:ext cx="54864" cy="54864"/>
+          </a:xfrm>
+          <a:prstGeom prst="ellipse">
+            <a:avLst/>
+          </a:prstGeom>
+          <a:solidFill>
+            <a:srgbClr val="21262D"/>
+          </a:solidFill>
+          <a:ln/>
+        </p:spPr>
+        <p:txBody>
+          <a:bodyPr/>
+          <a:lstStyle/>
+          <a:p>
+            <a:endParaRPr lang="en-US"/>
+          </a:p>
+        </p:txBody>
+      </p:sp>
+      <p:sp>
+        <p:nvSpPr>
+          <p:cNvPr id="50" name="Shape 47"/>
+          <p:cNvSpPr/>
+          <p:nvPr/>
+        </p:nvSpPr>
+        <p:spPr>
+          <a:xfrm>
+            <a:off x="1828800" y="6126480"/>
+            <a:ext cx="54864" cy="54864"/>
+          </a:xfrm>
+          <a:prstGeom prst="ellipse">
+            <a:avLst/>
+          </a:prstGeom>
+          <a:solidFill>
+            <a:srgbClr val="21262D"/>
+          </a:solidFill>
+          <a:ln/>
+        </p:spPr>
+        <p:txBody>
+          <a:bodyPr/>
+          <a:lstStyle/>
+          <a:p>
+            <a:endParaRPr lang="en-US"/>
+          </a:p>
+        </p:txBody>
+      </p:sp>
+      <p:sp>
+        <p:nvSpPr>
+          <p:cNvPr id="51" name="Shape 48"/>
+          <p:cNvSpPr/>
+          <p:nvPr/>
+        </p:nvSpPr>
+        <p:spPr>
+          <a:xfrm>
+            <a:off x="2103120" y="6126480"/>
+            <a:ext cx="54864" cy="54864"/>
+          </a:xfrm>
+          <a:prstGeom prst="ellipse">
+            <a:avLst/>
+          </a:prstGeom>
+          <a:solidFill>
+            <a:srgbClr val="21262D"/>
+          </a:solidFill>
+          <a:ln/>
+        </p:spPr>
+        <p:txBody>
+          <a:bodyPr/>
+          <a:lstStyle/>
+          <a:p>
+            <a:endParaRPr lang="en-US"/>
+          </a:p>
+        </p:txBody>
+      </p:sp>
+      <p:sp>
+        <p:nvSpPr>
+          <p:cNvPr id="52" name="Shape 49"/>
+          <p:cNvSpPr/>
+          <p:nvPr/>
+        </p:nvSpPr>
+        <p:spPr>
+          <a:xfrm>
+            <a:off x="2377440" y="6126480"/>
+            <a:ext cx="54864" cy="54864"/>
+          </a:xfrm>
+          <a:prstGeom prst="ellipse">
+            <a:avLst/>
+          </a:prstGeom>
+          <a:solidFill>
+            <a:srgbClr val="21262D"/>
+          </a:solidFill>
+          <a:ln/>
+        </p:spPr>
+        <p:txBody>
+          <a:bodyPr/>
+          <a:lstStyle/>
+          <a:p>
+            <a:endParaRPr lang="en-US"/>
+          </a:p>
+        </p:txBody>
+      </p:sp>
+      <p:sp>
+        <p:nvSpPr>
+          <p:cNvPr id="53" name="Shape 50"/>
+          <p:cNvSpPr/>
+          <p:nvPr/>
+        </p:nvSpPr>
+        <p:spPr>
+          <a:xfrm>
+            <a:off x="2651760" y="6126480"/>
+            <a:ext cx="54864" cy="54864"/>
+          </a:xfrm>
+          <a:prstGeom prst="ellipse">
+            <a:avLst/>
+          </a:prstGeom>
+          <a:solidFill>
+            <a:srgbClr val="21262D"/>
+          </a:solidFill>
+          <a:ln/>
+        </p:spPr>
+        <p:txBody>
+          <a:bodyPr/>
+          <a:lstStyle/>
+          <a:p>
+            <a:endParaRPr lang="en-US"/>
+          </a:p>
+        </p:txBody>
+      </p:sp>
+      <p:sp>
+        <p:nvSpPr>
+          <p:cNvPr id="54" name="Shape 51"/>
+          <p:cNvSpPr/>
+          <p:nvPr/>
+        </p:nvSpPr>
+        <p:spPr>
+          <a:xfrm>
+            <a:off x="2926080" y="6126480"/>
+            <a:ext cx="54864" cy="54864"/>
+          </a:xfrm>
+          <a:prstGeom prst="ellipse">
+            <a:avLst/>
+          </a:prstGeom>
+          <a:solidFill>
+            <a:srgbClr val="21262D"/>
+          </a:solidFill>
+          <a:ln/>
+        </p:spPr>
+        <p:txBody>
+          <a:bodyPr/>
+          <a:lstStyle/>
+          <a:p>
+            <a:endParaRPr lang="en-US"/>
+          </a:p>
+        </p:txBody>
+      </p:sp>
+      <p:sp>
+        <p:nvSpPr>
+          <p:cNvPr id="55" name="Shape 52"/>
+          <p:cNvSpPr/>
+          <p:nvPr/>
+        </p:nvSpPr>
+        <p:spPr>
+          <a:xfrm>
+            <a:off x="3200400" y="6126480"/>
+            <a:ext cx="54864" cy="54864"/>
+          </a:xfrm>
+          <a:prstGeom prst="ellipse">
+            <a:avLst/>
+          </a:prstGeom>
+          <a:solidFill>
+            <a:srgbClr val="21262D"/>
+          </a:solidFill>
+          <a:ln/>
+        </p:spPr>
+        <p:txBody>
+          <a:bodyPr/>
+          <a:lstStyle/>
+          <a:p>
+            <a:endParaRPr lang="en-US"/>
+          </a:p>
+        </p:txBody>
+      </p:sp>
+      <p:sp>
+        <p:nvSpPr>
+          <p:cNvPr id="56" name="Shape 53"/>
+          <p:cNvSpPr/>
+          <p:nvPr/>
+        </p:nvSpPr>
+        <p:spPr>
+          <a:xfrm>
+            <a:off x="3474720" y="6126480"/>
+            <a:ext cx="54864" cy="54864"/>
+          </a:xfrm>
+          <a:prstGeom prst="ellipse">
+            <a:avLst/>
+          </a:prstGeom>
+          <a:solidFill>
+            <a:srgbClr val="21262D"/>
+          </a:solidFill>
+          <a:ln/>
+        </p:spPr>
+        <p:txBody>
+          <a:bodyPr/>
+          <a:lstStyle/>
+          <a:p>
+            <a:endParaRPr lang="en-US"/>
+          </a:p>
+        </p:txBody>
+      </p:sp>
+      <p:sp>
+        <p:nvSpPr>
+          <p:cNvPr id="57" name="Shape 54"/>
+          <p:cNvSpPr/>
+          <p:nvPr/>
+        </p:nvSpPr>
+        <p:spPr>
+          <a:xfrm>
+            <a:off x="3749040" y="6126480"/>
+            <a:ext cx="54864" cy="54864"/>
+          </a:xfrm>
+          <a:prstGeom prst="ellipse">
+            <a:avLst/>
+          </a:prstGeom>
+          <a:solidFill>
+            <a:srgbClr val="21262D"/>
+          </a:solidFill>
+          <a:ln/>
+        </p:spPr>
+        <p:txBody>
+          <a:bodyPr/>
+          <a:lstStyle/>
+          <a:p>
+            <a:endParaRPr lang="en-US"/>
+          </a:p>
+        </p:txBody>
+      </p:sp>
+      <p:sp>
+        <p:nvSpPr>
+          <p:cNvPr id="58" name="Shape 55"/>
+          <p:cNvSpPr/>
+          <p:nvPr/>
+        </p:nvSpPr>
+        <p:spPr>
+          <a:xfrm>
+            <a:off x="4023360" y="6126480"/>
+            <a:ext cx="54864" cy="54864"/>
+          </a:xfrm>
+          <a:prstGeom prst="ellipse">
+            <a:avLst/>
+          </a:prstGeom>
+          <a:solidFill>
+            <a:srgbClr val="21262D"/>
+          </a:solidFill>
+          <a:ln/>
+        </p:spPr>
+        <p:txBody>
+          <a:bodyPr/>
+          <a:lstStyle/>
+          <a:p>
+            <a:endParaRPr lang="en-US"/>
+          </a:p>
+        </p:txBody>
+      </p:sp>
+      <p:sp>
+        <p:nvSpPr>
+          <p:cNvPr id="59" name="Shape 56"/>
+          <p:cNvSpPr/>
+          <p:nvPr/>
+        </p:nvSpPr>
+        <p:spPr>
+          <a:xfrm>
+            <a:off x="4297680" y="6126480"/>
+            <a:ext cx="54864" cy="54864"/>
+          </a:xfrm>
+          <a:prstGeom prst="ellipse">
+            <a:avLst/>
+          </a:prstGeom>
+          <a:solidFill>
+            <a:srgbClr val="21262D"/>
+          </a:solidFill>
+          <a:ln/>
+        </p:spPr>
+        <p:txBody>
+          <a:bodyPr/>
+          <a:lstStyle/>
+          <a:p>
+            <a:endParaRPr lang="en-US"/>
+          </a:p>
+        </p:txBody>
+      </p:sp>
+      <p:sp>
+        <p:nvSpPr>
+          <p:cNvPr id="60" name="Shape 57"/>
+          <p:cNvSpPr/>
+          <p:nvPr/>
+        </p:nvSpPr>
+        <p:spPr>
+          <a:xfrm>
+            <a:off x="4572000" y="6126480"/>
+            <a:ext cx="54864" cy="54864"/>
+          </a:xfrm>
+          <a:prstGeom prst="ellipse">
+            <a:avLst/>
+          </a:prstGeom>
+          <a:solidFill>
+            <a:srgbClr val="21262D"/>
+          </a:solidFill>
+          <a:ln/>
+        </p:spPr>
+        <p:txBody>
+          <a:bodyPr/>
+          <a:lstStyle/>
+          <a:p>
+            <a:endParaRPr lang="en-US"/>
+          </a:p>
+        </p:txBody>
+      </p:sp>
+      <p:sp>
+        <p:nvSpPr>
+          <p:cNvPr id="61" name="Shape 58"/>
+          <p:cNvSpPr/>
+          <p:nvPr/>
+        </p:nvSpPr>
+        <p:spPr>
+          <a:xfrm>
+            <a:off x="4846320" y="6126480"/>
+            <a:ext cx="54864" cy="54864"/>
+          </a:xfrm>
+          <a:prstGeom prst="ellipse">
+            <a:avLst/>
+          </a:prstGeom>
+          <a:solidFill>
+            <a:srgbClr val="21262D"/>
+          </a:solidFill>
+          <a:ln/>
+        </p:spPr>
+        <p:txBody>
+          <a:bodyPr/>
+          <a:lstStyle/>
+          <a:p>
+            <a:endParaRPr lang="en-US"/>
+          </a:p>
+        </p:txBody>
+      </p:sp>
+      <p:sp>
+        <p:nvSpPr>
+          <p:cNvPr id="62" name="Shape 59"/>
+          <p:cNvSpPr/>
+          <p:nvPr/>
+        </p:nvSpPr>
+        <p:spPr>
+          <a:xfrm>
+            <a:off x="5120640" y="6126480"/>
+            <a:ext cx="54864" cy="54864"/>
+          </a:xfrm>
+          <a:prstGeom prst="ellipse">
+            <a:avLst/>
+          </a:prstGeom>
+          <a:solidFill>
+            <a:srgbClr val="21262D"/>
+          </a:solidFill>
+          <a:ln/>
+        </p:spPr>
+        <p:txBody>
+          <a:bodyPr/>
+          <a:lstStyle/>
+          <a:p>
+            <a:endParaRPr lang="en-US"/>
+          </a:p>
+        </p:txBody>
+      </p:sp>
+      <p:sp>
+        <p:nvSpPr>
+          <p:cNvPr id="63" name="Shape 60"/>
+          <p:cNvSpPr/>
+          <p:nvPr/>
+        </p:nvSpPr>
+        <p:spPr>
+          <a:xfrm>
+            <a:off x="5394960" y="6126480"/>
+            <a:ext cx="54864" cy="54864"/>
+          </a:xfrm>
+          <a:prstGeom prst="ellipse">
+            <a:avLst/>
+          </a:prstGeom>
+          <a:solidFill>
+            <a:srgbClr val="21262D"/>
+          </a:solidFill>
+          <a:ln/>
+        </p:spPr>
+        <p:txBody>
+          <a:bodyPr/>
+          <a:lstStyle/>
+          <a:p>
+            <a:endParaRPr lang="en-US"/>
+          </a:p>
+        </p:txBody>
+      </p:sp>
+      <p:sp>
+        <p:nvSpPr>
+          <p:cNvPr id="64" name="Shape 61"/>
+          <p:cNvSpPr/>
+          <p:nvPr/>
+        </p:nvSpPr>
+        <p:spPr>
+          <a:xfrm>
+            <a:off x="5669280" y="6126480"/>
+            <a:ext cx="54864" cy="54864"/>
+          </a:xfrm>
+          <a:prstGeom prst="ellipse">
+            <a:avLst/>
+          </a:prstGeom>
+          <a:solidFill>
+            <a:srgbClr val="21262D"/>
+          </a:solidFill>
+          <a:ln/>
+        </p:spPr>
+        <p:txBody>
+          <a:bodyPr/>
+          <a:lstStyle/>
+          <a:p>
+            <a:endParaRPr lang="en-US"/>
+          </a:p>
+        </p:txBody>
+      </p:sp>
+      <p:sp>
+        <p:nvSpPr>
+          <p:cNvPr id="65" name="Shape 62"/>
+          <p:cNvSpPr/>
+          <p:nvPr/>
+        </p:nvSpPr>
+        <p:spPr>
+          <a:xfrm>
+            <a:off x="5943600" y="6126480"/>
+            <a:ext cx="54864" cy="54864"/>
+          </a:xfrm>
+          <a:prstGeom prst="ellipse">
+            <a:avLst/>
+          </a:prstGeom>
+          <a:solidFill>
+            <a:srgbClr val="21262D"/>
+          </a:solidFill>
+          <a:ln/>
+        </p:spPr>
+        <p:txBody>
+          <a:bodyPr/>
+          <a:lstStyle/>
+          <a:p>
+            <a:endParaRPr lang="en-US"/>
+          </a:p>
+        </p:txBody>
+      </p:sp>
+      <p:sp>
+        <p:nvSpPr>
+          <p:cNvPr id="66" name="Shape 63"/>
+          <p:cNvSpPr/>
+          <p:nvPr/>
+        </p:nvSpPr>
+        <p:spPr>
+          <a:xfrm>
+            <a:off x="6217920" y="6126480"/>
+            <a:ext cx="54864" cy="54864"/>
+          </a:xfrm>
+          <a:prstGeom prst="ellipse">
+            <a:avLst/>
+          </a:prstGeom>
+          <a:solidFill>
+            <a:srgbClr val="21262D"/>
+          </a:solidFill>
+          <a:ln/>
+        </p:spPr>
+        <p:txBody>
+          <a:bodyPr/>
+          <a:lstStyle/>
+          <a:p>
+            <a:endParaRPr lang="en-US"/>
+          </a:p>
+        </p:txBody>
+      </p:sp>
+      <p:sp>
+        <p:nvSpPr>
+          <p:cNvPr id="67" name="Shape 64"/>
+          <p:cNvSpPr/>
+          <p:nvPr/>
+        </p:nvSpPr>
+        <p:spPr>
+          <a:xfrm>
+            <a:off x="6492240" y="6126480"/>
+            <a:ext cx="54864" cy="54864"/>
+          </a:xfrm>
+          <a:prstGeom prst="ellipse">
+            <a:avLst/>
+          </a:prstGeom>
+          <a:solidFill>
+            <a:srgbClr val="21262D"/>
+          </a:solidFill>
+          <a:ln/>
+        </p:spPr>
+        <p:txBody>
+          <a:bodyPr/>
+          <a:lstStyle/>
+          <a:p>
+            <a:endParaRPr lang="en-US"/>
+          </a:p>
+        </p:txBody>
+      </p:sp>
+      <p:sp>
+        <p:nvSpPr>
+          <p:cNvPr id="68" name="Shape 65"/>
+          <p:cNvSpPr/>
+          <p:nvPr/>
+        </p:nvSpPr>
+        <p:spPr>
+          <a:xfrm>
+            <a:off x="6766560" y="6126480"/>
+            <a:ext cx="54864" cy="54864"/>
+          </a:xfrm>
+          <a:prstGeom prst="ellipse">
+            <a:avLst/>
+          </a:prstGeom>
+          <a:solidFill>
+            <a:srgbClr val="21262D"/>
+          </a:solidFill>
+          <a:ln/>
+        </p:spPr>
+        <p:txBody>
+          <a:bodyPr/>
+          <a:lstStyle/>
+          <a:p>
+            <a:endParaRPr lang="en-US"/>
+          </a:p>
+        </p:txBody>
+      </p:sp>
+      <p:sp>
+        <p:nvSpPr>
+          <p:cNvPr id="69" name="Shape 66"/>
+          <p:cNvSpPr/>
+          <p:nvPr/>
+        </p:nvSpPr>
+        <p:spPr>
+          <a:xfrm>
+            <a:off x="7040880" y="6126480"/>
+            <a:ext cx="54864" cy="54864"/>
+          </a:xfrm>
+          <a:prstGeom prst="ellipse">
+            <a:avLst/>
+          </a:prstGeom>
+          <a:solidFill>
+            <a:srgbClr val="21262D"/>
+          </a:solidFill>
+          <a:ln/>
+        </p:spPr>
+        <p:txBody>
+          <a:bodyPr/>
+          <a:lstStyle/>
+          <a:p>
+            <a:endParaRPr lang="en-US"/>
+          </a:p>
+        </p:txBody>
+      </p:sp>
+      <p:sp>
+        <p:nvSpPr>
+          <p:cNvPr id="70" name="Text 67"/>
+          <p:cNvSpPr/>
+          <p:nvPr/>
+        </p:nvSpPr>
+        <p:spPr>
+          <a:xfrm>
+            <a:off x="457200" y="6217920"/>
+            <a:ext cx="1828800" cy="365760"/>
+          </a:xfrm>
+          <a:prstGeom prst="rect">
+            <a:avLst/>
+          </a:prstGeom>
+          <a:noFill/>
+          <a:ln/>
+        </p:spPr>
+        <p:txBody>
+          <a:bodyPr wrap="square" rtlCol="0" anchor="ctr"/>
+          <a:lstStyle/>
+          <a:p>
+            <a:pPr marL="0" indent="0">
+              <a:buNone/>
+            </a:pPr>
+            <a:r>
+              <a:rPr lang="en-US" sz="1400" b="1" dirty="0">
+                <a:solidFill>
+                  <a:srgbClr val="484F58"/>
+                </a:solidFill>
+                <a:latin typeface="Segoe UI" pitchFamily="34" charset="0"/>
+                <a:ea typeface="Segoe UI" pitchFamily="34" charset="-122"/>
+                <a:cs typeface="Segoe UI" pitchFamily="34" charset="-120"/>
+              </a:rPr>
+              <a:t>GitHub</a:t>
+            </a:r>
+            <a:endParaRPr lang="en-US" sz="1400" dirty="0"/>
+          </a:p>
+        </p:txBody>
+      </p:sp>
+      <p:sp>
+        <p:nvSpPr>
+          <p:cNvPr id="71" name="Text 68"/>
+          <p:cNvSpPr/>
+          <p:nvPr/>
+        </p:nvSpPr>
+        <p:spPr>
+          <a:xfrm>
+            <a:off x="6858000" y="6217920"/>
+            <a:ext cx="1828800" cy="365760"/>
+          </a:xfrm>
+          <a:prstGeom prst="rect">
+            <a:avLst/>
+          </a:prstGeom>
+          <a:noFill/>
+          <a:ln/>
+        </p:spPr>
+        <p:txBody>
+          <a:bodyPr wrap="square" rtlCol="0" anchor="ctr"/>
+          <a:lstStyle/>
+          <a:p>
+            <a:pPr marL="0" indent="0" algn="r">
+              <a:buNone/>
+            </a:pPr>
+            <a:r>
+              <a:rPr lang="en-US" sz="1200" dirty="0">
+                <a:solidFill>
+                  <a:srgbClr val="484F58"/>
+                </a:solidFill>
+                <a:latin typeface="Segoe UI" pitchFamily="34" charset="0"/>
+                <a:ea typeface="Segoe UI" pitchFamily="34" charset="-122"/>
+                <a:cs typeface="Segoe UI" pitchFamily="34" charset="-120"/>
+              </a:rPr>
+              <a:t>March 2026</a:t>
+            </a:r>
+            <a:endParaRPr lang="en-US" sz="1200" dirty="0"/>
+          </a:p>
+        </p:txBody>
+      </p:sp>
+    </p:spTree>
+    <p:extLst>
+      <p:ext uri="{BB962C8B-B14F-4D97-AF65-F5344CB8AC3E}">
+        <p14:creationId xmlns:p14="http://schemas.microsoft.com/office/powerpoint/2010/main" val="2334127619"/>
+      </p:ext>
+    </p:extLst>
+  </p:cSld>
+  <p:clrMapOvr>
+    <a:masterClrMapping/>
+  </p:clrMapOvr>
+</p:sld>
+</file>
+
+<file path=ppt/slides/slide2.xml><?xml version="1.0" encoding="utf-8"?>
+<p:sld xmlns:a="http://schemas.openxmlformats.org/drawingml/2006/main" xmlns:r="http://schemas.openxmlformats.org/officeDocument/2006/relationships" xmlns:p="http://schemas.openxmlformats.org/presentationml/2006/main">
+  <p:cSld name="Slide 1">
+    <p:spTree>
+      <p:nvGrpSpPr>
+        <p:cNvPr id="1" name=""/>
+        <p:cNvGrpSpPr/>
+        <p:nvPr/>
+      </p:nvGrpSpPr>
+      <p:grpSpPr>
+        <a:xfrm>
+          <a:off x="0" y="0"/>
+          <a:ext cx="0" cy="0"/>
+          <a:chOff x="0" y="0"/>
+          <a:chExt cx="0" cy="0"/>
+        </a:xfrm>
+      </p:grpSpPr>
+      <p:sp>
+        <p:nvSpPr>
+          <p:cNvPr id="2" name="Shape 0"/>
+          <p:cNvSpPr/>
+          <p:nvPr/>
+        </p:nvSpPr>
+        <p:spPr>
+          <a:xfrm>
+            <a:off x="0" y="0"/>
+            <a:ext cx="9144000" cy="6858000"/>
+          </a:xfrm>
+          <a:prstGeom prst="rect">
+            <a:avLst/>
+          </a:prstGeom>
+          <a:solidFill>
+            <a:srgbClr val="0D1117"/>
+          </a:solidFill>
+          <a:ln/>
+        </p:spPr>
+        <p:txBody>
+          <a:bodyPr/>
+          <a:lstStyle/>
+          <a:p>
+            <a:endParaRPr lang="en-US"/>
+          </a:p>
+        </p:txBody>
+      </p:sp>
+      <p:sp>
+        <p:nvSpPr>
+          <p:cNvPr id="3" name="Shape 1"/>
+          <p:cNvSpPr/>
+          <p:nvPr/>
+        </p:nvSpPr>
+        <p:spPr>
+          <a:xfrm>
+            <a:off x="0" y="0"/>
+            <a:ext cx="9144000" cy="54864"/>
+          </a:xfrm>
+          <a:prstGeom prst="rect">
+            <a:avLst/>
+          </a:prstGeom>
+          <a:solidFill>
+            <a:srgbClr val="3FB950"/>
+          </a:solidFill>
+          <a:ln/>
+        </p:spPr>
+        <p:txBody>
+          <a:bodyPr/>
+          <a:lstStyle/>
+          <a:p>
+            <a:endParaRPr lang="en-US"/>
+          </a:p>
+        </p:txBody>
+      </p:sp>
+      <p:sp>
+        <p:nvSpPr>
+          <p:cNvPr id="4" name="Text 2"/>
+          <p:cNvSpPr/>
+          <p:nvPr/>
+        </p:nvSpPr>
+        <p:spPr>
+          <a:xfrm>
+            <a:off x="548640" y="320040"/>
+            <a:ext cx="4572000" cy="320040"/>
+          </a:xfrm>
+          <a:prstGeom prst="rect">
+            <a:avLst/>
+          </a:prstGeom>
+          <a:noFill/>
+          <a:ln/>
+        </p:spPr>
+        <p:txBody>
+          <a:bodyPr wrap="square" rtlCol="0" anchor="ctr"/>
+          <a:lstStyle/>
+          <a:p>
+            <a:pPr marL="0" indent="0">
+              <a:buNone/>
+            </a:pPr>
+            <a:r>
+              <a:rPr lang="en-US" sz="1000" b="1" dirty="0">
+                <a:solidFill>
+                  <a:srgbClr val="3FB950"/>
+                </a:solidFill>
+                <a:latin typeface="Segoe UI" pitchFamily="34" charset="0"/>
+                <a:ea typeface="Segoe UI" pitchFamily="34" charset="-122"/>
+                <a:cs typeface="Segoe UI" pitchFamily="34" charset="-120"/>
+              </a:rPr>
+              <a:t>STATE OF THE OCTOVERSE 2025</a:t>
+            </a:r>
+            <a:endParaRPr lang="en-US" sz="1000" dirty="0"/>
+          </a:p>
+        </p:txBody>
+      </p:sp>
+      <p:sp>
+        <p:nvSpPr>
+          <p:cNvPr id="5" name="Text 3"/>
+          <p:cNvSpPr/>
+          <p:nvPr/>
+        </p:nvSpPr>
+        <p:spPr>
+          <a:xfrm>
+            <a:off x="548640" y="640080"/>
+            <a:ext cx="7772400" cy="640080"/>
+          </a:xfrm>
+          <a:prstGeom prst="rect">
+            <a:avLst/>
+          </a:prstGeom>
+          <a:noFill/>
+          <a:ln/>
+        </p:spPr>
+        <p:txBody>
+          <a:bodyPr wrap="square" rtlCol="0" anchor="ctr"/>
+          <a:lstStyle/>
+          <a:p>
+            <a:pPr marL="0" indent="0">
+              <a:buNone/>
+            </a:pPr>
+            <a:r>
+              <a:rPr lang="en-US" sz="3000" b="1" dirty="0">
+                <a:solidFill>
+                  <a:srgbClr val="F0F6FC"/>
+                </a:solidFill>
+                <a:latin typeface="Segoe UI" pitchFamily="34" charset="0"/>
+                <a:ea typeface="Segoe UI" pitchFamily="34" charset="-122"/>
+                <a:cs typeface="Segoe UI" pitchFamily="34" charset="-120"/>
+              </a:rPr>
+              <a:t>The Rise of </a:t>
+            </a:r>
+            <a:r>
+              <a:rPr lang="en-US" sz="3000" b="1" dirty="0" err="1">
+                <a:solidFill>
+                  <a:srgbClr val="F0F6FC"/>
+                </a:solidFill>
+                <a:latin typeface="Segoe UI" pitchFamily="34" charset="0"/>
+                <a:ea typeface="Segoe UI" pitchFamily="34" charset="-122"/>
+                <a:cs typeface="Segoe UI" pitchFamily="34" charset="-120"/>
+              </a:rPr>
+              <a:t>Southytjtyuytjutyjrytjrytjryteast</a:t>
+            </a:r>
+            <a:r>
+              <a:rPr lang="en-US" sz="3000" b="1" dirty="0">
+                <a:solidFill>
+                  <a:srgbClr val="F0F6FC"/>
+                </a:solidFill>
+                <a:latin typeface="Segoe UI" pitchFamily="34" charset="0"/>
+                <a:ea typeface="Segoe UI" pitchFamily="34" charset="-122"/>
+                <a:cs typeface="Segoe UI" pitchFamily="34" charset="-120"/>
+              </a:rPr>
+              <a:t> Asia</a:t>
+            </a:r>
+            <a:endParaRPr lang="en-US" sz="3000" dirty="0"/>
+          </a:p>
+        </p:txBody>
+      </p:sp>
+      <p:sp>
+        <p:nvSpPr>
+          <p:cNvPr id="6" name="Text 4"/>
+          <p:cNvSpPr/>
+          <p:nvPr/>
+        </p:nvSpPr>
+        <p:spPr>
+          <a:xfrm>
+            <a:off x="548640" y="1234440"/>
+            <a:ext cx="6858000" cy="411480"/>
+          </a:xfrm>
+          <a:prstGeom prst="rect">
+            <a:avLst/>
+          </a:prstGeom>
+          <a:noFill/>
+          <a:ln/>
+        </p:spPr>
+        <p:txBody>
+          <a:bodyPr wrap="square" rtlCol="0" anchor="ctr"/>
+          <a:lstStyle/>
+          <a:p>
+            <a:pPr marL="0" indent="0">
+              <a:buNone/>
+            </a:pPr>
+            <a:r>
+              <a:rPr lang="en-US" sz="1300" dirty="0">
+                <a:solidFill>
+                  <a:srgbClr val="8B949E"/>
+                </a:solidFill>
+                <a:latin typeface="Segoe UI" pitchFamily="34" charset="0"/>
+                <a:ea typeface="Segoe UI" pitchFamily="34" charset="-122"/>
+                <a:cs typeface="Segoe UI" pitchFamily="34" charset="-120"/>
+              </a:rPr>
+              <a:t>A fast-growing developer ecosystem powered by digital transformation, AI adoption &amp; open source</a:t>
+            </a:r>
+            <a:endParaRPr lang="en-US" sz="1300" dirty="0"/>
+          </a:p>
+        </p:txBody>
+      </p:sp>
+      <p:sp>
+        <p:nvSpPr>
+          <p:cNvPr id="7" name="Shape 5"/>
+          <p:cNvSpPr/>
+          <p:nvPr/>
+        </p:nvSpPr>
+        <p:spPr>
+          <a:xfrm>
+            <a:off x="548640" y="1783080"/>
+            <a:ext cx="8046720" cy="18288"/>
+          </a:xfrm>
+          <a:prstGeom prst="rect">
+            <a:avLst/>
+          </a:prstGeom>
+          <a:solidFill>
+            <a:srgbClr val="21262D"/>
+          </a:solidFill>
+          <a:ln/>
+        </p:spPr>
+        <p:txBody>
+          <a:bodyPr/>
+          <a:lstStyle/>
+          <a:p>
+            <a:endParaRPr lang="en-US"/>
+          </a:p>
+        </p:txBody>
+      </p:sp>
+      <p:sp>
+        <p:nvSpPr>
+          <p:cNvPr id="8" name="Shape 6"/>
+          <p:cNvSpPr/>
+          <p:nvPr/>
+        </p:nvSpPr>
+        <p:spPr>
+          <a:xfrm flipV="1">
+            <a:off x="548640" y="4389120"/>
+            <a:ext cx="3840480" cy="420624"/>
+          </a:xfrm>
+          <a:prstGeom prst="roundRect">
+            <a:avLst>
+              <a:gd name="adj" fmla="val 4615"/>
+            </a:avLst>
+          </a:prstGeom>
+          <a:solidFill>
+            <a:srgbClr val="161B22"/>
+          </a:solidFill>
+          <a:ln w="12700">
+            <a:solidFill>
+              <a:srgbClr val="30363D"/>
+            </a:solidFill>
+            <a:prstDash val="solid"/>
+          </a:ln>
+        </p:spPr>
+        <p:txBody>
+          <a:bodyPr/>
+          <a:lstStyle/>
+          <a:p>
+            <a:endParaRPr lang="en-US"/>
+          </a:p>
+        </p:txBody>
+      </p:sp>
+      <p:sp>
+        <p:nvSpPr>
+          <p:cNvPr id="9" name="Shape 7"/>
+          <p:cNvSpPr/>
+          <p:nvPr/>
+        </p:nvSpPr>
+        <p:spPr>
+          <a:xfrm>
+            <a:off x="777240" y="2212848"/>
+            <a:ext cx="164592" cy="164592"/>
+          </a:xfrm>
+          <a:prstGeom prst="ellipse">
+            <a:avLst/>
+          </a:prstGeom>
+          <a:solidFill>
+            <a:srgbClr val="DA3633"/>
+          </a:solidFill>
+          <a:ln/>
+        </p:spPr>
+        <p:txBody>
+          <a:bodyPr/>
+          <a:lstStyle/>
+          <a:p>
+            <a:endParaRPr lang="en-US"/>
+          </a:p>
+        </p:txBody>
+      </p:sp>
+      <p:sp>
+        <p:nvSpPr>
+          <p:cNvPr id="10" name="Text 8"/>
+          <p:cNvSpPr/>
+          <p:nvPr/>
+        </p:nvSpPr>
+        <p:spPr>
+          <a:xfrm>
+            <a:off x="1051560" y="2148840"/>
+            <a:ext cx="2743200" cy="274320"/>
+          </a:xfrm>
+          <a:prstGeom prst="rect">
+            <a:avLst/>
+          </a:prstGeom>
+          <a:noFill/>
+          <a:ln/>
+        </p:spPr>
+        <p:txBody>
+          <a:bodyPr wrap="square" rtlCol="0" anchor="ctr"/>
+          <a:lstStyle/>
+          <a:p>
+            <a:pPr marL="0" indent="0">
+              <a:buNone/>
+            </a:pPr>
+            <a:r>
+              <a:rPr lang="en-US" sz="1300" b="1" dirty="0">
+                <a:solidFill>
+                  <a:srgbClr val="F0F6FC"/>
+                </a:solidFill>
+                <a:latin typeface="Segoe UI" pitchFamily="34" charset="0"/>
+                <a:ea typeface="Segoe UI" pitchFamily="34" charset="-122"/>
+                <a:cs typeface="Segoe UI" pitchFamily="34" charset="-120"/>
+              </a:rPr>
+              <a:t>Indonesia</a:t>
+            </a:r>
+            <a:endParaRPr lang="en-US" sz="1300" dirty="0"/>
+          </a:p>
+        </p:txBody>
+      </p:sp>
+      <p:sp>
+        <p:nvSpPr>
+          <p:cNvPr id="11" name="Text 9"/>
+          <p:cNvSpPr/>
+          <p:nvPr/>
+        </p:nvSpPr>
+        <p:spPr>
+          <a:xfrm>
+            <a:off x="777240" y="2423160"/>
+            <a:ext cx="3383280" cy="228600"/>
+          </a:xfrm>
+          <a:prstGeom prst="rect">
+            <a:avLst/>
+          </a:prstGeom>
+          <a:noFill/>
+          <a:ln/>
+        </p:spPr>
+        <p:txBody>
+          <a:bodyPr wrap="square" rtlCol="0" anchor="ctr"/>
+          <a:lstStyle/>
+          <a:p>
+            <a:pPr marL="0" indent="0">
+              <a:buNone/>
+            </a:pPr>
+            <a:r>
+              <a:rPr lang="en-US" sz="1000" i="1" dirty="0">
+                <a:solidFill>
+                  <a:srgbClr val="8B949E"/>
+                </a:solidFill>
+                <a:latin typeface="Segoe UI" pitchFamily="34" charset="0"/>
+                <a:ea typeface="Segoe UI" pitchFamily="34" charset="-122"/>
+                <a:cs typeface="Segoe UI" pitchFamily="34" charset="-120"/>
+              </a:rPr>
+              <a:t>Southeast Asia's Digital Powerhouse</a:t>
+            </a:r>
+            <a:endParaRPr lang="en-US" sz="1000" dirty="0"/>
+          </a:p>
+        </p:txBody>
+      </p:sp>
+      <p:sp>
+        <p:nvSpPr>
+          <p:cNvPr id="12" name="Text 10"/>
+          <p:cNvSpPr/>
+          <p:nvPr/>
+        </p:nvSpPr>
+        <p:spPr>
+          <a:xfrm>
+            <a:off x="777240" y="2697480"/>
+            <a:ext cx="3200400" cy="640080"/>
+          </a:xfrm>
+          <a:prstGeom prst="rect">
+            <a:avLst/>
+          </a:prstGeom>
+          <a:noFill/>
+          <a:ln/>
+        </p:spPr>
+        <p:txBody>
+          <a:bodyPr wrap="square" rtlCol="0" anchor="ctr"/>
+          <a:lstStyle/>
+          <a:p>
+            <a:pPr marL="0" indent="0">
+              <a:buNone/>
+            </a:pPr>
+            <a:r>
+              <a:rPr lang="en-US" sz="4200" b="1" dirty="0">
+                <a:solidFill>
+                  <a:srgbClr val="58A6FF"/>
+                </a:solidFill>
+                <a:latin typeface="Segoe UI" pitchFamily="34" charset="0"/>
+                <a:ea typeface="Segoe UI" pitchFamily="34" charset="-122"/>
+                <a:cs typeface="Segoe UI" pitchFamily="34" charset="-120"/>
+              </a:rPr>
+              <a:t>4.37Mjtyjytfjtyjjuytjuryt</a:t>
+            </a:r>
+            <a:endParaRPr lang="en-US" sz="4200" dirty="0"/>
+          </a:p>
+        </p:txBody>
+      </p:sp>
+      <p:sp>
+        <p:nvSpPr>
+          <p:cNvPr id="13" name="Text 11"/>
+          <p:cNvSpPr/>
+          <p:nvPr/>
+        </p:nvSpPr>
+        <p:spPr>
+          <a:xfrm>
+            <a:off x="777240" y="3291840"/>
+            <a:ext cx="3200400" cy="228600"/>
+          </a:xfrm>
+          <a:prstGeom prst="rect">
+            <a:avLst/>
+          </a:prstGeom>
+          <a:noFill/>
+          <a:ln/>
+        </p:spPr>
+        <p:txBody>
+          <a:bodyPr wrap="square" rtlCol="0" anchor="ctr"/>
+          <a:lstStyle/>
+          <a:p>
+            <a:pPr marL="0" indent="0">
+              <a:buNone/>
+            </a:pPr>
+            <a:r>
+              <a:rPr lang="en-US" sz="1100" dirty="0">
+                <a:solidFill>
+                  <a:srgbClr val="8B949E"/>
+                </a:solidFill>
+                <a:latin typeface="Segoe UI" pitchFamily="34" charset="0"/>
+                <a:ea typeface="Segoe UI" pitchFamily="34" charset="-122"/>
+                <a:cs typeface="Segoe UI" pitchFamily="34" charset="-120"/>
+              </a:rPr>
+              <a:t>developers on GitHub in 2025</a:t>
+            </a:r>
+            <a:endParaRPr lang="en-US" sz="1100" dirty="0"/>
+          </a:p>
+        </p:txBody>
+      </p:sp>
+      <p:sp>
+        <p:nvSpPr>
+          <p:cNvPr id="14" name="Shape 12"/>
+          <p:cNvSpPr/>
+          <p:nvPr/>
+        </p:nvSpPr>
+        <p:spPr>
+          <a:xfrm>
+            <a:off x="777240" y="3611880"/>
+            <a:ext cx="1463040" cy="320040"/>
+          </a:xfrm>
+          <a:prstGeom prst="roundRect">
+            <a:avLst>
+              <a:gd name="adj" fmla="val 22857"/>
+            </a:avLst>
+          </a:prstGeom>
+          <a:solidFill>
+            <a:srgbClr val="0E3A1E"/>
+          </a:solidFill>
+          <a:ln/>
+        </p:spPr>
+        <p:txBody>
+          <a:bodyPr/>
+          <a:lstStyle/>
+          <a:p>
+            <a:endParaRPr lang="en-US"/>
+          </a:p>
+        </p:txBody>
+      </p:sp>
+      <p:sp>
+        <p:nvSpPr>
+          <p:cNvPr id="15" name="Text 13"/>
+          <p:cNvSpPr/>
+          <p:nvPr/>
+        </p:nvSpPr>
+        <p:spPr>
+          <a:xfrm>
+            <a:off x="777240" y="3611880"/>
+            <a:ext cx="1463040" cy="320040"/>
+          </a:xfrm>
+          <a:prstGeom prst="rect">
+            <a:avLst/>
+          </a:prstGeom>
+          <a:noFill/>
+          <a:ln/>
+        </p:spPr>
+        <p:txBody>
+          <a:bodyPr wrap="square" rtlCol="0" anchor="ctr"/>
+          <a:lstStyle/>
+          <a:p>
+            <a:pPr marL="0" indent="0" algn="ctr">
+              <a:buNone/>
+            </a:pPr>
+            <a:r>
+              <a:rPr lang="en-US" sz="1000" b="1" dirty="0">
+                <a:solidFill>
+                  <a:srgbClr val="3FB950"/>
+                </a:solidFill>
+                <a:latin typeface="Segoe UI" pitchFamily="34" charset="0"/>
+                <a:ea typeface="Segoe UI" pitchFamily="34" charset="-122"/>
+                <a:cs typeface="Segoe UI" pitchFamily="34" charset="-120"/>
+              </a:rPr>
+              <a:t>▲ ~4.9× since 2020</a:t>
+            </a:r>
+            <a:endParaRPr lang="en-US" sz="1000" dirty="0"/>
+          </a:p>
+        </p:txBody>
+      </p:sp>
+      <p:sp>
+        <p:nvSpPr>
+          <p:cNvPr id="16" name="Shape 14"/>
+          <p:cNvSpPr/>
+          <p:nvPr/>
+        </p:nvSpPr>
+        <p:spPr>
+          <a:xfrm>
+            <a:off x="2377440" y="3611880"/>
+            <a:ext cx="1691640" cy="320040"/>
+          </a:xfrm>
+          <a:prstGeom prst="roundRect">
+            <a:avLst>
+              <a:gd name="adj" fmla="val 22857"/>
+            </a:avLst>
+          </a:prstGeom>
+          <a:solidFill>
+            <a:srgbClr val="1C1E24"/>
+          </a:solidFill>
+          <a:ln/>
+        </p:spPr>
+        <p:txBody>
+          <a:bodyPr/>
+          <a:lstStyle/>
+          <a:p>
+            <a:endParaRPr lang="en-US"/>
+          </a:p>
+        </p:txBody>
+      </p:sp>
+      <p:sp>
+        <p:nvSpPr>
+          <p:cNvPr id="17" name="Text 15"/>
+          <p:cNvSpPr/>
+          <p:nvPr/>
+        </p:nvSpPr>
+        <p:spPr>
+          <a:xfrm>
+            <a:off x="2377440" y="3611880"/>
+            <a:ext cx="1691640" cy="320040"/>
+          </a:xfrm>
+          <a:prstGeom prst="rect">
+            <a:avLst/>
+          </a:prstGeom>
+          <a:noFill/>
+          <a:ln/>
+        </p:spPr>
+        <p:txBody>
+          <a:bodyPr wrap="square" rtlCol="0" anchor="ctr"/>
+          <a:lstStyle/>
+          <a:p>
+            <a:pPr marL="0" indent="0" algn="ctr">
+              <a:buNone/>
+            </a:pPr>
+            <a:r>
+              <a:rPr lang="en-US" sz="1000" dirty="0">
+                <a:solidFill>
+                  <a:srgbClr val="8B949E"/>
+                </a:solidFill>
+                <a:latin typeface="Segoe UI" pitchFamily="34" charset="0"/>
+                <a:ea typeface="Segoe UI" pitchFamily="34" charset="-122"/>
+                <a:cs typeface="Segoe UI" pitchFamily="34" charset="-120"/>
+              </a:rPr>
+              <a:t>up from 0.9M in 2020</a:t>
+            </a:r>
+            <a:endParaRPr lang="en-US" sz="1000" dirty="0"/>
+          </a:p>
+        </p:txBody>
+      </p:sp>
+      <p:sp>
+        <p:nvSpPr>
+          <p:cNvPr id="18" name="Shape 16"/>
+          <p:cNvSpPr/>
+          <p:nvPr/>
+        </p:nvSpPr>
+        <p:spPr>
+          <a:xfrm>
+            <a:off x="777240" y="4023360"/>
+            <a:ext cx="1097280" cy="256032"/>
+          </a:xfrm>
+          <a:prstGeom prst="roundRect">
+            <a:avLst>
+              <a:gd name="adj" fmla="val 25000"/>
+            </a:avLst>
+          </a:prstGeom>
+          <a:solidFill>
+            <a:srgbClr val="1A1530"/>
+          </a:solidFill>
+          <a:ln/>
+        </p:spPr>
+        <p:txBody>
+          <a:bodyPr/>
+          <a:lstStyle/>
+          <a:p>
+            <a:endParaRPr lang="en-US"/>
+          </a:p>
+        </p:txBody>
+      </p:sp>
+      <p:sp>
+        <p:nvSpPr>
+          <p:cNvPr id="19" name="Text 17"/>
+          <p:cNvSpPr/>
+          <p:nvPr/>
+        </p:nvSpPr>
+        <p:spPr>
+          <a:xfrm>
+            <a:off x="777240" y="4023360"/>
+            <a:ext cx="1097280" cy="256032"/>
+          </a:xfrm>
+          <a:prstGeom prst="rect">
+            <a:avLst/>
+          </a:prstGeom>
+          <a:noFill/>
+          <a:ln/>
+        </p:spPr>
+        <p:txBody>
+          <a:bodyPr wrap="square" rtlCol="0" anchor="ctr"/>
+          <a:lstStyle/>
+          <a:p>
+            <a:pPr marL="0" indent="0" algn="ctr">
+              <a:buNone/>
+            </a:pPr>
+            <a:r>
+              <a:rPr lang="en-US" sz="900" b="1" dirty="0">
+                <a:solidFill>
+                  <a:srgbClr val="A371F7"/>
+                </a:solidFill>
+                <a:latin typeface="Segoe UI" pitchFamily="34" charset="0"/>
+                <a:ea typeface="Segoe UI" pitchFamily="34" charset="-122"/>
+                <a:cs typeface="Segoe UI" pitchFamily="34" charset="-120"/>
+              </a:rPr>
+              <a:t>Ranked #8 globally</a:t>
+            </a:r>
+            <a:endParaRPr lang="en-US" sz="900" dirty="0"/>
+          </a:p>
+        </p:txBody>
+      </p:sp>
+      <p:sp>
+        <p:nvSpPr>
+          <p:cNvPr id="20" name="Shape 18"/>
+          <p:cNvSpPr/>
+          <p:nvPr/>
+        </p:nvSpPr>
+        <p:spPr>
+          <a:xfrm>
+            <a:off x="1965960" y="4023360"/>
+            <a:ext cx="1508760" cy="256032"/>
+          </a:xfrm>
+          <a:prstGeom prst="roundRect">
+            <a:avLst>
+              <a:gd name="adj" fmla="val 25000"/>
+            </a:avLst>
+          </a:prstGeom>
+          <a:solidFill>
+            <a:srgbClr val="1A1530"/>
+          </a:solidFill>
+          <a:ln/>
+        </p:spPr>
+        <p:txBody>
+          <a:bodyPr/>
+          <a:lstStyle/>
+          <a:p>
+            <a:endParaRPr lang="en-US"/>
+          </a:p>
+        </p:txBody>
+      </p:sp>
+      <p:sp>
+        <p:nvSpPr>
+          <p:cNvPr id="21" name="Text 19"/>
+          <p:cNvSpPr/>
+          <p:nvPr/>
+        </p:nvSpPr>
+        <p:spPr>
+          <a:xfrm>
+            <a:off x="1965960" y="4023360"/>
+            <a:ext cx="1508760" cy="256032"/>
+          </a:xfrm>
+          <a:prstGeom prst="rect">
+            <a:avLst/>
+          </a:prstGeom>
+          <a:noFill/>
+          <a:ln/>
+        </p:spPr>
+        <p:txBody>
+          <a:bodyPr wrap="square" rtlCol="0" anchor="ctr"/>
+          <a:lstStyle/>
+          <a:p>
+            <a:pPr marL="0" indent="0" algn="ctr">
+              <a:buNone/>
+            </a:pPr>
+            <a:r>
+              <a:rPr lang="en-US" sz="900" b="1" dirty="0">
+                <a:solidFill>
+                  <a:srgbClr val="A371F7"/>
+                </a:solidFill>
+                <a:latin typeface="Segoe UI" pitchFamily="34" charset="0"/>
+                <a:ea typeface="Segoe UI" pitchFamily="34" charset="-122"/>
+                <a:cs typeface="Segoe UI" pitchFamily="34" charset="-120"/>
+              </a:rPr>
+              <a:t>Top 5 OSS contributors</a:t>
+            </a:r>
+            <a:endParaRPr lang="en-US" sz="900" dirty="0"/>
+          </a:p>
+        </p:txBody>
+      </p:sp>
+      <p:sp>
+        <p:nvSpPr>
+          <p:cNvPr id="22" name="Shape 20"/>
+          <p:cNvSpPr/>
+          <p:nvPr/>
+        </p:nvSpPr>
+        <p:spPr>
+          <a:xfrm>
+            <a:off x="4709160" y="2011680"/>
+            <a:ext cx="3886200" cy="2377440"/>
+          </a:xfrm>
+          <a:prstGeom prst="roundRect">
+            <a:avLst>
+              <a:gd name="adj" fmla="val 4615"/>
+            </a:avLst>
+          </a:prstGeom>
+          <a:solidFill>
+            <a:srgbClr val="161B22"/>
+          </a:solidFill>
+          <a:ln w="12700">
+            <a:solidFill>
+              <a:srgbClr val="30363D"/>
+            </a:solidFill>
+            <a:prstDash val="solid"/>
+          </a:ln>
+        </p:spPr>
+        <p:txBody>
+          <a:bodyPr/>
+          <a:lstStyle/>
+          <a:p>
+            <a:r>
+              <a:rPr lang="en-US" dirty="0" err="1"/>
+              <a:t>myjffjmuym</a:t>
+            </a:r>
+            <a:endParaRPr lang="en-US" dirty="0"/>
+          </a:p>
+        </p:txBody>
+      </p:sp>
+      <p:sp>
+        <p:nvSpPr>
+          <p:cNvPr id="23" name="Text 21"/>
+          <p:cNvSpPr/>
+          <p:nvPr/>
+        </p:nvSpPr>
+        <p:spPr>
+          <a:xfrm>
+            <a:off x="4937760" y="2148840"/>
+            <a:ext cx="3474720" cy="274320"/>
+          </a:xfrm>
+          <a:prstGeom prst="rect">
+            <a:avLst/>
+          </a:prstGeom>
+          <a:noFill/>
+          <a:ln/>
+        </p:spPr>
+        <p:txBody>
+          <a:bodyPr wrap="square" rtlCol="0" anchor="ctr"/>
+          <a:lstStyle/>
+          <a:p>
+            <a:pPr marL="0" indent="0">
+              <a:buNone/>
+            </a:pPr>
+            <a:r>
+              <a:rPr lang="en-US" sz="1300" b="1" dirty="0">
+                <a:solidFill>
+                  <a:srgbClr val="F0F6FC"/>
+                </a:solidFill>
+                <a:latin typeface="Segoe UI" pitchFamily="34" charset="0"/>
+                <a:ea typeface="Segoe UI" pitchFamily="34" charset="-122"/>
+                <a:cs typeface="Segoe UI" pitchFamily="34" charset="-120"/>
+              </a:rPr>
+              <a:t>APAC Regional Momentum</a:t>
+            </a:r>
+            <a:endParaRPr lang="en-US" sz="1300" dirty="0"/>
+          </a:p>
+        </p:txBody>
+      </p:sp>
+      <p:sp>
+        <p:nvSpPr>
+          <p:cNvPr id="24" name="Text 22"/>
+          <p:cNvSpPr/>
+          <p:nvPr/>
+        </p:nvSpPr>
+        <p:spPr>
+          <a:xfrm>
+            <a:off x="4937760" y="2514600"/>
+            <a:ext cx="1097280" cy="411480"/>
+          </a:xfrm>
+          <a:prstGeom prst="rect">
+            <a:avLst/>
+          </a:prstGeom>
+          <a:noFill/>
+          <a:ln/>
+        </p:spPr>
+        <p:txBody>
+          <a:bodyPr wrap="square" rtlCol="0" anchor="ctr"/>
+          <a:lstStyle/>
+          <a:p>
+            <a:pPr marL="0" indent="0">
+              <a:buNone/>
+            </a:pPr>
+            <a:r>
+              <a:rPr lang="en-US" sz="2800" b="1" dirty="0">
+                <a:solidFill>
+                  <a:srgbClr val="F78166"/>
+                </a:solidFill>
+                <a:latin typeface="Segoe UI" pitchFamily="34" charset="0"/>
+                <a:ea typeface="Segoe UI" pitchFamily="34" charset="-122"/>
+                <a:cs typeface="Segoe UI" pitchFamily="34" charset="-120"/>
+              </a:rPr>
+              <a:t>~25</a:t>
+            </a:r>
+            <a:endParaRPr lang="en-US" sz="2800" dirty="0"/>
+          </a:p>
+        </p:txBody>
+      </p:sp>
+      <p:sp>
+        <p:nvSpPr>
+          <p:cNvPr id="25" name="Text 23"/>
+          <p:cNvSpPr/>
+          <p:nvPr/>
+        </p:nvSpPr>
+        <p:spPr>
+          <a:xfrm>
+            <a:off x="5943600" y="2514600"/>
+            <a:ext cx="2468880" cy="411480"/>
+          </a:xfrm>
+          <a:prstGeom prst="rect">
+            <a:avLst/>
+          </a:prstGeom>
+          <a:noFill/>
+          <a:ln/>
+        </p:spPr>
+        <p:txBody>
+          <a:bodyPr wrap="square" rtlCol="0" anchor="ctr"/>
+          <a:lstStyle/>
+          <a:p>
+            <a:pPr marL="0" indent="0">
+              <a:buNone/>
+            </a:pPr>
+            <a:r>
+              <a:rPr lang="en-US" sz="1000" dirty="0">
+                <a:solidFill>
+                  <a:srgbClr val="8B949E"/>
+                </a:solidFill>
+                <a:latin typeface="Segoe UI" pitchFamily="34" charset="0"/>
+                <a:ea typeface="Segoe UI" pitchFamily="34" charset="-122"/>
+                <a:cs typeface="Segoe UI" pitchFamily="34" charset="-120"/>
+              </a:rPr>
+              <a:t>developers join</a:t>
+            </a:r>
+            <a:endParaRPr lang="en-US" sz="1000" dirty="0"/>
+          </a:p>
+          <a:p>
+            <a:pPr marL="0" indent="0">
+              <a:buNone/>
+            </a:pPr>
+            <a:r>
+              <a:rPr lang="en-US" sz="1000" dirty="0">
+                <a:solidFill>
+                  <a:srgbClr val="8B949E"/>
+                </a:solidFill>
+                <a:latin typeface="Segoe UI" pitchFamily="34" charset="0"/>
+                <a:ea typeface="Segoe UI" pitchFamily="34" charset="-122"/>
+                <a:cs typeface="Segoe UI" pitchFamily="34" charset="-120"/>
+              </a:rPr>
+              <a:t>from APAC every minute</a:t>
+            </a:r>
+            <a:endParaRPr lang="en-US" sz="1000" dirty="0"/>
+          </a:p>
+        </p:txBody>
+      </p:sp>
+      <p:sp>
+        <p:nvSpPr>
+          <p:cNvPr id="26" name="Shape 24"/>
+          <p:cNvSpPr/>
+          <p:nvPr/>
+        </p:nvSpPr>
+        <p:spPr>
+          <a:xfrm>
+            <a:off x="4937760" y="3017520"/>
+            <a:ext cx="3474720" cy="9144"/>
+          </a:xfrm>
+          <a:prstGeom prst="rect">
+            <a:avLst/>
+          </a:prstGeom>
+          <a:solidFill>
+            <a:srgbClr val="30363D"/>
+          </a:solidFill>
+          <a:ln/>
+        </p:spPr>
+        <p:txBody>
+          <a:bodyPr/>
+          <a:lstStyle/>
+          <a:p>
+            <a:endParaRPr lang="en-US"/>
+          </a:p>
+        </p:txBody>
+      </p:sp>
+      <p:sp>
+        <p:nvSpPr>
+          <p:cNvPr id="27" name="Text 25"/>
+          <p:cNvSpPr/>
+          <p:nvPr/>
+        </p:nvSpPr>
+        <p:spPr>
+          <a:xfrm>
+            <a:off x="4937760" y="3108960"/>
+            <a:ext cx="1371600" cy="411480"/>
+          </a:xfrm>
+          <a:prstGeom prst="rect">
+            <a:avLst/>
+          </a:prstGeom>
+          <a:noFill/>
+          <a:ln/>
+        </p:spPr>
+        <p:txBody>
+          <a:bodyPr wrap="square" rtlCol="0" anchor="ctr"/>
+          <a:lstStyle/>
+          <a:p>
+            <a:pPr marL="0" indent="0">
+              <a:buNone/>
+            </a:pPr>
+            <a:r>
+              <a:rPr lang="en-US" sz="2800" b="1" dirty="0">
+                <a:solidFill>
+                  <a:srgbClr val="F78166"/>
+                </a:solidFill>
+                <a:latin typeface="Segoe UI" pitchFamily="34" charset="0"/>
+                <a:ea typeface="Segoe UI" pitchFamily="34" charset="-122"/>
+                <a:cs typeface="Segoe UI" pitchFamily="34" charset="-120"/>
+              </a:rPr>
+              <a:t>+13juyfjuykjuykjuykjruyM</a:t>
+            </a:r>
+            <a:endParaRPr lang="en-US" sz="2800" dirty="0"/>
+          </a:p>
+        </p:txBody>
+      </p:sp>
+      <p:sp>
+        <p:nvSpPr>
+          <p:cNvPr id="28" name="Text 26"/>
+          <p:cNvSpPr/>
+          <p:nvPr/>
+        </p:nvSpPr>
+        <p:spPr>
+          <a:xfrm>
+            <a:off x="6172200" y="3108960"/>
+            <a:ext cx="2286000" cy="411480"/>
+          </a:xfrm>
+          <a:prstGeom prst="rect">
+            <a:avLst/>
+          </a:prstGeom>
+          <a:noFill/>
+          <a:ln/>
+        </p:spPr>
+        <p:txBody>
+          <a:bodyPr wrap="square" rtlCol="0" anchor="ctr"/>
+          <a:lstStyle/>
+          <a:p>
+            <a:pPr marL="0" indent="0">
+              <a:buNone/>
+            </a:pPr>
+            <a:r>
+              <a:rPr lang="en-US" sz="1000" dirty="0">
+                <a:solidFill>
+                  <a:srgbClr val="8B949E"/>
+                </a:solidFill>
+                <a:latin typeface="Segoe UI" pitchFamily="34" charset="0"/>
+                <a:ea typeface="Segoe UI" pitchFamily="34" charset="-122"/>
+                <a:cs typeface="Segoe UI" pitchFamily="34" charset="-120"/>
+              </a:rPr>
+              <a:t>net new APAC developers</a:t>
+            </a:r>
+            <a:endParaRPr lang="en-US" sz="1000" dirty="0"/>
+          </a:p>
+          <a:p>
+            <a:pPr marL="0" indent="0">
+              <a:buNone/>
+            </a:pPr>
+            <a:r>
+              <a:rPr lang="en-US" sz="1000" dirty="0">
+                <a:solidFill>
+                  <a:srgbClr val="8B949E"/>
+                </a:solidFill>
+                <a:latin typeface="Segoe UI" pitchFamily="34" charset="0"/>
+                <a:ea typeface="Segoe UI" pitchFamily="34" charset="-122"/>
+                <a:cs typeface="Segoe UI" pitchFamily="34" charset="-120"/>
+              </a:rPr>
+              <a:t>in 2024–2025</a:t>
+            </a:r>
+            <a:endParaRPr lang="en-US" sz="1000" dirty="0"/>
+          </a:p>
+        </p:txBody>
+      </p:sp>
+      <p:sp>
+        <p:nvSpPr>
+          <p:cNvPr id="29" name="Shape 27"/>
+          <p:cNvSpPr/>
+          <p:nvPr/>
+        </p:nvSpPr>
+        <p:spPr>
+          <a:xfrm>
+            <a:off x="4937760" y="3611880"/>
+            <a:ext cx="3474720" cy="9144"/>
+          </a:xfrm>
+          <a:prstGeom prst="rect">
+            <a:avLst/>
+          </a:prstGeom>
+          <a:solidFill>
+            <a:srgbClr val="30363D"/>
+          </a:solidFill>
+          <a:ln/>
+        </p:spPr>
+        <p:txBody>
+          <a:bodyPr/>
+          <a:lstStyle/>
+          <a:p>
+            <a:endParaRPr lang="en-US"/>
+          </a:p>
+        </p:txBody>
+      </p:sp>
+      <p:sp>
+        <p:nvSpPr>
+          <p:cNvPr id="30" name="Text 28"/>
+          <p:cNvSpPr/>
+          <p:nvPr/>
+        </p:nvSpPr>
+        <p:spPr>
+          <a:xfrm>
+            <a:off x="4937760" y="3703320"/>
+            <a:ext cx="1371600" cy="411480"/>
+          </a:xfrm>
+          <a:prstGeom prst="rect">
+            <a:avLst/>
+          </a:prstGeom>
+          <a:noFill/>
+          <a:ln/>
+        </p:spPr>
+        <p:txBody>
+          <a:bodyPr wrap="square" rtlCol="0" anchor="ctr"/>
+          <a:lstStyle/>
+          <a:p>
+            <a:pPr marL="0" indent="0">
+              <a:buNone/>
+            </a:pPr>
+            <a:r>
+              <a:rPr lang="en-US" sz="2800" b="1" dirty="0">
+                <a:solidFill>
+                  <a:srgbClr val="F78166"/>
+                </a:solidFill>
+                <a:latin typeface="Segoe UI" pitchFamily="34" charset="0"/>
+                <a:ea typeface="Segoe UI" pitchFamily="34" charset="-122"/>
+                <a:cs typeface="Segoe UI" pitchFamily="34" charset="-120"/>
+              </a:rPr>
+              <a:t>~50gjhmjymjuymuytm </a:t>
+            </a:r>
+            <a:r>
+              <a:rPr lang="en-US" sz="2800" b="1" dirty="0" err="1">
+                <a:solidFill>
+                  <a:srgbClr val="F78166"/>
+                </a:solidFill>
+                <a:latin typeface="Segoe UI" pitchFamily="34" charset="0"/>
+                <a:ea typeface="Segoe UI" pitchFamily="34" charset="-122"/>
+                <a:cs typeface="Segoe UI" pitchFamily="34" charset="-120"/>
+              </a:rPr>
+              <a:t>uytmuytmuytkmytumuy</a:t>
+            </a:r>
+            <a:r>
+              <a:rPr lang="en-US" sz="2800" b="1" dirty="0">
+                <a:solidFill>
+                  <a:srgbClr val="F78166"/>
+                </a:solidFill>
+                <a:latin typeface="Segoe UI" pitchFamily="34" charset="0"/>
+                <a:ea typeface="Segoe UI" pitchFamily="34" charset="-122"/>
+                <a:cs typeface="Segoe UI" pitchFamily="34" charset="-120"/>
+              </a:rPr>
+              <a:t>%</a:t>
+            </a:r>
+            <a:endParaRPr lang="en-US" sz="2800" dirty="0"/>
+          </a:p>
+        </p:txBody>
+      </p:sp>
+      <p:sp>
+        <p:nvSpPr>
+          <p:cNvPr id="31" name="Text 29"/>
+          <p:cNvSpPr/>
+          <p:nvPr/>
+        </p:nvSpPr>
+        <p:spPr>
+          <a:xfrm>
+            <a:off x="6172200" y="3703320"/>
+            <a:ext cx="2468880" cy="411480"/>
+          </a:xfrm>
+          <a:prstGeom prst="rect">
+            <a:avLst/>
+          </a:prstGeom>
+          <a:noFill/>
+          <a:ln/>
+        </p:spPr>
+        <p:txBody>
+          <a:bodyPr wrap="square" rtlCol="0" anchor="ctr"/>
+          <a:lstStyle/>
+          <a:p>
+            <a:pPr marL="0" indent="0">
+              <a:buNone/>
+            </a:pPr>
+            <a:r>
+              <a:rPr lang="en-US" sz="1000" dirty="0">
+                <a:solidFill>
+                  <a:srgbClr val="8B949E"/>
+                </a:solidFill>
+                <a:latin typeface="Segoe UI" pitchFamily="34" charset="0"/>
+                <a:ea typeface="Segoe UI" pitchFamily="34" charset="-122"/>
+                <a:cs typeface="Segoe UI" pitchFamily="34" charset="-120"/>
+              </a:rPr>
+              <a:t>of SE Asia's online economy</a:t>
+            </a:r>
+            <a:endParaRPr lang="en-US" sz="1000" dirty="0"/>
+          </a:p>
+          <a:p>
+            <a:pPr marL="0" indent="0">
+              <a:buNone/>
+            </a:pPr>
+            <a:r>
+              <a:rPr lang="en-US" sz="1000" dirty="0">
+                <a:solidFill>
+                  <a:srgbClr val="8B949E"/>
+                </a:solidFill>
+                <a:latin typeface="Segoe UI" pitchFamily="34" charset="0"/>
+                <a:ea typeface="Segoe UI" pitchFamily="34" charset="-122"/>
+                <a:cs typeface="Segoe UI" pitchFamily="34" charset="-120"/>
+              </a:rPr>
+              <a:t>is driven by Indonesia</a:t>
+            </a:r>
+            <a:endParaRPr lang="en-US" sz="1000" dirty="0"/>
+          </a:p>
+        </p:txBody>
+      </p:sp>
+      <p:sp>
+        <p:nvSpPr>
+          <p:cNvPr id="32" name="Shape 30"/>
+          <p:cNvSpPr/>
+          <p:nvPr/>
+        </p:nvSpPr>
+        <p:spPr>
+          <a:xfrm>
+            <a:off x="548640" y="4663440"/>
+            <a:ext cx="8046720" cy="1371600"/>
+          </a:xfrm>
+          <a:prstGeom prst="roundRect">
+            <a:avLst>
+              <a:gd name="adj" fmla="val 8000"/>
+            </a:avLst>
+          </a:prstGeom>
+          <a:solidFill>
+            <a:srgbClr val="161B22"/>
+          </a:solidFill>
+          <a:ln w="12700">
+            <a:solidFill>
+              <a:srgbClr val="30363D"/>
+            </a:solidFill>
+            <a:prstDash val="solid"/>
+          </a:ln>
+        </p:spPr>
+        <p:txBody>
+          <a:bodyPr/>
+          <a:lstStyle/>
+          <a:p>
+            <a:endParaRPr lang="en-US"/>
+          </a:p>
+        </p:txBody>
+      </p:sp>
+      <p:sp>
+        <p:nvSpPr>
+          <p:cNvPr id="33" name="Text 31"/>
+          <p:cNvSpPr/>
+          <p:nvPr/>
+        </p:nvSpPr>
+        <p:spPr>
+          <a:xfrm>
+            <a:off x="777240" y="4754880"/>
+            <a:ext cx="3657600" cy="274320"/>
+          </a:xfrm>
+          <a:prstGeom prst="rect">
+            <a:avLst/>
+          </a:prstGeom>
+          <a:noFill/>
+          <a:ln/>
+        </p:spPr>
+        <p:txBody>
+          <a:bodyPr wrap="square" rtlCol="0" anchor="ctr"/>
+          <a:lstStyle/>
+          <a:p>
+            <a:pPr marL="0" indent="0">
+              <a:buNone/>
+            </a:pPr>
+            <a:r>
+              <a:rPr lang="en-US" sz="1200" b="1" dirty="0">
+                <a:solidFill>
+                  <a:srgbClr val="F0F6FC"/>
+                </a:solidFill>
+                <a:latin typeface="Segoe UI" pitchFamily="34" charset="0"/>
+                <a:ea typeface="Segoe UI" pitchFamily="34" charset="-122"/>
+                <a:cs typeface="Segoe UI" pitchFamily="34" charset="-120"/>
+              </a:rPr>
+              <a:t>What's Fueling the Boom</a:t>
+            </a:r>
+            <a:endParaRPr lang="en-US" sz="1200" dirty="0"/>
+          </a:p>
+        </p:txBody>
+      </p:sp>
+      <p:sp>
+        <p:nvSpPr>
+          <p:cNvPr id="34" name="Text 32"/>
+          <p:cNvSpPr/>
+          <p:nvPr/>
+        </p:nvSpPr>
+        <p:spPr>
+          <a:xfrm>
+            <a:off x="777240" y="5074920"/>
+            <a:ext cx="365760" cy="274320"/>
+          </a:xfrm>
+          <a:prstGeom prst="rect">
+            <a:avLst/>
+          </a:prstGeom>
+          <a:noFill/>
+          <a:ln/>
+        </p:spPr>
+        <p:txBody>
+          <a:bodyPr wrap="square" rtlCol="0" anchor="ctr"/>
+          <a:lstStyle/>
+          <a:p>
+            <a:pPr marL="0" indent="0">
+              <a:buNone/>
+            </a:pPr>
+            <a:r>
+              <a:rPr lang="en-US" sz="1600" dirty="0">
+                <a:solidFill>
+                  <a:srgbClr val="000000"/>
+                </a:solidFill>
+                <a:latin typeface="Segoe UI Emoji" pitchFamily="34" charset="0"/>
+                <a:ea typeface="Segoe UI Emoji" pitchFamily="34" charset="-122"/>
+                <a:cs typeface="Segoe UI Emoji" pitchFamily="34" charset="-120"/>
+              </a:rPr>
+              <a:t>🏛️</a:t>
+            </a:r>
+            <a:endParaRPr lang="en-US" sz="1600" dirty="0"/>
+          </a:p>
+        </p:txBody>
+      </p:sp>
+      <p:sp>
+        <p:nvSpPr>
+          <p:cNvPr id="35" name="Text 33"/>
+          <p:cNvSpPr/>
+          <p:nvPr/>
+        </p:nvSpPr>
+        <p:spPr>
+          <a:xfrm>
+            <a:off x="1097280" y="5074920"/>
+            <a:ext cx="1554480" cy="228600"/>
+          </a:xfrm>
+          <a:prstGeom prst="rect">
+            <a:avLst/>
+          </a:prstGeom>
+          <a:noFill/>
+          <a:ln/>
+        </p:spPr>
+        <p:txBody>
+          <a:bodyPr wrap="square" rtlCol="0" anchor="ctr"/>
+          <a:lstStyle/>
+          <a:p>
+            <a:pPr marL="0" indent="0">
+              <a:buNone/>
+            </a:pPr>
+            <a:r>
+              <a:rPr lang="en-US" sz="1000" b="1" dirty="0">
+                <a:solidFill>
+                  <a:srgbClr val="58A6FF"/>
+                </a:solidFill>
+                <a:latin typeface="Segoe UI" pitchFamily="34" charset="0"/>
+                <a:ea typeface="Segoe UI" pitchFamily="34" charset="-122"/>
+                <a:cs typeface="Segoe UI" pitchFamily="34" charset="-120"/>
+              </a:rPr>
+              <a:t>Government Skilling</a:t>
+            </a:r>
+            <a:endParaRPr lang="en-US" sz="1000" dirty="0"/>
+          </a:p>
+        </p:txBody>
+      </p:sp>
+      <p:sp>
+        <p:nvSpPr>
+          <p:cNvPr id="36" name="Text 34"/>
+          <p:cNvSpPr/>
+          <p:nvPr/>
+        </p:nvSpPr>
+        <p:spPr>
+          <a:xfrm>
+            <a:off x="777240" y="5349240"/>
+            <a:ext cx="1828800" cy="548640"/>
+          </a:xfrm>
+          <a:prstGeom prst="rect">
+            <a:avLst/>
+          </a:prstGeom>
+          <a:noFill/>
+          <a:ln/>
+        </p:spPr>
+        <p:txBody>
+          <a:bodyPr wrap="square" rtlCol="0" anchor="ctr"/>
+          <a:lstStyle/>
+          <a:p>
+            <a:pPr marL="0" indent="0">
+              <a:buNone/>
+            </a:pPr>
+            <a:r>
+              <a:rPr lang="en-US" sz="900" dirty="0">
+                <a:solidFill>
+                  <a:srgbClr val="8B949E"/>
+                </a:solidFill>
+                <a:latin typeface="Segoe UI" pitchFamily="34" charset="0"/>
+                <a:ea typeface="Segoe UI" pitchFamily="34" charset="-122"/>
+                <a:cs typeface="Segoe UI" pitchFamily="34" charset="-120"/>
+              </a:rPr>
+              <a:t>National programs driving digital literacy &amp; developer talent</a:t>
+            </a:r>
+            <a:endParaRPr lang="en-US" sz="900" dirty="0"/>
+          </a:p>
+        </p:txBody>
+      </p:sp>
+      <p:sp>
+        <p:nvSpPr>
+          <p:cNvPr id="37" name="Text 35"/>
+          <p:cNvSpPr/>
+          <p:nvPr/>
+        </p:nvSpPr>
+        <p:spPr>
+          <a:xfrm>
+            <a:off x="2743200" y="5074920"/>
+            <a:ext cx="365760" cy="274320"/>
+          </a:xfrm>
+          <a:prstGeom prst="rect">
+            <a:avLst/>
+          </a:prstGeom>
+          <a:noFill/>
+          <a:ln/>
+        </p:spPr>
+        <p:txBody>
+          <a:bodyPr wrap="square" rtlCol="0" anchor="ctr"/>
+          <a:lstStyle/>
+          <a:p>
+            <a:pPr marL="0" indent="0">
+              <a:buNone/>
+            </a:pPr>
+            <a:r>
+              <a:rPr lang="en-US" sz="1600" dirty="0">
+                <a:solidFill>
+                  <a:srgbClr val="000000"/>
+                </a:solidFill>
+                <a:latin typeface="Segoe UI Emoji" pitchFamily="34" charset="0"/>
+                <a:ea typeface="Segoe UI Emoji" pitchFamily="34" charset="-122"/>
+                <a:cs typeface="Segoe UI Emoji" pitchFamily="34" charset="-120"/>
+              </a:rPr>
+              <a:t>🤖</a:t>
+            </a:r>
+            <a:endParaRPr lang="en-US" sz="1600" dirty="0"/>
+          </a:p>
+        </p:txBody>
+      </p:sp>
+      <p:sp>
+        <p:nvSpPr>
+          <p:cNvPr id="38" name="Text 36"/>
+          <p:cNvSpPr/>
+          <p:nvPr/>
+        </p:nvSpPr>
+        <p:spPr>
+          <a:xfrm>
+            <a:off x="3063240" y="5074920"/>
+            <a:ext cx="1554480" cy="228600"/>
+          </a:xfrm>
+          <a:prstGeom prst="rect">
+            <a:avLst/>
+          </a:prstGeom>
+          <a:noFill/>
+          <a:ln/>
+        </p:spPr>
+        <p:txBody>
+          <a:bodyPr wrap="square" rtlCol="0" anchor="ctr"/>
+          <a:lstStyle/>
+          <a:p>
+            <a:pPr marL="0" indent="0">
+              <a:buNone/>
+            </a:pPr>
+            <a:r>
+              <a:rPr lang="en-US" sz="1000" b="1" dirty="0">
+                <a:solidFill>
+                  <a:srgbClr val="58A6FF"/>
+                </a:solidFill>
+                <a:latin typeface="Segoe UI" pitchFamily="34" charset="0"/>
+                <a:ea typeface="Segoe UI" pitchFamily="34" charset="-122"/>
+                <a:cs typeface="Segoe UI" pitchFamily="34" charset="-120"/>
+              </a:rPr>
+              <a:t>AI Adoption</a:t>
+            </a:r>
+            <a:endParaRPr lang="en-US" sz="1000" dirty="0"/>
+          </a:p>
+        </p:txBody>
+      </p:sp>
+      <p:sp>
+        <p:nvSpPr>
+          <p:cNvPr id="39" name="Text 37"/>
+          <p:cNvSpPr/>
+          <p:nvPr/>
+        </p:nvSpPr>
+        <p:spPr>
+          <a:xfrm>
+            <a:off x="2743200" y="5349240"/>
+            <a:ext cx="1828800" cy="548640"/>
+          </a:xfrm>
+          <a:prstGeom prst="rect">
+            <a:avLst/>
+          </a:prstGeom>
+          <a:noFill/>
+          <a:ln/>
+        </p:spPr>
+        <p:txBody>
+          <a:bodyPr wrap="square" rtlCol="0" anchor="ctr"/>
+          <a:lstStyle/>
+          <a:p>
+            <a:pPr marL="0" indent="0">
+              <a:buNone/>
+            </a:pPr>
+            <a:r>
+              <a:rPr lang="en-US" sz="900" dirty="0">
+                <a:solidFill>
+                  <a:srgbClr val="8B949E"/>
+                </a:solidFill>
+                <a:latin typeface="Segoe UI" pitchFamily="34" charset="0"/>
+                <a:ea typeface="Segoe UI" pitchFamily="34" charset="-122"/>
+                <a:cs typeface="Segoe UI" pitchFamily="34" charset="-120"/>
+              </a:rPr>
+              <a:t>80% of new devs use Copilot in week one; AI projects surging</a:t>
+            </a:r>
+            <a:endParaRPr lang="en-US" sz="900" dirty="0"/>
+          </a:p>
+        </p:txBody>
+      </p:sp>
+      <p:sp>
+        <p:nvSpPr>
+          <p:cNvPr id="40" name="Text 38"/>
+          <p:cNvSpPr/>
+          <p:nvPr/>
+        </p:nvSpPr>
+        <p:spPr>
+          <a:xfrm>
+            <a:off x="4709160" y="5074920"/>
+            <a:ext cx="365760" cy="274320"/>
+          </a:xfrm>
+          <a:prstGeom prst="rect">
+            <a:avLst/>
+          </a:prstGeom>
+          <a:noFill/>
+          <a:ln/>
+        </p:spPr>
+        <p:txBody>
+          <a:bodyPr wrap="square" rtlCol="0" anchor="ctr"/>
+          <a:lstStyle/>
+          <a:p>
+            <a:pPr marL="0" indent="0">
+              <a:buNone/>
+            </a:pPr>
+            <a:r>
+              <a:rPr lang="en-US" sz="1600" dirty="0">
+                <a:solidFill>
+                  <a:srgbClr val="000000"/>
+                </a:solidFill>
+                <a:latin typeface="Segoe UI Emoji" pitchFamily="34" charset="0"/>
+                <a:ea typeface="Segoe UI Emoji" pitchFamily="34" charset="-122"/>
+                <a:cs typeface="Segoe UI Emoji" pitchFamily="34" charset="-120"/>
+              </a:rPr>
+              <a:t>🌐</a:t>
+            </a:r>
+            <a:endParaRPr lang="en-US" sz="1600" dirty="0"/>
+          </a:p>
+        </p:txBody>
+      </p:sp>
+      <p:sp>
+        <p:nvSpPr>
+          <p:cNvPr id="41" name="Text 39"/>
+          <p:cNvSpPr/>
+          <p:nvPr/>
+        </p:nvSpPr>
+        <p:spPr>
+          <a:xfrm>
+            <a:off x="5029200" y="5074920"/>
+            <a:ext cx="1554480" cy="228600"/>
+          </a:xfrm>
+          <a:prstGeom prst="rect">
+            <a:avLst/>
+          </a:prstGeom>
+          <a:noFill/>
+          <a:ln/>
+        </p:spPr>
+        <p:txBody>
+          <a:bodyPr wrap="square" rtlCol="0" anchor="ctr"/>
+          <a:lstStyle/>
+          <a:p>
+            <a:pPr marL="0" indent="0">
+              <a:buNone/>
+            </a:pPr>
+            <a:r>
+              <a:rPr lang="en-US" sz="1000" b="1" dirty="0">
+                <a:solidFill>
+                  <a:srgbClr val="58A6FF"/>
+                </a:solidFill>
+                <a:latin typeface="Segoe UI" pitchFamily="34" charset="0"/>
+                <a:ea typeface="Segoe UI" pitchFamily="34" charset="-122"/>
+                <a:cs typeface="Segoe UI" pitchFamily="34" charset="-120"/>
+              </a:rPr>
+              <a:t>Internet Expansion</a:t>
+            </a:r>
+            <a:endParaRPr lang="en-US" sz="1000" dirty="0"/>
+          </a:p>
+        </p:txBody>
+      </p:sp>
+      <p:sp>
+        <p:nvSpPr>
+          <p:cNvPr id="42" name="Text 40"/>
+          <p:cNvSpPr/>
+          <p:nvPr/>
+        </p:nvSpPr>
+        <p:spPr>
+          <a:xfrm>
+            <a:off x="4709160" y="5349240"/>
+            <a:ext cx="1828800" cy="548640"/>
+          </a:xfrm>
+          <a:prstGeom prst="rect">
+            <a:avLst/>
+          </a:prstGeom>
+          <a:noFill/>
+          <a:ln/>
+        </p:spPr>
+        <p:txBody>
+          <a:bodyPr wrap="square" rtlCol="0" anchor="ctr"/>
+          <a:lstStyle/>
+          <a:p>
+            <a:pPr marL="0" indent="0">
+              <a:buNone/>
+            </a:pPr>
+            <a:r>
+              <a:rPr lang="en-US" sz="900" dirty="0">
+                <a:solidFill>
+                  <a:srgbClr val="8B949E"/>
+                </a:solidFill>
+                <a:latin typeface="Segoe UI" pitchFamily="34" charset="0"/>
+                <a:ea typeface="Segoe UI" pitchFamily="34" charset="-122"/>
+                <a:cs typeface="Segoe UI" pitchFamily="34" charset="-120"/>
+              </a:rPr>
+              <a:t>Expanding access enabling booming startup ecosystems</a:t>
+            </a:r>
+            <a:endParaRPr lang="en-US" sz="900" dirty="0"/>
+          </a:p>
+        </p:txBody>
+      </p:sp>
+      <p:sp>
+        <p:nvSpPr>
+          <p:cNvPr id="43" name="Text 41"/>
+          <p:cNvSpPr/>
+          <p:nvPr/>
+        </p:nvSpPr>
+        <p:spPr>
+          <a:xfrm>
+            <a:off x="6675120" y="5074920"/>
+            <a:ext cx="365760" cy="274320"/>
+          </a:xfrm>
+          <a:prstGeom prst="rect">
+            <a:avLst/>
+          </a:prstGeom>
+          <a:noFill/>
+          <a:ln/>
+        </p:spPr>
+        <p:txBody>
+          <a:bodyPr wrap="square" rtlCol="0" anchor="ctr"/>
+          <a:lstStyle/>
+          <a:p>
+            <a:pPr marL="0" indent="0">
+              <a:buNone/>
+            </a:pPr>
+            <a:r>
+              <a:rPr lang="en-US" sz="1600" dirty="0">
+                <a:solidFill>
+                  <a:srgbClr val="000000"/>
+                </a:solidFill>
+                <a:latin typeface="Segoe UI Emoji" pitchFamily="34" charset="0"/>
+                <a:ea typeface="Segoe UI Emoji" pitchFamily="34" charset="-122"/>
+                <a:cs typeface="Segoe UI Emoji" pitchFamily="34" charset="-120"/>
+              </a:rPr>
+              <a:t>📦</a:t>
+            </a:r>
+            <a:endParaRPr lang="en-US" sz="1600" dirty="0"/>
+          </a:p>
+        </p:txBody>
+      </p:sp>
+      <p:sp>
+        <p:nvSpPr>
+          <p:cNvPr id="44" name="Text 42"/>
+          <p:cNvSpPr/>
+          <p:nvPr/>
+        </p:nvSpPr>
+        <p:spPr>
+          <a:xfrm>
+            <a:off x="6995160" y="5074920"/>
+            <a:ext cx="1554480" cy="228600"/>
+          </a:xfrm>
+          <a:prstGeom prst="rect">
+            <a:avLst/>
+          </a:prstGeom>
+          <a:noFill/>
+          <a:ln/>
+        </p:spPr>
+        <p:txBody>
+          <a:bodyPr wrap="square" rtlCol="0" anchor="ctr"/>
+          <a:lstStyle/>
+          <a:p>
+            <a:pPr marL="0" indent="0">
+              <a:buNone/>
+            </a:pPr>
+            <a:r>
+              <a:rPr lang="en-US" sz="1000" b="1" dirty="0">
+                <a:solidFill>
+                  <a:srgbClr val="58A6FF"/>
+                </a:solidFill>
+                <a:latin typeface="Segoe UI" pitchFamily="34" charset="0"/>
+                <a:ea typeface="Segoe UI" pitchFamily="34" charset="-122"/>
+                <a:cs typeface="Segoe UI" pitchFamily="34" charset="-120"/>
+              </a:rPr>
+              <a:t>Open Source Growth</a:t>
+            </a:r>
+            <a:endParaRPr lang="en-US" sz="1000" dirty="0"/>
+          </a:p>
+        </p:txBody>
+      </p:sp>
+      <p:sp>
+        <p:nvSpPr>
+          <p:cNvPr id="45" name="Text 43"/>
+          <p:cNvSpPr/>
+          <p:nvPr/>
+        </p:nvSpPr>
+        <p:spPr>
+          <a:xfrm>
+            <a:off x="6675120" y="5349240"/>
+            <a:ext cx="1828800" cy="548640"/>
+          </a:xfrm>
+          <a:prstGeom prst="rect">
+            <a:avLst/>
+          </a:prstGeom>
+          <a:noFill/>
+          <a:ln/>
+        </p:spPr>
+        <p:txBody>
+          <a:bodyPr wrap="square" rtlCol="0" anchor="ctr"/>
+          <a:lstStyle/>
+          <a:p>
+            <a:pPr marL="0" indent="0">
+              <a:buNone/>
+            </a:pPr>
+            <a:r>
+              <a:rPr lang="en-US" sz="900" dirty="0">
+                <a:solidFill>
+                  <a:srgbClr val="8B949E"/>
+                </a:solidFill>
+                <a:latin typeface="Segoe UI" pitchFamily="34" charset="0"/>
+                <a:ea typeface="Segoe UI" pitchFamily="34" charset="-122"/>
+                <a:cs typeface="Segoe UI" pitchFamily="34" charset="-120"/>
+              </a:rPr>
+              <a:t>Indonesia now a top-5 global OSS contributor community</a:t>
+            </a:r>
+            <a:endParaRPr lang="en-US" sz="900" dirty="0"/>
+          </a:p>
+        </p:txBody>
+      </p:sp>
+      <p:sp>
+        <p:nvSpPr>
+          <p:cNvPr id="46" name="Shape 44"/>
+          <p:cNvSpPr/>
+          <p:nvPr/>
+        </p:nvSpPr>
+        <p:spPr>
+          <a:xfrm>
+            <a:off x="548640" y="6309360"/>
+            <a:ext cx="8046720" cy="9144"/>
+          </a:xfrm>
+          <a:prstGeom prst="rect">
+            <a:avLst/>
+          </a:prstGeom>
+          <a:solidFill>
+            <a:srgbClr val="21262D"/>
+          </a:solidFill>
+          <a:ln/>
+        </p:spPr>
+        <p:txBody>
+          <a:bodyPr/>
+          <a:lstStyle/>
+          <a:p>
+            <a:endParaRPr lang="en-US"/>
+          </a:p>
+        </p:txBody>
+      </p:sp>
+      <p:sp>
+        <p:nvSpPr>
+          <p:cNvPr id="47" name="Text 45"/>
+          <p:cNvSpPr/>
+          <p:nvPr/>
+        </p:nvSpPr>
+        <p:spPr>
+          <a:xfrm>
+            <a:off x="548640" y="6355080"/>
+            <a:ext cx="3657600" cy="274320"/>
+          </a:xfrm>
+          <a:prstGeom prst="rect">
+            <a:avLst/>
+          </a:prstGeom>
+          <a:noFill/>
+          <a:ln/>
+        </p:spPr>
+        <p:txBody>
+          <a:bodyPr wrap="square" rtlCol="0" anchor="ctr"/>
+          <a:lstStyle/>
+          <a:p>
+            <a:pPr marL="0" indent="0">
+              <a:buNone/>
+            </a:pPr>
+            <a:r>
+              <a:rPr lang="en-US" sz="900" dirty="0">
+                <a:solidFill>
+                  <a:srgbClr val="484F58"/>
+                </a:solidFill>
+                <a:latin typeface="Segoe UI" pitchFamily="34" charset="0"/>
+                <a:ea typeface="Segoe UI" pitchFamily="34" charset="-122"/>
+                <a:cs typeface="Segoe UI" pitchFamily="34" charset="-120"/>
+              </a:rPr>
+              <a:t>Source: GitHub Octoverse 2025</a:t>
+            </a:r>
+            <a:endParaRPr lang="en-US" sz="900" dirty="0"/>
+          </a:p>
+        </p:txBody>
+      </p:sp>
+      <p:sp>
+        <p:nvSpPr>
+          <p:cNvPr id="48" name="Text 46"/>
+          <p:cNvSpPr/>
+          <p:nvPr/>
+        </p:nvSpPr>
+        <p:spPr>
+          <a:xfrm>
+            <a:off x="5120640" y="6355080"/>
+            <a:ext cx="3474720" cy="274320"/>
+          </a:xfrm>
+          <a:prstGeom prst="rect">
+            <a:avLst/>
+          </a:prstGeom>
+          <a:noFill/>
+          <a:ln/>
+        </p:spPr>
+        <p:txBody>
+          <a:bodyPr wrap="square" rtlCol="0" anchor="ctr"/>
+          <a:lstStyle/>
+          <a:p>
+            <a:pPr marL="0" indent="0" algn="r">
+              <a:buNone/>
+            </a:pPr>
+            <a:r>
+              <a:rPr lang="en-US" sz="900" dirty="0">
+                <a:solidFill>
+                  <a:srgbClr val="484F58"/>
+                </a:solidFill>
+                <a:latin typeface="Segoe UI" pitchFamily="34" charset="0"/>
+                <a:ea typeface="Segoe UI" pitchFamily="34" charset="-122"/>
+                <a:cs typeface="Segoe UI" pitchFamily="34" charset="-120"/>
+              </a:rPr>
+              <a:t>github.com/octoverse</a:t>
+            </a:r>
+            <a:endParaRPr lang="en-US" sz="900" dirty="0"/>
           </a:p>
         </p:txBody>
       </p:sp>
@@ -3456,4 +7746,337 @@
   </a:objectDefaults>
   <a:extraClrSchemeLst/>
 </a:theme>
+</file>
+
+<file path=ppt/theme/theme2.xml><?xml version="1.0" encoding="utf-8"?>
+<a:theme xmlns:a="http://schemas.openxmlformats.org/drawingml/2006/main" name="Office Theme">
+  <a:themeElements>
+    <a:clrScheme name="Office">
+      <a:dk1>
+        <a:sysClr val="windowText" lastClr="000000"/>
+      </a:dk1>
+      <a:lt1>
+        <a:sysClr val="window" lastClr="FFFFFF"/>
+      </a:lt1>
+      <a:dk2>
+        <a:srgbClr val="0E2841"/>
+      </a:dk2>
+      <a:lt2>
+        <a:srgbClr val="E8E8E8"/>
+      </a:lt2>
+      <a:accent1>
+        <a:srgbClr val="156082"/>
+      </a:accent1>
+      <a:accent2>
+        <a:srgbClr val="E97132"/>
+      </a:accent2>
+      <a:accent3>
+        <a:srgbClr val="196B24"/>
+      </a:accent3>
+      <a:accent4>
+        <a:srgbClr val="0F9ED5"/>
+      </a:accent4>
+      <a:accent5>
+        <a:srgbClr val="A02B93"/>
+      </a:accent5>
+      <a:accent6>
+        <a:srgbClr val="4EA72E"/>
+      </a:accent6>
+      <a:hlink>
+        <a:srgbClr val="467886"/>
+      </a:hlink>
+      <a:folHlink>
+        <a:srgbClr val="96607D"/>
+      </a:folHlink>
+    </a:clrScheme>
+    <a:fontScheme name="Office">
+      <a:majorFont>
+        <a:latin typeface="Aptos Display" panose="02110004020202020204"/>
+        <a:ea typeface=""/>
+        <a:cs typeface=""/>
+        <a:font script="Jpan" typeface="游ゴシック Light"/>
+        <a:font script="Hang" typeface="맑은 고딕"/>
+        <a:font script="Hans" typeface="等线 Light"/>
+        <a:font script="Hant" typeface="新細明體"/>
+        <a:font script="Arab" typeface="Times New Roman"/>
+        <a:font script="Hebr" typeface="Times New Roman"/>
+        <a:font script="Thai" typeface="Angsana New"/>
+        <a:font script="Ethi" typeface="Nyala"/>
+        <a:font script="Beng" typeface="Vrinda"/>
+        <a:font script="Gujr" typeface="Shruti"/>
+        <a:font script="Khmr" typeface="MoolBoran"/>
+        <a:font script="Knda" typeface="Tunga"/>
+        <a:font script="Guru" typeface="Raavi"/>
+        <a:font script="Cans" typeface="Euphemia"/>
+        <a:font script="Cher" typeface="Plantagenet Cherokee"/>
+        <a:font script="Yiii" typeface="Microsoft Yi Baiti"/>
+        <a:font script="Tibt" typeface="Microsoft Himalaya"/>
+        <a:font script="Thaa" typeface="MV Boli"/>
+        <a:font script="Deva" typeface="Mangal"/>
+        <a:font script="Telu" typeface="Gautami"/>
+        <a:font script="Taml" typeface="Latha"/>
+        <a:font script="Syrc" typeface="Estrangelo Edessa"/>
+        <a:font script="Orya" typeface="Kalinga"/>
+        <a:font script="Mlym" typeface="Kartika"/>
+        <a:font script="Laoo" typeface="DokChampa"/>
+        <a:font script="Sinh" typeface="Iskoola Pota"/>
+        <a:font script="Mong" typeface="Mongolian Baiti"/>
+        <a:font script="Viet" typeface="Times New Roman"/>
+        <a:font script="Uigh" typeface="Microsoft Uighur"/>
+        <a:font script="Geor" typeface="Sylfaen"/>
+        <a:font script="Armn" typeface="Arial"/>
+        <a:font script="Bugi" typeface="Leelawadee UI"/>
+        <a:font script="Bopo" typeface="Microsoft JhengHei"/>
+        <a:font script="Java" typeface="Javanese Text"/>
+        <a:font script="Lisu" typeface="Segoe UI"/>
+        <a:font script="Mymr" typeface="Myanmar Text"/>
+        <a:font script="Nkoo" typeface="Ebrima"/>
+        <a:font script="Olck" typeface="Nirmala UI"/>
+        <a:font script="Osma" typeface="Ebrima"/>
+        <a:font script="Phag" typeface="Phagspa"/>
+        <a:font script="Syrn" typeface="Estrangelo Edessa"/>
+        <a:font script="Syrj" typeface="Estrangelo Edessa"/>
+        <a:font script="Syre" typeface="Estrangelo Edessa"/>
+        <a:font script="Sora" typeface="Nirmala UI"/>
+        <a:font script="Tale" typeface="Microsoft Tai Le"/>
+        <a:font script="Talu" typeface="Microsoft New Tai Lue"/>
+        <a:font script="Tfng" typeface="Ebrima"/>
+      </a:majorFont>
+      <a:minorFont>
+        <a:latin typeface="Aptos" panose="02110004020202020204"/>
+        <a:ea typeface=""/>
+        <a:cs typeface=""/>
+        <a:font script="Jpan" typeface="游ゴシック"/>
+        <a:font script="Hang" typeface="맑은 고딕"/>
+        <a:font script="Hans" typeface="等线"/>
+        <a:font script="Hant" typeface="新細明體"/>
+        <a:font script="Arab" typeface="Arial"/>
+        <a:font script="Hebr" typeface="Arial"/>
+        <a:font script="Thai" typeface="Cordia New"/>
+        <a:font script="Ethi" typeface="Nyala"/>
+        <a:font script="Beng" typeface="Vrinda"/>
+        <a:font script="Gujr" typeface="Shruti"/>
+        <a:font script="Khmr" typeface="DaunPenh"/>
+        <a:font script="Knda" typeface="Tunga"/>
+        <a:font script="Guru" typeface="Raavi"/>
+        <a:font script="Cans" typeface="Euphemia"/>
+        <a:font script="Cher" typeface="Plantagenet Cherokee"/>
+        <a:font script="Yiii" typeface="Microsoft Yi Baiti"/>
+        <a:font script="Tibt" typeface="Microsoft Himalaya"/>
+        <a:font script="Thaa" typeface="MV Boli"/>
+        <a:font script="Deva" typeface="Mangal"/>
+        <a:font script="Telu" typeface="Gautami"/>
+        <a:font script="Taml" typeface="Latha"/>
+        <a:font script="Syrc" typeface="Estrangelo Edessa"/>
+        <a:font script="Orya" typeface="Kalinga"/>
+        <a:font script="Mlym" typeface="Kartika"/>
+        <a:font script="Laoo" typeface="DokChampa"/>
+        <a:font script="Sinh" typeface="Iskoola Pota"/>
+        <a:font script="Mong" typeface="Mongolian Baiti"/>
+        <a:font script="Viet" typeface="Arial"/>
+        <a:font script="Uigh" typeface="Microsoft Uighur"/>
+        <a:font script="Geor" typeface="Sylfaen"/>
+        <a:font script="Armn" typeface="Arial"/>
+        <a:font script="Bugi" typeface="Leelawadee UI"/>
+        <a:font script="Bopo" typeface="Microsoft JhengHei"/>
+        <a:font script="Java" typeface="Javanese Text"/>
+        <a:font script="Lisu" typeface="Segoe UI"/>
+        <a:font script="Mymr" typeface="Myanmar Text"/>
+        <a:font script="Nkoo" typeface="Ebrima"/>
+        <a:font script="Olck" typeface="Nirmala UI"/>
+        <a:font script="Osma" typeface="Ebrima"/>
+        <a:font script="Phag" typeface="Phagspa"/>
+        <a:font script="Syrn" typeface="Estrangelo Edessa"/>
+        <a:font script="Syrj" typeface="Estrangelo Edessa"/>
+        <a:font script="Syre" typeface="Estrangelo Edessa"/>
+        <a:font script="Sora" typeface="Nirmala UI"/>
+        <a:font script="Tale" typeface="Microsoft Tai Le"/>
+        <a:font script="Talu" typeface="Microsoft New Tai Lue"/>
+        <a:font script="Tfng" typeface="Ebrima"/>
+      </a:minorFont>
+    </a:fontScheme>
+    <a:fmtScheme name="Office">
+      <a:fillStyleLst>
+        <a:solidFill>
+          <a:schemeClr val="phClr"/>
+        </a:solidFill>
+        <a:gradFill rotWithShape="1">
+          <a:gsLst>
+            <a:gs pos="0">
+              <a:schemeClr val="phClr">
+                <a:lumMod val="110000"/>
+                <a:satMod val="105000"/>
+                <a:tint val="67000"/>
+              </a:schemeClr>
+            </a:gs>
+            <a:gs pos="50000">
+              <a:schemeClr val="phClr">
+                <a:lumMod val="105000"/>
+                <a:satMod val="103000"/>
+                <a:tint val="73000"/>
+              </a:schemeClr>
+            </a:gs>
+            <a:gs pos="100000">
+              <a:schemeClr val="phClr">
+                <a:lumMod val="105000"/>
+                <a:satMod val="109000"/>
+                <a:tint val="81000"/>
+              </a:schemeClr>
+            </a:gs>
+          </a:gsLst>
+          <a:lin ang="5400000" scaled="0"/>
+        </a:gradFill>
+        <a:gradFill rotWithShape="1">
+          <a:gsLst>
+            <a:gs pos="0">
+              <a:schemeClr val="phClr">
+                <a:satMod val="103000"/>
+                <a:lumMod val="102000"/>
+                <a:tint val="94000"/>
+              </a:schemeClr>
+            </a:gs>
+            <a:gs pos="50000">
+              <a:schemeClr val="phClr">
+                <a:satMod val="110000"/>
+                <a:lumMod val="100000"/>
+                <a:shade val="100000"/>
+              </a:schemeClr>
+            </a:gs>
+            <a:gs pos="100000">
+              <a:schemeClr val="phClr">
+                <a:lumMod val="99000"/>
+                <a:satMod val="120000"/>
+                <a:shade val="78000"/>
+              </a:schemeClr>
+            </a:gs>
+          </a:gsLst>
+          <a:lin ang="5400000" scaled="0"/>
+        </a:gradFill>
+      </a:fillStyleLst>
+      <a:lnStyleLst>
+        <a:ln w="12700" cap="flat" cmpd="sng" algn="ctr">
+          <a:solidFill>
+            <a:schemeClr val="phClr"/>
+          </a:solidFill>
+          <a:prstDash val="solid"/>
+          <a:miter lim="800000"/>
+        </a:ln>
+        <a:ln w="19050" cap="flat" cmpd="sng" algn="ctr">
+          <a:solidFill>
+            <a:schemeClr val="phClr"/>
+          </a:solidFill>
+          <a:prstDash val="solid"/>
+          <a:miter lim="800000"/>
+        </a:ln>
+        <a:ln w="25400" cap="flat" cmpd="sng" algn="ctr">
+          <a:solidFill>
+            <a:schemeClr val="phClr"/>
+          </a:solidFill>
+          <a:prstDash val="solid"/>
+          <a:miter lim="800000"/>
+        </a:ln>
+      </a:lnStyleLst>
+      <a:effectStyleLst>
+        <a:effectStyle>
+          <a:effectLst/>
+        </a:effectStyle>
+        <a:effectStyle>
+          <a:effectLst/>
+        </a:effectStyle>
+        <a:effectStyle>
+          <a:effectLst>
+            <a:outerShdw blurRad="57150" dist="19050" dir="5400000" algn="ctr" rotWithShape="0">
+              <a:srgbClr val="000000">
+                <a:alpha val="63000"/>
+              </a:srgbClr>
+            </a:outerShdw>
+          </a:effectLst>
+        </a:effectStyle>
+      </a:effectStyleLst>
+      <a:bgFillStyleLst>
+        <a:solidFill>
+          <a:schemeClr val="phClr"/>
+        </a:solidFill>
+        <a:solidFill>
+          <a:schemeClr val="phClr">
+            <a:tint val="95000"/>
+            <a:satMod val="170000"/>
+          </a:schemeClr>
+        </a:solidFill>
+        <a:gradFill rotWithShape="1">
+          <a:gsLst>
+            <a:gs pos="0">
+              <a:schemeClr val="phClr">
+                <a:tint val="93000"/>
+                <a:satMod val="150000"/>
+                <a:shade val="98000"/>
+                <a:lumMod val="102000"/>
+              </a:schemeClr>
+            </a:gs>
+            <a:gs pos="50000">
+              <a:schemeClr val="phClr">
+                <a:tint val="98000"/>
+                <a:satMod val="130000"/>
+                <a:shade val="90000"/>
+                <a:lumMod val="103000"/>
+              </a:schemeClr>
+            </a:gs>
+            <a:gs pos="100000">
+              <a:schemeClr val="phClr">
+                <a:shade val="63000"/>
+                <a:satMod val="120000"/>
+              </a:schemeClr>
+            </a:gs>
+          </a:gsLst>
+          <a:lin ang="5400000" scaled="0"/>
+        </a:gradFill>
+      </a:bgFillStyleLst>
+    </a:fmtScheme>
+  </a:themeElements>
+  <a:objectDefaults>
+    <a:lnDef>
+      <a:spPr/>
+      <a:bodyPr/>
+      <a:lstStyle/>
+      <a:style>
+        <a:lnRef idx="2">
+          <a:schemeClr val="accent1"/>
+        </a:lnRef>
+        <a:fillRef idx="0">
+          <a:schemeClr val="accent1"/>
+        </a:fillRef>
+        <a:effectRef idx="1">
+          <a:schemeClr val="accent1"/>
+        </a:effectRef>
+        <a:fontRef idx="minor">
+          <a:schemeClr val="tx1"/>
+        </a:fontRef>
+      </a:style>
+    </a:lnDef>
+  </a:objectDefaults>
+  <a:extraClrSchemeLst/>
+  <a:extLst>
+    <a:ext uri="{05A4C25C-085E-4340-85A3-A5531E510DB2}">
+      <thm15:themeFamily xmlns:thm15="http://schemas.microsoft.com/office/thememl/2012/main" name="Office Theme" id="{2E142A2C-CD16-42D6-873A-C26D2A0506FA}" vid="{1BDDFF52-6CD6-40A5-AB3C-68EB2F1E4D0A}"/>
+    </a:ext>
+  </a:extLst>
+</a:theme>
+</file>
+
+<file path=ppt/webextensions/taskpanes.xml><?xml version="1.0" encoding="utf-8"?>
+<wetp:taskpanes xmlns:wetp="http://schemas.microsoft.com/office/webextensions/taskpanes/2010/11">
+  <wetp:taskpane dockstate="right" visibility="0" width="350" row="0">
+    <wetp:webextensionref xmlns:r="http://schemas.openxmlformats.org/officeDocument/2006/relationships" r:id="rId1"/>
+  </wetp:taskpane>
+</wetp:taskpanes>
+</file>
+
+<file path=ppt/webextensions/webextension1.xml><?xml version="1.0" encoding="utf-8"?>
+<we:webextension xmlns:we="http://schemas.microsoft.com/office/webextensions/webextension/2010/11" id="{47224B91-EB88-C146-A0F3-E66689001FD2}">
+  <we:reference id="12345678-1234-1234-1234-123456789012" version="1.0.0.0" store="developer" storeType="Registry"/>
+  <we:alternateReferences/>
+  <we:properties/>
+  <we:bindings/>
+  <we:snapshot xmlns:r="http://schemas.openxmlformats.org/officeDocument/2006/relationships"/>
+</we:webextension>
 </file>
--- a/files/demo-presentation.pptx
+++ b/files/demo-presentation.pptx
@@ -5,11 +5,12 @@
     <p:sldMasterId id="2147483648" r:id="rId1"/>
   </p:sldMasterIdLst>
   <p:notesMasterIdLst>
-    <p:notesMasterId r:id="rId4"/>
+    <p:notesMasterId r:id="rId5"/>
   </p:notesMasterIdLst>
   <p:sldIdLst>
     <p:sldId id="257" r:id="rId2"/>
-    <p:sldId id="256" r:id="rId3"/>
+    <p:sldId id="258" r:id="rId3"/>
+    <p:sldId id="256" r:id="rId4"/>
   </p:sldIdLst>
   <p:sldSz cx="9144000" cy="5143500" type="screen16x9"/>
   <p:notesSz cx="6858000" cy="9144000"/>
@@ -645,6 +646,90 @@
 </p:notes>
 </file>
 
+<file path=ppt/notesSlides/notesSlide3.xml><?xml version="1.0" encoding="utf-8"?>
+<p:notes xmlns:a="http://schemas.openxmlformats.org/drawingml/2006/main" xmlns:r="http://schemas.openxmlformats.org/officeDocument/2006/relationships" xmlns:p="http://schemas.openxmlformats.org/presentationml/2006/main">
+  <p:cSld>
+    <p:spTree>
+      <p:nvGrpSpPr>
+        <p:cNvPr id="1" name=""/>
+        <p:cNvGrpSpPr/>
+        <p:nvPr/>
+      </p:nvGrpSpPr>
+      <p:grpSpPr>
+        <a:xfrm>
+          <a:off x="0" y="0"/>
+          <a:ext cx="0" cy="0"/>
+          <a:chOff x="0" y="0"/>
+          <a:chExt cx="0" cy="0"/>
+        </a:xfrm>
+      </p:grpSpPr>
+      <p:sp>
+        <p:nvSpPr>
+          <p:cNvPr id="2" name="Slide Image Placeholder 1"/>
+          <p:cNvSpPr>
+            <a:spLocks noGrp="1" noRot="1" noChangeAspect="1"/>
+          </p:cNvSpPr>
+          <p:nvPr>
+            <p:ph type="sldImg"/>
+          </p:nvPr>
+        </p:nvSpPr>
+        <p:spPr/>
+      </p:sp>
+      <p:sp>
+        <p:nvSpPr>
+          <p:cNvPr id="3" name="Notes Placeholder 2"/>
+          <p:cNvSpPr>
+            <a:spLocks noGrp="1"/>
+          </p:cNvSpPr>
+          <p:nvPr>
+            <p:ph type="body" idx="1"/>
+          </p:nvPr>
+        </p:nvSpPr>
+        <p:spPr/>
+        <p:txBody>
+          <a:bodyPr/>
+          <a:lstStyle/>
+          <a:p>
+            <a:endParaRPr lang="en-US" dirty="0"/>
+          </a:p>
+        </p:txBody>
+      </p:sp>
+      <p:sp>
+        <p:nvSpPr>
+          <p:cNvPr id="4" name="Slide Number Placeholder 3"/>
+          <p:cNvSpPr>
+            <a:spLocks noGrp="1"/>
+          </p:cNvSpPr>
+          <p:nvPr>
+            <p:ph type="sldNum" sz="quarter" idx="10"/>
+          </p:nvPr>
+        </p:nvSpPr>
+        <p:spPr/>
+        <p:txBody>
+          <a:bodyPr/>
+          <a:lstStyle/>
+          <a:p>
+            <a:fld id="{F7021451-1387-4CA6-816F-3879F97B5CBC}" type="slidenum">
+              <a:rPr lang="en-US"/>
+              <a:t>3</a:t>
+            </a:fld>
+            <a:endParaRPr lang="en-US"/>
+          </a:p>
+        </p:txBody>
+      </p:sp>
+    </p:spTree>
+    <p:extLst>
+      <p:ext uri="{BB962C8B-B14F-4D97-AF65-F5344CB8AC3E}">
+        <p14:creationId xmlns:p14="http://schemas.microsoft.com/office/powerpoint/2010/main" val="1024086991"/>
+      </p:ext>
+    </p:extLst>
+  </p:cSld>
+  <p:clrMapOvr>
+    <a:masterClrMapping/>
+  </p:clrMapOvr>
+</p:notes>
+</file>
+
 <file path=ppt/slideLayouts/slideLayout1.xml><?xml version="1.0" encoding="utf-8"?>
 <p:sldLayout xmlns:a="http://schemas.openxmlformats.org/drawingml/2006/main" xmlns:r="http://schemas.openxmlformats.org/officeDocument/2006/relationships" xmlns:p="http://schemas.openxmlformats.org/presentationml/2006/main" type="title" preserve="1">
   <p:cSld name="Title Slide">
@@ -5636,7 +5721,7 @@
         <p:spPr>
           <a:xfrm>
             <a:off x="0" y="0"/>
-            <a:ext cx="9144000" cy="6858000"/>
+            <a:ext cx="9144000" cy="5143500"/>
           </a:xfrm>
           <a:prstGeom prst="rect">
             <a:avLst/>
@@ -5663,7 +5748,7 @@
         <p:spPr>
           <a:xfrm>
             <a:off x="0" y="0"/>
-            <a:ext cx="9144000" cy="54864"/>
+            <a:ext cx="9144000" cy="32004"/>
           </a:xfrm>
           <a:prstGeom prst="rect">
             <a:avLst/>
@@ -5689,8 +5774,8 @@
         </p:nvSpPr>
         <p:spPr>
           <a:xfrm>
-            <a:off x="548640" y="320040"/>
-            <a:ext cx="4572000" cy="320040"/>
+            <a:off x="457200" y="91440"/>
+            <a:ext cx="4572000" cy="146304"/>
           </a:xfrm>
           <a:prstGeom prst="rect">
             <a:avLst/>
@@ -5706,7 +5791,7 @@
               <a:buNone/>
             </a:pPr>
             <a:r>
-              <a:rPr lang="en-US" sz="1000" b="1" dirty="0">
+              <a:rPr lang="en-US" sz="750" b="1" dirty="0">
                 <a:solidFill>
                   <a:srgbClr val="3FB950"/>
                 </a:solidFill>
@@ -5716,7 +5801,7 @@
               </a:rPr>
               <a:t>STATE OF THE OCTOVERSE 2025</a:t>
             </a:r>
-            <a:endParaRPr lang="en-US" sz="1000" dirty="0"/>
+            <a:endParaRPr lang="en-US" sz="750" dirty="0"/>
           </a:p>
         </p:txBody>
       </p:sp>
@@ -5728,8 +5813,8 @@
         </p:nvSpPr>
         <p:spPr>
           <a:xfrm>
-            <a:off x="548640" y="640080"/>
-            <a:ext cx="7772400" cy="640080"/>
+            <a:off x="457200" y="228600"/>
+            <a:ext cx="8229600" cy="292608"/>
           </a:xfrm>
           <a:prstGeom prst="rect">
             <a:avLst/>
@@ -5745,7 +5830,7 @@
               <a:buNone/>
             </a:pPr>
             <a:r>
-              <a:rPr lang="en-US" sz="3000" b="1" dirty="0">
+              <a:rPr lang="en-US" sz="2000" b="1" dirty="0">
                 <a:solidFill>
                   <a:srgbClr val="F0F6FC"/>
                 </a:solidFill>
@@ -5753,31 +5838,9 @@
                 <a:ea typeface="Segoe UI" pitchFamily="34" charset="-122"/>
                 <a:cs typeface="Segoe UI" pitchFamily="34" charset="-120"/>
               </a:rPr>
-              <a:t>The Rise of </a:t>
-            </a:r>
-            <a:r>
-              <a:rPr lang="en-US" sz="3000" b="1" dirty="0" err="1">
-                <a:solidFill>
-                  <a:srgbClr val="F0F6FC"/>
-                </a:solidFill>
-                <a:latin typeface="Segoe UI" pitchFamily="34" charset="0"/>
-                <a:ea typeface="Segoe UI" pitchFamily="34" charset="-122"/>
-                <a:cs typeface="Segoe UI" pitchFamily="34" charset="-120"/>
-              </a:rPr>
-              <a:t>Southytjtyuytjutyjrytjrytjryteast</a:t>
-            </a:r>
-            <a:r>
-              <a:rPr lang="en-US" sz="3000" b="1" dirty="0">
-                <a:solidFill>
-                  <a:srgbClr val="F0F6FC"/>
-                </a:solidFill>
-                <a:latin typeface="Segoe UI" pitchFamily="34" charset="0"/>
-                <a:ea typeface="Segoe UI" pitchFamily="34" charset="-122"/>
-                <a:cs typeface="Segoe UI" pitchFamily="34" charset="-120"/>
-              </a:rPr>
-              <a:t> Asia</a:t>
-            </a:r>
-            <a:endParaRPr lang="en-US" sz="3000" dirty="0"/>
+              <a:t>The Rise of Southeast Asia</a:t>
+            </a:r>
+            <a:endParaRPr lang="en-US" sz="2000" dirty="0"/>
           </a:p>
         </p:txBody>
       </p:sp>
@@ -5789,8 +5852,8 @@
         </p:nvSpPr>
         <p:spPr>
           <a:xfrm>
-            <a:off x="548640" y="1234440"/>
-            <a:ext cx="6858000" cy="411480"/>
+            <a:off x="457200" y="512064"/>
+            <a:ext cx="7315200" cy="146304"/>
           </a:xfrm>
           <a:prstGeom prst="rect">
             <a:avLst/>
@@ -5806,7 +5869,7 @@
               <a:buNone/>
             </a:pPr>
             <a:r>
-              <a:rPr lang="en-US" sz="1300" dirty="0">
+              <a:rPr lang="en-US" sz="850" dirty="0">
                 <a:solidFill>
                   <a:srgbClr val="8B949E"/>
                 </a:solidFill>
@@ -5816,7 +5879,7 @@
               </a:rPr>
               <a:t>A fast-growing developer ecosystem powered by digital transformation, AI adoption &amp; open source</a:t>
             </a:r>
-            <a:endParaRPr lang="en-US" sz="1300" dirty="0"/>
+            <a:endParaRPr lang="en-US" sz="850" dirty="0"/>
           </a:p>
         </p:txBody>
       </p:sp>
@@ -5828,8 +5891,8 @@
         </p:nvSpPr>
         <p:spPr>
           <a:xfrm>
-            <a:off x="548640" y="1783080"/>
-            <a:ext cx="8046720" cy="18288"/>
+            <a:off x="457200" y="694944"/>
+            <a:ext cx="8229600" cy="5486"/>
           </a:xfrm>
           <a:prstGeom prst="rect">
             <a:avLst/>
@@ -5854,13 +5917,13 @@
           <p:nvPr/>
         </p:nvSpPr>
         <p:spPr>
-          <a:xfrm flipV="1">
-            <a:off x="548640" y="4389120"/>
-            <a:ext cx="3840480" cy="420624"/>
+          <a:xfrm>
+            <a:off x="457200" y="777240"/>
+            <a:ext cx="3931920" cy="1463040"/>
           </a:xfrm>
           <a:prstGeom prst="roundRect">
             <a:avLst>
-              <a:gd name="adj" fmla="val 4615"/>
+              <a:gd name="adj" fmla="val 5000"/>
             </a:avLst>
           </a:prstGeom>
           <a:solidFill>
@@ -5889,8 +5952,8 @@
         </p:nvSpPr>
         <p:spPr>
           <a:xfrm>
-            <a:off x="777240" y="2212848"/>
-            <a:ext cx="164592" cy="164592"/>
+            <a:off x="603504" y="868680"/>
+            <a:ext cx="91440" cy="91440"/>
           </a:xfrm>
           <a:prstGeom prst="ellipse">
             <a:avLst/>
@@ -5916,8 +5979,8 @@
         </p:nvSpPr>
         <p:spPr>
           <a:xfrm>
-            <a:off x="1051560" y="2148840"/>
-            <a:ext cx="2743200" cy="274320"/>
+            <a:off x="731520" y="822960"/>
+            <a:ext cx="3383280" cy="164592"/>
           </a:xfrm>
           <a:prstGeom prst="rect">
             <a:avLst/>
@@ -5933,7 +5996,7 @@
               <a:buNone/>
             </a:pPr>
             <a:r>
-              <a:rPr lang="en-US" sz="1300" b="1" dirty="0">
+              <a:rPr lang="en-US" sz="850" b="1" dirty="0">
                 <a:solidFill>
                   <a:srgbClr val="F0F6FC"/>
                 </a:solidFill>
@@ -5941,9 +6004,9 @@
                 <a:ea typeface="Segoe UI" pitchFamily="34" charset="-122"/>
                 <a:cs typeface="Segoe UI" pitchFamily="34" charset="-120"/>
               </a:rPr>
-              <a:t>Indonesia</a:t>
-            </a:r>
-            <a:endParaRPr lang="en-US" sz="1300" dirty="0"/>
+              <a:t>Indonesia  ·  SE Asia's Digital Powerhouse</a:t>
+            </a:r>
+            <a:endParaRPr lang="en-US" sz="850" dirty="0"/>
           </a:p>
         </p:txBody>
       </p:sp>
@@ -5955,8 +6018,8 @@
         </p:nvSpPr>
         <p:spPr>
           <a:xfrm>
-            <a:off x="777240" y="2423160"/>
-            <a:ext cx="3383280" cy="228600"/>
+            <a:off x="603504" y="1005840"/>
+            <a:ext cx="3200400" cy="347472"/>
           </a:xfrm>
           <a:prstGeom prst="rect">
             <a:avLst/>
@@ -5972,46 +6035,7 @@
               <a:buNone/>
             </a:pPr>
             <a:r>
-              <a:rPr lang="en-US" sz="1000" i="1" dirty="0">
-                <a:solidFill>
-                  <a:srgbClr val="8B949E"/>
-                </a:solidFill>
-                <a:latin typeface="Segoe UI" pitchFamily="34" charset="0"/>
-                <a:ea typeface="Segoe UI" pitchFamily="34" charset="-122"/>
-                <a:cs typeface="Segoe UI" pitchFamily="34" charset="-120"/>
-              </a:rPr>
-              <a:t>Southeast Asia's Digital Powerhouse</a:t>
-            </a:r>
-            <a:endParaRPr lang="en-US" sz="1000" dirty="0"/>
-          </a:p>
-        </p:txBody>
-      </p:sp>
-      <p:sp>
-        <p:nvSpPr>
-          <p:cNvPr id="12" name="Text 10"/>
-          <p:cNvSpPr/>
-          <p:nvPr/>
-        </p:nvSpPr>
-        <p:spPr>
-          <a:xfrm>
-            <a:off x="777240" y="2697480"/>
-            <a:ext cx="3200400" cy="640080"/>
-          </a:xfrm>
-          <a:prstGeom prst="rect">
-            <a:avLst/>
-          </a:prstGeom>
-          <a:noFill/>
-          <a:ln/>
-        </p:spPr>
-        <p:txBody>
-          <a:bodyPr wrap="square" rtlCol="0" anchor="ctr"/>
-          <a:lstStyle/>
-          <a:p>
-            <a:pPr marL="0" indent="0">
-              <a:buNone/>
-            </a:pPr>
-            <a:r>
-              <a:rPr lang="en-US" sz="4200" b="1" dirty="0">
+              <a:rPr lang="en-US" sz="2800" b="1" dirty="0">
                 <a:solidFill>
                   <a:srgbClr val="58A6FF"/>
                 </a:solidFill>
@@ -6019,22 +6043,22 @@
                 <a:ea typeface="Segoe UI" pitchFamily="34" charset="-122"/>
                 <a:cs typeface="Segoe UI" pitchFamily="34" charset="-120"/>
               </a:rPr>
-              <a:t>4.37Mjtyjytfjtyjjuytjuryt</a:t>
-            </a:r>
-            <a:endParaRPr lang="en-US" sz="4200" dirty="0"/>
-          </a:p>
-        </p:txBody>
-      </p:sp>
-      <p:sp>
-        <p:nvSpPr>
-          <p:cNvPr id="13" name="Text 11"/>
-          <p:cNvSpPr/>
-          <p:nvPr/>
-        </p:nvSpPr>
-        <p:spPr>
-          <a:xfrm>
-            <a:off x="777240" y="3291840"/>
-            <a:ext cx="3200400" cy="228600"/>
+              <a:t>4.37M</a:t>
+            </a:r>
+            <a:endParaRPr lang="en-US" sz="2800" dirty="0"/>
+          </a:p>
+        </p:txBody>
+      </p:sp>
+      <p:sp>
+        <p:nvSpPr>
+          <p:cNvPr id="12" name="Text 10"/>
+          <p:cNvSpPr/>
+          <p:nvPr/>
+        </p:nvSpPr>
+        <p:spPr>
+          <a:xfrm>
+            <a:off x="603504" y="1344168"/>
+            <a:ext cx="3200400" cy="128016"/>
           </a:xfrm>
           <a:prstGeom prst="rect">
             <a:avLst/>
@@ -6050,7 +6074,7 @@
               <a:buNone/>
             </a:pPr>
             <a:r>
-              <a:rPr lang="en-US" sz="1100" dirty="0">
+              <a:rPr lang="en-US" sz="800" dirty="0">
                 <a:solidFill>
                   <a:srgbClr val="8B949E"/>
                 </a:solidFill>
@@ -6060,24 +6084,24 @@
               </a:rPr>
               <a:t>developers on GitHub in 2025</a:t>
             </a:r>
-            <a:endParaRPr lang="en-US" sz="1100" dirty="0"/>
-          </a:p>
-        </p:txBody>
-      </p:sp>
-      <p:sp>
-        <p:nvSpPr>
-          <p:cNvPr id="14" name="Shape 12"/>
-          <p:cNvSpPr/>
-          <p:nvPr/>
-        </p:nvSpPr>
-        <p:spPr>
-          <a:xfrm>
-            <a:off x="777240" y="3611880"/>
-            <a:ext cx="1463040" cy="320040"/>
+            <a:endParaRPr lang="en-US" sz="800" dirty="0"/>
+          </a:p>
+        </p:txBody>
+      </p:sp>
+      <p:sp>
+        <p:nvSpPr>
+          <p:cNvPr id="13" name="Shape 11"/>
+          <p:cNvSpPr/>
+          <p:nvPr/>
+        </p:nvSpPr>
+        <p:spPr>
+          <a:xfrm>
+            <a:off x="603504" y="1527048"/>
+            <a:ext cx="1234440" cy="182880"/>
           </a:xfrm>
           <a:prstGeom prst="roundRect">
             <a:avLst>
-              <a:gd name="adj" fmla="val 22857"/>
+              <a:gd name="adj" fmla="val 20000"/>
             </a:avLst>
           </a:prstGeom>
           <a:solidFill>
@@ -6095,14 +6119,14 @@
       </p:sp>
       <p:sp>
         <p:nvSpPr>
-          <p:cNvPr id="15" name="Text 13"/>
-          <p:cNvSpPr/>
-          <p:nvPr/>
-        </p:nvSpPr>
-        <p:spPr>
-          <a:xfrm>
-            <a:off x="777240" y="3611880"/>
-            <a:ext cx="1463040" cy="320040"/>
+          <p:cNvPr id="14" name="Text 12"/>
+          <p:cNvSpPr/>
+          <p:nvPr/>
+        </p:nvSpPr>
+        <p:spPr>
+          <a:xfrm>
+            <a:off x="603504" y="1527048"/>
+            <a:ext cx="1234440" cy="182880"/>
           </a:xfrm>
           <a:prstGeom prst="rect">
             <a:avLst/>
@@ -6118,7 +6142,7 @@
               <a:buNone/>
             </a:pPr>
             <a:r>
-              <a:rPr lang="en-US" sz="1000" b="1" dirty="0">
+              <a:rPr lang="en-US" sz="750" b="1" dirty="0">
                 <a:solidFill>
                   <a:srgbClr val="3FB950"/>
                 </a:solidFill>
@@ -6128,24 +6152,24 @@
               </a:rPr>
               <a:t>▲ ~4.9× since 2020</a:t>
             </a:r>
-            <a:endParaRPr lang="en-US" sz="1000" dirty="0"/>
-          </a:p>
-        </p:txBody>
-      </p:sp>
-      <p:sp>
-        <p:nvSpPr>
-          <p:cNvPr id="16" name="Shape 14"/>
-          <p:cNvSpPr/>
-          <p:nvPr/>
-        </p:nvSpPr>
-        <p:spPr>
-          <a:xfrm>
-            <a:off x="2377440" y="3611880"/>
-            <a:ext cx="1691640" cy="320040"/>
+            <a:endParaRPr lang="en-US" sz="750" dirty="0"/>
+          </a:p>
+        </p:txBody>
+      </p:sp>
+      <p:sp>
+        <p:nvSpPr>
+          <p:cNvPr id="15" name="Shape 13"/>
+          <p:cNvSpPr/>
+          <p:nvPr/>
+        </p:nvSpPr>
+        <p:spPr>
+          <a:xfrm>
+            <a:off x="1901952" y="1527048"/>
+            <a:ext cx="1280160" cy="182880"/>
           </a:xfrm>
           <a:prstGeom prst="roundRect">
             <a:avLst>
-              <a:gd name="adj" fmla="val 22857"/>
+              <a:gd name="adj" fmla="val 20000"/>
             </a:avLst>
           </a:prstGeom>
           <a:solidFill>
@@ -6163,14 +6187,14 @@
       </p:sp>
       <p:sp>
         <p:nvSpPr>
-          <p:cNvPr id="17" name="Text 15"/>
-          <p:cNvSpPr/>
-          <p:nvPr/>
-        </p:nvSpPr>
-        <p:spPr>
-          <a:xfrm>
-            <a:off x="2377440" y="3611880"/>
-            <a:ext cx="1691640" cy="320040"/>
+          <p:cNvPr id="16" name="Text 14"/>
+          <p:cNvSpPr/>
+          <p:nvPr/>
+        </p:nvSpPr>
+        <p:spPr>
+          <a:xfrm>
+            <a:off x="1901952" y="1527048"/>
+            <a:ext cx="1280160" cy="182880"/>
           </a:xfrm>
           <a:prstGeom prst="rect">
             <a:avLst/>
@@ -6186,7 +6210,7 @@
               <a:buNone/>
             </a:pPr>
             <a:r>
-              <a:rPr lang="en-US" sz="1000" dirty="0">
+              <a:rPr lang="en-US" sz="750" dirty="0">
                 <a:solidFill>
                   <a:srgbClr val="8B949E"/>
                 </a:solidFill>
@@ -6196,24 +6220,24 @@
               </a:rPr>
               <a:t>up from 0.9M in 2020</a:t>
             </a:r>
-            <a:endParaRPr lang="en-US" sz="1000" dirty="0"/>
-          </a:p>
-        </p:txBody>
-      </p:sp>
-      <p:sp>
-        <p:nvSpPr>
-          <p:cNvPr id="18" name="Shape 16"/>
-          <p:cNvSpPr/>
-          <p:nvPr/>
-        </p:nvSpPr>
-        <p:spPr>
-          <a:xfrm>
-            <a:off x="777240" y="4023360"/>
-            <a:ext cx="1097280" cy="256032"/>
+            <a:endParaRPr lang="en-US" sz="750" dirty="0"/>
+          </a:p>
+        </p:txBody>
+      </p:sp>
+      <p:sp>
+        <p:nvSpPr>
+          <p:cNvPr id="17" name="Shape 15"/>
+          <p:cNvSpPr/>
+          <p:nvPr/>
+        </p:nvSpPr>
+        <p:spPr>
+          <a:xfrm>
+            <a:off x="603504" y="1755648"/>
+            <a:ext cx="960120" cy="182880"/>
           </a:xfrm>
           <a:prstGeom prst="roundRect">
             <a:avLst>
-              <a:gd name="adj" fmla="val 25000"/>
+              <a:gd name="adj" fmla="val 20000"/>
             </a:avLst>
           </a:prstGeom>
           <a:solidFill>
@@ -6231,14 +6255,14 @@
       </p:sp>
       <p:sp>
         <p:nvSpPr>
-          <p:cNvPr id="19" name="Text 17"/>
-          <p:cNvSpPr/>
-          <p:nvPr/>
-        </p:nvSpPr>
-        <p:spPr>
-          <a:xfrm>
-            <a:off x="777240" y="4023360"/>
-            <a:ext cx="1097280" cy="256032"/>
+          <p:cNvPr id="18" name="Text 16"/>
+          <p:cNvSpPr/>
+          <p:nvPr/>
+        </p:nvSpPr>
+        <p:spPr>
+          <a:xfrm>
+            <a:off x="603504" y="1755648"/>
+            <a:ext cx="960120" cy="182880"/>
           </a:xfrm>
           <a:prstGeom prst="rect">
             <a:avLst/>
@@ -6254,7 +6278,7 @@
               <a:buNone/>
             </a:pPr>
             <a:r>
-              <a:rPr lang="en-US" sz="900" b="1" dirty="0">
+              <a:rPr lang="en-US" sz="650" b="1" dirty="0">
                 <a:solidFill>
                   <a:srgbClr val="A371F7"/>
                 </a:solidFill>
@@ -6264,24 +6288,24 @@
               </a:rPr>
               <a:t>Ranked #8 globally</a:t>
             </a:r>
-            <a:endParaRPr lang="en-US" sz="900" dirty="0"/>
-          </a:p>
-        </p:txBody>
-      </p:sp>
-      <p:sp>
-        <p:nvSpPr>
-          <p:cNvPr id="20" name="Shape 18"/>
-          <p:cNvSpPr/>
-          <p:nvPr/>
-        </p:nvSpPr>
-        <p:spPr>
-          <a:xfrm>
-            <a:off x="1965960" y="4023360"/>
-            <a:ext cx="1508760" cy="256032"/>
+            <a:endParaRPr lang="en-US" sz="650" dirty="0"/>
+          </a:p>
+        </p:txBody>
+      </p:sp>
+      <p:sp>
+        <p:nvSpPr>
+          <p:cNvPr id="19" name="Shape 17"/>
+          <p:cNvSpPr/>
+          <p:nvPr/>
+        </p:nvSpPr>
+        <p:spPr>
+          <a:xfrm>
+            <a:off x="1627632" y="1755648"/>
+            <a:ext cx="1280160" cy="182880"/>
           </a:xfrm>
           <a:prstGeom prst="roundRect">
             <a:avLst>
-              <a:gd name="adj" fmla="val 25000"/>
+              <a:gd name="adj" fmla="val 20000"/>
             </a:avLst>
           </a:prstGeom>
           <a:solidFill>
@@ -6299,14 +6323,14 @@
       </p:sp>
       <p:sp>
         <p:nvSpPr>
-          <p:cNvPr id="21" name="Text 19"/>
-          <p:cNvSpPr/>
-          <p:nvPr/>
-        </p:nvSpPr>
-        <p:spPr>
-          <a:xfrm>
-            <a:off x="1965960" y="4023360"/>
-            <a:ext cx="1508760" cy="256032"/>
+          <p:cNvPr id="20" name="Text 18"/>
+          <p:cNvSpPr/>
+          <p:nvPr/>
+        </p:nvSpPr>
+        <p:spPr>
+          <a:xfrm>
+            <a:off x="1627632" y="1755648"/>
+            <a:ext cx="1280160" cy="182880"/>
           </a:xfrm>
           <a:prstGeom prst="rect">
             <a:avLst/>
@@ -6322,7 +6346,7 @@
               <a:buNone/>
             </a:pPr>
             <a:r>
-              <a:rPr lang="en-US" sz="900" b="1" dirty="0">
+              <a:rPr lang="en-US" sz="650" b="1" dirty="0">
                 <a:solidFill>
                   <a:srgbClr val="A371F7"/>
                 </a:solidFill>
@@ -6332,24 +6356,92 @@
               </a:rPr>
               <a:t>Top 5 OSS contributors</a:t>
             </a:r>
-            <a:endParaRPr lang="en-US" sz="900" dirty="0"/>
-          </a:p>
-        </p:txBody>
-      </p:sp>
-      <p:sp>
-        <p:nvSpPr>
-          <p:cNvPr id="22" name="Shape 20"/>
-          <p:cNvSpPr/>
-          <p:nvPr/>
-        </p:nvSpPr>
-        <p:spPr>
-          <a:xfrm>
-            <a:off x="4709160" y="2011680"/>
-            <a:ext cx="3886200" cy="2377440"/>
+            <a:endParaRPr lang="en-US" sz="650" dirty="0"/>
+          </a:p>
+        </p:txBody>
+      </p:sp>
+      <p:sp>
+        <p:nvSpPr>
+          <p:cNvPr id="21" name="Shape 19"/>
+          <p:cNvSpPr/>
+          <p:nvPr/>
+        </p:nvSpPr>
+        <p:spPr>
+          <a:xfrm>
+            <a:off x="2971800" y="1755648"/>
+            <a:ext cx="1234440" cy="182880"/>
           </a:xfrm>
           <a:prstGeom prst="roundRect">
             <a:avLst>
-              <a:gd name="adj" fmla="val 4615"/>
+              <a:gd name="adj" fmla="val 20000"/>
+            </a:avLst>
+          </a:prstGeom>
+          <a:solidFill>
+            <a:srgbClr val="1A1530"/>
+          </a:solidFill>
+          <a:ln/>
+        </p:spPr>
+        <p:txBody>
+          <a:bodyPr/>
+          <a:lstStyle/>
+          <a:p>
+            <a:endParaRPr lang="en-US"/>
+          </a:p>
+        </p:txBody>
+      </p:sp>
+      <p:sp>
+        <p:nvSpPr>
+          <p:cNvPr id="22" name="Text 20"/>
+          <p:cNvSpPr/>
+          <p:nvPr/>
+        </p:nvSpPr>
+        <p:spPr>
+          <a:xfrm>
+            <a:off x="2971800" y="1755648"/>
+            <a:ext cx="1234440" cy="182880"/>
+          </a:xfrm>
+          <a:prstGeom prst="rect">
+            <a:avLst/>
+          </a:prstGeom>
+          <a:noFill/>
+          <a:ln/>
+        </p:spPr>
+        <p:txBody>
+          <a:bodyPr wrap="square" rtlCol="0" anchor="ctr"/>
+          <a:lstStyle/>
+          <a:p>
+            <a:pPr marL="0" indent="0" algn="ctr">
+              <a:buNone/>
+            </a:pPr>
+            <a:r>
+              <a:rPr lang="en-US" sz="650" b="1" dirty="0">
+                <a:solidFill>
+                  <a:srgbClr val="A371F7"/>
+                </a:solidFill>
+                <a:latin typeface="Segoe UI" pitchFamily="34" charset="0"/>
+                <a:ea typeface="Segoe UI" pitchFamily="34" charset="-122"/>
+                <a:cs typeface="Segoe UI" pitchFamily="34" charset="-120"/>
+              </a:rPr>
+              <a:t>~50% of SE Asia economy</a:t>
+            </a:r>
+            <a:endParaRPr lang="en-US" sz="650" dirty="0"/>
+          </a:p>
+        </p:txBody>
+      </p:sp>
+      <p:sp>
+        <p:nvSpPr>
+          <p:cNvPr id="23" name="Shape 21"/>
+          <p:cNvSpPr/>
+          <p:nvPr/>
+        </p:nvSpPr>
+        <p:spPr>
+          <a:xfrm>
+            <a:off x="4754880" y="777240"/>
+            <a:ext cx="3931920" cy="1463040"/>
+          </a:xfrm>
+          <a:prstGeom prst="roundRect">
+            <a:avLst>
+              <a:gd name="adj" fmla="val 5000"/>
             </a:avLst>
           </a:prstGeom>
           <a:solidFill>
@@ -6366,24 +6458,20 @@
           <a:bodyPr/>
           <a:lstStyle/>
           <a:p>
-            <a:r>
-              <a:rPr lang="en-US" dirty="0" err="1"/>
-              <a:t>myjffjmuym</a:t>
-            </a:r>
-            <a:endParaRPr lang="en-US" dirty="0"/>
-          </a:p>
-        </p:txBody>
-      </p:sp>
-      <p:sp>
-        <p:nvSpPr>
-          <p:cNvPr id="23" name="Text 21"/>
-          <p:cNvSpPr/>
-          <p:nvPr/>
-        </p:nvSpPr>
-        <p:spPr>
-          <a:xfrm>
-            <a:off x="4937760" y="2148840"/>
-            <a:ext cx="3474720" cy="274320"/>
+            <a:endParaRPr lang="en-US"/>
+          </a:p>
+        </p:txBody>
+      </p:sp>
+      <p:sp>
+        <p:nvSpPr>
+          <p:cNvPr id="24" name="Text 22"/>
+          <p:cNvSpPr/>
+          <p:nvPr/>
+        </p:nvSpPr>
+        <p:spPr>
+          <a:xfrm>
+            <a:off x="4919472" y="822960"/>
+            <a:ext cx="3474720" cy="164592"/>
           </a:xfrm>
           <a:prstGeom prst="rect">
             <a:avLst/>
@@ -6399,7 +6487,7 @@
               <a:buNone/>
             </a:pPr>
             <a:r>
-              <a:rPr lang="en-US" sz="1300" b="1" dirty="0">
+              <a:rPr lang="en-US" sz="1000" b="1" dirty="0">
                 <a:solidFill>
                   <a:srgbClr val="F0F6FC"/>
                 </a:solidFill>
@@ -6409,20 +6497,20 @@
               </a:rPr>
               <a:t>APAC Regional Momentum</a:t>
             </a:r>
-            <a:endParaRPr lang="en-US" sz="1300" dirty="0"/>
-          </a:p>
-        </p:txBody>
-      </p:sp>
-      <p:sp>
-        <p:nvSpPr>
-          <p:cNvPr id="24" name="Text 22"/>
-          <p:cNvSpPr/>
-          <p:nvPr/>
-        </p:nvSpPr>
-        <p:spPr>
-          <a:xfrm>
-            <a:off x="4937760" y="2514600"/>
-            <a:ext cx="1097280" cy="411480"/>
+            <a:endParaRPr lang="en-US" sz="1000" dirty="0"/>
+          </a:p>
+        </p:txBody>
+      </p:sp>
+      <p:sp>
+        <p:nvSpPr>
+          <p:cNvPr id="25" name="Text 23"/>
+          <p:cNvSpPr/>
+          <p:nvPr/>
+        </p:nvSpPr>
+        <p:spPr>
+          <a:xfrm>
+            <a:off x="4919472" y="1051560"/>
+            <a:ext cx="960120" cy="219456"/>
           </a:xfrm>
           <a:prstGeom prst="rect">
             <a:avLst/>
@@ -6438,7 +6526,7 @@
               <a:buNone/>
             </a:pPr>
             <a:r>
-              <a:rPr lang="en-US" sz="2800" b="1" dirty="0">
+              <a:rPr lang="en-US" sz="1600" b="1" dirty="0">
                 <a:solidFill>
                   <a:srgbClr val="F78166"/>
                 </a:solidFill>
@@ -6448,20 +6536,20 @@
               </a:rPr>
               <a:t>~25</a:t>
             </a:r>
-            <a:endParaRPr lang="en-US" sz="2800" dirty="0"/>
-          </a:p>
-        </p:txBody>
-      </p:sp>
-      <p:sp>
-        <p:nvSpPr>
-          <p:cNvPr id="25" name="Text 23"/>
-          <p:cNvSpPr/>
-          <p:nvPr/>
-        </p:nvSpPr>
-        <p:spPr>
-          <a:xfrm>
-            <a:off x="5943600" y="2514600"/>
-            <a:ext cx="2468880" cy="411480"/>
+            <a:endParaRPr lang="en-US" sz="1600" dirty="0"/>
+          </a:p>
+        </p:txBody>
+      </p:sp>
+      <p:sp>
+        <p:nvSpPr>
+          <p:cNvPr id="26" name="Text 24"/>
+          <p:cNvSpPr/>
+          <p:nvPr/>
+        </p:nvSpPr>
+        <p:spPr>
+          <a:xfrm>
+            <a:off x="5870448" y="1051560"/>
+            <a:ext cx="2606040" cy="219456"/>
           </a:xfrm>
           <a:prstGeom prst="rect">
             <a:avLst/>
@@ -6477,7 +6565,7 @@
               <a:buNone/>
             </a:pPr>
             <a:r>
-              <a:rPr lang="en-US" sz="1000" dirty="0">
+              <a:rPr lang="en-US" sz="800" dirty="0">
                 <a:solidFill>
                   <a:srgbClr val="8B949E"/>
                 </a:solidFill>
@@ -6485,16 +6573,104 @@
                 <a:ea typeface="Segoe UI" pitchFamily="34" charset="-122"/>
                 <a:cs typeface="Segoe UI" pitchFamily="34" charset="-120"/>
               </a:rPr>
-              <a:t>developers join</a:t>
-            </a:r>
-            <a:endParaRPr lang="en-US" sz="1000" dirty="0"/>
-          </a:p>
+              <a:t>devs join from APAC every minute</a:t>
+            </a:r>
+            <a:endParaRPr lang="en-US" sz="800" dirty="0"/>
+          </a:p>
+        </p:txBody>
+      </p:sp>
+      <p:sp>
+        <p:nvSpPr>
+          <p:cNvPr id="27" name="Shape 25"/>
+          <p:cNvSpPr/>
+          <p:nvPr/>
+        </p:nvSpPr>
+        <p:spPr>
+          <a:xfrm>
+            <a:off x="4919472" y="1298448"/>
+            <a:ext cx="3520440" cy="3658"/>
+          </a:xfrm>
+          <a:prstGeom prst="rect">
+            <a:avLst/>
+          </a:prstGeom>
+          <a:solidFill>
+            <a:srgbClr val="30363D"/>
+          </a:solidFill>
+          <a:ln/>
+        </p:spPr>
+        <p:txBody>
+          <a:bodyPr/>
+          <a:lstStyle/>
+          <a:p>
+            <a:endParaRPr lang="en-US"/>
+          </a:p>
+        </p:txBody>
+      </p:sp>
+      <p:sp>
+        <p:nvSpPr>
+          <p:cNvPr id="28" name="Text 26"/>
+          <p:cNvSpPr/>
+          <p:nvPr/>
+        </p:nvSpPr>
+        <p:spPr>
+          <a:xfrm>
+            <a:off x="4919472" y="1344168"/>
+            <a:ext cx="960120" cy="219456"/>
+          </a:xfrm>
+          <a:prstGeom prst="rect">
+            <a:avLst/>
+          </a:prstGeom>
+          <a:noFill/>
+          <a:ln/>
+        </p:spPr>
+        <p:txBody>
+          <a:bodyPr wrap="square" rtlCol="0" anchor="ctr"/>
+          <a:lstStyle/>
           <a:p>
             <a:pPr marL="0" indent="0">
               <a:buNone/>
             </a:pPr>
             <a:r>
-              <a:rPr lang="en-US" sz="1000" dirty="0">
+              <a:rPr lang="en-US" sz="1600" b="1" dirty="0">
+                <a:solidFill>
+                  <a:srgbClr val="F78166"/>
+                </a:solidFill>
+                <a:latin typeface="Segoe UI" pitchFamily="34" charset="0"/>
+                <a:ea typeface="Segoe UI" pitchFamily="34" charset="-122"/>
+                <a:cs typeface="Segoe UI" pitchFamily="34" charset="-120"/>
+              </a:rPr>
+              <a:t>+13M</a:t>
+            </a:r>
+            <a:endParaRPr lang="en-US" sz="1600" dirty="0"/>
+          </a:p>
+        </p:txBody>
+      </p:sp>
+      <p:sp>
+        <p:nvSpPr>
+          <p:cNvPr id="29" name="Text 27"/>
+          <p:cNvSpPr/>
+          <p:nvPr/>
+        </p:nvSpPr>
+        <p:spPr>
+          <a:xfrm>
+            <a:off x="5870448" y="1344168"/>
+            <a:ext cx="2606040" cy="219456"/>
+          </a:xfrm>
+          <a:prstGeom prst="rect">
+            <a:avLst/>
+          </a:prstGeom>
+          <a:noFill/>
+          <a:ln/>
+        </p:spPr>
+        <p:txBody>
+          <a:bodyPr wrap="square" rtlCol="0" anchor="ctr"/>
+          <a:lstStyle/>
+          <a:p>
+            <a:pPr marL="0" indent="0">
+              <a:buNone/>
+            </a:pPr>
+            <a:r>
+              <a:rPr lang="en-US" sz="800" dirty="0">
                 <a:solidFill>
                   <a:srgbClr val="8B949E"/>
                 </a:solidFill>
@@ -6502,22 +6678,22 @@
                 <a:ea typeface="Segoe UI" pitchFamily="34" charset="-122"/>
                 <a:cs typeface="Segoe UI" pitchFamily="34" charset="-120"/>
               </a:rPr>
-              <a:t>from APAC every minute</a:t>
-            </a:r>
-            <a:endParaRPr lang="en-US" sz="1000" dirty="0"/>
-          </a:p>
-        </p:txBody>
-      </p:sp>
-      <p:sp>
-        <p:nvSpPr>
-          <p:cNvPr id="26" name="Shape 24"/>
-          <p:cNvSpPr/>
-          <p:nvPr/>
-        </p:nvSpPr>
-        <p:spPr>
-          <a:xfrm>
-            <a:off x="4937760" y="3017520"/>
-            <a:ext cx="3474720" cy="9144"/>
+              <a:t>net new APAC devs in 2024–2025</a:t>
+            </a:r>
+            <a:endParaRPr lang="en-US" sz="800" dirty="0"/>
+          </a:p>
+        </p:txBody>
+      </p:sp>
+      <p:sp>
+        <p:nvSpPr>
+          <p:cNvPr id="30" name="Shape 28"/>
+          <p:cNvSpPr/>
+          <p:nvPr/>
+        </p:nvSpPr>
+        <p:spPr>
+          <a:xfrm>
+            <a:off x="4919472" y="1591056"/>
+            <a:ext cx="3520440" cy="3658"/>
           </a:xfrm>
           <a:prstGeom prst="rect">
             <a:avLst/>
@@ -6537,14 +6713,14 @@
       </p:sp>
       <p:sp>
         <p:nvSpPr>
-          <p:cNvPr id="27" name="Text 25"/>
-          <p:cNvSpPr/>
-          <p:nvPr/>
-        </p:nvSpPr>
-        <p:spPr>
-          <a:xfrm>
-            <a:off x="4937760" y="3108960"/>
-            <a:ext cx="1371600" cy="411480"/>
+          <p:cNvPr id="31" name="Text 29"/>
+          <p:cNvSpPr/>
+          <p:nvPr/>
+        </p:nvSpPr>
+        <p:spPr>
+          <a:xfrm>
+            <a:off x="4919472" y="1636776"/>
+            <a:ext cx="960120" cy="219456"/>
           </a:xfrm>
           <a:prstGeom prst="rect">
             <a:avLst/>
@@ -6560,7 +6736,7 @@
               <a:buNone/>
             </a:pPr>
             <a:r>
-              <a:rPr lang="en-US" sz="2800" b="1" dirty="0">
+              <a:rPr lang="en-US" sz="1600" b="1" dirty="0">
                 <a:solidFill>
                   <a:srgbClr val="F78166"/>
                 </a:solidFill>
@@ -6568,22 +6744,22 @@
                 <a:ea typeface="Segoe UI" pitchFamily="34" charset="-122"/>
                 <a:cs typeface="Segoe UI" pitchFamily="34" charset="-120"/>
               </a:rPr>
-              <a:t>+13juyfjuykjuykjuykjruyM</a:t>
-            </a:r>
-            <a:endParaRPr lang="en-US" sz="2800" dirty="0"/>
-          </a:p>
-        </p:txBody>
-      </p:sp>
-      <p:sp>
-        <p:nvSpPr>
-          <p:cNvPr id="28" name="Text 26"/>
-          <p:cNvSpPr/>
-          <p:nvPr/>
-        </p:nvSpPr>
-        <p:spPr>
-          <a:xfrm>
-            <a:off x="6172200" y="3108960"/>
-            <a:ext cx="2286000" cy="411480"/>
+              <a:t>~50%</a:t>
+            </a:r>
+            <a:endParaRPr lang="en-US" sz="1600" dirty="0"/>
+          </a:p>
+        </p:txBody>
+      </p:sp>
+      <p:sp>
+        <p:nvSpPr>
+          <p:cNvPr id="32" name="Text 30"/>
+          <p:cNvSpPr/>
+          <p:nvPr/>
+        </p:nvSpPr>
+        <p:spPr>
+          <a:xfrm>
+            <a:off x="5870448" y="1636776"/>
+            <a:ext cx="2606040" cy="219456"/>
           </a:xfrm>
           <a:prstGeom prst="rect">
             <a:avLst/>
@@ -6599,7 +6775,7 @@
               <a:buNone/>
             </a:pPr>
             <a:r>
-              <a:rPr lang="en-US" sz="1000" dirty="0">
+              <a:rPr lang="en-US" sz="800" dirty="0">
                 <a:solidFill>
                   <a:srgbClr val="8B949E"/>
                 </a:solidFill>
@@ -6607,16 +6783,104 @@
                 <a:ea typeface="Segoe UI" pitchFamily="34" charset="-122"/>
                 <a:cs typeface="Segoe UI" pitchFamily="34" charset="-120"/>
               </a:rPr>
-              <a:t>net new APAC developers</a:t>
-            </a:r>
-            <a:endParaRPr lang="en-US" sz="1000" dirty="0"/>
-          </a:p>
+              <a:t>of SE Asia's online economy is Indonesia</a:t>
+            </a:r>
+            <a:endParaRPr lang="en-US" sz="800" dirty="0"/>
+          </a:p>
+        </p:txBody>
+      </p:sp>
+      <p:sp>
+        <p:nvSpPr>
+          <p:cNvPr id="33" name="Shape 31"/>
+          <p:cNvSpPr/>
+          <p:nvPr/>
+        </p:nvSpPr>
+        <p:spPr>
+          <a:xfrm>
+            <a:off x="4919472" y="1883664"/>
+            <a:ext cx="3520440" cy="3658"/>
+          </a:xfrm>
+          <a:prstGeom prst="rect">
+            <a:avLst/>
+          </a:prstGeom>
+          <a:solidFill>
+            <a:srgbClr val="30363D"/>
+          </a:solidFill>
+          <a:ln/>
+        </p:spPr>
+        <p:txBody>
+          <a:bodyPr/>
+          <a:lstStyle/>
+          <a:p>
+            <a:endParaRPr lang="en-US"/>
+          </a:p>
+        </p:txBody>
+      </p:sp>
+      <p:sp>
+        <p:nvSpPr>
+          <p:cNvPr id="34" name="Text 32"/>
+          <p:cNvSpPr/>
+          <p:nvPr/>
+        </p:nvSpPr>
+        <p:spPr>
+          <a:xfrm>
+            <a:off x="4919472" y="1929384"/>
+            <a:ext cx="960120" cy="219456"/>
+          </a:xfrm>
+          <a:prstGeom prst="rect">
+            <a:avLst/>
+          </a:prstGeom>
+          <a:noFill/>
+          <a:ln/>
+        </p:spPr>
+        <p:txBody>
+          <a:bodyPr wrap="square" rtlCol="0" anchor="ctr"/>
+          <a:lstStyle/>
           <a:p>
             <a:pPr marL="0" indent="0">
               <a:buNone/>
             </a:pPr>
             <a:r>
-              <a:rPr lang="en-US" sz="1000" dirty="0">
+              <a:rPr lang="en-US" sz="1600" b="1" dirty="0">
+                <a:solidFill>
+                  <a:srgbClr val="F78166"/>
+                </a:solidFill>
+                <a:latin typeface="Segoe UI" pitchFamily="34" charset="0"/>
+                <a:ea typeface="Segoe UI" pitchFamily="34" charset="-122"/>
+                <a:cs typeface="Segoe UI" pitchFamily="34" charset="-120"/>
+              </a:rPr>
+              <a:t>80%</a:t>
+            </a:r>
+            <a:endParaRPr lang="en-US" sz="1600" dirty="0"/>
+          </a:p>
+        </p:txBody>
+      </p:sp>
+      <p:sp>
+        <p:nvSpPr>
+          <p:cNvPr id="35" name="Text 33"/>
+          <p:cNvSpPr/>
+          <p:nvPr/>
+        </p:nvSpPr>
+        <p:spPr>
+          <a:xfrm>
+            <a:off x="5870448" y="1929384"/>
+            <a:ext cx="2606040" cy="219456"/>
+          </a:xfrm>
+          <a:prstGeom prst="rect">
+            <a:avLst/>
+          </a:prstGeom>
+          <a:noFill/>
+          <a:ln/>
+        </p:spPr>
+        <p:txBody>
+          <a:bodyPr wrap="square" rtlCol="0" anchor="ctr"/>
+          <a:lstStyle/>
+          <a:p>
+            <a:pPr marL="0" indent="0">
+              <a:buNone/>
+            </a:pPr>
+            <a:r>
+              <a:rPr lang="en-US" sz="800" dirty="0">
                 <a:solidFill>
                   <a:srgbClr val="8B949E"/>
                 </a:solidFill>
@@ -6624,170 +6888,26 @@
                 <a:ea typeface="Segoe UI" pitchFamily="34" charset="-122"/>
                 <a:cs typeface="Segoe UI" pitchFamily="34" charset="-120"/>
               </a:rPr>
-              <a:t>in 2024–2025</a:t>
-            </a:r>
-            <a:endParaRPr lang="en-US" sz="1000" dirty="0"/>
-          </a:p>
-        </p:txBody>
-      </p:sp>
-      <p:sp>
-        <p:nvSpPr>
-          <p:cNvPr id="29" name="Shape 27"/>
-          <p:cNvSpPr/>
-          <p:nvPr/>
-        </p:nvSpPr>
-        <p:spPr>
-          <a:xfrm>
-            <a:off x="4937760" y="3611880"/>
-            <a:ext cx="3474720" cy="9144"/>
-          </a:xfrm>
-          <a:prstGeom prst="rect">
-            <a:avLst/>
-          </a:prstGeom>
-          <a:solidFill>
-            <a:srgbClr val="30363D"/>
-          </a:solidFill>
-          <a:ln/>
-        </p:spPr>
-        <p:txBody>
-          <a:bodyPr/>
-          <a:lstStyle/>
-          <a:p>
-            <a:endParaRPr lang="en-US"/>
-          </a:p>
-        </p:txBody>
-      </p:sp>
-      <p:sp>
-        <p:nvSpPr>
-          <p:cNvPr id="30" name="Text 28"/>
-          <p:cNvSpPr/>
-          <p:nvPr/>
-        </p:nvSpPr>
-        <p:spPr>
-          <a:xfrm>
-            <a:off x="4937760" y="3703320"/>
-            <a:ext cx="1371600" cy="411480"/>
-          </a:xfrm>
-          <a:prstGeom prst="rect">
-            <a:avLst/>
-          </a:prstGeom>
-          <a:noFill/>
-          <a:ln/>
-        </p:spPr>
-        <p:txBody>
-          <a:bodyPr wrap="square" rtlCol="0" anchor="ctr"/>
-          <a:lstStyle/>
-          <a:p>
-            <a:pPr marL="0" indent="0">
-              <a:buNone/>
-            </a:pPr>
-            <a:r>
-              <a:rPr lang="en-US" sz="2800" b="1" dirty="0">
-                <a:solidFill>
-                  <a:srgbClr val="F78166"/>
-                </a:solidFill>
-                <a:latin typeface="Segoe UI" pitchFamily="34" charset="0"/>
-                <a:ea typeface="Segoe UI" pitchFamily="34" charset="-122"/>
-                <a:cs typeface="Segoe UI" pitchFamily="34" charset="-120"/>
-              </a:rPr>
-              <a:t>~50gjhmjymjuymuytm </a:t>
-            </a:r>
-            <a:r>
-              <a:rPr lang="en-US" sz="2800" b="1" dirty="0" err="1">
-                <a:solidFill>
-                  <a:srgbClr val="F78166"/>
-                </a:solidFill>
-                <a:latin typeface="Segoe UI" pitchFamily="34" charset="0"/>
-                <a:ea typeface="Segoe UI" pitchFamily="34" charset="-122"/>
-                <a:cs typeface="Segoe UI" pitchFamily="34" charset="-120"/>
-              </a:rPr>
-              <a:t>uytmuytmuytkmytumuy</a:t>
-            </a:r>
-            <a:r>
-              <a:rPr lang="en-US" sz="2800" b="1" dirty="0">
-                <a:solidFill>
-                  <a:srgbClr val="F78166"/>
-                </a:solidFill>
-                <a:latin typeface="Segoe UI" pitchFamily="34" charset="0"/>
-                <a:ea typeface="Segoe UI" pitchFamily="34" charset="-122"/>
-                <a:cs typeface="Segoe UI" pitchFamily="34" charset="-120"/>
-              </a:rPr>
-              <a:t>%</a:t>
-            </a:r>
-            <a:endParaRPr lang="en-US" sz="2800" dirty="0"/>
-          </a:p>
-        </p:txBody>
-      </p:sp>
-      <p:sp>
-        <p:nvSpPr>
-          <p:cNvPr id="31" name="Text 29"/>
-          <p:cNvSpPr/>
-          <p:nvPr/>
-        </p:nvSpPr>
-        <p:spPr>
-          <a:xfrm>
-            <a:off x="6172200" y="3703320"/>
-            <a:ext cx="2468880" cy="411480"/>
-          </a:xfrm>
-          <a:prstGeom prst="rect">
-            <a:avLst/>
-          </a:prstGeom>
-          <a:noFill/>
-          <a:ln/>
-        </p:spPr>
-        <p:txBody>
-          <a:bodyPr wrap="square" rtlCol="0" anchor="ctr"/>
-          <a:lstStyle/>
-          <a:p>
-            <a:pPr marL="0" indent="0">
-              <a:buNone/>
-            </a:pPr>
-            <a:r>
-              <a:rPr lang="en-US" sz="1000" dirty="0">
-                <a:solidFill>
-                  <a:srgbClr val="8B949E"/>
-                </a:solidFill>
-                <a:latin typeface="Segoe UI" pitchFamily="34" charset="0"/>
-                <a:ea typeface="Segoe UI" pitchFamily="34" charset="-122"/>
-                <a:cs typeface="Segoe UI" pitchFamily="34" charset="-120"/>
-              </a:rPr>
-              <a:t>of SE Asia's online economy</a:t>
-            </a:r>
-            <a:endParaRPr lang="en-US" sz="1000" dirty="0"/>
-          </a:p>
-          <a:p>
-            <a:pPr marL="0" indent="0">
-              <a:buNone/>
-            </a:pPr>
-            <a:r>
-              <a:rPr lang="en-US" sz="1000" dirty="0">
-                <a:solidFill>
-                  <a:srgbClr val="8B949E"/>
-                </a:solidFill>
-                <a:latin typeface="Segoe UI" pitchFamily="34" charset="0"/>
-                <a:ea typeface="Segoe UI" pitchFamily="34" charset="-122"/>
-                <a:cs typeface="Segoe UI" pitchFamily="34" charset="-120"/>
-              </a:rPr>
-              <a:t>is driven by Indonesia</a:t>
-            </a:r>
-            <a:endParaRPr lang="en-US" sz="1000" dirty="0"/>
-          </a:p>
-        </p:txBody>
-      </p:sp>
-      <p:sp>
-        <p:nvSpPr>
-          <p:cNvPr id="32" name="Shape 30"/>
-          <p:cNvSpPr/>
-          <p:nvPr/>
-        </p:nvSpPr>
-        <p:spPr>
-          <a:xfrm>
-            <a:off x="548640" y="4663440"/>
-            <a:ext cx="8046720" cy="1371600"/>
+              <a:t>of new devs use Copilot in week one</a:t>
+            </a:r>
+            <a:endParaRPr lang="en-US" sz="800" dirty="0"/>
+          </a:p>
+        </p:txBody>
+      </p:sp>
+      <p:sp>
+        <p:nvSpPr>
+          <p:cNvPr id="36" name="Shape 34"/>
+          <p:cNvSpPr/>
+          <p:nvPr/>
+        </p:nvSpPr>
+        <p:spPr>
+          <a:xfrm>
+            <a:off x="457200" y="2377440"/>
+            <a:ext cx="8229600" cy="2331720"/>
           </a:xfrm>
           <a:prstGeom prst="roundRect">
             <a:avLst>
-              <a:gd name="adj" fmla="val 8000"/>
+              <a:gd name="adj" fmla="val 3137"/>
             </a:avLst>
           </a:prstGeom>
           <a:solidFill>
@@ -6810,14 +6930,14 @@
       </p:sp>
       <p:sp>
         <p:nvSpPr>
-          <p:cNvPr id="33" name="Text 31"/>
-          <p:cNvSpPr/>
-          <p:nvPr/>
-        </p:nvSpPr>
-        <p:spPr>
-          <a:xfrm>
-            <a:off x="777240" y="4754880"/>
-            <a:ext cx="3657600" cy="274320"/>
+          <p:cNvPr id="37" name="Text 35"/>
+          <p:cNvSpPr/>
+          <p:nvPr/>
+        </p:nvSpPr>
+        <p:spPr>
+          <a:xfrm>
+            <a:off x="621792" y="2432304"/>
+            <a:ext cx="3657600" cy="182880"/>
           </a:xfrm>
           <a:prstGeom prst="rect">
             <a:avLst/>
@@ -6833,7 +6953,7 @@
               <a:buNone/>
             </a:pPr>
             <a:r>
-              <a:rPr lang="en-US" sz="1200" b="1" dirty="0">
+              <a:rPr lang="en-US" sz="1000" b="1" dirty="0">
                 <a:solidFill>
                   <a:srgbClr val="F0F6FC"/>
                 </a:solidFill>
@@ -6843,20 +6963,49 @@
               </a:rPr>
               <a:t>What's Fueling the Boom</a:t>
             </a:r>
-            <a:endParaRPr lang="en-US" sz="1200" dirty="0"/>
-          </a:p>
-        </p:txBody>
-      </p:sp>
-      <p:sp>
-        <p:nvSpPr>
-          <p:cNvPr id="34" name="Text 32"/>
-          <p:cNvSpPr/>
-          <p:nvPr/>
-        </p:nvSpPr>
-        <p:spPr>
-          <a:xfrm>
-            <a:off x="777240" y="5074920"/>
-            <a:ext cx="365760" cy="274320"/>
+            <a:endParaRPr lang="en-US" sz="1000" dirty="0"/>
+          </a:p>
+        </p:txBody>
+      </p:sp>
+      <p:sp>
+        <p:nvSpPr>
+          <p:cNvPr id="38" name="Shape 36"/>
+          <p:cNvSpPr/>
+          <p:nvPr/>
+        </p:nvSpPr>
+        <p:spPr>
+          <a:xfrm>
+            <a:off x="621792" y="2670048"/>
+            <a:ext cx="3794760" cy="868680"/>
+          </a:xfrm>
+          <a:prstGeom prst="roundRect">
+            <a:avLst>
+              <a:gd name="adj" fmla="val 6316"/>
+            </a:avLst>
+          </a:prstGeom>
+          <a:solidFill>
+            <a:srgbClr val="0D1117"/>
+          </a:solidFill>
+          <a:ln/>
+        </p:spPr>
+        <p:txBody>
+          <a:bodyPr/>
+          <a:lstStyle/>
+          <a:p>
+            <a:endParaRPr lang="en-US"/>
+          </a:p>
+        </p:txBody>
+      </p:sp>
+      <p:sp>
+        <p:nvSpPr>
+          <p:cNvPr id="39" name="Text 37"/>
+          <p:cNvSpPr/>
+          <p:nvPr/>
+        </p:nvSpPr>
+        <p:spPr>
+          <a:xfrm>
+            <a:off x="694944" y="2724912"/>
+            <a:ext cx="256032" cy="219456"/>
           </a:xfrm>
           <a:prstGeom prst="rect">
             <a:avLst/>
@@ -6868,34 +7017,31 @@
           <a:bodyPr wrap="square" rtlCol="0" anchor="ctr"/>
           <a:lstStyle/>
           <a:p>
-            <a:pPr marL="0" indent="0">
+            <a:pPr marL="0" indent="0" algn="ctr">
               <a:buNone/>
             </a:pPr>
             <a:r>
-              <a:rPr lang="en-US" sz="1600" dirty="0">
+              <a:rPr lang="en-US" sz="1200" dirty="0">
                 <a:solidFill>
                   <a:srgbClr val="000000"/>
                 </a:solidFill>
-                <a:latin typeface="Segoe UI Emoji" pitchFamily="34" charset="0"/>
-                <a:ea typeface="Segoe UI Emoji" pitchFamily="34" charset="-122"/>
-                <a:cs typeface="Segoe UI Emoji" pitchFamily="34" charset="-120"/>
               </a:rPr>
               <a:t>🏛️</a:t>
             </a:r>
-            <a:endParaRPr lang="en-US" sz="1600" dirty="0"/>
-          </a:p>
-        </p:txBody>
-      </p:sp>
-      <p:sp>
-        <p:nvSpPr>
-          <p:cNvPr id="35" name="Text 33"/>
-          <p:cNvSpPr/>
-          <p:nvPr/>
-        </p:nvSpPr>
-        <p:spPr>
-          <a:xfrm>
-            <a:off x="1097280" y="5074920"/>
-            <a:ext cx="1554480" cy="228600"/>
+            <a:endParaRPr lang="en-US" sz="1200" dirty="0"/>
+          </a:p>
+        </p:txBody>
+      </p:sp>
+      <p:sp>
+        <p:nvSpPr>
+          <p:cNvPr id="40" name="Text 38"/>
+          <p:cNvSpPr/>
+          <p:nvPr/>
+        </p:nvSpPr>
+        <p:spPr>
+          <a:xfrm>
+            <a:off x="969264" y="2724912"/>
+            <a:ext cx="3200400" cy="219456"/>
           </a:xfrm>
           <a:prstGeom prst="rect">
             <a:avLst/>
@@ -6911,7 +7057,7 @@
               <a:buNone/>
             </a:pPr>
             <a:r>
-              <a:rPr lang="en-US" sz="1000" b="1" dirty="0">
+              <a:rPr lang="en-US" sz="900" b="1" dirty="0">
                 <a:solidFill>
                   <a:srgbClr val="58A6FF"/>
                 </a:solidFill>
@@ -6921,20 +7067,20 @@
               </a:rPr>
               <a:t>Government Skilling</a:t>
             </a:r>
-            <a:endParaRPr lang="en-US" sz="1000" dirty="0"/>
-          </a:p>
-        </p:txBody>
-      </p:sp>
-      <p:sp>
-        <p:nvSpPr>
-          <p:cNvPr id="36" name="Text 34"/>
-          <p:cNvSpPr/>
-          <p:nvPr/>
-        </p:nvSpPr>
-        <p:spPr>
-          <a:xfrm>
-            <a:off x="777240" y="5349240"/>
-            <a:ext cx="1828800" cy="548640"/>
+            <a:endParaRPr lang="en-US" sz="900" dirty="0"/>
+          </a:p>
+        </p:txBody>
+      </p:sp>
+      <p:sp>
+        <p:nvSpPr>
+          <p:cNvPr id="41" name="Text 39"/>
+          <p:cNvSpPr/>
+          <p:nvPr/>
+        </p:nvSpPr>
+        <p:spPr>
+          <a:xfrm>
+            <a:off x="713232" y="2990088"/>
+            <a:ext cx="3566160" cy="502920"/>
           </a:xfrm>
           <a:prstGeom prst="rect">
             <a:avLst/>
@@ -6947,10 +7093,13 @@
           <a:lstStyle/>
           <a:p>
             <a:pPr marL="0" indent="0">
+              <a:lnSpc>
+                <a:spcPct val="115000"/>
+              </a:lnSpc>
               <a:buNone/>
             </a:pPr>
             <a:r>
-              <a:rPr lang="en-US" sz="900" dirty="0">
+              <a:rPr lang="en-US" sz="750" dirty="0">
                 <a:solidFill>
                   <a:srgbClr val="8B949E"/>
                 </a:solidFill>
@@ -6958,22 +7107,51 @@
                 <a:ea typeface="Segoe UI" pitchFamily="34" charset="-122"/>
                 <a:cs typeface="Segoe UI" pitchFamily="34" charset="-120"/>
               </a:rPr>
-              <a:t>National programs driving digital literacy &amp; developer talent</a:t>
-            </a:r>
-            <a:endParaRPr lang="en-US" sz="900" dirty="0"/>
-          </a:p>
-        </p:txBody>
-      </p:sp>
-      <p:sp>
-        <p:nvSpPr>
-          <p:cNvPr id="37" name="Text 35"/>
-          <p:cNvSpPr/>
-          <p:nvPr/>
-        </p:nvSpPr>
-        <p:spPr>
-          <a:xfrm>
-            <a:off x="2743200" y="5074920"/>
-            <a:ext cx="365760" cy="274320"/>
+              <a:t>National digital literacy initiatives and developer talent pipeline investment across the region.</a:t>
+            </a:r>
+            <a:endParaRPr lang="en-US" sz="750" dirty="0"/>
+          </a:p>
+        </p:txBody>
+      </p:sp>
+      <p:sp>
+        <p:nvSpPr>
+          <p:cNvPr id="42" name="Shape 40"/>
+          <p:cNvSpPr/>
+          <p:nvPr/>
+        </p:nvSpPr>
+        <p:spPr>
+          <a:xfrm>
+            <a:off x="4736592" y="2670048"/>
+            <a:ext cx="3794760" cy="868680"/>
+          </a:xfrm>
+          <a:prstGeom prst="roundRect">
+            <a:avLst>
+              <a:gd name="adj" fmla="val 6316"/>
+            </a:avLst>
+          </a:prstGeom>
+          <a:solidFill>
+            <a:srgbClr val="0D1117"/>
+          </a:solidFill>
+          <a:ln/>
+        </p:spPr>
+        <p:txBody>
+          <a:bodyPr/>
+          <a:lstStyle/>
+          <a:p>
+            <a:endParaRPr lang="en-US"/>
+          </a:p>
+        </p:txBody>
+      </p:sp>
+      <p:sp>
+        <p:nvSpPr>
+          <p:cNvPr id="43" name="Text 41"/>
+          <p:cNvSpPr/>
+          <p:nvPr/>
+        </p:nvSpPr>
+        <p:spPr>
+          <a:xfrm>
+            <a:off x="4809744" y="2724912"/>
+            <a:ext cx="256032" cy="219456"/>
           </a:xfrm>
           <a:prstGeom prst="rect">
             <a:avLst/>
@@ -6985,34 +7163,31 @@
           <a:bodyPr wrap="square" rtlCol="0" anchor="ctr"/>
           <a:lstStyle/>
           <a:p>
-            <a:pPr marL="0" indent="0">
+            <a:pPr marL="0" indent="0" algn="ctr">
               <a:buNone/>
             </a:pPr>
             <a:r>
-              <a:rPr lang="en-US" sz="1600" dirty="0">
+              <a:rPr lang="en-US" sz="1200" dirty="0">
                 <a:solidFill>
                   <a:srgbClr val="000000"/>
                 </a:solidFill>
-                <a:latin typeface="Segoe UI Emoji" pitchFamily="34" charset="0"/>
-                <a:ea typeface="Segoe UI Emoji" pitchFamily="34" charset="-122"/>
-                <a:cs typeface="Segoe UI Emoji" pitchFamily="34" charset="-120"/>
               </a:rPr>
               <a:t>🤖</a:t>
             </a:r>
-            <a:endParaRPr lang="en-US" sz="1600" dirty="0"/>
-          </a:p>
-        </p:txBody>
-      </p:sp>
-      <p:sp>
-        <p:nvSpPr>
-          <p:cNvPr id="38" name="Text 36"/>
-          <p:cNvSpPr/>
-          <p:nvPr/>
-        </p:nvSpPr>
-        <p:spPr>
-          <a:xfrm>
-            <a:off x="3063240" y="5074920"/>
-            <a:ext cx="1554480" cy="228600"/>
+            <a:endParaRPr lang="en-US" sz="1200" dirty="0"/>
+          </a:p>
+        </p:txBody>
+      </p:sp>
+      <p:sp>
+        <p:nvSpPr>
+          <p:cNvPr id="44" name="Text 42"/>
+          <p:cNvSpPr/>
+          <p:nvPr/>
+        </p:nvSpPr>
+        <p:spPr>
+          <a:xfrm>
+            <a:off x="5084064" y="2724912"/>
+            <a:ext cx="3200400" cy="219456"/>
           </a:xfrm>
           <a:prstGeom prst="rect">
             <a:avLst/>
@@ -7028,7 +7203,7 @@
               <a:buNone/>
             </a:pPr>
             <a:r>
-              <a:rPr lang="en-US" sz="1000" b="1" dirty="0">
+              <a:rPr lang="en-US" sz="900" b="1" dirty="0">
                 <a:solidFill>
                   <a:srgbClr val="58A6FF"/>
                 </a:solidFill>
@@ -7036,22 +7211,22 @@
                 <a:ea typeface="Segoe UI" pitchFamily="34" charset="-122"/>
                 <a:cs typeface="Segoe UI" pitchFamily="34" charset="-120"/>
               </a:rPr>
-              <a:t>AI Adoption</a:t>
-            </a:r>
-            <a:endParaRPr lang="en-US" sz="1000" dirty="0"/>
-          </a:p>
-        </p:txBody>
-      </p:sp>
-      <p:sp>
-        <p:nvSpPr>
-          <p:cNvPr id="39" name="Text 37"/>
-          <p:cNvSpPr/>
-          <p:nvPr/>
-        </p:nvSpPr>
-        <p:spPr>
-          <a:xfrm>
-            <a:off x="2743200" y="5349240"/>
-            <a:ext cx="1828800" cy="548640"/>
+              <a:t>Rapid AI Adoption</a:t>
+            </a:r>
+            <a:endParaRPr lang="en-US" sz="900" dirty="0"/>
+          </a:p>
+        </p:txBody>
+      </p:sp>
+      <p:sp>
+        <p:nvSpPr>
+          <p:cNvPr id="45" name="Text 43"/>
+          <p:cNvSpPr/>
+          <p:nvPr/>
+        </p:nvSpPr>
+        <p:spPr>
+          <a:xfrm>
+            <a:off x="4828032" y="2990088"/>
+            <a:ext cx="3566160" cy="502920"/>
           </a:xfrm>
           <a:prstGeom prst="rect">
             <a:avLst/>
@@ -7064,10 +7239,13 @@
           <a:lstStyle/>
           <a:p>
             <a:pPr marL="0" indent="0">
+              <a:lnSpc>
+                <a:spcPct val="115000"/>
+              </a:lnSpc>
               <a:buNone/>
             </a:pPr>
             <a:r>
-              <a:rPr lang="en-US" sz="900" dirty="0">
+              <a:rPr lang="en-US" sz="750" dirty="0">
                 <a:solidFill>
                   <a:srgbClr val="8B949E"/>
                 </a:solidFill>
@@ -7075,22 +7253,51 @@
                 <a:ea typeface="Segoe UI" pitchFamily="34" charset="-122"/>
                 <a:cs typeface="Segoe UI" pitchFamily="34" charset="-120"/>
               </a:rPr>
-              <a:t>80% of new devs use Copilot in week one; AI projects surging</a:t>
-            </a:r>
-            <a:endParaRPr lang="en-US" sz="900" dirty="0"/>
-          </a:p>
-        </p:txBody>
-      </p:sp>
-      <p:sp>
-        <p:nvSpPr>
-          <p:cNvPr id="40" name="Text 38"/>
-          <p:cNvSpPr/>
-          <p:nvPr/>
-        </p:nvSpPr>
-        <p:spPr>
-          <a:xfrm>
-            <a:off x="4709160" y="5074920"/>
-            <a:ext cx="365760" cy="274320"/>
+              <a:t>80% of new GitHub devs use Copilot in week one. AI projects surged +178% YoY.</a:t>
+            </a:r>
+            <a:endParaRPr lang="en-US" sz="750" dirty="0"/>
+          </a:p>
+        </p:txBody>
+      </p:sp>
+      <p:sp>
+        <p:nvSpPr>
+          <p:cNvPr id="46" name="Shape 44"/>
+          <p:cNvSpPr/>
+          <p:nvPr/>
+        </p:nvSpPr>
+        <p:spPr>
+          <a:xfrm>
+            <a:off x="621792" y="3675888"/>
+            <a:ext cx="3794760" cy="868680"/>
+          </a:xfrm>
+          <a:prstGeom prst="roundRect">
+            <a:avLst>
+              <a:gd name="adj" fmla="val 6316"/>
+            </a:avLst>
+          </a:prstGeom>
+          <a:solidFill>
+            <a:srgbClr val="0D1117"/>
+          </a:solidFill>
+          <a:ln/>
+        </p:spPr>
+        <p:txBody>
+          <a:bodyPr/>
+          <a:lstStyle/>
+          <a:p>
+            <a:endParaRPr lang="en-US"/>
+          </a:p>
+        </p:txBody>
+      </p:sp>
+      <p:sp>
+        <p:nvSpPr>
+          <p:cNvPr id="47" name="Text 45"/>
+          <p:cNvSpPr/>
+          <p:nvPr/>
+        </p:nvSpPr>
+        <p:spPr>
+          <a:xfrm>
+            <a:off x="694944" y="3730752"/>
+            <a:ext cx="256032" cy="219456"/>
           </a:xfrm>
           <a:prstGeom prst="rect">
             <a:avLst/>
@@ -7102,34 +7309,31 @@
           <a:bodyPr wrap="square" rtlCol="0" anchor="ctr"/>
           <a:lstStyle/>
           <a:p>
-            <a:pPr marL="0" indent="0">
+            <a:pPr marL="0" indent="0" algn="ctr">
               <a:buNone/>
             </a:pPr>
             <a:r>
-              <a:rPr lang="en-US" sz="1600" dirty="0">
+              <a:rPr lang="en-US" sz="1200" dirty="0">
                 <a:solidFill>
                   <a:srgbClr val="000000"/>
                 </a:solidFill>
-                <a:latin typeface="Segoe UI Emoji" pitchFamily="34" charset="0"/>
-                <a:ea typeface="Segoe UI Emoji" pitchFamily="34" charset="-122"/>
-                <a:cs typeface="Segoe UI Emoji" pitchFamily="34" charset="-120"/>
               </a:rPr>
               <a:t>🌐</a:t>
             </a:r>
-            <a:endParaRPr lang="en-US" sz="1600" dirty="0"/>
-          </a:p>
-        </p:txBody>
-      </p:sp>
-      <p:sp>
-        <p:nvSpPr>
-          <p:cNvPr id="41" name="Text 39"/>
-          <p:cNvSpPr/>
-          <p:nvPr/>
-        </p:nvSpPr>
-        <p:spPr>
-          <a:xfrm>
-            <a:off x="5029200" y="5074920"/>
-            <a:ext cx="1554480" cy="228600"/>
+            <a:endParaRPr lang="en-US" sz="1200" dirty="0"/>
+          </a:p>
+        </p:txBody>
+      </p:sp>
+      <p:sp>
+        <p:nvSpPr>
+          <p:cNvPr id="48" name="Text 46"/>
+          <p:cNvSpPr/>
+          <p:nvPr/>
+        </p:nvSpPr>
+        <p:spPr>
+          <a:xfrm>
+            <a:off x="969264" y="3730752"/>
+            <a:ext cx="3200400" cy="219456"/>
           </a:xfrm>
           <a:prstGeom prst="rect">
             <a:avLst/>
@@ -7145,7 +7349,7 @@
               <a:buNone/>
             </a:pPr>
             <a:r>
-              <a:rPr lang="en-US" sz="1000" b="1" dirty="0">
+              <a:rPr lang="en-US" sz="900" b="1" dirty="0">
                 <a:solidFill>
                   <a:srgbClr val="58A6FF"/>
                 </a:solidFill>
@@ -7153,22 +7357,22 @@
                 <a:ea typeface="Segoe UI" pitchFamily="34" charset="-122"/>
                 <a:cs typeface="Segoe UI" pitchFamily="34" charset="-120"/>
               </a:rPr>
-              <a:t>Internet Expansion</a:t>
-            </a:r>
-            <a:endParaRPr lang="en-US" sz="1000" dirty="0"/>
-          </a:p>
-        </p:txBody>
-      </p:sp>
-      <p:sp>
-        <p:nvSpPr>
-          <p:cNvPr id="42" name="Text 40"/>
-          <p:cNvSpPr/>
-          <p:nvPr/>
-        </p:nvSpPr>
-        <p:spPr>
-          <a:xfrm>
-            <a:off x="4709160" y="5349240"/>
-            <a:ext cx="1828800" cy="548640"/>
+              <a:t>Internet &amp; Startup Growth</a:t>
+            </a:r>
+            <a:endParaRPr lang="en-US" sz="900" dirty="0"/>
+          </a:p>
+        </p:txBody>
+      </p:sp>
+      <p:sp>
+        <p:nvSpPr>
+          <p:cNvPr id="49" name="Text 47"/>
+          <p:cNvSpPr/>
+          <p:nvPr/>
+        </p:nvSpPr>
+        <p:spPr>
+          <a:xfrm>
+            <a:off x="713232" y="3995928"/>
+            <a:ext cx="3566160" cy="502920"/>
           </a:xfrm>
           <a:prstGeom prst="rect">
             <a:avLst/>
@@ -7181,10 +7385,13 @@
           <a:lstStyle/>
           <a:p>
             <a:pPr marL="0" indent="0">
+              <a:lnSpc>
+                <a:spcPct val="115000"/>
+              </a:lnSpc>
               <a:buNone/>
             </a:pPr>
             <a:r>
-              <a:rPr lang="en-US" sz="900" dirty="0">
+              <a:rPr lang="en-US" sz="750" dirty="0">
                 <a:solidFill>
                   <a:srgbClr val="8B949E"/>
                 </a:solidFill>
@@ -7192,22 +7399,51 @@
                 <a:ea typeface="Segoe UI" pitchFamily="34" charset="-122"/>
                 <a:cs typeface="Segoe UI" pitchFamily="34" charset="-120"/>
               </a:rPr>
-              <a:t>Expanding access enabling booming startup ecosystems</a:t>
-            </a:r>
-            <a:endParaRPr lang="en-US" sz="900" dirty="0"/>
-          </a:p>
-        </p:txBody>
-      </p:sp>
-      <p:sp>
-        <p:nvSpPr>
-          <p:cNvPr id="43" name="Text 41"/>
-          <p:cNvSpPr/>
-          <p:nvPr/>
-        </p:nvSpPr>
-        <p:spPr>
-          <a:xfrm>
-            <a:off x="6675120" y="5074920"/>
-            <a:ext cx="365760" cy="274320"/>
+              <a:t>Expanding broadband access fueling booming startup and fintech ecosystems.</a:t>
+            </a:r>
+            <a:endParaRPr lang="en-US" sz="750" dirty="0"/>
+          </a:p>
+        </p:txBody>
+      </p:sp>
+      <p:sp>
+        <p:nvSpPr>
+          <p:cNvPr id="50" name="Shape 48"/>
+          <p:cNvSpPr/>
+          <p:nvPr/>
+        </p:nvSpPr>
+        <p:spPr>
+          <a:xfrm>
+            <a:off x="4736592" y="3675888"/>
+            <a:ext cx="3794760" cy="868680"/>
+          </a:xfrm>
+          <a:prstGeom prst="roundRect">
+            <a:avLst>
+              <a:gd name="adj" fmla="val 6316"/>
+            </a:avLst>
+          </a:prstGeom>
+          <a:solidFill>
+            <a:srgbClr val="0D1117"/>
+          </a:solidFill>
+          <a:ln/>
+        </p:spPr>
+        <p:txBody>
+          <a:bodyPr/>
+          <a:lstStyle/>
+          <a:p>
+            <a:endParaRPr lang="en-US"/>
+          </a:p>
+        </p:txBody>
+      </p:sp>
+      <p:sp>
+        <p:nvSpPr>
+          <p:cNvPr id="51" name="Text 49"/>
+          <p:cNvSpPr/>
+          <p:nvPr/>
+        </p:nvSpPr>
+        <p:spPr>
+          <a:xfrm>
+            <a:off x="4809744" y="3730752"/>
+            <a:ext cx="256032" cy="219456"/>
           </a:xfrm>
           <a:prstGeom prst="rect">
             <a:avLst/>
@@ -7219,34 +7455,31 @@
           <a:bodyPr wrap="square" rtlCol="0" anchor="ctr"/>
           <a:lstStyle/>
           <a:p>
-            <a:pPr marL="0" indent="0">
+            <a:pPr marL="0" indent="0" algn="ctr">
               <a:buNone/>
             </a:pPr>
             <a:r>
-              <a:rPr lang="en-US" sz="1600" dirty="0">
+              <a:rPr lang="en-US" sz="1200" dirty="0">
                 <a:solidFill>
                   <a:srgbClr val="000000"/>
                 </a:solidFill>
-                <a:latin typeface="Segoe UI Emoji" pitchFamily="34" charset="0"/>
-                <a:ea typeface="Segoe UI Emoji" pitchFamily="34" charset="-122"/>
-                <a:cs typeface="Segoe UI Emoji" pitchFamily="34" charset="-120"/>
               </a:rPr>
               <a:t>📦</a:t>
             </a:r>
-            <a:endParaRPr lang="en-US" sz="1600" dirty="0"/>
-          </a:p>
-        </p:txBody>
-      </p:sp>
-      <p:sp>
-        <p:nvSpPr>
-          <p:cNvPr id="44" name="Text 42"/>
-          <p:cNvSpPr/>
-          <p:nvPr/>
-        </p:nvSpPr>
-        <p:spPr>
-          <a:xfrm>
-            <a:off x="6995160" y="5074920"/>
-            <a:ext cx="1554480" cy="228600"/>
+            <a:endParaRPr lang="en-US" sz="1200" dirty="0"/>
+          </a:p>
+        </p:txBody>
+      </p:sp>
+      <p:sp>
+        <p:nvSpPr>
+          <p:cNvPr id="52" name="Text 50"/>
+          <p:cNvSpPr/>
+          <p:nvPr/>
+        </p:nvSpPr>
+        <p:spPr>
+          <a:xfrm>
+            <a:off x="5084064" y="3730752"/>
+            <a:ext cx="3200400" cy="219456"/>
           </a:xfrm>
           <a:prstGeom prst="rect">
             <a:avLst/>
@@ -7262,7 +7495,7 @@
               <a:buNone/>
             </a:pPr>
             <a:r>
-              <a:rPr lang="en-US" sz="1000" b="1" dirty="0">
+              <a:rPr lang="en-US" sz="900" b="1" dirty="0">
                 <a:solidFill>
                   <a:srgbClr val="58A6FF"/>
                 </a:solidFill>
@@ -7270,22 +7503,22 @@
                 <a:ea typeface="Segoe UI" pitchFamily="34" charset="-122"/>
                 <a:cs typeface="Segoe UI" pitchFamily="34" charset="-120"/>
               </a:rPr>
-              <a:t>Open Source Growth</a:t>
-            </a:r>
-            <a:endParaRPr lang="en-US" sz="1000" dirty="0"/>
-          </a:p>
-        </p:txBody>
-      </p:sp>
-      <p:sp>
-        <p:nvSpPr>
-          <p:cNvPr id="45" name="Text 43"/>
-          <p:cNvSpPr/>
-          <p:nvPr/>
-        </p:nvSpPr>
-        <p:spPr>
-          <a:xfrm>
-            <a:off x="6675120" y="5349240"/>
-            <a:ext cx="1828800" cy="548640"/>
+              <a:t>Open Source Momentum</a:t>
+            </a:r>
+            <a:endParaRPr lang="en-US" sz="900" dirty="0"/>
+          </a:p>
+        </p:txBody>
+      </p:sp>
+      <p:sp>
+        <p:nvSpPr>
+          <p:cNvPr id="53" name="Text 51"/>
+          <p:cNvSpPr/>
+          <p:nvPr/>
+        </p:nvSpPr>
+        <p:spPr>
+          <a:xfrm>
+            <a:off x="4828032" y="3995928"/>
+            <a:ext cx="3566160" cy="502920"/>
           </a:xfrm>
           <a:prstGeom prst="rect">
             <a:avLst/>
@@ -7298,10 +7531,13 @@
           <a:lstStyle/>
           <a:p>
             <a:pPr marL="0" indent="0">
+              <a:lnSpc>
+                <a:spcPct val="115000"/>
+              </a:lnSpc>
               <a:buNone/>
             </a:pPr>
             <a:r>
-              <a:rPr lang="en-US" sz="900" dirty="0">
+              <a:rPr lang="en-US" sz="750" dirty="0">
                 <a:solidFill>
                   <a:srgbClr val="8B949E"/>
                 </a:solidFill>
@@ -7309,22 +7545,22 @@
                 <a:ea typeface="Segoe UI" pitchFamily="34" charset="-122"/>
                 <a:cs typeface="Segoe UI" pitchFamily="34" charset="-120"/>
               </a:rPr>
-              <a:t>Indonesia now a top-5 global OSS contributor community</a:t>
-            </a:r>
-            <a:endParaRPr lang="en-US" sz="900" dirty="0"/>
-          </a:p>
-        </p:txBody>
-      </p:sp>
-      <p:sp>
-        <p:nvSpPr>
-          <p:cNvPr id="46" name="Shape 44"/>
-          <p:cNvSpPr/>
-          <p:nvPr/>
-        </p:nvSpPr>
-        <p:spPr>
-          <a:xfrm>
-            <a:off x="548640" y="6309360"/>
-            <a:ext cx="8046720" cy="9144"/>
+              <a:t>Indonesia now a top-5 global OSS contributor. 255K new contributors in Mar '25.</a:t>
+            </a:r>
+            <a:endParaRPr lang="en-US" sz="750" dirty="0"/>
+          </a:p>
+        </p:txBody>
+      </p:sp>
+      <p:sp>
+        <p:nvSpPr>
+          <p:cNvPr id="54" name="Shape 52"/>
+          <p:cNvSpPr/>
+          <p:nvPr/>
+        </p:nvSpPr>
+        <p:spPr>
+          <a:xfrm>
+            <a:off x="457200" y="4887468"/>
+            <a:ext cx="8229600" cy="3658"/>
           </a:xfrm>
           <a:prstGeom prst="rect">
             <a:avLst/>
@@ -7344,14 +7580,14 @@
       </p:sp>
       <p:sp>
         <p:nvSpPr>
-          <p:cNvPr id="47" name="Text 45"/>
-          <p:cNvSpPr/>
-          <p:nvPr/>
-        </p:nvSpPr>
-        <p:spPr>
-          <a:xfrm>
-            <a:off x="548640" y="6355080"/>
-            <a:ext cx="3657600" cy="274320"/>
+          <p:cNvPr id="55" name="Text 53"/>
+          <p:cNvSpPr/>
+          <p:nvPr/>
+        </p:nvSpPr>
+        <p:spPr>
+          <a:xfrm>
+            <a:off x="457200" y="4924044"/>
+            <a:ext cx="3657600" cy="146304"/>
           </a:xfrm>
           <a:prstGeom prst="rect">
             <a:avLst/>
@@ -7367,7 +7603,7 @@
               <a:buNone/>
             </a:pPr>
             <a:r>
-              <a:rPr lang="en-US" sz="900" dirty="0">
+              <a:rPr lang="en-US" sz="700" dirty="0">
                 <a:solidFill>
                   <a:srgbClr val="484F58"/>
                 </a:solidFill>
@@ -7377,20 +7613,20 @@
               </a:rPr>
               <a:t>Source: GitHub Octoverse 2025</a:t>
             </a:r>
-            <a:endParaRPr lang="en-US" sz="900" dirty="0"/>
-          </a:p>
-        </p:txBody>
-      </p:sp>
-      <p:sp>
-        <p:nvSpPr>
-          <p:cNvPr id="48" name="Text 46"/>
-          <p:cNvSpPr/>
-          <p:nvPr/>
-        </p:nvSpPr>
-        <p:spPr>
-          <a:xfrm>
-            <a:off x="5120640" y="6355080"/>
-            <a:ext cx="3474720" cy="274320"/>
+            <a:endParaRPr lang="en-US" sz="700" dirty="0"/>
+          </a:p>
+        </p:txBody>
+      </p:sp>
+      <p:sp>
+        <p:nvSpPr>
+          <p:cNvPr id="56" name="Text 54"/>
+          <p:cNvSpPr/>
+          <p:nvPr/>
+        </p:nvSpPr>
+        <p:spPr>
+          <a:xfrm>
+            <a:off x="5029200" y="4924044"/>
+            <a:ext cx="3657600" cy="146304"/>
           </a:xfrm>
           <a:prstGeom prst="rect">
             <a:avLst/>
@@ -7406,7 +7642,7 @@
               <a:buNone/>
             </a:pPr>
             <a:r>
-              <a:rPr lang="en-US" sz="900" dirty="0">
+              <a:rPr lang="en-US" sz="700" dirty="0">
                 <a:solidFill>
                   <a:srgbClr val="484F58"/>
                 </a:solidFill>
@@ -7414,9 +7650,1993 @@
                 <a:ea typeface="Segoe UI" pitchFamily="34" charset="-122"/>
                 <a:cs typeface="Segoe UI" pitchFamily="34" charset="-120"/>
               </a:rPr>
-              <a:t>github.com/octoverse</a:t>
-            </a:r>
-            <a:endParaRPr lang="en-US" sz="900" dirty="0"/>
+              <a:t>octoverse.github.com</a:t>
+            </a:r>
+            <a:endParaRPr lang="en-US" sz="700" dirty="0"/>
+          </a:p>
+        </p:txBody>
+      </p:sp>
+    </p:spTree>
+    <p:extLst>
+      <p:ext uri="{BB962C8B-B14F-4D97-AF65-F5344CB8AC3E}">
+        <p14:creationId xmlns:p14="http://schemas.microsoft.com/office/powerpoint/2010/main" val="537087917"/>
+      </p:ext>
+    </p:extLst>
+  </p:cSld>
+  <p:clrMapOvr>
+    <a:masterClrMapping/>
+  </p:clrMapOvr>
+</p:sld>
+</file>
+
+<file path=ppt/slides/slide3.xml><?xml version="1.0" encoding="utf-8"?>
+<p:sld xmlns:a="http://schemas.openxmlformats.org/drawingml/2006/main" xmlns:r="http://schemas.openxmlformats.org/officeDocument/2006/relationships" xmlns:p="http://schemas.openxmlformats.org/presentationml/2006/main">
+  <p:cSld name="Slide 1">
+    <p:spTree>
+      <p:nvGrpSpPr>
+        <p:cNvPr id="1" name=""/>
+        <p:cNvGrpSpPr/>
+        <p:nvPr/>
+      </p:nvGrpSpPr>
+      <p:grpSpPr>
+        <a:xfrm>
+          <a:off x="0" y="0"/>
+          <a:ext cx="0" cy="0"/>
+          <a:chOff x="0" y="0"/>
+          <a:chExt cx="0" cy="0"/>
+        </a:xfrm>
+      </p:grpSpPr>
+      <p:sp>
+        <p:nvSpPr>
+          <p:cNvPr id="2" name="Shape 0"/>
+          <p:cNvSpPr/>
+          <p:nvPr/>
+        </p:nvSpPr>
+        <p:spPr>
+          <a:xfrm>
+            <a:off x="0" y="0"/>
+            <a:ext cx="9144000" cy="5143500"/>
+          </a:xfrm>
+          <a:prstGeom prst="rect">
+            <a:avLst/>
+          </a:prstGeom>
+          <a:solidFill>
+            <a:srgbClr val="0D1117"/>
+          </a:solidFill>
+          <a:ln/>
+        </p:spPr>
+        <p:txBody>
+          <a:bodyPr/>
+          <a:lstStyle/>
+          <a:p>
+            <a:endParaRPr lang="en-US"/>
+          </a:p>
+        </p:txBody>
+      </p:sp>
+      <p:sp>
+        <p:nvSpPr>
+          <p:cNvPr id="3" name="Shape 1"/>
+          <p:cNvSpPr/>
+          <p:nvPr/>
+        </p:nvSpPr>
+        <p:spPr>
+          <a:xfrm>
+            <a:off x="0" y="0"/>
+            <a:ext cx="9144000" cy="32004"/>
+          </a:xfrm>
+          <a:prstGeom prst="rect">
+            <a:avLst/>
+          </a:prstGeom>
+          <a:solidFill>
+            <a:srgbClr val="3FB950"/>
+          </a:solidFill>
+          <a:ln/>
+        </p:spPr>
+        <p:txBody>
+          <a:bodyPr/>
+          <a:lstStyle/>
+          <a:p>
+            <a:endParaRPr lang="en-US"/>
+          </a:p>
+        </p:txBody>
+      </p:sp>
+      <p:sp>
+        <p:nvSpPr>
+          <p:cNvPr id="4" name="Text 2"/>
+          <p:cNvSpPr/>
+          <p:nvPr/>
+        </p:nvSpPr>
+        <p:spPr>
+          <a:xfrm>
+            <a:off x="457200" y="109728"/>
+            <a:ext cx="5486400" cy="146304"/>
+          </a:xfrm>
+          <a:prstGeom prst="rect">
+            <a:avLst/>
+          </a:prstGeom>
+          <a:noFill/>
+          <a:ln/>
+        </p:spPr>
+        <p:txBody>
+          <a:bodyPr wrap="square" rtlCol="0" anchor="ctr"/>
+          <a:lstStyle/>
+          <a:p>
+            <a:pPr marL="0" indent="0">
+              <a:buNone/>
+            </a:pPr>
+            <a:r>
+              <a:rPr lang="en-US" sz="750" b="1" dirty="0">
+                <a:solidFill>
+                  <a:srgbClr val="3FB950"/>
+                </a:solidFill>
+                <a:latin typeface="Segoe UI" pitchFamily="34" charset="0"/>
+                <a:ea typeface="Segoe UI" pitchFamily="34" charset="-122"/>
+                <a:cs typeface="Segoe UI" pitchFamily="34" charset="-120"/>
+              </a:rPr>
+              <a:t>GITHUB CUSTOMER STORIES  ·  SOUTHEAST ASIA</a:t>
+            </a:r>
+            <a:endParaRPr lang="en-US" sz="750" dirty="0"/>
+          </a:p>
+        </p:txBody>
+      </p:sp>
+      <p:sp>
+        <p:nvSpPr>
+          <p:cNvPr id="5" name="Text 3"/>
+          <p:cNvSpPr/>
+          <p:nvPr/>
+        </p:nvSpPr>
+        <p:spPr>
+          <a:xfrm>
+            <a:off x="457200" y="246888"/>
+            <a:ext cx="8229600" cy="310896"/>
+          </a:xfrm>
+          <a:prstGeom prst="rect">
+            <a:avLst/>
+          </a:prstGeom>
+          <a:noFill/>
+          <a:ln/>
+        </p:spPr>
+        <p:txBody>
+          <a:bodyPr wrap="square" rtlCol="0" anchor="ctr"/>
+          <a:lstStyle/>
+          <a:p>
+            <a:pPr marL="0" indent="0">
+              <a:buNone/>
+            </a:pPr>
+            <a:r>
+              <a:rPr lang="en-US" sz="2000" b="1" dirty="0">
+                <a:solidFill>
+                  <a:srgbClr val="F0F6FC"/>
+                </a:solidFill>
+                <a:latin typeface="Segoe UI" pitchFamily="34" charset="0"/>
+                <a:ea typeface="Segoe UI" pitchFamily="34" charset="-122"/>
+                <a:cs typeface="Segoe UI" pitchFamily="34" charset="-120"/>
+              </a:rPr>
+              <a:t>Building at Scale in Indonesia</a:t>
+            </a:r>
+            <a:endParaRPr lang="en-US" sz="2000" dirty="0"/>
+          </a:p>
+        </p:txBody>
+      </p:sp>
+      <p:sp>
+        <p:nvSpPr>
+          <p:cNvPr id="6" name="Text 4"/>
+          <p:cNvSpPr/>
+          <p:nvPr/>
+        </p:nvSpPr>
+        <p:spPr>
+          <a:xfrm>
+            <a:off x="457200" y="548640"/>
+            <a:ext cx="7772400" cy="164592"/>
+          </a:xfrm>
+          <a:prstGeom prst="rect">
+            <a:avLst/>
+          </a:prstGeom>
+          <a:noFill/>
+          <a:ln/>
+        </p:spPr>
+        <p:txBody>
+          <a:bodyPr wrap="square" rtlCol="0" anchor="ctr"/>
+          <a:lstStyle/>
+          <a:p>
+            <a:pPr marL="0" indent="0">
+              <a:buNone/>
+            </a:pPr>
+            <a:r>
+              <a:rPr lang="en-US" sz="850" dirty="0">
+                <a:solidFill>
+                  <a:srgbClr val="8B949E"/>
+                </a:solidFill>
+                <a:latin typeface="Segoe UI" pitchFamily="34" charset="0"/>
+                <a:ea typeface="Segoe UI" pitchFamily="34" charset="-122"/>
+                <a:cs typeface="Segoe UI" pitchFamily="34" charset="-120"/>
+              </a:rPr>
+              <a:t>How Tokopedia scaled from 300 to 1,000+ engineers — and transformed their entire software architecture with GitHub</a:t>
+            </a:r>
+            <a:endParaRPr lang="en-US" sz="850" dirty="0"/>
+          </a:p>
+        </p:txBody>
+      </p:sp>
+      <p:sp>
+        <p:nvSpPr>
+          <p:cNvPr id="7" name="Shape 5"/>
+          <p:cNvSpPr/>
+          <p:nvPr/>
+        </p:nvSpPr>
+        <p:spPr>
+          <a:xfrm>
+            <a:off x="457200" y="768096"/>
+            <a:ext cx="8229600" cy="5486"/>
+          </a:xfrm>
+          <a:prstGeom prst="rect">
+            <a:avLst/>
+          </a:prstGeom>
+          <a:solidFill>
+            <a:srgbClr val="21262D"/>
+          </a:solidFill>
+          <a:ln/>
+        </p:spPr>
+        <p:txBody>
+          <a:bodyPr/>
+          <a:lstStyle/>
+          <a:p>
+            <a:endParaRPr lang="en-US"/>
+          </a:p>
+        </p:txBody>
+      </p:sp>
+      <p:sp>
+        <p:nvSpPr>
+          <p:cNvPr id="8" name="Shape 6"/>
+          <p:cNvSpPr/>
+          <p:nvPr/>
+        </p:nvSpPr>
+        <p:spPr>
+          <a:xfrm>
+            <a:off x="457200" y="868680"/>
+            <a:ext cx="3108960" cy="3749040"/>
+          </a:xfrm>
+          <a:prstGeom prst="roundRect">
+            <a:avLst>
+              <a:gd name="adj" fmla="val 2353"/>
+            </a:avLst>
+          </a:prstGeom>
+          <a:solidFill>
+            <a:srgbClr val="161B22"/>
+          </a:solidFill>
+          <a:ln w="12700">
+            <a:solidFill>
+              <a:srgbClr val="30363D"/>
+            </a:solidFill>
+            <a:prstDash val="solid"/>
+          </a:ln>
+        </p:spPr>
+        <p:txBody>
+          <a:bodyPr/>
+          <a:lstStyle/>
+          <a:p>
+            <a:endParaRPr lang="en-US"/>
+          </a:p>
+        </p:txBody>
+      </p:sp>
+      <p:sp>
+        <p:nvSpPr>
+          <p:cNvPr id="9" name="Shape 7"/>
+          <p:cNvSpPr/>
+          <p:nvPr/>
+        </p:nvSpPr>
+        <p:spPr>
+          <a:xfrm>
+            <a:off x="621792" y="987552"/>
+            <a:ext cx="640080" cy="201168"/>
+          </a:xfrm>
+          <a:prstGeom prst="roundRect">
+            <a:avLst>
+              <a:gd name="adj" fmla="val 18182"/>
+            </a:avLst>
+          </a:prstGeom>
+          <a:solidFill>
+            <a:srgbClr val="0E3A1E"/>
+          </a:solidFill>
+          <a:ln/>
+        </p:spPr>
+        <p:txBody>
+          <a:bodyPr/>
+          <a:lstStyle/>
+          <a:p>
+            <a:endParaRPr lang="en-US"/>
+          </a:p>
+        </p:txBody>
+      </p:sp>
+      <p:sp>
+        <p:nvSpPr>
+          <p:cNvPr id="10" name="Text 8"/>
+          <p:cNvSpPr/>
+          <p:nvPr/>
+        </p:nvSpPr>
+        <p:spPr>
+          <a:xfrm>
+            <a:off x="621792" y="987552"/>
+            <a:ext cx="640080" cy="201168"/>
+          </a:xfrm>
+          <a:prstGeom prst="rect">
+            <a:avLst/>
+          </a:prstGeom>
+          <a:noFill/>
+          <a:ln/>
+        </p:spPr>
+        <p:txBody>
+          <a:bodyPr wrap="square" rtlCol="0" anchor="ctr"/>
+          <a:lstStyle/>
+          <a:p>
+            <a:pPr marL="0" indent="0" algn="ctr">
+              <a:buNone/>
+            </a:pPr>
+            <a:r>
+              <a:rPr lang="en-US" sz="650" b="1" dirty="0">
+                <a:solidFill>
+                  <a:srgbClr val="3FB950"/>
+                </a:solidFill>
+                <a:latin typeface="Segoe UI" pitchFamily="34" charset="0"/>
+                <a:ea typeface="Segoe UI" pitchFamily="34" charset="-122"/>
+                <a:cs typeface="Segoe UI" pitchFamily="34" charset="-120"/>
+              </a:rPr>
+              <a:t>FEATURED</a:t>
+            </a:r>
+            <a:endParaRPr lang="en-US" sz="650" dirty="0"/>
+          </a:p>
+        </p:txBody>
+      </p:sp>
+      <p:sp>
+        <p:nvSpPr>
+          <p:cNvPr id="11" name="Text 9"/>
+          <p:cNvSpPr/>
+          <p:nvPr/>
+        </p:nvSpPr>
+        <p:spPr>
+          <a:xfrm>
+            <a:off x="621792" y="1234440"/>
+            <a:ext cx="2743200" cy="256032"/>
+          </a:xfrm>
+          <a:prstGeom prst="rect">
+            <a:avLst/>
+          </a:prstGeom>
+          <a:noFill/>
+          <a:ln/>
+        </p:spPr>
+        <p:txBody>
+          <a:bodyPr wrap="square" rtlCol="0" anchor="ctr"/>
+          <a:lstStyle/>
+          <a:p>
+            <a:pPr marL="0" indent="0">
+              <a:buNone/>
+            </a:pPr>
+            <a:r>
+              <a:rPr lang="en-US" sz="1600" b="1" dirty="0">
+                <a:solidFill>
+                  <a:srgbClr val="F0F6FC"/>
+                </a:solidFill>
+                <a:latin typeface="Segoe UI" pitchFamily="34" charset="0"/>
+                <a:ea typeface="Segoe UI" pitchFamily="34" charset="-122"/>
+                <a:cs typeface="Segoe UI" pitchFamily="34" charset="-120"/>
+              </a:rPr>
+              <a:t>Tokopedia</a:t>
+            </a:r>
+            <a:endParaRPr lang="en-US" sz="1600" dirty="0"/>
+          </a:p>
+        </p:txBody>
+      </p:sp>
+      <p:sp>
+        <p:nvSpPr>
+          <p:cNvPr id="12" name="Text 10"/>
+          <p:cNvSpPr/>
+          <p:nvPr/>
+        </p:nvSpPr>
+        <p:spPr>
+          <a:xfrm>
+            <a:off x="621792" y="1463040"/>
+            <a:ext cx="2743200" cy="146304"/>
+          </a:xfrm>
+          <a:prstGeom prst="rect">
+            <a:avLst/>
+          </a:prstGeom>
+          <a:noFill/>
+          <a:ln/>
+        </p:spPr>
+        <p:txBody>
+          <a:bodyPr wrap="square" rtlCol="0" anchor="ctr"/>
+          <a:lstStyle/>
+          <a:p>
+            <a:pPr marL="0" indent="0">
+              <a:buNone/>
+            </a:pPr>
+            <a:r>
+              <a:rPr lang="en-US" sz="800" i="1" dirty="0">
+                <a:solidFill>
+                  <a:srgbClr val="8B949E"/>
+                </a:solidFill>
+                <a:latin typeface="Segoe UI" pitchFamily="34" charset="0"/>
+                <a:ea typeface="Segoe UI" pitchFamily="34" charset="-122"/>
+                <a:cs typeface="Segoe UI" pitchFamily="34" charset="-120"/>
+              </a:rPr>
+              <a:t>Indonesia's Leading E-Commerce Platform</a:t>
+            </a:r>
+            <a:endParaRPr lang="en-US" sz="800" dirty="0"/>
+          </a:p>
+        </p:txBody>
+      </p:sp>
+      <p:sp>
+        <p:nvSpPr>
+          <p:cNvPr id="13" name="Shape 11"/>
+          <p:cNvSpPr/>
+          <p:nvPr/>
+        </p:nvSpPr>
+        <p:spPr>
+          <a:xfrm>
+            <a:off x="621792" y="1691640"/>
+            <a:ext cx="2743200" cy="4572"/>
+          </a:xfrm>
+          <a:prstGeom prst="rect">
+            <a:avLst/>
+          </a:prstGeom>
+          <a:solidFill>
+            <a:srgbClr val="30363D"/>
+          </a:solidFill>
+          <a:ln/>
+        </p:spPr>
+        <p:txBody>
+          <a:bodyPr/>
+          <a:lstStyle/>
+          <a:p>
+            <a:endParaRPr lang="en-US"/>
+          </a:p>
+        </p:txBody>
+      </p:sp>
+      <p:sp>
+        <p:nvSpPr>
+          <p:cNvPr id="14" name="Text 12"/>
+          <p:cNvSpPr/>
+          <p:nvPr/>
+        </p:nvSpPr>
+        <p:spPr>
+          <a:xfrm>
+            <a:off x="621792" y="1783080"/>
+            <a:ext cx="1005840" cy="274320"/>
+          </a:xfrm>
+          <a:prstGeom prst="rect">
+            <a:avLst/>
+          </a:prstGeom>
+          <a:noFill/>
+          <a:ln/>
+        </p:spPr>
+        <p:txBody>
+          <a:bodyPr wrap="square" rtlCol="0" anchor="ctr"/>
+          <a:lstStyle/>
+          <a:p>
+            <a:pPr marL="0" indent="0">
+              <a:buNone/>
+            </a:pPr>
+            <a:r>
+              <a:rPr lang="en-US" sz="1500" b="1" dirty="0">
+                <a:solidFill>
+                  <a:srgbClr val="58A6FF"/>
+                </a:solidFill>
+                <a:latin typeface="Segoe UI" pitchFamily="34" charset="0"/>
+                <a:ea typeface="Segoe UI" pitchFamily="34" charset="-122"/>
+                <a:cs typeface="Segoe UI" pitchFamily="34" charset="-120"/>
+              </a:rPr>
+              <a:t>7.6M+</a:t>
+            </a:r>
+            <a:endParaRPr lang="en-US" sz="1500" dirty="0"/>
+          </a:p>
+        </p:txBody>
+      </p:sp>
+      <p:sp>
+        <p:nvSpPr>
+          <p:cNvPr id="15" name="Text 13"/>
+          <p:cNvSpPr/>
+          <p:nvPr/>
+        </p:nvSpPr>
+        <p:spPr>
+          <a:xfrm>
+            <a:off x="1627632" y="1783080"/>
+            <a:ext cx="1737360" cy="274320"/>
+          </a:xfrm>
+          <a:prstGeom prst="rect">
+            <a:avLst/>
+          </a:prstGeom>
+          <a:noFill/>
+          <a:ln/>
+        </p:spPr>
+        <p:txBody>
+          <a:bodyPr wrap="square" rtlCol="0" anchor="ctr"/>
+          <a:lstStyle/>
+          <a:p>
+            <a:pPr marL="0" indent="0">
+              <a:buNone/>
+            </a:pPr>
+            <a:r>
+              <a:rPr lang="en-US" sz="800" dirty="0">
+                <a:solidFill>
+                  <a:srgbClr val="8B949E"/>
+                </a:solidFill>
+                <a:latin typeface="Segoe UI" pitchFamily="34" charset="0"/>
+                <a:ea typeface="Segoe UI" pitchFamily="34" charset="-122"/>
+                <a:cs typeface="Segoe UI" pitchFamily="34" charset="-120"/>
+              </a:rPr>
+              <a:t>merchants on platform</a:t>
+            </a:r>
+            <a:endParaRPr lang="en-US" sz="800" dirty="0"/>
+          </a:p>
+        </p:txBody>
+      </p:sp>
+      <p:sp>
+        <p:nvSpPr>
+          <p:cNvPr id="16" name="Shape 14"/>
+          <p:cNvSpPr/>
+          <p:nvPr/>
+        </p:nvSpPr>
+        <p:spPr>
+          <a:xfrm>
+            <a:off x="621792" y="2103120"/>
+            <a:ext cx="2743200" cy="3658"/>
+          </a:xfrm>
+          <a:prstGeom prst="rect">
+            <a:avLst/>
+          </a:prstGeom>
+          <a:solidFill>
+            <a:srgbClr val="21262D"/>
+          </a:solidFill>
+          <a:ln/>
+        </p:spPr>
+        <p:txBody>
+          <a:bodyPr/>
+          <a:lstStyle/>
+          <a:p>
+            <a:endParaRPr lang="en-US"/>
+          </a:p>
+        </p:txBody>
+      </p:sp>
+      <p:sp>
+        <p:nvSpPr>
+          <p:cNvPr id="17" name="Text 15"/>
+          <p:cNvSpPr/>
+          <p:nvPr/>
+        </p:nvSpPr>
+        <p:spPr>
+          <a:xfrm>
+            <a:off x="621792" y="2167128"/>
+            <a:ext cx="1005840" cy="274320"/>
+          </a:xfrm>
+          <a:prstGeom prst="rect">
+            <a:avLst/>
+          </a:prstGeom>
+          <a:noFill/>
+          <a:ln/>
+        </p:spPr>
+        <p:txBody>
+          <a:bodyPr wrap="square" rtlCol="0" anchor="ctr"/>
+          <a:lstStyle/>
+          <a:p>
+            <a:pPr marL="0" indent="0">
+              <a:buNone/>
+            </a:pPr>
+            <a:r>
+              <a:rPr lang="en-US" sz="1500" b="1" dirty="0">
+                <a:solidFill>
+                  <a:srgbClr val="58A6FF"/>
+                </a:solidFill>
+                <a:latin typeface="Segoe UI" pitchFamily="34" charset="0"/>
+                <a:ea typeface="Segoe UI" pitchFamily="34" charset="-122"/>
+                <a:cs typeface="Segoe UI" pitchFamily="34" charset="-120"/>
+              </a:rPr>
+              <a:t>86.5%</a:t>
+            </a:r>
+            <a:endParaRPr lang="en-US" sz="1500" dirty="0"/>
+          </a:p>
+        </p:txBody>
+      </p:sp>
+      <p:sp>
+        <p:nvSpPr>
+          <p:cNvPr id="18" name="Text 16"/>
+          <p:cNvSpPr/>
+          <p:nvPr/>
+        </p:nvSpPr>
+        <p:spPr>
+          <a:xfrm>
+            <a:off x="1627632" y="2167128"/>
+            <a:ext cx="1737360" cy="274320"/>
+          </a:xfrm>
+          <a:prstGeom prst="rect">
+            <a:avLst/>
+          </a:prstGeom>
+          <a:noFill/>
+          <a:ln/>
+        </p:spPr>
+        <p:txBody>
+          <a:bodyPr wrap="square" rtlCol="0" anchor="ctr"/>
+          <a:lstStyle/>
+          <a:p>
+            <a:pPr marL="0" indent="0">
+              <a:buNone/>
+            </a:pPr>
+            <a:r>
+              <a:rPr lang="en-US" sz="800" dirty="0">
+                <a:solidFill>
+                  <a:srgbClr val="8B949E"/>
+                </a:solidFill>
+                <a:latin typeface="Segoe UI" pitchFamily="34" charset="0"/>
+                <a:ea typeface="Segoe UI" pitchFamily="34" charset="-122"/>
+                <a:cs typeface="Segoe UI" pitchFamily="34" charset="-120"/>
+              </a:rPr>
+              <a:t>first-time entrepreneurs</a:t>
+            </a:r>
+            <a:endParaRPr lang="en-US" sz="800" dirty="0"/>
+          </a:p>
+        </p:txBody>
+      </p:sp>
+      <p:sp>
+        <p:nvSpPr>
+          <p:cNvPr id="19" name="Shape 17"/>
+          <p:cNvSpPr/>
+          <p:nvPr/>
+        </p:nvSpPr>
+        <p:spPr>
+          <a:xfrm>
+            <a:off x="621792" y="2487168"/>
+            <a:ext cx="2743200" cy="3658"/>
+          </a:xfrm>
+          <a:prstGeom prst="rect">
+            <a:avLst/>
+          </a:prstGeom>
+          <a:solidFill>
+            <a:srgbClr val="21262D"/>
+          </a:solidFill>
+          <a:ln/>
+        </p:spPr>
+        <p:txBody>
+          <a:bodyPr/>
+          <a:lstStyle/>
+          <a:p>
+            <a:endParaRPr lang="en-US"/>
+          </a:p>
+        </p:txBody>
+      </p:sp>
+      <p:sp>
+        <p:nvSpPr>
+          <p:cNvPr id="20" name="Text 18"/>
+          <p:cNvSpPr/>
+          <p:nvPr/>
+        </p:nvSpPr>
+        <p:spPr>
+          <a:xfrm>
+            <a:off x="621792" y="2551176"/>
+            <a:ext cx="1005840" cy="274320"/>
+          </a:xfrm>
+          <a:prstGeom prst="rect">
+            <a:avLst/>
+          </a:prstGeom>
+          <a:noFill/>
+          <a:ln/>
+        </p:spPr>
+        <p:txBody>
+          <a:bodyPr wrap="square" rtlCol="0" anchor="ctr"/>
+          <a:lstStyle/>
+          <a:p>
+            <a:pPr marL="0" indent="0">
+              <a:buNone/>
+            </a:pPr>
+            <a:r>
+              <a:rPr lang="en-US" sz="1500" b="1" dirty="0">
+                <a:solidFill>
+                  <a:srgbClr val="58A6FF"/>
+                </a:solidFill>
+                <a:latin typeface="Segoe UI" pitchFamily="34" charset="0"/>
+                <a:ea typeface="Segoe UI" pitchFamily="34" charset="-122"/>
+                <a:cs typeface="Segoe UI" pitchFamily="34" charset="-120"/>
+              </a:rPr>
+              <a:t>1,000+</a:t>
+            </a:r>
+            <a:endParaRPr lang="en-US" sz="1500" dirty="0"/>
+          </a:p>
+        </p:txBody>
+      </p:sp>
+      <p:sp>
+        <p:nvSpPr>
+          <p:cNvPr id="21" name="Text 19"/>
+          <p:cNvSpPr/>
+          <p:nvPr/>
+        </p:nvSpPr>
+        <p:spPr>
+          <a:xfrm>
+            <a:off x="1627632" y="2551176"/>
+            <a:ext cx="1737360" cy="274320"/>
+          </a:xfrm>
+          <a:prstGeom prst="rect">
+            <a:avLst/>
+          </a:prstGeom>
+          <a:noFill/>
+          <a:ln/>
+        </p:spPr>
+        <p:txBody>
+          <a:bodyPr wrap="square" rtlCol="0" anchor="ctr"/>
+          <a:lstStyle/>
+          <a:p>
+            <a:pPr marL="0" indent="0">
+              <a:buNone/>
+            </a:pPr>
+            <a:r>
+              <a:rPr lang="en-US" sz="800" dirty="0">
+                <a:solidFill>
+                  <a:srgbClr val="8B949E"/>
+                </a:solidFill>
+                <a:latin typeface="Segoe UI" pitchFamily="34" charset="0"/>
+                <a:ea typeface="Segoe UI" pitchFamily="34" charset="-122"/>
+                <a:cs typeface="Segoe UI" pitchFamily="34" charset="-120"/>
+              </a:rPr>
+              <a:t>engineers (from 300)</a:t>
+            </a:r>
+            <a:endParaRPr lang="en-US" sz="800" dirty="0"/>
+          </a:p>
+        </p:txBody>
+      </p:sp>
+      <p:sp>
+        <p:nvSpPr>
+          <p:cNvPr id="22" name="Shape 20"/>
+          <p:cNvSpPr/>
+          <p:nvPr/>
+        </p:nvSpPr>
+        <p:spPr>
+          <a:xfrm>
+            <a:off x="621792" y="2871216"/>
+            <a:ext cx="2743200" cy="3658"/>
+          </a:xfrm>
+          <a:prstGeom prst="rect">
+            <a:avLst/>
+          </a:prstGeom>
+          <a:solidFill>
+            <a:srgbClr val="21262D"/>
+          </a:solidFill>
+          <a:ln/>
+        </p:spPr>
+        <p:txBody>
+          <a:bodyPr/>
+          <a:lstStyle/>
+          <a:p>
+            <a:endParaRPr lang="en-US"/>
+          </a:p>
+        </p:txBody>
+      </p:sp>
+      <p:sp>
+        <p:nvSpPr>
+          <p:cNvPr id="23" name="Text 21"/>
+          <p:cNvSpPr/>
+          <p:nvPr/>
+        </p:nvSpPr>
+        <p:spPr>
+          <a:xfrm>
+            <a:off x="621792" y="2935224"/>
+            <a:ext cx="1005840" cy="274320"/>
+          </a:xfrm>
+          <a:prstGeom prst="rect">
+            <a:avLst/>
+          </a:prstGeom>
+          <a:noFill/>
+          <a:ln/>
+        </p:spPr>
+        <p:txBody>
+          <a:bodyPr wrap="square" rtlCol="0" anchor="ctr"/>
+          <a:lstStyle/>
+          <a:p>
+            <a:pPr marL="0" indent="0">
+              <a:buNone/>
+            </a:pPr>
+            <a:r>
+              <a:rPr lang="en-US" sz="1500" b="1" dirty="0">
+                <a:solidFill>
+                  <a:srgbClr val="58A6FF"/>
+                </a:solidFill>
+                <a:latin typeface="Segoe UI" pitchFamily="34" charset="0"/>
+                <a:ea typeface="Segoe UI" pitchFamily="34" charset="-122"/>
+                <a:cs typeface="Segoe UI" pitchFamily="34" charset="-120"/>
+              </a:rPr>
+              <a:t>200–300</a:t>
+            </a:r>
+            <a:endParaRPr lang="en-US" sz="1500" dirty="0"/>
+          </a:p>
+        </p:txBody>
+      </p:sp>
+      <p:sp>
+        <p:nvSpPr>
+          <p:cNvPr id="24" name="Text 22"/>
+          <p:cNvSpPr/>
+          <p:nvPr/>
+        </p:nvSpPr>
+        <p:spPr>
+          <a:xfrm>
+            <a:off x="1627632" y="2935224"/>
+            <a:ext cx="1737360" cy="274320"/>
+          </a:xfrm>
+          <a:prstGeom prst="rect">
+            <a:avLst/>
+          </a:prstGeom>
+          <a:noFill/>
+          <a:ln/>
+        </p:spPr>
+        <p:txBody>
+          <a:bodyPr wrap="square" rtlCol="0" anchor="ctr"/>
+          <a:lstStyle/>
+          <a:p>
+            <a:pPr marL="0" indent="0">
+              <a:buNone/>
+            </a:pPr>
+            <a:r>
+              <a:rPr lang="en-US" sz="800" dirty="0">
+                <a:solidFill>
+                  <a:srgbClr val="8B949E"/>
+                </a:solidFill>
+                <a:latin typeface="Segoe UI" pitchFamily="34" charset="0"/>
+                <a:ea typeface="Segoe UI" pitchFamily="34" charset="-122"/>
+                <a:cs typeface="Segoe UI" pitchFamily="34" charset="-120"/>
+              </a:rPr>
+              <a:t>daily pushes to production</a:t>
+            </a:r>
+            <a:endParaRPr lang="en-US" sz="800" dirty="0"/>
+          </a:p>
+        </p:txBody>
+      </p:sp>
+      <p:sp>
+        <p:nvSpPr>
+          <p:cNvPr id="25" name="Shape 23"/>
+          <p:cNvSpPr/>
+          <p:nvPr/>
+        </p:nvSpPr>
+        <p:spPr>
+          <a:xfrm>
+            <a:off x="621792" y="3255264"/>
+            <a:ext cx="2743200" cy="3658"/>
+          </a:xfrm>
+          <a:prstGeom prst="rect">
+            <a:avLst/>
+          </a:prstGeom>
+          <a:solidFill>
+            <a:srgbClr val="21262D"/>
+          </a:solidFill>
+          <a:ln/>
+        </p:spPr>
+        <p:txBody>
+          <a:bodyPr/>
+          <a:lstStyle/>
+          <a:p>
+            <a:endParaRPr lang="en-US"/>
+          </a:p>
+        </p:txBody>
+      </p:sp>
+      <p:sp>
+        <p:nvSpPr>
+          <p:cNvPr id="26" name="Text 24"/>
+          <p:cNvSpPr/>
+          <p:nvPr/>
+        </p:nvSpPr>
+        <p:spPr>
+          <a:xfrm>
+            <a:off x="621792" y="3319272"/>
+            <a:ext cx="1005840" cy="274320"/>
+          </a:xfrm>
+          <a:prstGeom prst="rect">
+            <a:avLst/>
+          </a:prstGeom>
+          <a:noFill/>
+          <a:ln/>
+        </p:spPr>
+        <p:txBody>
+          <a:bodyPr wrap="square" rtlCol="0" anchor="ctr"/>
+          <a:lstStyle/>
+          <a:p>
+            <a:pPr marL="0" indent="0">
+              <a:buNone/>
+            </a:pPr>
+            <a:r>
+              <a:rPr lang="en-US" sz="1500" b="1" dirty="0">
+                <a:solidFill>
+                  <a:srgbClr val="58A6FF"/>
+                </a:solidFill>
+                <a:latin typeface="Segoe UI" pitchFamily="34" charset="0"/>
+                <a:ea typeface="Segoe UI" pitchFamily="34" charset="-122"/>
+                <a:cs typeface="Segoe UI" pitchFamily="34" charset="-120"/>
+              </a:rPr>
+              <a:t>80%</a:t>
+            </a:r>
+            <a:endParaRPr lang="en-US" sz="1500" dirty="0"/>
+          </a:p>
+        </p:txBody>
+      </p:sp>
+      <p:sp>
+        <p:nvSpPr>
+          <p:cNvPr id="27" name="Text 25"/>
+          <p:cNvSpPr/>
+          <p:nvPr/>
+        </p:nvSpPr>
+        <p:spPr>
+          <a:xfrm>
+            <a:off x="1627632" y="3319272"/>
+            <a:ext cx="1737360" cy="274320"/>
+          </a:xfrm>
+          <a:prstGeom prst="rect">
+            <a:avLst/>
+          </a:prstGeom>
+          <a:noFill/>
+          <a:ln/>
+        </p:spPr>
+        <p:txBody>
+          <a:bodyPr wrap="square" rtlCol="0" anchor="ctr"/>
+          <a:lstStyle/>
+          <a:p>
+            <a:pPr marL="0" indent="0">
+              <a:buNone/>
+            </a:pPr>
+            <a:r>
+              <a:rPr lang="en-US" sz="800" dirty="0">
+                <a:solidFill>
+                  <a:srgbClr val="8B949E"/>
+                </a:solidFill>
+                <a:latin typeface="Segoe UI" pitchFamily="34" charset="0"/>
+                <a:ea typeface="Segoe UI" pitchFamily="34" charset="-122"/>
+                <a:cs typeface="Segoe UI" pitchFamily="34" charset="-120"/>
+              </a:rPr>
+              <a:t>workflow automation</a:t>
+            </a:r>
+            <a:endParaRPr lang="en-US" sz="800" dirty="0"/>
+          </a:p>
+        </p:txBody>
+      </p:sp>
+      <p:sp>
+        <p:nvSpPr>
+          <p:cNvPr id="28" name="Shape 26"/>
+          <p:cNvSpPr/>
+          <p:nvPr/>
+        </p:nvSpPr>
+        <p:spPr>
+          <a:xfrm>
+            <a:off x="621792" y="3767328"/>
+            <a:ext cx="868680" cy="182880"/>
+          </a:xfrm>
+          <a:prstGeom prst="roundRect">
+            <a:avLst>
+              <a:gd name="adj" fmla="val 20000"/>
+            </a:avLst>
+          </a:prstGeom>
+          <a:solidFill>
+            <a:srgbClr val="1A1530"/>
+          </a:solidFill>
+          <a:ln/>
+        </p:spPr>
+        <p:txBody>
+          <a:bodyPr/>
+          <a:lstStyle/>
+          <a:p>
+            <a:endParaRPr lang="en-US"/>
+          </a:p>
+        </p:txBody>
+      </p:sp>
+      <p:sp>
+        <p:nvSpPr>
+          <p:cNvPr id="29" name="Text 27"/>
+          <p:cNvSpPr/>
+          <p:nvPr/>
+        </p:nvSpPr>
+        <p:spPr>
+          <a:xfrm>
+            <a:off x="621792" y="3767328"/>
+            <a:ext cx="868680" cy="182880"/>
+          </a:xfrm>
+          <a:prstGeom prst="rect">
+            <a:avLst/>
+          </a:prstGeom>
+          <a:noFill/>
+          <a:ln/>
+        </p:spPr>
+        <p:txBody>
+          <a:bodyPr wrap="square" rtlCol="0" anchor="ctr"/>
+          <a:lstStyle/>
+          <a:p>
+            <a:pPr marL="0" indent="0" algn="ctr">
+              <a:buNone/>
+            </a:pPr>
+            <a:r>
+              <a:rPr lang="en-US" sz="600" b="1" dirty="0">
+                <a:solidFill>
+                  <a:srgbClr val="A371F7"/>
+                </a:solidFill>
+                <a:latin typeface="Segoe UI" pitchFamily="34" charset="0"/>
+                <a:ea typeface="Segoe UI" pitchFamily="34" charset="-122"/>
+                <a:cs typeface="Segoe UI" pitchFamily="34" charset="-120"/>
+              </a:rPr>
+              <a:t>Enterprise Cloud</a:t>
+            </a:r>
+            <a:endParaRPr lang="en-US" sz="600" dirty="0"/>
+          </a:p>
+        </p:txBody>
+      </p:sp>
+      <p:sp>
+        <p:nvSpPr>
+          <p:cNvPr id="30" name="Shape 28"/>
+          <p:cNvSpPr/>
+          <p:nvPr/>
+        </p:nvSpPr>
+        <p:spPr>
+          <a:xfrm>
+            <a:off x="1545336" y="3767328"/>
+            <a:ext cx="594360" cy="182880"/>
+          </a:xfrm>
+          <a:prstGeom prst="roundRect">
+            <a:avLst>
+              <a:gd name="adj" fmla="val 20000"/>
+            </a:avLst>
+          </a:prstGeom>
+          <a:solidFill>
+            <a:srgbClr val="1A1530"/>
+          </a:solidFill>
+          <a:ln/>
+        </p:spPr>
+        <p:txBody>
+          <a:bodyPr/>
+          <a:lstStyle/>
+          <a:p>
+            <a:endParaRPr lang="en-US"/>
+          </a:p>
+        </p:txBody>
+      </p:sp>
+      <p:sp>
+        <p:nvSpPr>
+          <p:cNvPr id="31" name="Text 29"/>
+          <p:cNvSpPr/>
+          <p:nvPr/>
+        </p:nvSpPr>
+        <p:spPr>
+          <a:xfrm>
+            <a:off x="1545336" y="3767328"/>
+            <a:ext cx="594360" cy="182880"/>
+          </a:xfrm>
+          <a:prstGeom prst="rect">
+            <a:avLst/>
+          </a:prstGeom>
+          <a:noFill/>
+          <a:ln/>
+        </p:spPr>
+        <p:txBody>
+          <a:bodyPr wrap="square" rtlCol="0" anchor="ctr"/>
+          <a:lstStyle/>
+          <a:p>
+            <a:pPr marL="0" indent="0" algn="ctr">
+              <a:buNone/>
+            </a:pPr>
+            <a:r>
+              <a:rPr lang="en-US" sz="600" b="1" dirty="0">
+                <a:solidFill>
+                  <a:srgbClr val="A371F7"/>
+                </a:solidFill>
+                <a:latin typeface="Segoe UI" pitchFamily="34" charset="0"/>
+                <a:ea typeface="Segoe UI" pitchFamily="34" charset="-122"/>
+                <a:cs typeface="Segoe UI" pitchFamily="34" charset="-120"/>
+              </a:rPr>
+              <a:t>Actions</a:t>
+            </a:r>
+            <a:endParaRPr lang="en-US" sz="600" dirty="0"/>
+          </a:p>
+        </p:txBody>
+      </p:sp>
+      <p:sp>
+        <p:nvSpPr>
+          <p:cNvPr id="32" name="Shape 30"/>
+          <p:cNvSpPr/>
+          <p:nvPr/>
+        </p:nvSpPr>
+        <p:spPr>
+          <a:xfrm>
+            <a:off x="2194560" y="3767328"/>
+            <a:ext cx="594360" cy="182880"/>
+          </a:xfrm>
+          <a:prstGeom prst="roundRect">
+            <a:avLst>
+              <a:gd name="adj" fmla="val 20000"/>
+            </a:avLst>
+          </a:prstGeom>
+          <a:solidFill>
+            <a:srgbClr val="1A1530"/>
+          </a:solidFill>
+          <a:ln/>
+        </p:spPr>
+        <p:txBody>
+          <a:bodyPr/>
+          <a:lstStyle/>
+          <a:p>
+            <a:endParaRPr lang="en-US"/>
+          </a:p>
+        </p:txBody>
+      </p:sp>
+      <p:sp>
+        <p:nvSpPr>
+          <p:cNvPr id="33" name="Text 31"/>
+          <p:cNvSpPr/>
+          <p:nvPr/>
+        </p:nvSpPr>
+        <p:spPr>
+          <a:xfrm>
+            <a:off x="2194560" y="3767328"/>
+            <a:ext cx="594360" cy="182880"/>
+          </a:xfrm>
+          <a:prstGeom prst="rect">
+            <a:avLst/>
+          </a:prstGeom>
+          <a:noFill/>
+          <a:ln/>
+        </p:spPr>
+        <p:txBody>
+          <a:bodyPr wrap="square" rtlCol="0" anchor="ctr"/>
+          <a:lstStyle/>
+          <a:p>
+            <a:pPr marL="0" indent="0" algn="ctr">
+              <a:buNone/>
+            </a:pPr>
+            <a:r>
+              <a:rPr lang="en-US" sz="600" b="1" dirty="0">
+                <a:solidFill>
+                  <a:srgbClr val="A371F7"/>
+                </a:solidFill>
+                <a:latin typeface="Segoe UI" pitchFamily="34" charset="0"/>
+                <a:ea typeface="Segoe UI" pitchFamily="34" charset="-122"/>
+                <a:cs typeface="Segoe UI" pitchFamily="34" charset="-120"/>
+              </a:rPr>
+              <a:t>Packages</a:t>
+            </a:r>
+            <a:endParaRPr lang="en-US" sz="600" dirty="0"/>
+          </a:p>
+        </p:txBody>
+      </p:sp>
+      <p:sp>
+        <p:nvSpPr>
+          <p:cNvPr id="34" name="Shape 32"/>
+          <p:cNvSpPr/>
+          <p:nvPr/>
+        </p:nvSpPr>
+        <p:spPr>
+          <a:xfrm>
+            <a:off x="2843784" y="3767328"/>
+            <a:ext cx="1005840" cy="182880"/>
+          </a:xfrm>
+          <a:prstGeom prst="roundRect">
+            <a:avLst>
+              <a:gd name="adj" fmla="val 20000"/>
+            </a:avLst>
+          </a:prstGeom>
+          <a:solidFill>
+            <a:srgbClr val="1A1530"/>
+          </a:solidFill>
+          <a:ln/>
+        </p:spPr>
+        <p:txBody>
+          <a:bodyPr/>
+          <a:lstStyle/>
+          <a:p>
+            <a:endParaRPr lang="en-US"/>
+          </a:p>
+        </p:txBody>
+      </p:sp>
+      <p:sp>
+        <p:nvSpPr>
+          <p:cNvPr id="35" name="Text 33"/>
+          <p:cNvSpPr/>
+          <p:nvPr/>
+        </p:nvSpPr>
+        <p:spPr>
+          <a:xfrm>
+            <a:off x="2843784" y="3767328"/>
+            <a:ext cx="1005840" cy="182880"/>
+          </a:xfrm>
+          <a:prstGeom prst="rect">
+            <a:avLst/>
+          </a:prstGeom>
+          <a:noFill/>
+          <a:ln/>
+        </p:spPr>
+        <p:txBody>
+          <a:bodyPr wrap="square" rtlCol="0" anchor="ctr"/>
+          <a:lstStyle/>
+          <a:p>
+            <a:pPr marL="0" indent="0" algn="ctr">
+              <a:buNone/>
+            </a:pPr>
+            <a:r>
+              <a:rPr lang="en-US" sz="600" b="1" dirty="0">
+                <a:solidFill>
+                  <a:srgbClr val="A371F7"/>
+                </a:solidFill>
+                <a:latin typeface="Segoe UI" pitchFamily="34" charset="0"/>
+                <a:ea typeface="Segoe UI" pitchFamily="34" charset="-122"/>
+                <a:cs typeface="Segoe UI" pitchFamily="34" charset="-120"/>
+              </a:rPr>
+              <a:t>Security Advisories</a:t>
+            </a:r>
+            <a:endParaRPr lang="en-US" sz="600" dirty="0"/>
+          </a:p>
+        </p:txBody>
+      </p:sp>
+      <p:sp>
+        <p:nvSpPr>
+          <p:cNvPr id="36" name="Shape 34"/>
+          <p:cNvSpPr/>
+          <p:nvPr/>
+        </p:nvSpPr>
+        <p:spPr>
+          <a:xfrm>
+            <a:off x="621792" y="4041648"/>
+            <a:ext cx="1828800" cy="164592"/>
+          </a:xfrm>
+          <a:prstGeom prst="roundRect">
+            <a:avLst>
+              <a:gd name="adj" fmla="val 22222"/>
+            </a:avLst>
+          </a:prstGeom>
+          <a:solidFill>
+            <a:srgbClr val="1C1E24"/>
+          </a:solidFill>
+          <a:ln/>
+        </p:spPr>
+        <p:txBody>
+          <a:bodyPr/>
+          <a:lstStyle/>
+          <a:p>
+            <a:endParaRPr lang="en-US"/>
+          </a:p>
+        </p:txBody>
+      </p:sp>
+      <p:sp>
+        <p:nvSpPr>
+          <p:cNvPr id="37" name="Text 35"/>
+          <p:cNvSpPr/>
+          <p:nvPr/>
+        </p:nvSpPr>
+        <p:spPr>
+          <a:xfrm>
+            <a:off x="621792" y="4041648"/>
+            <a:ext cx="1828800" cy="164592"/>
+          </a:xfrm>
+          <a:prstGeom prst="rect">
+            <a:avLst/>
+          </a:prstGeom>
+          <a:noFill/>
+          <a:ln/>
+        </p:spPr>
+        <p:txBody>
+          <a:bodyPr wrap="square" rtlCol="0" anchor="ctr"/>
+          <a:lstStyle/>
+          <a:p>
+            <a:pPr marL="0" indent="0" algn="ctr">
+              <a:buNone/>
+            </a:pPr>
+            <a:r>
+              <a:rPr lang="en-US" sz="550" dirty="0">
+                <a:solidFill>
+                  <a:srgbClr val="58A6FF"/>
+                </a:solidFill>
+                <a:latin typeface="Segoe UI" pitchFamily="34" charset="0"/>
+                <a:ea typeface="Segoe UI" pitchFamily="34" charset="-122"/>
+                <a:cs typeface="Segoe UI" pitchFamily="34" charset="-120"/>
+              </a:rPr>
+              <a:t>github.com/customer-stories/tokopedia</a:t>
+            </a:r>
+            <a:endParaRPr lang="en-US" sz="550" dirty="0"/>
+          </a:p>
+        </p:txBody>
+      </p:sp>
+      <p:sp>
+        <p:nvSpPr>
+          <p:cNvPr id="38" name="Shape 36"/>
+          <p:cNvSpPr/>
+          <p:nvPr/>
+        </p:nvSpPr>
+        <p:spPr>
+          <a:xfrm>
+            <a:off x="3794760" y="868680"/>
+            <a:ext cx="4892040" cy="1097280"/>
+          </a:xfrm>
+          <a:prstGeom prst="roundRect">
+            <a:avLst>
+              <a:gd name="adj" fmla="val 6667"/>
+            </a:avLst>
+          </a:prstGeom>
+          <a:solidFill>
+            <a:srgbClr val="161B22"/>
+          </a:solidFill>
+          <a:ln w="12700">
+            <a:solidFill>
+              <a:srgbClr val="30363D"/>
+            </a:solidFill>
+            <a:prstDash val="solid"/>
+          </a:ln>
+        </p:spPr>
+        <p:txBody>
+          <a:bodyPr/>
+          <a:lstStyle/>
+          <a:p>
+            <a:endParaRPr lang="en-US"/>
+          </a:p>
+        </p:txBody>
+      </p:sp>
+      <p:sp>
+        <p:nvSpPr>
+          <p:cNvPr id="39" name="Shape 37"/>
+          <p:cNvSpPr/>
+          <p:nvPr/>
+        </p:nvSpPr>
+        <p:spPr>
+          <a:xfrm>
+            <a:off x="3931920" y="960120"/>
+            <a:ext cx="256032" cy="256032"/>
+          </a:xfrm>
+          <a:prstGeom prst="roundRect">
+            <a:avLst>
+              <a:gd name="adj" fmla="val 17857"/>
+            </a:avLst>
+          </a:prstGeom>
+          <a:solidFill>
+            <a:srgbClr val="0D1117"/>
+          </a:solidFill>
+          <a:ln/>
+        </p:spPr>
+        <p:txBody>
+          <a:bodyPr/>
+          <a:lstStyle/>
+          <a:p>
+            <a:endParaRPr lang="en-US"/>
+          </a:p>
+        </p:txBody>
+      </p:sp>
+      <p:sp>
+        <p:nvSpPr>
+          <p:cNvPr id="40" name="Text 38"/>
+          <p:cNvSpPr/>
+          <p:nvPr/>
+        </p:nvSpPr>
+        <p:spPr>
+          <a:xfrm>
+            <a:off x="3931920" y="960120"/>
+            <a:ext cx="256032" cy="256032"/>
+          </a:xfrm>
+          <a:prstGeom prst="rect">
+            <a:avLst/>
+          </a:prstGeom>
+          <a:noFill/>
+          <a:ln/>
+        </p:spPr>
+        <p:txBody>
+          <a:bodyPr wrap="square" rtlCol="0" anchor="ctr"/>
+          <a:lstStyle/>
+          <a:p>
+            <a:pPr marL="0" indent="0" algn="ctr">
+              <a:buNone/>
+            </a:pPr>
+            <a:r>
+              <a:rPr lang="en-US" sz="1200" dirty="0">
+                <a:solidFill>
+                  <a:srgbClr val="000000"/>
+                </a:solidFill>
+              </a:rPr>
+              <a:t>⚡</a:t>
+            </a:r>
+            <a:endParaRPr lang="en-US" sz="1200" dirty="0"/>
+          </a:p>
+        </p:txBody>
+      </p:sp>
+      <p:sp>
+        <p:nvSpPr>
+          <p:cNvPr id="41" name="Text 39"/>
+          <p:cNvSpPr/>
+          <p:nvPr/>
+        </p:nvSpPr>
+        <p:spPr>
+          <a:xfrm>
+            <a:off x="4233672" y="960120"/>
+            <a:ext cx="2743200" cy="237744"/>
+          </a:xfrm>
+          <a:prstGeom prst="rect">
+            <a:avLst/>
+          </a:prstGeom>
+          <a:noFill/>
+          <a:ln/>
+        </p:spPr>
+        <p:txBody>
+          <a:bodyPr wrap="square" rtlCol="0" anchor="ctr"/>
+          <a:lstStyle/>
+          <a:p>
+            <a:pPr marL="0" indent="0">
+              <a:buNone/>
+            </a:pPr>
+            <a:r>
+              <a:rPr lang="en-US" sz="1000" b="1" dirty="0">
+                <a:solidFill>
+                  <a:srgbClr val="F0F6FC"/>
+                </a:solidFill>
+                <a:latin typeface="Segoe UI" pitchFamily="34" charset="0"/>
+                <a:ea typeface="Segoe UI" pitchFamily="34" charset="-122"/>
+                <a:cs typeface="Segoe UI" pitchFamily="34" charset="-120"/>
+              </a:rPr>
+              <a:t>The Challenge</a:t>
+            </a:r>
+            <a:endParaRPr lang="en-US" sz="1000" dirty="0"/>
+          </a:p>
+        </p:txBody>
+      </p:sp>
+      <p:sp>
+        <p:nvSpPr>
+          <p:cNvPr id="42" name="Text 40"/>
+          <p:cNvSpPr/>
+          <p:nvPr/>
+        </p:nvSpPr>
+        <p:spPr>
+          <a:xfrm>
+            <a:off x="3931920" y="1252728"/>
+            <a:ext cx="4572000" cy="621792"/>
+          </a:xfrm>
+          <a:prstGeom prst="rect">
+            <a:avLst/>
+          </a:prstGeom>
+          <a:noFill/>
+          <a:ln/>
+        </p:spPr>
+        <p:txBody>
+          <a:bodyPr wrap="square" rtlCol="0" anchor="ctr"/>
+          <a:lstStyle/>
+          <a:p>
+            <a:pPr marL="0" indent="0">
+              <a:lnSpc>
+                <a:spcPct val="120000"/>
+              </a:lnSpc>
+              <a:buNone/>
+            </a:pPr>
+            <a:r>
+              <a:rPr lang="en-US" sz="750" dirty="0">
+                <a:solidFill>
+                  <a:srgbClr val="8B949E"/>
+                </a:solidFill>
+                <a:latin typeface="Segoe UI" pitchFamily="34" charset="0"/>
+                <a:ea typeface="Segoe UI" pitchFamily="34" charset="-122"/>
+                <a:cs typeface="Segoe UI" pitchFamily="34" charset="-120"/>
+              </a:rPr>
+              <a:t>Tokopedia's monolith architecture couldn't scale with their engineering team growth from 300 to 1,000+ developers across multiple locations. On-premises code management created bottlenecks — everything had to go through one team for deployment.</a:t>
+            </a:r>
+            <a:endParaRPr lang="en-US" sz="750" dirty="0"/>
+          </a:p>
+        </p:txBody>
+      </p:sp>
+      <p:sp>
+        <p:nvSpPr>
+          <p:cNvPr id="43" name="Shape 41"/>
+          <p:cNvSpPr/>
+          <p:nvPr/>
+        </p:nvSpPr>
+        <p:spPr>
+          <a:xfrm>
+            <a:off x="3794760" y="2057400"/>
+            <a:ext cx="4892040" cy="1097280"/>
+          </a:xfrm>
+          <a:prstGeom prst="roundRect">
+            <a:avLst>
+              <a:gd name="adj" fmla="val 6667"/>
+            </a:avLst>
+          </a:prstGeom>
+          <a:solidFill>
+            <a:srgbClr val="161B22"/>
+          </a:solidFill>
+          <a:ln w="12700">
+            <a:solidFill>
+              <a:srgbClr val="30363D"/>
+            </a:solidFill>
+            <a:prstDash val="solid"/>
+          </a:ln>
+        </p:spPr>
+        <p:txBody>
+          <a:bodyPr/>
+          <a:lstStyle/>
+          <a:p>
+            <a:endParaRPr lang="en-US"/>
+          </a:p>
+        </p:txBody>
+      </p:sp>
+      <p:sp>
+        <p:nvSpPr>
+          <p:cNvPr id="44" name="Shape 42"/>
+          <p:cNvSpPr/>
+          <p:nvPr/>
+        </p:nvSpPr>
+        <p:spPr>
+          <a:xfrm>
+            <a:off x="3931920" y="2148840"/>
+            <a:ext cx="256032" cy="256032"/>
+          </a:xfrm>
+          <a:prstGeom prst="roundRect">
+            <a:avLst>
+              <a:gd name="adj" fmla="val 17857"/>
+            </a:avLst>
+          </a:prstGeom>
+          <a:solidFill>
+            <a:srgbClr val="0D1117"/>
+          </a:solidFill>
+          <a:ln/>
+        </p:spPr>
+        <p:txBody>
+          <a:bodyPr/>
+          <a:lstStyle/>
+          <a:p>
+            <a:endParaRPr lang="en-US"/>
+          </a:p>
+        </p:txBody>
+      </p:sp>
+      <p:sp>
+        <p:nvSpPr>
+          <p:cNvPr id="45" name="Text 43"/>
+          <p:cNvSpPr/>
+          <p:nvPr/>
+        </p:nvSpPr>
+        <p:spPr>
+          <a:xfrm>
+            <a:off x="3931920" y="2148840"/>
+            <a:ext cx="256032" cy="256032"/>
+          </a:xfrm>
+          <a:prstGeom prst="rect">
+            <a:avLst/>
+          </a:prstGeom>
+          <a:noFill/>
+          <a:ln/>
+        </p:spPr>
+        <p:txBody>
+          <a:bodyPr wrap="square" rtlCol="0" anchor="ctr"/>
+          <a:lstStyle/>
+          <a:p>
+            <a:pPr marL="0" indent="0" algn="ctr">
+              <a:buNone/>
+            </a:pPr>
+            <a:r>
+              <a:rPr lang="en-US" sz="1200" dirty="0">
+                <a:solidFill>
+                  <a:srgbClr val="000000"/>
+                </a:solidFill>
+              </a:rPr>
+              <a:t>🛠️</a:t>
+            </a:r>
+            <a:endParaRPr lang="en-US" sz="1200" dirty="0"/>
+          </a:p>
+        </p:txBody>
+      </p:sp>
+      <p:sp>
+        <p:nvSpPr>
+          <p:cNvPr id="46" name="Text 44"/>
+          <p:cNvSpPr/>
+          <p:nvPr/>
+        </p:nvSpPr>
+        <p:spPr>
+          <a:xfrm>
+            <a:off x="4233672" y="2148840"/>
+            <a:ext cx="2743200" cy="237744"/>
+          </a:xfrm>
+          <a:prstGeom prst="rect">
+            <a:avLst/>
+          </a:prstGeom>
+          <a:noFill/>
+          <a:ln/>
+        </p:spPr>
+        <p:txBody>
+          <a:bodyPr wrap="square" rtlCol="0" anchor="ctr"/>
+          <a:lstStyle/>
+          <a:p>
+            <a:pPr marL="0" indent="0">
+              <a:buNone/>
+            </a:pPr>
+            <a:r>
+              <a:rPr lang="en-US" sz="1000" b="1" dirty="0">
+                <a:solidFill>
+                  <a:srgbClr val="F0F6FC"/>
+                </a:solidFill>
+                <a:latin typeface="Segoe UI" pitchFamily="34" charset="0"/>
+                <a:ea typeface="Segoe UI" pitchFamily="34" charset="-122"/>
+                <a:cs typeface="Segoe UI" pitchFamily="34" charset="-120"/>
+              </a:rPr>
+              <a:t>The Solution</a:t>
+            </a:r>
+            <a:endParaRPr lang="en-US" sz="1000" dirty="0"/>
+          </a:p>
+        </p:txBody>
+      </p:sp>
+      <p:sp>
+        <p:nvSpPr>
+          <p:cNvPr id="47" name="Text 45"/>
+          <p:cNvSpPr/>
+          <p:nvPr/>
+        </p:nvSpPr>
+        <p:spPr>
+          <a:xfrm>
+            <a:off x="3931920" y="2441448"/>
+            <a:ext cx="4572000" cy="621792"/>
+          </a:xfrm>
+          <a:prstGeom prst="rect">
+            <a:avLst/>
+          </a:prstGeom>
+          <a:noFill/>
+          <a:ln/>
+        </p:spPr>
+        <p:txBody>
+          <a:bodyPr wrap="square" rtlCol="0" anchor="ctr"/>
+          <a:lstStyle/>
+          <a:p>
+            <a:pPr marL="0" indent="0">
+              <a:lnSpc>
+                <a:spcPct val="120000"/>
+              </a:lnSpc>
+              <a:buNone/>
+            </a:pPr>
+            <a:r>
+              <a:rPr lang="en-US" sz="750" dirty="0">
+                <a:solidFill>
+                  <a:srgbClr val="8B949E"/>
+                </a:solidFill>
+                <a:latin typeface="Segoe UI" pitchFamily="34" charset="0"/>
+                <a:ea typeface="Segoe UI" pitchFamily="34" charset="-122"/>
+                <a:cs typeface="Segoe UI" pitchFamily="34" charset="-120"/>
+              </a:rPr>
+              <a:t>Migrated to GitHub Enterprise Cloud and transitioned to a microservices architecture. Individual engineers now manage their own code and deploy independently. GitHub Actions automates 80% of workflows — up from 20% with their previous vendor.</a:t>
+            </a:r>
+            <a:endParaRPr lang="en-US" sz="750" dirty="0"/>
+          </a:p>
+        </p:txBody>
+      </p:sp>
+      <p:sp>
+        <p:nvSpPr>
+          <p:cNvPr id="48" name="Shape 46"/>
+          <p:cNvSpPr/>
+          <p:nvPr/>
+        </p:nvSpPr>
+        <p:spPr>
+          <a:xfrm>
+            <a:off x="3794760" y="3246120"/>
+            <a:ext cx="4892040" cy="1097280"/>
+          </a:xfrm>
+          <a:prstGeom prst="roundRect">
+            <a:avLst>
+              <a:gd name="adj" fmla="val 6667"/>
+            </a:avLst>
+          </a:prstGeom>
+          <a:solidFill>
+            <a:srgbClr val="161B22"/>
+          </a:solidFill>
+          <a:ln w="12700">
+            <a:solidFill>
+              <a:srgbClr val="30363D"/>
+            </a:solidFill>
+            <a:prstDash val="solid"/>
+          </a:ln>
+        </p:spPr>
+        <p:txBody>
+          <a:bodyPr/>
+          <a:lstStyle/>
+          <a:p>
+            <a:endParaRPr lang="en-US"/>
+          </a:p>
+        </p:txBody>
+      </p:sp>
+      <p:sp>
+        <p:nvSpPr>
+          <p:cNvPr id="49" name="Shape 47"/>
+          <p:cNvSpPr/>
+          <p:nvPr/>
+        </p:nvSpPr>
+        <p:spPr>
+          <a:xfrm>
+            <a:off x="3931920" y="3337560"/>
+            <a:ext cx="256032" cy="256032"/>
+          </a:xfrm>
+          <a:prstGeom prst="roundRect">
+            <a:avLst>
+              <a:gd name="adj" fmla="val 17857"/>
+            </a:avLst>
+          </a:prstGeom>
+          <a:solidFill>
+            <a:srgbClr val="0D1117"/>
+          </a:solidFill>
+          <a:ln/>
+        </p:spPr>
+        <p:txBody>
+          <a:bodyPr/>
+          <a:lstStyle/>
+          <a:p>
+            <a:endParaRPr lang="en-US"/>
+          </a:p>
+        </p:txBody>
+      </p:sp>
+      <p:sp>
+        <p:nvSpPr>
+          <p:cNvPr id="50" name="Text 48"/>
+          <p:cNvSpPr/>
+          <p:nvPr/>
+        </p:nvSpPr>
+        <p:spPr>
+          <a:xfrm>
+            <a:off x="3931920" y="3337560"/>
+            <a:ext cx="256032" cy="256032"/>
+          </a:xfrm>
+          <a:prstGeom prst="rect">
+            <a:avLst/>
+          </a:prstGeom>
+          <a:noFill/>
+          <a:ln/>
+        </p:spPr>
+        <p:txBody>
+          <a:bodyPr wrap="square" rtlCol="0" anchor="ctr"/>
+          <a:lstStyle/>
+          <a:p>
+            <a:pPr marL="0" indent="0" algn="ctr">
+              <a:buNone/>
+            </a:pPr>
+            <a:r>
+              <a:rPr lang="en-US" sz="1200" dirty="0">
+                <a:solidFill>
+                  <a:srgbClr val="000000"/>
+                </a:solidFill>
+              </a:rPr>
+              <a:t>🚀</a:t>
+            </a:r>
+            <a:endParaRPr lang="en-US" sz="1200" dirty="0"/>
+          </a:p>
+        </p:txBody>
+      </p:sp>
+      <p:sp>
+        <p:nvSpPr>
+          <p:cNvPr id="51" name="Text 49"/>
+          <p:cNvSpPr/>
+          <p:nvPr/>
+        </p:nvSpPr>
+        <p:spPr>
+          <a:xfrm>
+            <a:off x="4233672" y="3337560"/>
+            <a:ext cx="2743200" cy="237744"/>
+          </a:xfrm>
+          <a:prstGeom prst="rect">
+            <a:avLst/>
+          </a:prstGeom>
+          <a:noFill/>
+          <a:ln/>
+        </p:spPr>
+        <p:txBody>
+          <a:bodyPr wrap="square" rtlCol="0" anchor="ctr"/>
+          <a:lstStyle/>
+          <a:p>
+            <a:pPr marL="0" indent="0">
+              <a:buNone/>
+            </a:pPr>
+            <a:r>
+              <a:rPr lang="en-US" sz="1000" b="1" dirty="0">
+                <a:solidFill>
+                  <a:srgbClr val="F0F6FC"/>
+                </a:solidFill>
+                <a:latin typeface="Segoe UI" pitchFamily="34" charset="0"/>
+                <a:ea typeface="Segoe UI" pitchFamily="34" charset="-122"/>
+                <a:cs typeface="Segoe UI" pitchFamily="34" charset="-120"/>
+              </a:rPr>
+              <a:t>The Impact</a:t>
+            </a:r>
+            <a:endParaRPr lang="en-US" sz="1000" dirty="0"/>
+          </a:p>
+        </p:txBody>
+      </p:sp>
+      <p:sp>
+        <p:nvSpPr>
+          <p:cNvPr id="52" name="Shape 50"/>
+          <p:cNvSpPr/>
+          <p:nvPr/>
+        </p:nvSpPr>
+        <p:spPr>
+          <a:xfrm>
+            <a:off x="3931920" y="3611880"/>
+            <a:ext cx="36576" cy="594360"/>
+          </a:xfrm>
+          <a:prstGeom prst="rect">
+            <a:avLst/>
+          </a:prstGeom>
+          <a:solidFill>
+            <a:srgbClr val="3FB950"/>
+          </a:solidFill>
+          <a:ln/>
+        </p:spPr>
+        <p:txBody>
+          <a:bodyPr/>
+          <a:lstStyle/>
+          <a:p>
+            <a:endParaRPr lang="en-US"/>
+          </a:p>
+        </p:txBody>
+      </p:sp>
+      <p:sp>
+        <p:nvSpPr>
+          <p:cNvPr id="53" name="Text 51"/>
+          <p:cNvSpPr/>
+          <p:nvPr/>
+        </p:nvSpPr>
+        <p:spPr>
+          <a:xfrm>
+            <a:off x="4069080" y="3611880"/>
+            <a:ext cx="4407408" cy="484632"/>
+          </a:xfrm>
+          <a:prstGeom prst="rect">
+            <a:avLst/>
+          </a:prstGeom>
+          <a:noFill/>
+          <a:ln/>
+        </p:spPr>
+        <p:txBody>
+          <a:bodyPr wrap="square" rtlCol="0" anchor="ctr"/>
+          <a:lstStyle/>
+          <a:p>
+            <a:pPr marL="0" indent="0">
+              <a:lnSpc>
+                <a:spcPct val="115000"/>
+              </a:lnSpc>
+              <a:buNone/>
+            </a:pPr>
+            <a:r>
+              <a:rPr lang="en-US" sz="750" i="1" dirty="0">
+                <a:solidFill>
+                  <a:srgbClr val="C9D1D9"/>
+                </a:solidFill>
+                <a:latin typeface="Segoe UI" pitchFamily="34" charset="0"/>
+                <a:ea typeface="Segoe UI" pitchFamily="34" charset="-122"/>
+                <a:cs typeface="Segoe UI" pitchFamily="34" charset="-120"/>
+              </a:rPr>
+              <a:t>"We don't have to do deployment on a particular day or at a particular time. Now we do it 24/7, all throughout the year. GitHub is providing the essential tools to help us be more productive and also more stable."</a:t>
+            </a:r>
+            <a:endParaRPr lang="en-US" sz="750" dirty="0"/>
+          </a:p>
+        </p:txBody>
+      </p:sp>
+      <p:sp>
+        <p:nvSpPr>
+          <p:cNvPr id="54" name="Text 52"/>
+          <p:cNvSpPr/>
+          <p:nvPr/>
+        </p:nvSpPr>
+        <p:spPr>
+          <a:xfrm>
+            <a:off x="4069080" y="4087368"/>
+            <a:ext cx="3657600" cy="146304"/>
+          </a:xfrm>
+          <a:prstGeom prst="rect">
+            <a:avLst/>
+          </a:prstGeom>
+          <a:noFill/>
+          <a:ln/>
+        </p:spPr>
+        <p:txBody>
+          <a:bodyPr wrap="square" rtlCol="0" anchor="ctr"/>
+          <a:lstStyle/>
+          <a:p>
+            <a:pPr marL="0" indent="0">
+              <a:buNone/>
+            </a:pPr>
+            <a:r>
+              <a:rPr lang="en-US" sz="700" b="1" dirty="0">
+                <a:solidFill>
+                  <a:srgbClr val="58A6FF"/>
+                </a:solidFill>
+                <a:latin typeface="Segoe UI" pitchFamily="34" charset="0"/>
+                <a:ea typeface="Segoe UI" pitchFamily="34" charset="-122"/>
+                <a:cs typeface="Segoe UI" pitchFamily="34" charset="-120"/>
+              </a:rPr>
+              <a:t>— Purnaresa Yuliartanto, Security Engineer Lead</a:t>
+            </a:r>
+            <a:endParaRPr lang="en-US" sz="700" dirty="0"/>
+          </a:p>
+        </p:txBody>
+      </p:sp>
+      <p:sp>
+        <p:nvSpPr>
+          <p:cNvPr id="55" name="Shape 53"/>
+          <p:cNvSpPr/>
+          <p:nvPr/>
+        </p:nvSpPr>
+        <p:spPr>
+          <a:xfrm>
+            <a:off x="457200" y="4887468"/>
+            <a:ext cx="8229600" cy="3658"/>
+          </a:xfrm>
+          <a:prstGeom prst="rect">
+            <a:avLst/>
+          </a:prstGeom>
+          <a:solidFill>
+            <a:srgbClr val="21262D"/>
+          </a:solidFill>
+          <a:ln/>
+        </p:spPr>
+        <p:txBody>
+          <a:bodyPr/>
+          <a:lstStyle/>
+          <a:p>
+            <a:endParaRPr lang="en-US"/>
+          </a:p>
+        </p:txBody>
+      </p:sp>
+      <p:sp>
+        <p:nvSpPr>
+          <p:cNvPr id="56" name="Text 54"/>
+          <p:cNvSpPr/>
+          <p:nvPr/>
+        </p:nvSpPr>
+        <p:spPr>
+          <a:xfrm>
+            <a:off x="457200" y="4924044"/>
+            <a:ext cx="4114800" cy="146304"/>
+          </a:xfrm>
+          <a:prstGeom prst="rect">
+            <a:avLst/>
+          </a:prstGeom>
+          <a:noFill/>
+          <a:ln/>
+        </p:spPr>
+        <p:txBody>
+          <a:bodyPr wrap="square" rtlCol="0" anchor="ctr"/>
+          <a:lstStyle/>
+          <a:p>
+            <a:pPr marL="0" indent="0">
+              <a:buNone/>
+            </a:pPr>
+            <a:r>
+              <a:rPr lang="en-US" sz="700" dirty="0">
+                <a:solidFill>
+                  <a:srgbClr val="484F58"/>
+                </a:solidFill>
+                <a:latin typeface="Segoe UI" pitchFamily="34" charset="0"/>
+                <a:ea typeface="Segoe UI" pitchFamily="34" charset="-122"/>
+                <a:cs typeface="Segoe UI" pitchFamily="34" charset="-120"/>
+              </a:rPr>
+              <a:t>Source: github.com/customer-stories/tokopedia</a:t>
+            </a:r>
+            <a:endParaRPr lang="en-US" sz="700" dirty="0"/>
+          </a:p>
+        </p:txBody>
+      </p:sp>
+      <p:sp>
+        <p:nvSpPr>
+          <p:cNvPr id="57" name="Text 55"/>
+          <p:cNvSpPr/>
+          <p:nvPr/>
+        </p:nvSpPr>
+        <p:spPr>
+          <a:xfrm>
+            <a:off x="5029200" y="4924044"/>
+            <a:ext cx="3657600" cy="146304"/>
+          </a:xfrm>
+          <a:prstGeom prst="rect">
+            <a:avLst/>
+          </a:prstGeom>
+          <a:noFill/>
+          <a:ln/>
+        </p:spPr>
+        <p:txBody>
+          <a:bodyPr wrap="square" rtlCol="0" anchor="ctr"/>
+          <a:lstStyle/>
+          <a:p>
+            <a:pPr marL="0" indent="0" algn="r">
+              <a:buNone/>
+            </a:pPr>
+            <a:r>
+              <a:rPr lang="en-US" sz="700" dirty="0">
+                <a:solidFill>
+                  <a:srgbClr val="484F58"/>
+                </a:solidFill>
+                <a:latin typeface="Segoe UI" pitchFamily="34" charset="0"/>
+                <a:ea typeface="Segoe UI" pitchFamily="34" charset="-122"/>
+                <a:cs typeface="Segoe UI" pitchFamily="34" charset="-120"/>
+              </a:rPr>
+              <a:t>github.com/customer-stories</a:t>
+            </a:r>
+            <a:endParaRPr lang="en-US" sz="700" dirty="0"/>
           </a:p>
         </p:txBody>
       </p:sp>

--- a/files/demo-presentation.pptx
+++ b/files/demo-presentation.pptx
@@ -5,12 +5,13 @@
     <p:sldMasterId id="2147483648" r:id="rId1"/>
   </p:sldMasterIdLst>
   <p:notesMasterIdLst>
-    <p:notesMasterId r:id="rId5"/>
+    <p:notesMasterId r:id="rId6"/>
   </p:notesMasterIdLst>
   <p:sldIdLst>
     <p:sldId id="257" r:id="rId2"/>
     <p:sldId id="258" r:id="rId3"/>
     <p:sldId id="256" r:id="rId4"/>
+    <p:sldId id="260" r:id="rId5"/>
   </p:sldIdLst>
   <p:sldSz cx="9144000" cy="5143500" type="screen16x9"/>
   <p:notesSz cx="6858000" cy="9144000"/>
@@ -730,6 +731,90 @@
 </p:notes>
 </file>
 
+<file path=ppt/notesSlides/notesSlide4.xml><?xml version="1.0" encoding="utf-8"?>
+<p:notes xmlns:a="http://schemas.openxmlformats.org/drawingml/2006/main" xmlns:r="http://schemas.openxmlformats.org/officeDocument/2006/relationships" xmlns:p="http://schemas.openxmlformats.org/presentationml/2006/main">
+  <p:cSld>
+    <p:spTree>
+      <p:nvGrpSpPr>
+        <p:cNvPr id="1" name=""/>
+        <p:cNvGrpSpPr/>
+        <p:nvPr/>
+      </p:nvGrpSpPr>
+      <p:grpSpPr>
+        <a:xfrm>
+          <a:off x="0" y="0"/>
+          <a:ext cx="0" cy="0"/>
+          <a:chOff x="0" y="0"/>
+          <a:chExt cx="0" cy="0"/>
+        </a:xfrm>
+      </p:grpSpPr>
+      <p:sp>
+        <p:nvSpPr>
+          <p:cNvPr id="2" name="Slide Image Placeholder 1"/>
+          <p:cNvSpPr>
+            <a:spLocks noGrp="1" noRot="1" noChangeAspect="1"/>
+          </p:cNvSpPr>
+          <p:nvPr>
+            <p:ph type="sldImg"/>
+          </p:nvPr>
+        </p:nvSpPr>
+        <p:spPr/>
+      </p:sp>
+      <p:sp>
+        <p:nvSpPr>
+          <p:cNvPr id="3" name="Notes Placeholder 2"/>
+          <p:cNvSpPr>
+            <a:spLocks noGrp="1"/>
+          </p:cNvSpPr>
+          <p:nvPr>
+            <p:ph type="body" idx="1"/>
+          </p:nvPr>
+        </p:nvSpPr>
+        <p:spPr/>
+        <p:txBody>
+          <a:bodyPr/>
+          <a:lstStyle/>
+          <a:p>
+            <a:endParaRPr lang="en-US" dirty="0"/>
+          </a:p>
+        </p:txBody>
+      </p:sp>
+      <p:sp>
+        <p:nvSpPr>
+          <p:cNvPr id="4" name="Slide Number Placeholder 3"/>
+          <p:cNvSpPr>
+            <a:spLocks noGrp="1"/>
+          </p:cNvSpPr>
+          <p:nvPr>
+            <p:ph type="sldNum" sz="quarter" idx="10"/>
+          </p:nvPr>
+        </p:nvSpPr>
+        <p:spPr/>
+        <p:txBody>
+          <a:bodyPr/>
+          <a:lstStyle/>
+          <a:p>
+            <a:fld id="{F7021451-1387-4CA6-816F-3879F97B5CBC}" type="slidenum">
+              <a:rPr lang="en-US"/>
+              <a:t>4</a:t>
+            </a:fld>
+            <a:endParaRPr lang="en-US"/>
+          </a:p>
+        </p:txBody>
+      </p:sp>
+    </p:spTree>
+    <p:extLst>
+      <p:ext uri="{BB962C8B-B14F-4D97-AF65-F5344CB8AC3E}">
+        <p14:creationId xmlns:p14="http://schemas.microsoft.com/office/powerpoint/2010/main" val="1024086991"/>
+      </p:ext>
+    </p:extLst>
+  </p:cSld>
+  <p:clrMapOvr>
+    <a:masterClrMapping/>
+  </p:clrMapOvr>
+</p:notes>
+</file>
+
 <file path=ppt/slideLayouts/slideLayout1.xml><?xml version="1.0" encoding="utf-8"?>
 <p:sldLayout xmlns:a="http://schemas.openxmlformats.org/drawingml/2006/main" xmlns:r="http://schemas.openxmlformats.org/officeDocument/2006/relationships" xmlns:p="http://schemas.openxmlformats.org/presentationml/2006/main" type="title" preserve="1">
   <p:cSld name="Title Slide">
@@ -9641,6 +9726,2694 @@
         </p:txBody>
       </p:sp>
     </p:spTree>
+  </p:cSld>
+  <p:clrMapOvr>
+    <a:masterClrMapping/>
+  </p:clrMapOvr>
+</p:sld>
+</file>
+
+<file path=ppt/slides/slide4.xml><?xml version="1.0" encoding="utf-8"?>
+<p:sld xmlns:a="http://schemas.openxmlformats.org/drawingml/2006/main" xmlns:r="http://schemas.openxmlformats.org/officeDocument/2006/relationships" xmlns:p="http://schemas.openxmlformats.org/presentationml/2006/main">
+  <p:cSld name="Slide 1">
+    <p:spTree>
+      <p:nvGrpSpPr>
+        <p:cNvPr id="1" name=""/>
+        <p:cNvGrpSpPr/>
+        <p:nvPr/>
+      </p:nvGrpSpPr>
+      <p:grpSpPr>
+        <a:xfrm>
+          <a:off x="0" y="0"/>
+          <a:ext cx="0" cy="0"/>
+          <a:chOff x="0" y="0"/>
+          <a:chExt cx="0" cy="0"/>
+        </a:xfrm>
+      </p:grpSpPr>
+      <p:sp>
+        <p:nvSpPr>
+          <p:cNvPr id="2" name="Shape 0"/>
+          <p:cNvSpPr/>
+          <p:nvPr/>
+        </p:nvSpPr>
+        <p:spPr>
+          <a:xfrm>
+            <a:off x="0" y="0"/>
+            <a:ext cx="9144000" cy="5143500"/>
+          </a:xfrm>
+          <a:prstGeom prst="rect">
+            <a:avLst/>
+          </a:prstGeom>
+          <a:solidFill>
+            <a:srgbClr val="0D1117"/>
+          </a:solidFill>
+          <a:ln/>
+        </p:spPr>
+        <p:txBody>
+          <a:bodyPr/>
+          <a:lstStyle/>
+          <a:p>
+            <a:endParaRPr lang="en-US"/>
+          </a:p>
+        </p:txBody>
+      </p:sp>
+      <p:sp>
+        <p:nvSpPr>
+          <p:cNvPr id="3" name="Shape 1"/>
+          <p:cNvSpPr/>
+          <p:nvPr/>
+        </p:nvSpPr>
+        <p:spPr>
+          <a:xfrm>
+            <a:off x="0" y="0"/>
+            <a:ext cx="9144000" cy="32004"/>
+          </a:xfrm>
+          <a:prstGeom prst="rect">
+            <a:avLst/>
+          </a:prstGeom>
+          <a:solidFill>
+            <a:srgbClr val="3FB950"/>
+          </a:solidFill>
+          <a:ln/>
+        </p:spPr>
+        <p:txBody>
+          <a:bodyPr/>
+          <a:lstStyle/>
+          <a:p>
+            <a:endParaRPr lang="en-US"/>
+          </a:p>
+        </p:txBody>
+      </p:sp>
+      <p:sp>
+        <p:nvSpPr>
+          <p:cNvPr id="4" name="Text 2"/>
+          <p:cNvSpPr/>
+          <p:nvPr/>
+        </p:nvSpPr>
+        <p:spPr>
+          <a:xfrm>
+            <a:off x="365760" y="91440"/>
+            <a:ext cx="5486400" cy="137160"/>
+          </a:xfrm>
+          <a:prstGeom prst="rect">
+            <a:avLst/>
+          </a:prstGeom>
+          <a:noFill/>
+          <a:ln/>
+        </p:spPr>
+        <p:txBody>
+          <a:bodyPr wrap="square" rtlCol="0" anchor="ctr"/>
+          <a:lstStyle/>
+          <a:p>
+            <a:pPr marL="0" indent="0">
+              <a:buNone/>
+            </a:pPr>
+            <a:r>
+              <a:rPr lang="en-US" sz="700" b="1" dirty="0">
+                <a:solidFill>
+                  <a:srgbClr val="3FB950"/>
+                </a:solidFill>
+                <a:latin typeface="Segoe UI" pitchFamily="34" charset="0"/>
+                <a:ea typeface="Segoe UI" pitchFamily="34" charset="-122"/>
+                <a:cs typeface="Segoe UI" pitchFamily="34" charset="-120"/>
+              </a:rPr>
+              <a:t>GITHUB CUSTOMER STORIES  ·  INDUSTRY MAPPING</a:t>
+            </a:r>
+            <a:endParaRPr lang="en-US" sz="700" dirty="0"/>
+          </a:p>
+        </p:txBody>
+      </p:sp>
+      <p:sp>
+        <p:nvSpPr>
+          <p:cNvPr id="5" name="Text 3"/>
+          <p:cNvSpPr/>
+          <p:nvPr/>
+        </p:nvSpPr>
+        <p:spPr>
+          <a:xfrm>
+            <a:off x="365760" y="219456"/>
+            <a:ext cx="8229600" cy="292608"/>
+          </a:xfrm>
+          <a:prstGeom prst="rect">
+            <a:avLst/>
+          </a:prstGeom>
+          <a:noFill/>
+          <a:ln/>
+        </p:spPr>
+        <p:txBody>
+          <a:bodyPr wrap="square" rtlCol="0" anchor="ctr"/>
+          <a:lstStyle/>
+          <a:p>
+            <a:pPr marL="0" indent="0">
+              <a:buNone/>
+            </a:pPr>
+            <a:r>
+              <a:rPr lang="en-US" sz="1900" b="1" dirty="0">
+                <a:solidFill>
+                  <a:srgbClr val="F0F6FC"/>
+                </a:solidFill>
+                <a:latin typeface="Segoe UI" pitchFamily="34" charset="0"/>
+                <a:ea typeface="Segoe UI" pitchFamily="34" charset="-122"/>
+                <a:cs typeface="Segoe UI" pitchFamily="34" charset="-120"/>
+              </a:rPr>
+              <a:t>GitHub Across SE Asia's Key Verticals</a:t>
+            </a:r>
+            <a:endParaRPr lang="en-US" sz="1900" dirty="0"/>
+          </a:p>
+        </p:txBody>
+      </p:sp>
+      <p:sp>
+        <p:nvSpPr>
+          <p:cNvPr id="6" name="Text 4"/>
+          <p:cNvSpPr/>
+          <p:nvPr/>
+        </p:nvSpPr>
+        <p:spPr>
+          <a:xfrm>
+            <a:off x="365760" y="502920"/>
+            <a:ext cx="7315200" cy="146304"/>
+          </a:xfrm>
+          <a:prstGeom prst="rect">
+            <a:avLst/>
+          </a:prstGeom>
+          <a:noFill/>
+          <a:ln/>
+        </p:spPr>
+        <p:txBody>
+          <a:bodyPr wrap="square" rtlCol="0" anchor="ctr"/>
+          <a:lstStyle/>
+          <a:p>
+            <a:pPr marL="0" indent="0">
+              <a:buNone/>
+            </a:pPr>
+            <a:r>
+              <a:rPr lang="en-US" sz="850" dirty="0">
+                <a:solidFill>
+                  <a:srgbClr val="8B949E"/>
+                </a:solidFill>
+                <a:latin typeface="Segoe UI" pitchFamily="34" charset="0"/>
+                <a:ea typeface="Segoe UI" pitchFamily="34" charset="-122"/>
+                <a:cs typeface="Segoe UI" pitchFamily="34" charset="-120"/>
+              </a:rPr>
+              <a:t>Mapping proven customer stories to Southeast Asia's highest-growth industries</a:t>
+            </a:r>
+            <a:endParaRPr lang="en-US" sz="850" dirty="0"/>
+          </a:p>
+        </p:txBody>
+      </p:sp>
+      <p:sp>
+        <p:nvSpPr>
+          <p:cNvPr id="7" name="Shape 5"/>
+          <p:cNvSpPr/>
+          <p:nvPr/>
+        </p:nvSpPr>
+        <p:spPr>
+          <a:xfrm>
+            <a:off x="365760" y="694944"/>
+            <a:ext cx="8412480" cy="4572"/>
+          </a:xfrm>
+          <a:prstGeom prst="rect">
+            <a:avLst/>
+          </a:prstGeom>
+          <a:solidFill>
+            <a:srgbClr val="21262D"/>
+          </a:solidFill>
+          <a:ln/>
+        </p:spPr>
+        <p:txBody>
+          <a:bodyPr/>
+          <a:lstStyle/>
+          <a:p>
+            <a:endParaRPr lang="en-US"/>
+          </a:p>
+        </p:txBody>
+      </p:sp>
+      <p:sp>
+        <p:nvSpPr>
+          <p:cNvPr id="8" name="Shape 6"/>
+          <p:cNvSpPr/>
+          <p:nvPr/>
+        </p:nvSpPr>
+        <p:spPr>
+          <a:xfrm>
+            <a:off x="365760" y="804672"/>
+            <a:ext cx="2743200" cy="2011680"/>
+          </a:xfrm>
+          <a:prstGeom prst="roundRect">
+            <a:avLst>
+              <a:gd name="adj" fmla="val 3182"/>
+            </a:avLst>
+          </a:prstGeom>
+          <a:solidFill>
+            <a:srgbClr val="0E2117"/>
+          </a:solidFill>
+          <a:ln w="12700">
+            <a:solidFill>
+              <a:srgbClr val="238636"/>
+            </a:solidFill>
+            <a:prstDash val="solid"/>
+          </a:ln>
+        </p:spPr>
+        <p:txBody>
+          <a:bodyPr/>
+          <a:lstStyle/>
+          <a:p>
+            <a:endParaRPr lang="en-US"/>
+          </a:p>
+        </p:txBody>
+      </p:sp>
+      <p:sp>
+        <p:nvSpPr>
+          <p:cNvPr id="9" name="Shape 7"/>
+          <p:cNvSpPr/>
+          <p:nvPr/>
+        </p:nvSpPr>
+        <p:spPr>
+          <a:xfrm>
+            <a:off x="457200" y="877824"/>
+            <a:ext cx="777240" cy="155448"/>
+          </a:xfrm>
+          <a:prstGeom prst="roundRect">
+            <a:avLst>
+              <a:gd name="adj" fmla="val 23529"/>
+            </a:avLst>
+          </a:prstGeom>
+          <a:solidFill>
+            <a:srgbClr val="0D1117"/>
+          </a:solidFill>
+          <a:ln/>
+        </p:spPr>
+        <p:txBody>
+          <a:bodyPr/>
+          <a:lstStyle/>
+          <a:p>
+            <a:endParaRPr lang="en-US"/>
+          </a:p>
+        </p:txBody>
+      </p:sp>
+      <p:sp>
+        <p:nvSpPr>
+          <p:cNvPr id="10" name="Text 8"/>
+          <p:cNvSpPr/>
+          <p:nvPr/>
+        </p:nvSpPr>
+        <p:spPr>
+          <a:xfrm>
+            <a:off x="457200" y="877824"/>
+            <a:ext cx="777240" cy="155448"/>
+          </a:xfrm>
+          <a:prstGeom prst="rect">
+            <a:avLst/>
+          </a:prstGeom>
+          <a:noFill/>
+          <a:ln/>
+        </p:spPr>
+        <p:txBody>
+          <a:bodyPr wrap="square" rtlCol="0" anchor="ctr"/>
+          <a:lstStyle/>
+          <a:p>
+            <a:pPr marL="0" indent="0" algn="ctr">
+              <a:buNone/>
+            </a:pPr>
+            <a:r>
+              <a:rPr lang="en-US" sz="550" b="1" dirty="0">
+                <a:solidFill>
+                  <a:srgbClr val="3FB950"/>
+                </a:solidFill>
+                <a:latin typeface="Segoe UI" pitchFamily="34" charset="0"/>
+                <a:ea typeface="Segoe UI" pitchFamily="34" charset="-122"/>
+                <a:cs typeface="Segoe UI" pitchFamily="34" charset="-120"/>
+              </a:rPr>
+              <a:t>E-COMMERCE</a:t>
+            </a:r>
+            <a:endParaRPr lang="en-US" sz="550" dirty="0"/>
+          </a:p>
+        </p:txBody>
+      </p:sp>
+      <p:sp>
+        <p:nvSpPr>
+          <p:cNvPr id="11" name="Shape 9"/>
+          <p:cNvSpPr/>
+          <p:nvPr/>
+        </p:nvSpPr>
+        <p:spPr>
+          <a:xfrm>
+            <a:off x="1280160" y="877824"/>
+            <a:ext cx="594360" cy="155448"/>
+          </a:xfrm>
+          <a:prstGeom prst="roundRect">
+            <a:avLst>
+              <a:gd name="adj" fmla="val 23529"/>
+            </a:avLst>
+          </a:prstGeom>
+          <a:solidFill>
+            <a:srgbClr val="0E3A1E"/>
+          </a:solidFill>
+          <a:ln/>
+        </p:spPr>
+        <p:txBody>
+          <a:bodyPr/>
+          <a:lstStyle/>
+          <a:p>
+            <a:endParaRPr lang="en-US"/>
+          </a:p>
+        </p:txBody>
+      </p:sp>
+      <p:sp>
+        <p:nvSpPr>
+          <p:cNvPr id="12" name="Text 10"/>
+          <p:cNvSpPr/>
+          <p:nvPr/>
+        </p:nvSpPr>
+        <p:spPr>
+          <a:xfrm>
+            <a:off x="1280160" y="877824"/>
+            <a:ext cx="594360" cy="155448"/>
+          </a:xfrm>
+          <a:prstGeom prst="rect">
+            <a:avLst/>
+          </a:prstGeom>
+          <a:noFill/>
+          <a:ln/>
+        </p:spPr>
+        <p:txBody>
+          <a:bodyPr wrap="square" rtlCol="0" anchor="ctr"/>
+          <a:lstStyle/>
+          <a:p>
+            <a:pPr marL="0" indent="0" algn="ctr">
+              <a:buNone/>
+            </a:pPr>
+            <a:r>
+              <a:rPr lang="en-US" sz="550" b="1" dirty="0">
+                <a:solidFill>
+                  <a:srgbClr val="3FB950"/>
+                </a:solidFill>
+                <a:latin typeface="Segoe UI" pitchFamily="34" charset="0"/>
+                <a:ea typeface="Segoe UI" pitchFamily="34" charset="-122"/>
+                <a:cs typeface="Segoe UI" pitchFamily="34" charset="-120"/>
+              </a:rPr>
+              <a:t>SE ASIA ✦</a:t>
+            </a:r>
+            <a:endParaRPr lang="en-US" sz="550" dirty="0"/>
+          </a:p>
+        </p:txBody>
+      </p:sp>
+      <p:sp>
+        <p:nvSpPr>
+          <p:cNvPr id="13" name="Text 11"/>
+          <p:cNvSpPr/>
+          <p:nvPr/>
+        </p:nvSpPr>
+        <p:spPr>
+          <a:xfrm>
+            <a:off x="457200" y="1078992"/>
+            <a:ext cx="2514600" cy="201168"/>
+          </a:xfrm>
+          <a:prstGeom prst="rect">
+            <a:avLst/>
+          </a:prstGeom>
+          <a:noFill/>
+          <a:ln/>
+        </p:spPr>
+        <p:txBody>
+          <a:bodyPr wrap="square" rtlCol="0" anchor="ctr"/>
+          <a:lstStyle/>
+          <a:p>
+            <a:pPr marL="0" indent="0">
+              <a:buNone/>
+            </a:pPr>
+            <a:r>
+              <a:rPr lang="en-US" sz="1000" b="1" dirty="0">
+                <a:solidFill>
+                  <a:srgbClr val="F0F6FC"/>
+                </a:solidFill>
+                <a:latin typeface="Segoe UI" pitchFamily="34" charset="0"/>
+                <a:ea typeface="Segoe UI" pitchFamily="34" charset="-122"/>
+                <a:cs typeface="Segoe UI" pitchFamily="34" charset="-120"/>
+              </a:rPr>
+              <a:t>🛒  Digital Marketplace</a:t>
+            </a:r>
+            <a:endParaRPr lang="en-US" sz="1000" dirty="0"/>
+          </a:p>
+        </p:txBody>
+      </p:sp>
+      <p:sp>
+        <p:nvSpPr>
+          <p:cNvPr id="14" name="Text 12"/>
+          <p:cNvSpPr/>
+          <p:nvPr/>
+        </p:nvSpPr>
+        <p:spPr>
+          <a:xfrm>
+            <a:off x="457200" y="1298448"/>
+            <a:ext cx="1371600" cy="164592"/>
+          </a:xfrm>
+          <a:prstGeom prst="rect">
+            <a:avLst/>
+          </a:prstGeom>
+          <a:noFill/>
+          <a:ln/>
+        </p:spPr>
+        <p:txBody>
+          <a:bodyPr wrap="square" rtlCol="0" anchor="ctr"/>
+          <a:lstStyle/>
+          <a:p>
+            <a:pPr marL="0" indent="0">
+              <a:buNone/>
+            </a:pPr>
+            <a:r>
+              <a:rPr lang="en-US" sz="900" b="1" u="sng" dirty="0">
+                <a:solidFill>
+                  <a:srgbClr val="3FB950"/>
+                </a:solidFill>
+                <a:latin typeface="Segoe UI" pitchFamily="34" charset="0"/>
+                <a:ea typeface="Segoe UI" pitchFamily="34" charset="-122"/>
+                <a:cs typeface="Segoe UI" pitchFamily="34" charset="-120"/>
+                <a:hlinkClick r:id="rId3">
+                  <a:extLst>
+                    <a:ext uri="{A12FA001-AC4F-418D-AE19-62706E023703}">
+                      <ahyp:hlinkClr xmlns:ahyp="http://schemas.microsoft.com/office/drawing/2018/hyperlinkcolor" val="tx"/>
+                    </a:ext>
+                  </a:extLst>
+                </a:hlinkClick>
+              </a:rPr>
+              <a:t>Tokopedia</a:t>
+            </a:r>
+            <a:endParaRPr lang="en-US" sz="900" dirty="0"/>
+          </a:p>
+        </p:txBody>
+      </p:sp>
+      <p:sp>
+        <p:nvSpPr>
+          <p:cNvPr id="15" name="Text 13"/>
+          <p:cNvSpPr/>
+          <p:nvPr/>
+        </p:nvSpPr>
+        <p:spPr>
+          <a:xfrm>
+            <a:off x="1737360" y="1298448"/>
+            <a:ext cx="1280160" cy="164592"/>
+          </a:xfrm>
+          <a:prstGeom prst="rect">
+            <a:avLst/>
+          </a:prstGeom>
+          <a:noFill/>
+          <a:ln/>
+        </p:spPr>
+        <p:txBody>
+          <a:bodyPr wrap="square" rtlCol="0" anchor="ctr"/>
+          <a:lstStyle/>
+          <a:p>
+            <a:pPr marL="0" indent="0" algn="r">
+              <a:buNone/>
+            </a:pPr>
+            <a:r>
+              <a:rPr lang="en-US" sz="750" dirty="0">
+                <a:solidFill>
+                  <a:srgbClr val="8B949E"/>
+                </a:solidFill>
+                <a:latin typeface="Segoe UI" pitchFamily="34" charset="0"/>
+                <a:ea typeface="Segoe UI" pitchFamily="34" charset="-122"/>
+                <a:cs typeface="Segoe UI" pitchFamily="34" charset="-120"/>
+              </a:rPr>
+              <a:t>🇮🇩 Indonesia</a:t>
+            </a:r>
+            <a:endParaRPr lang="en-US" sz="750" dirty="0"/>
+          </a:p>
+        </p:txBody>
+      </p:sp>
+      <p:sp>
+        <p:nvSpPr>
+          <p:cNvPr id="16" name="Shape 14"/>
+          <p:cNvSpPr/>
+          <p:nvPr/>
+        </p:nvSpPr>
+        <p:spPr>
+          <a:xfrm>
+            <a:off x="457200" y="1499616"/>
+            <a:ext cx="2560320" cy="3658"/>
+          </a:xfrm>
+          <a:prstGeom prst="rect">
+            <a:avLst/>
+          </a:prstGeom>
+          <a:solidFill>
+            <a:srgbClr val="30363D"/>
+          </a:solidFill>
+          <a:ln/>
+        </p:spPr>
+        <p:txBody>
+          <a:bodyPr/>
+          <a:lstStyle/>
+          <a:p>
+            <a:endParaRPr lang="en-US"/>
+          </a:p>
+        </p:txBody>
+      </p:sp>
+      <p:sp>
+        <p:nvSpPr>
+          <p:cNvPr id="17" name="Text 15"/>
+          <p:cNvSpPr/>
+          <p:nvPr/>
+        </p:nvSpPr>
+        <p:spPr>
+          <a:xfrm>
+            <a:off x="457200" y="1554480"/>
+            <a:ext cx="2560320" cy="868680"/>
+          </a:xfrm>
+          <a:prstGeom prst="rect">
+            <a:avLst/>
+          </a:prstGeom>
+          <a:noFill/>
+          <a:ln/>
+        </p:spPr>
+        <p:txBody>
+          <a:bodyPr wrap="square" rtlCol="0" anchor="t"/>
+          <a:lstStyle/>
+          <a:p>
+            <a:pPr marL="0" indent="0">
+              <a:lnSpc>
+                <a:spcPct val="120000"/>
+              </a:lnSpc>
+              <a:buNone/>
+            </a:pPr>
+            <a:r>
+              <a:rPr lang="en-US" sz="700" i="1" dirty="0">
+                <a:solidFill>
+                  <a:srgbClr val="C9D1D9"/>
+                </a:solidFill>
+                <a:latin typeface="Segoe UI" pitchFamily="34" charset="0"/>
+                <a:ea typeface="Segoe UI" pitchFamily="34" charset="-122"/>
+                <a:cs typeface="Segoe UI" pitchFamily="34" charset="-120"/>
+              </a:rPr>
+              <a:t>"200–300 daily pushes to production with 80% workflow automation via GitHub Actions."</a:t>
+            </a:r>
+            <a:endParaRPr lang="en-US" sz="700" dirty="0"/>
+          </a:p>
+        </p:txBody>
+      </p:sp>
+      <p:sp>
+        <p:nvSpPr>
+          <p:cNvPr id="18" name="Text 16"/>
+          <p:cNvSpPr/>
+          <p:nvPr/>
+        </p:nvSpPr>
+        <p:spPr>
+          <a:xfrm>
+            <a:off x="457200" y="2560320"/>
+            <a:ext cx="2560320" cy="164592"/>
+          </a:xfrm>
+          <a:prstGeom prst="rect">
+            <a:avLst/>
+          </a:prstGeom>
+          <a:noFill/>
+          <a:ln/>
+        </p:spPr>
+        <p:txBody>
+          <a:bodyPr wrap="square" rtlCol="0" anchor="ctr"/>
+          <a:lstStyle/>
+          <a:p>
+            <a:pPr marL="0" indent="0">
+              <a:buNone/>
+            </a:pPr>
+            <a:r>
+              <a:rPr lang="en-US" sz="650" b="1" dirty="0">
+                <a:solidFill>
+                  <a:srgbClr val="484F58"/>
+                </a:solidFill>
+                <a:latin typeface="Segoe UI" pitchFamily="34" charset="0"/>
+                <a:ea typeface="Segoe UI" pitchFamily="34" charset="-122"/>
+                <a:cs typeface="Segoe UI" pitchFamily="34" charset="-120"/>
+              </a:rPr>
+              <a:t>Enterprise Cloud · Actions</a:t>
+            </a:r>
+            <a:endParaRPr lang="en-US" sz="650" dirty="0"/>
+          </a:p>
+        </p:txBody>
+      </p:sp>
+      <p:sp>
+        <p:nvSpPr>
+          <p:cNvPr id="19" name="Text 17"/>
+          <p:cNvSpPr/>
+          <p:nvPr/>
+        </p:nvSpPr>
+        <p:spPr>
+          <a:xfrm>
+            <a:off x="1645920" y="2560320"/>
+            <a:ext cx="1371600" cy="164592"/>
+          </a:xfrm>
+          <a:prstGeom prst="rect">
+            <a:avLst/>
+          </a:prstGeom>
+          <a:noFill/>
+          <a:ln/>
+        </p:spPr>
+        <p:txBody>
+          <a:bodyPr wrap="square" rtlCol="0" anchor="ctr"/>
+          <a:lstStyle/>
+          <a:p>
+            <a:pPr marL="0" indent="0" algn="r">
+              <a:buNone/>
+            </a:pPr>
+            <a:r>
+              <a:rPr lang="en-US" sz="650" u="sng" dirty="0">
+                <a:solidFill>
+                  <a:srgbClr val="58A6FF"/>
+                </a:solidFill>
+                <a:latin typeface="Segoe UI" pitchFamily="34" charset="0"/>
+                <a:ea typeface="Segoe UI" pitchFamily="34" charset="-122"/>
+                <a:cs typeface="Segoe UI" pitchFamily="34" charset="-120"/>
+                <a:hlinkClick r:id="rId3">
+                  <a:extLst>
+                    <a:ext uri="{A12FA001-AC4F-418D-AE19-62706E023703}">
+                      <ahyp:hlinkClr xmlns:ahyp="http://schemas.microsoft.com/office/drawing/2018/hyperlinkcolor" val="tx"/>
+                    </a:ext>
+                  </a:extLst>
+                </a:hlinkClick>
+              </a:rPr>
+              <a:t>Read full story →</a:t>
+            </a:r>
+            <a:endParaRPr lang="en-US" sz="650" dirty="0"/>
+          </a:p>
+        </p:txBody>
+      </p:sp>
+      <p:sp>
+        <p:nvSpPr>
+          <p:cNvPr id="20" name="Shape 18"/>
+          <p:cNvSpPr/>
+          <p:nvPr/>
+        </p:nvSpPr>
+        <p:spPr>
+          <a:xfrm>
+            <a:off x="3200400" y="804672"/>
+            <a:ext cx="2743200" cy="2011680"/>
+          </a:xfrm>
+          <a:prstGeom prst="roundRect">
+            <a:avLst>
+              <a:gd name="adj" fmla="val 3182"/>
+            </a:avLst>
+          </a:prstGeom>
+          <a:solidFill>
+            <a:srgbClr val="161B22"/>
+          </a:solidFill>
+          <a:ln w="12700">
+            <a:solidFill>
+              <a:srgbClr val="30363D"/>
+            </a:solidFill>
+            <a:prstDash val="solid"/>
+          </a:ln>
+        </p:spPr>
+        <p:txBody>
+          <a:bodyPr/>
+          <a:lstStyle/>
+          <a:p>
+            <a:endParaRPr lang="en-US"/>
+          </a:p>
+        </p:txBody>
+      </p:sp>
+      <p:sp>
+        <p:nvSpPr>
+          <p:cNvPr id="21" name="Shape 19"/>
+          <p:cNvSpPr/>
+          <p:nvPr/>
+        </p:nvSpPr>
+        <p:spPr>
+          <a:xfrm>
+            <a:off x="3291840" y="877824"/>
+            <a:ext cx="777240" cy="155448"/>
+          </a:xfrm>
+          <a:prstGeom prst="roundRect">
+            <a:avLst>
+              <a:gd name="adj" fmla="val 23529"/>
+            </a:avLst>
+          </a:prstGeom>
+          <a:solidFill>
+            <a:srgbClr val="0D1117"/>
+          </a:solidFill>
+          <a:ln/>
+        </p:spPr>
+        <p:txBody>
+          <a:bodyPr/>
+          <a:lstStyle/>
+          <a:p>
+            <a:endParaRPr lang="en-US"/>
+          </a:p>
+        </p:txBody>
+      </p:sp>
+      <p:sp>
+        <p:nvSpPr>
+          <p:cNvPr id="22" name="Text 20"/>
+          <p:cNvSpPr/>
+          <p:nvPr/>
+        </p:nvSpPr>
+        <p:spPr>
+          <a:xfrm>
+            <a:off x="3291840" y="877824"/>
+            <a:ext cx="777240" cy="155448"/>
+          </a:xfrm>
+          <a:prstGeom prst="rect">
+            <a:avLst/>
+          </a:prstGeom>
+          <a:noFill/>
+          <a:ln/>
+        </p:spPr>
+        <p:txBody>
+          <a:bodyPr wrap="square" rtlCol="0" anchor="ctr"/>
+          <a:lstStyle/>
+          <a:p>
+            <a:pPr marL="0" indent="0" algn="ctr">
+              <a:buNone/>
+            </a:pPr>
+            <a:r>
+              <a:rPr lang="en-US" sz="550" b="1" dirty="0">
+                <a:solidFill>
+                  <a:srgbClr val="58A6FF"/>
+                </a:solidFill>
+                <a:latin typeface="Segoe UI" pitchFamily="34" charset="0"/>
+                <a:ea typeface="Segoe UI" pitchFamily="34" charset="-122"/>
+                <a:cs typeface="Segoe UI" pitchFamily="34" charset="-120"/>
+              </a:rPr>
+              <a:t>FINTECH</a:t>
+            </a:r>
+            <a:endParaRPr lang="en-US" sz="550" dirty="0"/>
+          </a:p>
+        </p:txBody>
+      </p:sp>
+      <p:sp>
+        <p:nvSpPr>
+          <p:cNvPr id="23" name="Text 21"/>
+          <p:cNvSpPr/>
+          <p:nvPr/>
+        </p:nvSpPr>
+        <p:spPr>
+          <a:xfrm>
+            <a:off x="3291840" y="1078992"/>
+            <a:ext cx="2514600" cy="201168"/>
+          </a:xfrm>
+          <a:prstGeom prst="rect">
+            <a:avLst/>
+          </a:prstGeom>
+          <a:noFill/>
+          <a:ln/>
+        </p:spPr>
+        <p:txBody>
+          <a:bodyPr wrap="square" rtlCol="0" anchor="ctr"/>
+          <a:lstStyle/>
+          <a:p>
+            <a:pPr marL="0" indent="0">
+              <a:buNone/>
+            </a:pPr>
+            <a:r>
+              <a:rPr lang="en-US" sz="1000" b="1" dirty="0">
+                <a:solidFill>
+                  <a:srgbClr val="F0F6FC"/>
+                </a:solidFill>
+                <a:latin typeface="Segoe UI" pitchFamily="34" charset="0"/>
+                <a:ea typeface="Segoe UI" pitchFamily="34" charset="-122"/>
+                <a:cs typeface="Segoe UI" pitchFamily="34" charset="-120"/>
+              </a:rPr>
+              <a:t>💳  Payments &amp; Banking</a:t>
+            </a:r>
+            <a:endParaRPr lang="en-US" sz="1000" dirty="0"/>
+          </a:p>
+        </p:txBody>
+      </p:sp>
+      <p:sp>
+        <p:nvSpPr>
+          <p:cNvPr id="24" name="Text 22"/>
+          <p:cNvSpPr/>
+          <p:nvPr/>
+        </p:nvSpPr>
+        <p:spPr>
+          <a:xfrm>
+            <a:off x="3291840" y="1298448"/>
+            <a:ext cx="1371600" cy="164592"/>
+          </a:xfrm>
+          <a:prstGeom prst="rect">
+            <a:avLst/>
+          </a:prstGeom>
+          <a:noFill/>
+          <a:ln/>
+        </p:spPr>
+        <p:txBody>
+          <a:bodyPr wrap="square" rtlCol="0" anchor="ctr"/>
+          <a:lstStyle/>
+          <a:p>
+            <a:pPr marL="0" indent="0">
+              <a:buNone/>
+            </a:pPr>
+            <a:r>
+              <a:rPr lang="en-US" sz="900" b="1" u="sng" dirty="0">
+                <a:solidFill>
+                  <a:srgbClr val="58A6FF"/>
+                </a:solidFill>
+                <a:latin typeface="Segoe UI" pitchFamily="34" charset="0"/>
+                <a:ea typeface="Segoe UI" pitchFamily="34" charset="-122"/>
+                <a:cs typeface="Segoe UI" pitchFamily="34" charset="-120"/>
+                <a:hlinkClick r:id="rId4">
+                  <a:extLst>
+                    <a:ext uri="{A12FA001-AC4F-418D-AE19-62706E023703}">
+                      <ahyp:hlinkClr xmlns:ahyp="http://schemas.microsoft.com/office/drawing/2018/hyperlinkcolor" val="tx"/>
+                    </a:ext>
+                  </a:extLst>
+                </a:hlinkClick>
+              </a:rPr>
+              <a:t>Stripe</a:t>
+            </a:r>
+            <a:endParaRPr lang="en-US" sz="900" dirty="0"/>
+          </a:p>
+        </p:txBody>
+      </p:sp>
+      <p:sp>
+        <p:nvSpPr>
+          <p:cNvPr id="25" name="Text 23"/>
+          <p:cNvSpPr/>
+          <p:nvPr/>
+        </p:nvSpPr>
+        <p:spPr>
+          <a:xfrm>
+            <a:off x="4572000" y="1298448"/>
+            <a:ext cx="1280160" cy="164592"/>
+          </a:xfrm>
+          <a:prstGeom prst="rect">
+            <a:avLst/>
+          </a:prstGeom>
+          <a:noFill/>
+          <a:ln/>
+        </p:spPr>
+        <p:txBody>
+          <a:bodyPr wrap="square" rtlCol="0" anchor="ctr"/>
+          <a:lstStyle/>
+          <a:p>
+            <a:pPr marL="0" indent="0" algn="r">
+              <a:buNone/>
+            </a:pPr>
+            <a:r>
+              <a:rPr lang="en-US" sz="750" dirty="0">
+                <a:solidFill>
+                  <a:srgbClr val="8B949E"/>
+                </a:solidFill>
+                <a:latin typeface="Segoe UI" pitchFamily="34" charset="0"/>
+                <a:ea typeface="Segoe UI" pitchFamily="34" charset="-122"/>
+                <a:cs typeface="Segoe UI" pitchFamily="34" charset="-120"/>
+              </a:rPr>
+              <a:t>🇸🇬 Singapore hub</a:t>
+            </a:r>
+            <a:endParaRPr lang="en-US" sz="750" dirty="0"/>
+          </a:p>
+        </p:txBody>
+      </p:sp>
+      <p:sp>
+        <p:nvSpPr>
+          <p:cNvPr id="26" name="Shape 24"/>
+          <p:cNvSpPr/>
+          <p:nvPr/>
+        </p:nvSpPr>
+        <p:spPr>
+          <a:xfrm>
+            <a:off x="3291840" y="1499616"/>
+            <a:ext cx="2560320" cy="3658"/>
+          </a:xfrm>
+          <a:prstGeom prst="rect">
+            <a:avLst/>
+          </a:prstGeom>
+          <a:solidFill>
+            <a:srgbClr val="30363D"/>
+          </a:solidFill>
+          <a:ln/>
+        </p:spPr>
+        <p:txBody>
+          <a:bodyPr/>
+          <a:lstStyle/>
+          <a:p>
+            <a:endParaRPr lang="en-US"/>
+          </a:p>
+        </p:txBody>
+      </p:sp>
+      <p:sp>
+        <p:nvSpPr>
+          <p:cNvPr id="27" name="Text 25"/>
+          <p:cNvSpPr/>
+          <p:nvPr/>
+        </p:nvSpPr>
+        <p:spPr>
+          <a:xfrm>
+            <a:off x="3291840" y="1554480"/>
+            <a:ext cx="2560320" cy="868680"/>
+          </a:xfrm>
+          <a:prstGeom prst="rect">
+            <a:avLst/>
+          </a:prstGeom>
+          <a:noFill/>
+          <a:ln/>
+        </p:spPr>
+        <p:txBody>
+          <a:bodyPr wrap="square" rtlCol="0" anchor="t"/>
+          <a:lstStyle/>
+          <a:p>
+            <a:pPr marL="0" indent="0">
+              <a:lnSpc>
+                <a:spcPct val="120000"/>
+              </a:lnSpc>
+              <a:buNone/>
+            </a:pPr>
+            <a:r>
+              <a:rPr lang="en-US" sz="700" i="1" dirty="0">
+                <a:solidFill>
+                  <a:srgbClr val="C9D1D9"/>
+                </a:solidFill>
+                <a:latin typeface="Segoe UI" pitchFamily="34" charset="0"/>
+                <a:ea typeface="Segoe UI" pitchFamily="34" charset="-122"/>
+                <a:cs typeface="Segoe UI" pitchFamily="34" charset="-120"/>
+              </a:rPr>
+              <a:t>"Live in 34 countries from its Singapore engineering hub. GitHub Enterprise at the heart of their DevOps."</a:t>
+            </a:r>
+            <a:endParaRPr lang="en-US" sz="700" dirty="0"/>
+          </a:p>
+        </p:txBody>
+      </p:sp>
+      <p:sp>
+        <p:nvSpPr>
+          <p:cNvPr id="28" name="Text 26"/>
+          <p:cNvSpPr/>
+          <p:nvPr/>
+        </p:nvSpPr>
+        <p:spPr>
+          <a:xfrm>
+            <a:off x="3291840" y="2560320"/>
+            <a:ext cx="2560320" cy="164592"/>
+          </a:xfrm>
+          <a:prstGeom prst="rect">
+            <a:avLst/>
+          </a:prstGeom>
+          <a:noFill/>
+          <a:ln/>
+        </p:spPr>
+        <p:txBody>
+          <a:bodyPr wrap="square" rtlCol="0" anchor="ctr"/>
+          <a:lstStyle/>
+          <a:p>
+            <a:pPr marL="0" indent="0">
+              <a:buNone/>
+            </a:pPr>
+            <a:r>
+              <a:rPr lang="en-US" sz="650" b="1" dirty="0">
+                <a:solidFill>
+                  <a:srgbClr val="484F58"/>
+                </a:solidFill>
+                <a:latin typeface="Segoe UI" pitchFamily="34" charset="0"/>
+                <a:ea typeface="Segoe UI" pitchFamily="34" charset="-122"/>
+                <a:cs typeface="Segoe UI" pitchFamily="34" charset="-120"/>
+              </a:rPr>
+              <a:t>Enterprise · Open Source</a:t>
+            </a:r>
+            <a:endParaRPr lang="en-US" sz="650" dirty="0"/>
+          </a:p>
+        </p:txBody>
+      </p:sp>
+      <p:sp>
+        <p:nvSpPr>
+          <p:cNvPr id="29" name="Text 27"/>
+          <p:cNvSpPr/>
+          <p:nvPr/>
+        </p:nvSpPr>
+        <p:spPr>
+          <a:xfrm>
+            <a:off x="4480560" y="2560320"/>
+            <a:ext cx="1371600" cy="164592"/>
+          </a:xfrm>
+          <a:prstGeom prst="rect">
+            <a:avLst/>
+          </a:prstGeom>
+          <a:noFill/>
+          <a:ln/>
+        </p:spPr>
+        <p:txBody>
+          <a:bodyPr wrap="square" rtlCol="0" anchor="ctr"/>
+          <a:lstStyle/>
+          <a:p>
+            <a:pPr marL="0" indent="0" algn="r">
+              <a:buNone/>
+            </a:pPr>
+            <a:r>
+              <a:rPr lang="en-US" sz="650" u="sng" dirty="0">
+                <a:solidFill>
+                  <a:srgbClr val="58A6FF"/>
+                </a:solidFill>
+                <a:latin typeface="Segoe UI" pitchFamily="34" charset="0"/>
+                <a:ea typeface="Segoe UI" pitchFamily="34" charset="-122"/>
+                <a:cs typeface="Segoe UI" pitchFamily="34" charset="-120"/>
+                <a:hlinkClick r:id="rId4">
+                  <a:extLst>
+                    <a:ext uri="{A12FA001-AC4F-418D-AE19-62706E023703}">
+                      <ahyp:hlinkClr xmlns:ahyp="http://schemas.microsoft.com/office/drawing/2018/hyperlinkcolor" val="tx"/>
+                    </a:ext>
+                  </a:extLst>
+                </a:hlinkClick>
+              </a:rPr>
+              <a:t>Read full story →</a:t>
+            </a:r>
+            <a:endParaRPr lang="en-US" sz="650" dirty="0"/>
+          </a:p>
+        </p:txBody>
+      </p:sp>
+      <p:sp>
+        <p:nvSpPr>
+          <p:cNvPr id="30" name="Shape 28"/>
+          <p:cNvSpPr/>
+          <p:nvPr/>
+        </p:nvSpPr>
+        <p:spPr>
+          <a:xfrm>
+            <a:off x="6035040" y="804672"/>
+            <a:ext cx="2743200" cy="2011680"/>
+          </a:xfrm>
+          <a:prstGeom prst="roundRect">
+            <a:avLst>
+              <a:gd name="adj" fmla="val 3182"/>
+            </a:avLst>
+          </a:prstGeom>
+          <a:solidFill>
+            <a:srgbClr val="161B22"/>
+          </a:solidFill>
+          <a:ln w="12700">
+            <a:solidFill>
+              <a:srgbClr val="30363D"/>
+            </a:solidFill>
+            <a:prstDash val="solid"/>
+          </a:ln>
+        </p:spPr>
+        <p:txBody>
+          <a:bodyPr/>
+          <a:lstStyle/>
+          <a:p>
+            <a:endParaRPr lang="en-US"/>
+          </a:p>
+        </p:txBody>
+      </p:sp>
+      <p:sp>
+        <p:nvSpPr>
+          <p:cNvPr id="31" name="Shape 29"/>
+          <p:cNvSpPr/>
+          <p:nvPr/>
+        </p:nvSpPr>
+        <p:spPr>
+          <a:xfrm>
+            <a:off x="6126480" y="877824"/>
+            <a:ext cx="777240" cy="155448"/>
+          </a:xfrm>
+          <a:prstGeom prst="roundRect">
+            <a:avLst>
+              <a:gd name="adj" fmla="val 23529"/>
+            </a:avLst>
+          </a:prstGeom>
+          <a:solidFill>
+            <a:srgbClr val="0D1117"/>
+          </a:solidFill>
+          <a:ln/>
+        </p:spPr>
+        <p:txBody>
+          <a:bodyPr/>
+          <a:lstStyle/>
+          <a:p>
+            <a:endParaRPr lang="en-US"/>
+          </a:p>
+        </p:txBody>
+      </p:sp>
+      <p:sp>
+        <p:nvSpPr>
+          <p:cNvPr id="32" name="Text 30"/>
+          <p:cNvSpPr/>
+          <p:nvPr/>
+        </p:nvSpPr>
+        <p:spPr>
+          <a:xfrm>
+            <a:off x="6126480" y="877824"/>
+            <a:ext cx="777240" cy="155448"/>
+          </a:xfrm>
+          <a:prstGeom prst="rect">
+            <a:avLst/>
+          </a:prstGeom>
+          <a:noFill/>
+          <a:ln/>
+        </p:spPr>
+        <p:txBody>
+          <a:bodyPr wrap="square" rtlCol="0" anchor="ctr"/>
+          <a:lstStyle/>
+          <a:p>
+            <a:pPr marL="0" indent="0" algn="ctr">
+              <a:buNone/>
+            </a:pPr>
+            <a:r>
+              <a:rPr lang="en-US" sz="550" b="1" dirty="0">
+                <a:solidFill>
+                  <a:srgbClr val="F78166"/>
+                </a:solidFill>
+                <a:latin typeface="Segoe UI" pitchFamily="34" charset="0"/>
+                <a:ea typeface="Segoe UI" pitchFamily="34" charset="-122"/>
+                <a:cs typeface="Segoe UI" pitchFamily="34" charset="-120"/>
+              </a:rPr>
+              <a:t>TELECOMMUNICATIONS</a:t>
+            </a:r>
+            <a:endParaRPr lang="en-US" sz="550" dirty="0"/>
+          </a:p>
+        </p:txBody>
+      </p:sp>
+      <p:sp>
+        <p:nvSpPr>
+          <p:cNvPr id="33" name="Text 31"/>
+          <p:cNvSpPr/>
+          <p:nvPr/>
+        </p:nvSpPr>
+        <p:spPr>
+          <a:xfrm>
+            <a:off x="6126480" y="1078992"/>
+            <a:ext cx="2514600" cy="201168"/>
+          </a:xfrm>
+          <a:prstGeom prst="rect">
+            <a:avLst/>
+          </a:prstGeom>
+          <a:noFill/>
+          <a:ln/>
+        </p:spPr>
+        <p:txBody>
+          <a:bodyPr wrap="square" rtlCol="0" anchor="ctr"/>
+          <a:lstStyle/>
+          <a:p>
+            <a:pPr marL="0" indent="0">
+              <a:buNone/>
+            </a:pPr>
+            <a:r>
+              <a:rPr lang="en-US" sz="1000" b="1" dirty="0">
+                <a:solidFill>
+                  <a:srgbClr val="F0F6FC"/>
+                </a:solidFill>
+                <a:latin typeface="Segoe UI" pitchFamily="34" charset="0"/>
+                <a:ea typeface="Segoe UI" pitchFamily="34" charset="-122"/>
+                <a:cs typeface="Segoe UI" pitchFamily="34" charset="-120"/>
+              </a:rPr>
+              <a:t>📡  Telco &amp; Connectivity</a:t>
+            </a:r>
+            <a:endParaRPr lang="en-US" sz="1000" dirty="0"/>
+          </a:p>
+        </p:txBody>
+      </p:sp>
+      <p:sp>
+        <p:nvSpPr>
+          <p:cNvPr id="34" name="Text 32"/>
+          <p:cNvSpPr/>
+          <p:nvPr/>
+        </p:nvSpPr>
+        <p:spPr>
+          <a:xfrm>
+            <a:off x="6126480" y="1298448"/>
+            <a:ext cx="1371600" cy="164592"/>
+          </a:xfrm>
+          <a:prstGeom prst="rect">
+            <a:avLst/>
+          </a:prstGeom>
+          <a:noFill/>
+          <a:ln/>
+        </p:spPr>
+        <p:txBody>
+          <a:bodyPr wrap="square" rtlCol="0" anchor="ctr"/>
+          <a:lstStyle/>
+          <a:p>
+            <a:pPr marL="0" indent="0">
+              <a:buNone/>
+            </a:pPr>
+            <a:r>
+              <a:rPr lang="en-US" sz="900" b="1" u="sng" dirty="0">
+                <a:solidFill>
+                  <a:srgbClr val="F78166"/>
+                </a:solidFill>
+                <a:latin typeface="Segoe UI" pitchFamily="34" charset="0"/>
+                <a:ea typeface="Segoe UI" pitchFamily="34" charset="-122"/>
+                <a:cs typeface="Segoe UI" pitchFamily="34" charset="-120"/>
+                <a:hlinkClick r:id="rId5">
+                  <a:extLst>
+                    <a:ext uri="{A12FA001-AC4F-418D-AE19-62706E023703}">
+                      <ahyp:hlinkClr xmlns:ahyp="http://schemas.microsoft.com/office/drawing/2018/hyperlinkcolor" val="tx"/>
+                    </a:ext>
+                  </a:extLst>
+                </a:hlinkClick>
+              </a:rPr>
+              <a:t>Vodafone</a:t>
+            </a:r>
+            <a:endParaRPr lang="en-US" sz="900" dirty="0"/>
+          </a:p>
+        </p:txBody>
+      </p:sp>
+      <p:sp>
+        <p:nvSpPr>
+          <p:cNvPr id="35" name="Text 33"/>
+          <p:cNvSpPr/>
+          <p:nvPr/>
+        </p:nvSpPr>
+        <p:spPr>
+          <a:xfrm>
+            <a:off x="7406640" y="1298448"/>
+            <a:ext cx="1280160" cy="164592"/>
+          </a:xfrm>
+          <a:prstGeom prst="rect">
+            <a:avLst/>
+          </a:prstGeom>
+          <a:noFill/>
+          <a:ln/>
+        </p:spPr>
+        <p:txBody>
+          <a:bodyPr wrap="square" rtlCol="0" anchor="ctr"/>
+          <a:lstStyle/>
+          <a:p>
+            <a:pPr marL="0" indent="0" algn="r">
+              <a:buNone/>
+            </a:pPr>
+            <a:r>
+              <a:rPr lang="en-US" sz="750" dirty="0">
+                <a:solidFill>
+                  <a:srgbClr val="8B949E"/>
+                </a:solidFill>
+                <a:latin typeface="Segoe UI" pitchFamily="34" charset="0"/>
+                <a:ea typeface="Segoe UI" pitchFamily="34" charset="-122"/>
+                <a:cs typeface="Segoe UI" pitchFamily="34" charset="-120"/>
+              </a:rPr>
+              <a:t>🌏 21 countries</a:t>
+            </a:r>
+            <a:endParaRPr lang="en-US" sz="750" dirty="0"/>
+          </a:p>
+        </p:txBody>
+      </p:sp>
+      <p:sp>
+        <p:nvSpPr>
+          <p:cNvPr id="36" name="Shape 34"/>
+          <p:cNvSpPr/>
+          <p:nvPr/>
+        </p:nvSpPr>
+        <p:spPr>
+          <a:xfrm>
+            <a:off x="6126480" y="1499616"/>
+            <a:ext cx="2560320" cy="3658"/>
+          </a:xfrm>
+          <a:prstGeom prst="rect">
+            <a:avLst/>
+          </a:prstGeom>
+          <a:solidFill>
+            <a:srgbClr val="30363D"/>
+          </a:solidFill>
+          <a:ln/>
+        </p:spPr>
+        <p:txBody>
+          <a:bodyPr/>
+          <a:lstStyle/>
+          <a:p>
+            <a:endParaRPr lang="en-US"/>
+          </a:p>
+        </p:txBody>
+      </p:sp>
+      <p:sp>
+        <p:nvSpPr>
+          <p:cNvPr id="37" name="Text 35"/>
+          <p:cNvSpPr/>
+          <p:nvPr/>
+        </p:nvSpPr>
+        <p:spPr>
+          <a:xfrm>
+            <a:off x="6126480" y="1554480"/>
+            <a:ext cx="2560320" cy="868680"/>
+          </a:xfrm>
+          <a:prstGeom prst="rect">
+            <a:avLst/>
+          </a:prstGeom>
+          <a:noFill/>
+          <a:ln/>
+        </p:spPr>
+        <p:txBody>
+          <a:bodyPr wrap="square" rtlCol="0" anchor="t"/>
+          <a:lstStyle/>
+          <a:p>
+            <a:pPr marL="0" indent="0">
+              <a:lnSpc>
+                <a:spcPct val="120000"/>
+              </a:lnSpc>
+              <a:buNone/>
+            </a:pPr>
+            <a:r>
+              <a:rPr lang="en-US" sz="700" i="1" dirty="0">
+                <a:solidFill>
+                  <a:srgbClr val="C9D1D9"/>
+                </a:solidFill>
+                <a:latin typeface="Segoe UI" pitchFamily="34" charset="0"/>
+                <a:ea typeface="Segoe UI" pitchFamily="34" charset="-122"/>
+                <a:cs typeface="Segoe UI" pitchFamily="34" charset="-120"/>
+              </a:rPr>
+              <a:t>"9,000+ devs across 12 countries unified on GitHub Enterprise. CI with Actions driving cultural shift."</a:t>
+            </a:r>
+            <a:endParaRPr lang="en-US" sz="700" dirty="0"/>
+          </a:p>
+        </p:txBody>
+      </p:sp>
+      <p:sp>
+        <p:nvSpPr>
+          <p:cNvPr id="38" name="Text 36"/>
+          <p:cNvSpPr/>
+          <p:nvPr/>
+        </p:nvSpPr>
+        <p:spPr>
+          <a:xfrm>
+            <a:off x="6126480" y="2560320"/>
+            <a:ext cx="2560320" cy="164592"/>
+          </a:xfrm>
+          <a:prstGeom prst="rect">
+            <a:avLst/>
+          </a:prstGeom>
+          <a:noFill/>
+          <a:ln/>
+        </p:spPr>
+        <p:txBody>
+          <a:bodyPr wrap="square" rtlCol="0" anchor="ctr"/>
+          <a:lstStyle/>
+          <a:p>
+            <a:pPr marL="0" indent="0">
+              <a:buNone/>
+            </a:pPr>
+            <a:r>
+              <a:rPr lang="en-US" sz="650" b="1" dirty="0">
+                <a:solidFill>
+                  <a:srgbClr val="484F58"/>
+                </a:solidFill>
+                <a:latin typeface="Segoe UI" pitchFamily="34" charset="0"/>
+                <a:ea typeface="Segoe UI" pitchFamily="34" charset="-122"/>
+                <a:cs typeface="Segoe UI" pitchFamily="34" charset="-120"/>
+              </a:rPr>
+              <a:t>Enterprise · Actions · GHAS</a:t>
+            </a:r>
+            <a:endParaRPr lang="en-US" sz="650" dirty="0"/>
+          </a:p>
+        </p:txBody>
+      </p:sp>
+      <p:sp>
+        <p:nvSpPr>
+          <p:cNvPr id="39" name="Text 37"/>
+          <p:cNvSpPr/>
+          <p:nvPr/>
+        </p:nvSpPr>
+        <p:spPr>
+          <a:xfrm>
+            <a:off x="7315200" y="2560320"/>
+            <a:ext cx="1371600" cy="164592"/>
+          </a:xfrm>
+          <a:prstGeom prst="rect">
+            <a:avLst/>
+          </a:prstGeom>
+          <a:noFill/>
+          <a:ln/>
+        </p:spPr>
+        <p:txBody>
+          <a:bodyPr wrap="square" rtlCol="0" anchor="ctr"/>
+          <a:lstStyle/>
+          <a:p>
+            <a:pPr marL="0" indent="0" algn="r">
+              <a:buNone/>
+            </a:pPr>
+            <a:r>
+              <a:rPr lang="en-US" sz="650" u="sng" dirty="0">
+                <a:solidFill>
+                  <a:srgbClr val="58A6FF"/>
+                </a:solidFill>
+                <a:latin typeface="Segoe UI" pitchFamily="34" charset="0"/>
+                <a:ea typeface="Segoe UI" pitchFamily="34" charset="-122"/>
+                <a:cs typeface="Segoe UI" pitchFamily="34" charset="-120"/>
+                <a:hlinkClick r:id="rId5">
+                  <a:extLst>
+                    <a:ext uri="{A12FA001-AC4F-418D-AE19-62706E023703}">
+                      <ahyp:hlinkClr xmlns:ahyp="http://schemas.microsoft.com/office/drawing/2018/hyperlinkcolor" val="tx"/>
+                    </a:ext>
+                  </a:extLst>
+                </a:hlinkClick>
+              </a:rPr>
+              <a:t>Read full story →</a:t>
+            </a:r>
+            <a:endParaRPr lang="en-US" sz="650" dirty="0"/>
+          </a:p>
+        </p:txBody>
+      </p:sp>
+      <p:sp>
+        <p:nvSpPr>
+          <p:cNvPr id="40" name="Shape 38"/>
+          <p:cNvSpPr/>
+          <p:nvPr/>
+        </p:nvSpPr>
+        <p:spPr>
+          <a:xfrm>
+            <a:off x="365760" y="2907792"/>
+            <a:ext cx="2743200" cy="2011680"/>
+          </a:xfrm>
+          <a:prstGeom prst="roundRect">
+            <a:avLst>
+              <a:gd name="adj" fmla="val 3182"/>
+            </a:avLst>
+          </a:prstGeom>
+          <a:solidFill>
+            <a:srgbClr val="161B22"/>
+          </a:solidFill>
+          <a:ln w="12700">
+            <a:solidFill>
+              <a:srgbClr val="30363D"/>
+            </a:solidFill>
+            <a:prstDash val="solid"/>
+          </a:ln>
+        </p:spPr>
+        <p:txBody>
+          <a:bodyPr/>
+          <a:lstStyle/>
+          <a:p>
+            <a:endParaRPr lang="en-US"/>
+          </a:p>
+        </p:txBody>
+      </p:sp>
+      <p:sp>
+        <p:nvSpPr>
+          <p:cNvPr id="41" name="Shape 39"/>
+          <p:cNvSpPr/>
+          <p:nvPr/>
+        </p:nvSpPr>
+        <p:spPr>
+          <a:xfrm>
+            <a:off x="457200" y="2980944"/>
+            <a:ext cx="777240" cy="155448"/>
+          </a:xfrm>
+          <a:prstGeom prst="roundRect">
+            <a:avLst>
+              <a:gd name="adj" fmla="val 23529"/>
+            </a:avLst>
+          </a:prstGeom>
+          <a:solidFill>
+            <a:srgbClr val="0D1117"/>
+          </a:solidFill>
+          <a:ln/>
+        </p:spPr>
+        <p:txBody>
+          <a:bodyPr/>
+          <a:lstStyle/>
+          <a:p>
+            <a:endParaRPr lang="en-US"/>
+          </a:p>
+        </p:txBody>
+      </p:sp>
+      <p:sp>
+        <p:nvSpPr>
+          <p:cNvPr id="42" name="Text 40"/>
+          <p:cNvSpPr/>
+          <p:nvPr/>
+        </p:nvSpPr>
+        <p:spPr>
+          <a:xfrm>
+            <a:off x="457200" y="2980944"/>
+            <a:ext cx="777240" cy="155448"/>
+          </a:xfrm>
+          <a:prstGeom prst="rect">
+            <a:avLst/>
+          </a:prstGeom>
+          <a:noFill/>
+          <a:ln/>
+        </p:spPr>
+        <p:txBody>
+          <a:bodyPr wrap="square" rtlCol="0" anchor="ctr"/>
+          <a:lstStyle/>
+          <a:p>
+            <a:pPr marL="0" indent="0" algn="ctr">
+              <a:buNone/>
+            </a:pPr>
+            <a:r>
+              <a:rPr lang="en-US" sz="550" b="1" dirty="0">
+                <a:solidFill>
+                  <a:srgbClr val="D2A8FF"/>
+                </a:solidFill>
+                <a:latin typeface="Segoe UI" pitchFamily="34" charset="0"/>
+                <a:ea typeface="Segoe UI" pitchFamily="34" charset="-122"/>
+                <a:cs typeface="Segoe UI" pitchFamily="34" charset="-120"/>
+              </a:rPr>
+              <a:t>AUTOMOTIVE</a:t>
+            </a:r>
+            <a:endParaRPr lang="en-US" sz="550" dirty="0"/>
+          </a:p>
+        </p:txBody>
+      </p:sp>
+      <p:sp>
+        <p:nvSpPr>
+          <p:cNvPr id="43" name="Text 41"/>
+          <p:cNvSpPr/>
+          <p:nvPr/>
+        </p:nvSpPr>
+        <p:spPr>
+          <a:xfrm>
+            <a:off x="457200" y="3182112"/>
+            <a:ext cx="2514600" cy="201168"/>
+          </a:xfrm>
+          <a:prstGeom prst="rect">
+            <a:avLst/>
+          </a:prstGeom>
+          <a:noFill/>
+          <a:ln/>
+        </p:spPr>
+        <p:txBody>
+          <a:bodyPr wrap="square" rtlCol="0" anchor="ctr"/>
+          <a:lstStyle/>
+          <a:p>
+            <a:pPr marL="0" indent="0">
+              <a:buNone/>
+            </a:pPr>
+            <a:r>
+              <a:rPr lang="en-US" sz="1000" b="1" dirty="0">
+                <a:solidFill>
+                  <a:srgbClr val="F0F6FC"/>
+                </a:solidFill>
+                <a:latin typeface="Segoe UI" pitchFamily="34" charset="0"/>
+                <a:ea typeface="Segoe UI" pitchFamily="34" charset="-122"/>
+                <a:cs typeface="Segoe UI" pitchFamily="34" charset="-120"/>
+              </a:rPr>
+              <a:t>🚗  Mobility &amp; Manufacturing</a:t>
+            </a:r>
+            <a:endParaRPr lang="en-US" sz="1000" dirty="0"/>
+          </a:p>
+        </p:txBody>
+      </p:sp>
+      <p:sp>
+        <p:nvSpPr>
+          <p:cNvPr id="44" name="Text 42"/>
+          <p:cNvSpPr/>
+          <p:nvPr/>
+        </p:nvSpPr>
+        <p:spPr>
+          <a:xfrm>
+            <a:off x="457200" y="3401568"/>
+            <a:ext cx="1371600" cy="164592"/>
+          </a:xfrm>
+          <a:prstGeom prst="rect">
+            <a:avLst/>
+          </a:prstGeom>
+          <a:noFill/>
+          <a:ln/>
+        </p:spPr>
+        <p:txBody>
+          <a:bodyPr wrap="square" rtlCol="0" anchor="ctr"/>
+          <a:lstStyle/>
+          <a:p>
+            <a:pPr marL="0" indent="0">
+              <a:buNone/>
+            </a:pPr>
+            <a:r>
+              <a:rPr lang="en-US" sz="900" b="1" u="sng" dirty="0">
+                <a:solidFill>
+                  <a:srgbClr val="D2A8FF"/>
+                </a:solidFill>
+                <a:latin typeface="Segoe UI" pitchFamily="34" charset="0"/>
+                <a:ea typeface="Segoe UI" pitchFamily="34" charset="-122"/>
+                <a:cs typeface="Segoe UI" pitchFamily="34" charset="-120"/>
+                <a:hlinkClick r:id="rId6">
+                  <a:extLst>
+                    <a:ext uri="{A12FA001-AC4F-418D-AE19-62706E023703}">
+                      <ahyp:hlinkClr xmlns:ahyp="http://schemas.microsoft.com/office/drawing/2018/hyperlinkcolor" val="tx"/>
+                    </a:ext>
+                  </a:extLst>
+                </a:hlinkClick>
+              </a:rPr>
+              <a:t>Mercedes-Benz</a:t>
+            </a:r>
+            <a:endParaRPr lang="en-US" sz="900" dirty="0"/>
+          </a:p>
+        </p:txBody>
+      </p:sp>
+      <p:sp>
+        <p:nvSpPr>
+          <p:cNvPr id="45" name="Text 43"/>
+          <p:cNvSpPr/>
+          <p:nvPr/>
+        </p:nvSpPr>
+        <p:spPr>
+          <a:xfrm>
+            <a:off x="1737360" y="3401568"/>
+            <a:ext cx="1280160" cy="164592"/>
+          </a:xfrm>
+          <a:prstGeom prst="rect">
+            <a:avLst/>
+          </a:prstGeom>
+          <a:noFill/>
+          <a:ln/>
+        </p:spPr>
+        <p:txBody>
+          <a:bodyPr wrap="square" rtlCol="0" anchor="ctr"/>
+          <a:lstStyle/>
+          <a:p>
+            <a:pPr marL="0" indent="0" algn="r">
+              <a:buNone/>
+            </a:pPr>
+            <a:r>
+              <a:rPr lang="en-US" sz="750" dirty="0">
+                <a:solidFill>
+                  <a:srgbClr val="8B949E"/>
+                </a:solidFill>
+                <a:latin typeface="Segoe UI" pitchFamily="34" charset="0"/>
+                <a:ea typeface="Segoe UI" pitchFamily="34" charset="-122"/>
+                <a:cs typeface="Segoe UI" pitchFamily="34" charset="-120"/>
+              </a:rPr>
+              <a:t>🌏 Global</a:t>
+            </a:r>
+            <a:endParaRPr lang="en-US" sz="750" dirty="0"/>
+          </a:p>
+        </p:txBody>
+      </p:sp>
+      <p:sp>
+        <p:nvSpPr>
+          <p:cNvPr id="46" name="Shape 44"/>
+          <p:cNvSpPr/>
+          <p:nvPr/>
+        </p:nvSpPr>
+        <p:spPr>
+          <a:xfrm>
+            <a:off x="457200" y="3602736"/>
+            <a:ext cx="2560320" cy="3658"/>
+          </a:xfrm>
+          <a:prstGeom prst="rect">
+            <a:avLst/>
+          </a:prstGeom>
+          <a:solidFill>
+            <a:srgbClr val="30363D"/>
+          </a:solidFill>
+          <a:ln/>
+        </p:spPr>
+        <p:txBody>
+          <a:bodyPr/>
+          <a:lstStyle/>
+          <a:p>
+            <a:endParaRPr lang="en-US"/>
+          </a:p>
+        </p:txBody>
+      </p:sp>
+      <p:sp>
+        <p:nvSpPr>
+          <p:cNvPr id="47" name="Text 45"/>
+          <p:cNvSpPr/>
+          <p:nvPr/>
+        </p:nvSpPr>
+        <p:spPr>
+          <a:xfrm>
+            <a:off x="457200" y="3657600"/>
+            <a:ext cx="2560320" cy="868680"/>
+          </a:xfrm>
+          <a:prstGeom prst="rect">
+            <a:avLst/>
+          </a:prstGeom>
+          <a:noFill/>
+          <a:ln/>
+        </p:spPr>
+        <p:txBody>
+          <a:bodyPr wrap="square" rtlCol="0" anchor="t"/>
+          <a:lstStyle/>
+          <a:p>
+            <a:pPr marL="0" indent="0">
+              <a:lnSpc>
+                <a:spcPct val="120000"/>
+              </a:lnSpc>
+              <a:buNone/>
+            </a:pPr>
+            <a:r>
+              <a:rPr lang="en-US" sz="700" i="1" dirty="0">
+                <a:solidFill>
+                  <a:srgbClr val="C9D1D9"/>
+                </a:solidFill>
+                <a:latin typeface="Segoe UI" pitchFamily="34" charset="0"/>
+                <a:ea typeface="Segoe UI" pitchFamily="34" charset="-122"/>
+                <a:cs typeface="Segoe UI" pitchFamily="34" charset="-120"/>
+              </a:rPr>
+              <a:t>"55,000+ devs accepted 2M+ lines of Copilot code. 115K repos across 4,300 orgs."</a:t>
+            </a:r>
+            <a:endParaRPr lang="en-US" sz="700" dirty="0"/>
+          </a:p>
+        </p:txBody>
+      </p:sp>
+      <p:sp>
+        <p:nvSpPr>
+          <p:cNvPr id="48" name="Text 46"/>
+          <p:cNvSpPr/>
+          <p:nvPr/>
+        </p:nvSpPr>
+        <p:spPr>
+          <a:xfrm>
+            <a:off x="457200" y="4663440"/>
+            <a:ext cx="2560320" cy="164592"/>
+          </a:xfrm>
+          <a:prstGeom prst="rect">
+            <a:avLst/>
+          </a:prstGeom>
+          <a:noFill/>
+          <a:ln/>
+        </p:spPr>
+        <p:txBody>
+          <a:bodyPr wrap="square" rtlCol="0" anchor="ctr"/>
+          <a:lstStyle/>
+          <a:p>
+            <a:pPr marL="0" indent="0">
+              <a:buNone/>
+            </a:pPr>
+            <a:r>
+              <a:rPr lang="en-US" sz="650" b="1" dirty="0">
+                <a:solidFill>
+                  <a:srgbClr val="484F58"/>
+                </a:solidFill>
+                <a:latin typeface="Segoe UI" pitchFamily="34" charset="0"/>
+                <a:ea typeface="Segoe UI" pitchFamily="34" charset="-122"/>
+                <a:cs typeface="Segoe UI" pitchFamily="34" charset="-120"/>
+              </a:rPr>
+              <a:t>Enterprise · Copilot · Actions</a:t>
+            </a:r>
+            <a:endParaRPr lang="en-US" sz="650" dirty="0"/>
+          </a:p>
+        </p:txBody>
+      </p:sp>
+      <p:sp>
+        <p:nvSpPr>
+          <p:cNvPr id="49" name="Text 47"/>
+          <p:cNvSpPr/>
+          <p:nvPr/>
+        </p:nvSpPr>
+        <p:spPr>
+          <a:xfrm>
+            <a:off x="1645920" y="4663440"/>
+            <a:ext cx="1371600" cy="164592"/>
+          </a:xfrm>
+          <a:prstGeom prst="rect">
+            <a:avLst/>
+          </a:prstGeom>
+          <a:noFill/>
+          <a:ln/>
+        </p:spPr>
+        <p:txBody>
+          <a:bodyPr wrap="square" rtlCol="0" anchor="ctr"/>
+          <a:lstStyle/>
+          <a:p>
+            <a:pPr marL="0" indent="0" algn="r">
+              <a:buNone/>
+            </a:pPr>
+            <a:r>
+              <a:rPr lang="en-US" sz="650" u="sng" dirty="0">
+                <a:solidFill>
+                  <a:srgbClr val="58A6FF"/>
+                </a:solidFill>
+                <a:latin typeface="Segoe UI" pitchFamily="34" charset="0"/>
+                <a:ea typeface="Segoe UI" pitchFamily="34" charset="-122"/>
+                <a:cs typeface="Segoe UI" pitchFamily="34" charset="-120"/>
+                <a:hlinkClick r:id="rId6">
+                  <a:extLst>
+                    <a:ext uri="{A12FA001-AC4F-418D-AE19-62706E023703}">
+                      <ahyp:hlinkClr xmlns:ahyp="http://schemas.microsoft.com/office/drawing/2018/hyperlinkcolor" val="tx"/>
+                    </a:ext>
+                  </a:extLst>
+                </a:hlinkClick>
+              </a:rPr>
+              <a:t>Read full story →</a:t>
+            </a:r>
+            <a:endParaRPr lang="en-US" sz="650" dirty="0"/>
+          </a:p>
+        </p:txBody>
+      </p:sp>
+      <p:sp>
+        <p:nvSpPr>
+          <p:cNvPr id="50" name="Shape 48"/>
+          <p:cNvSpPr/>
+          <p:nvPr/>
+        </p:nvSpPr>
+        <p:spPr>
+          <a:xfrm>
+            <a:off x="3200400" y="2907792"/>
+            <a:ext cx="2743200" cy="2011680"/>
+          </a:xfrm>
+          <a:prstGeom prst="roundRect">
+            <a:avLst>
+              <a:gd name="adj" fmla="val 3182"/>
+            </a:avLst>
+          </a:prstGeom>
+          <a:solidFill>
+            <a:srgbClr val="161B22"/>
+          </a:solidFill>
+          <a:ln w="12700">
+            <a:solidFill>
+              <a:srgbClr val="30363D"/>
+            </a:solidFill>
+            <a:prstDash val="solid"/>
+          </a:ln>
+        </p:spPr>
+        <p:txBody>
+          <a:bodyPr/>
+          <a:lstStyle/>
+          <a:p>
+            <a:endParaRPr lang="en-US"/>
+          </a:p>
+        </p:txBody>
+      </p:sp>
+      <p:sp>
+        <p:nvSpPr>
+          <p:cNvPr id="51" name="Shape 49"/>
+          <p:cNvSpPr/>
+          <p:nvPr/>
+        </p:nvSpPr>
+        <p:spPr>
+          <a:xfrm>
+            <a:off x="3291840" y="2980944"/>
+            <a:ext cx="777240" cy="155448"/>
+          </a:xfrm>
+          <a:prstGeom prst="roundRect">
+            <a:avLst>
+              <a:gd name="adj" fmla="val 23529"/>
+            </a:avLst>
+          </a:prstGeom>
+          <a:solidFill>
+            <a:srgbClr val="0D1117"/>
+          </a:solidFill>
+          <a:ln/>
+        </p:spPr>
+        <p:txBody>
+          <a:bodyPr/>
+          <a:lstStyle/>
+          <a:p>
+            <a:endParaRPr lang="en-US"/>
+          </a:p>
+        </p:txBody>
+      </p:sp>
+      <p:sp>
+        <p:nvSpPr>
+          <p:cNvPr id="52" name="Text 50"/>
+          <p:cNvSpPr/>
+          <p:nvPr/>
+        </p:nvSpPr>
+        <p:spPr>
+          <a:xfrm>
+            <a:off x="3291840" y="2980944"/>
+            <a:ext cx="777240" cy="155448"/>
+          </a:xfrm>
+          <a:prstGeom prst="rect">
+            <a:avLst/>
+          </a:prstGeom>
+          <a:noFill/>
+          <a:ln/>
+        </p:spPr>
+        <p:txBody>
+          <a:bodyPr wrap="square" rtlCol="0" anchor="ctr"/>
+          <a:lstStyle/>
+          <a:p>
+            <a:pPr marL="0" indent="0" algn="ctr">
+              <a:buNone/>
+            </a:pPr>
+            <a:r>
+              <a:rPr lang="en-US" sz="550" b="1" dirty="0">
+                <a:solidFill>
+                  <a:srgbClr val="F85149"/>
+                </a:solidFill>
+                <a:latin typeface="Segoe UI" pitchFamily="34" charset="0"/>
+                <a:ea typeface="Segoe UI" pitchFamily="34" charset="-122"/>
+                <a:cs typeface="Segoe UI" pitchFamily="34" charset="-120"/>
+              </a:rPr>
+              <a:t>HEALTH TECH</a:t>
+            </a:r>
+            <a:endParaRPr lang="en-US" sz="550" dirty="0"/>
+          </a:p>
+        </p:txBody>
+      </p:sp>
+      <p:sp>
+        <p:nvSpPr>
+          <p:cNvPr id="53" name="Text 51"/>
+          <p:cNvSpPr/>
+          <p:nvPr/>
+        </p:nvSpPr>
+        <p:spPr>
+          <a:xfrm>
+            <a:off x="3291840" y="3182112"/>
+            <a:ext cx="2514600" cy="201168"/>
+          </a:xfrm>
+          <a:prstGeom prst="rect">
+            <a:avLst/>
+          </a:prstGeom>
+          <a:noFill/>
+          <a:ln/>
+        </p:spPr>
+        <p:txBody>
+          <a:bodyPr wrap="square" rtlCol="0" anchor="ctr"/>
+          <a:lstStyle/>
+          <a:p>
+            <a:pPr marL="0" indent="0">
+              <a:buNone/>
+            </a:pPr>
+            <a:r>
+              <a:rPr lang="en-US" sz="1000" b="1" dirty="0">
+                <a:solidFill>
+                  <a:srgbClr val="F0F6FC"/>
+                </a:solidFill>
+                <a:latin typeface="Segoe UI" pitchFamily="34" charset="0"/>
+                <a:ea typeface="Segoe UI" pitchFamily="34" charset="-122"/>
+                <a:cs typeface="Segoe UI" pitchFamily="34" charset="-120"/>
+              </a:rPr>
+              <a:t>🏥  Healthcare &amp; MedTech</a:t>
+            </a:r>
+            <a:endParaRPr lang="en-US" sz="1000" dirty="0"/>
+          </a:p>
+        </p:txBody>
+      </p:sp>
+      <p:sp>
+        <p:nvSpPr>
+          <p:cNvPr id="54" name="Text 52"/>
+          <p:cNvSpPr/>
+          <p:nvPr/>
+        </p:nvSpPr>
+        <p:spPr>
+          <a:xfrm>
+            <a:off x="3291840" y="3401568"/>
+            <a:ext cx="1371600" cy="164592"/>
+          </a:xfrm>
+          <a:prstGeom prst="rect">
+            <a:avLst/>
+          </a:prstGeom>
+          <a:noFill/>
+          <a:ln/>
+        </p:spPr>
+        <p:txBody>
+          <a:bodyPr wrap="square" rtlCol="0" anchor="ctr"/>
+          <a:lstStyle/>
+          <a:p>
+            <a:pPr marL="0" indent="0">
+              <a:buNone/>
+            </a:pPr>
+            <a:r>
+              <a:rPr lang="en-US" sz="900" b="1" u="sng" dirty="0">
+                <a:solidFill>
+                  <a:srgbClr val="F85149"/>
+                </a:solidFill>
+                <a:latin typeface="Segoe UI" pitchFamily="34" charset="0"/>
+                <a:ea typeface="Segoe UI" pitchFamily="34" charset="-122"/>
+                <a:cs typeface="Segoe UI" pitchFamily="34" charset="-120"/>
+                <a:hlinkClick r:id="rId7">
+                  <a:extLst>
+                    <a:ext uri="{A12FA001-AC4F-418D-AE19-62706E023703}">
+                      <ahyp:hlinkClr xmlns:ahyp="http://schemas.microsoft.com/office/drawing/2018/hyperlinkcolor" val="tx"/>
+                    </a:ext>
+                  </a:extLst>
+                </a:hlinkClick>
+              </a:rPr>
+              <a:t>Philips</a:t>
+            </a:r>
+            <a:endParaRPr lang="en-US" sz="900" dirty="0"/>
+          </a:p>
+        </p:txBody>
+      </p:sp>
+      <p:sp>
+        <p:nvSpPr>
+          <p:cNvPr id="55" name="Text 53"/>
+          <p:cNvSpPr/>
+          <p:nvPr/>
+        </p:nvSpPr>
+        <p:spPr>
+          <a:xfrm>
+            <a:off x="4572000" y="3401568"/>
+            <a:ext cx="1280160" cy="164592"/>
+          </a:xfrm>
+          <a:prstGeom prst="rect">
+            <a:avLst/>
+          </a:prstGeom>
+          <a:noFill/>
+          <a:ln/>
+        </p:spPr>
+        <p:txBody>
+          <a:bodyPr wrap="square" rtlCol="0" anchor="ctr"/>
+          <a:lstStyle/>
+          <a:p>
+            <a:pPr marL="0" indent="0" algn="r">
+              <a:buNone/>
+            </a:pPr>
+            <a:r>
+              <a:rPr lang="en-US" sz="750" dirty="0">
+                <a:solidFill>
+                  <a:srgbClr val="8B949E"/>
+                </a:solidFill>
+                <a:latin typeface="Segoe UI" pitchFamily="34" charset="0"/>
+                <a:ea typeface="Segoe UI" pitchFamily="34" charset="-122"/>
+                <a:cs typeface="Segoe UI" pitchFamily="34" charset="-120"/>
+              </a:rPr>
+              <a:t>🌏 Global</a:t>
+            </a:r>
+            <a:endParaRPr lang="en-US" sz="750" dirty="0"/>
+          </a:p>
+        </p:txBody>
+      </p:sp>
+      <p:sp>
+        <p:nvSpPr>
+          <p:cNvPr id="56" name="Shape 54"/>
+          <p:cNvSpPr/>
+          <p:nvPr/>
+        </p:nvSpPr>
+        <p:spPr>
+          <a:xfrm>
+            <a:off x="3291840" y="3602736"/>
+            <a:ext cx="2560320" cy="3658"/>
+          </a:xfrm>
+          <a:prstGeom prst="rect">
+            <a:avLst/>
+          </a:prstGeom>
+          <a:solidFill>
+            <a:srgbClr val="30363D"/>
+          </a:solidFill>
+          <a:ln/>
+        </p:spPr>
+        <p:txBody>
+          <a:bodyPr/>
+          <a:lstStyle/>
+          <a:p>
+            <a:endParaRPr lang="en-US"/>
+          </a:p>
+        </p:txBody>
+      </p:sp>
+      <p:sp>
+        <p:nvSpPr>
+          <p:cNvPr id="57" name="Text 55"/>
+          <p:cNvSpPr/>
+          <p:nvPr/>
+        </p:nvSpPr>
+        <p:spPr>
+          <a:xfrm>
+            <a:off x="3291840" y="3657600"/>
+            <a:ext cx="2560320" cy="868680"/>
+          </a:xfrm>
+          <a:prstGeom prst="rect">
+            <a:avLst/>
+          </a:prstGeom>
+          <a:noFill/>
+          <a:ln/>
+        </p:spPr>
+        <p:txBody>
+          <a:bodyPr wrap="square" rtlCol="0" anchor="t"/>
+          <a:lstStyle/>
+          <a:p>
+            <a:pPr marL="0" indent="0">
+              <a:lnSpc>
+                <a:spcPct val="120000"/>
+              </a:lnSpc>
+              <a:buNone/>
+            </a:pPr>
+            <a:r>
+              <a:rPr lang="en-US" sz="700" i="1" dirty="0">
+                <a:solidFill>
+                  <a:srgbClr val="C9D1D9"/>
+                </a:solidFill>
+                <a:latin typeface="Segoe UI" pitchFamily="34" charset="0"/>
+                <a:ea typeface="Segoe UI" pitchFamily="34" charset="-122"/>
+                <a:cs typeface="Segoe UI" pitchFamily="34" charset="-120"/>
+              </a:rPr>
+              <a:t>"6,000+ devs, 85% of code innersourced. GitHub accelerating innovation to improve 2.5B lives/yr."</a:t>
+            </a:r>
+            <a:endParaRPr lang="en-US" sz="700" dirty="0"/>
+          </a:p>
+        </p:txBody>
+      </p:sp>
+      <p:sp>
+        <p:nvSpPr>
+          <p:cNvPr id="58" name="Text 56"/>
+          <p:cNvSpPr/>
+          <p:nvPr/>
+        </p:nvSpPr>
+        <p:spPr>
+          <a:xfrm>
+            <a:off x="3291840" y="4663440"/>
+            <a:ext cx="2560320" cy="164592"/>
+          </a:xfrm>
+          <a:prstGeom prst="rect">
+            <a:avLst/>
+          </a:prstGeom>
+          <a:noFill/>
+          <a:ln/>
+        </p:spPr>
+        <p:txBody>
+          <a:bodyPr wrap="square" rtlCol="0" anchor="ctr"/>
+          <a:lstStyle/>
+          <a:p>
+            <a:pPr marL="0" indent="0">
+              <a:buNone/>
+            </a:pPr>
+            <a:r>
+              <a:rPr lang="en-US" sz="650" b="1" dirty="0">
+                <a:solidFill>
+                  <a:srgbClr val="484F58"/>
+                </a:solidFill>
+                <a:latin typeface="Segoe UI" pitchFamily="34" charset="0"/>
+                <a:ea typeface="Segoe UI" pitchFamily="34" charset="-122"/>
+                <a:cs typeface="Segoe UI" pitchFamily="34" charset="-120"/>
+              </a:rPr>
+              <a:t>Enterprise Cloud · Actions</a:t>
+            </a:r>
+            <a:endParaRPr lang="en-US" sz="650" dirty="0"/>
+          </a:p>
+        </p:txBody>
+      </p:sp>
+      <p:sp>
+        <p:nvSpPr>
+          <p:cNvPr id="59" name="Text 57"/>
+          <p:cNvSpPr/>
+          <p:nvPr/>
+        </p:nvSpPr>
+        <p:spPr>
+          <a:xfrm>
+            <a:off x="4480560" y="4663440"/>
+            <a:ext cx="1371600" cy="164592"/>
+          </a:xfrm>
+          <a:prstGeom prst="rect">
+            <a:avLst/>
+          </a:prstGeom>
+          <a:noFill/>
+          <a:ln/>
+        </p:spPr>
+        <p:txBody>
+          <a:bodyPr wrap="square" rtlCol="0" anchor="ctr"/>
+          <a:lstStyle/>
+          <a:p>
+            <a:pPr marL="0" indent="0" algn="r">
+              <a:buNone/>
+            </a:pPr>
+            <a:r>
+              <a:rPr lang="en-US" sz="650" u="sng" dirty="0">
+                <a:solidFill>
+                  <a:srgbClr val="58A6FF"/>
+                </a:solidFill>
+                <a:latin typeface="Segoe UI" pitchFamily="34" charset="0"/>
+                <a:ea typeface="Segoe UI" pitchFamily="34" charset="-122"/>
+                <a:cs typeface="Segoe UI" pitchFamily="34" charset="-120"/>
+                <a:hlinkClick r:id="rId7">
+                  <a:extLst>
+                    <a:ext uri="{A12FA001-AC4F-418D-AE19-62706E023703}">
+                      <ahyp:hlinkClr xmlns:ahyp="http://schemas.microsoft.com/office/drawing/2018/hyperlinkcolor" val="tx"/>
+                    </a:ext>
+                  </a:extLst>
+                </a:hlinkClick>
+              </a:rPr>
+              <a:t>Read full story →</a:t>
+            </a:r>
+            <a:endParaRPr lang="en-US" sz="650" dirty="0"/>
+          </a:p>
+        </p:txBody>
+      </p:sp>
+      <p:sp>
+        <p:nvSpPr>
+          <p:cNvPr id="60" name="Shape 58"/>
+          <p:cNvSpPr/>
+          <p:nvPr/>
+        </p:nvSpPr>
+        <p:spPr>
+          <a:xfrm>
+            <a:off x="6035040" y="2907792"/>
+            <a:ext cx="2743200" cy="2011680"/>
+          </a:xfrm>
+          <a:prstGeom prst="roundRect">
+            <a:avLst>
+              <a:gd name="adj" fmla="val 3182"/>
+            </a:avLst>
+          </a:prstGeom>
+          <a:solidFill>
+            <a:srgbClr val="161B22"/>
+          </a:solidFill>
+          <a:ln w="12700">
+            <a:solidFill>
+              <a:srgbClr val="30363D"/>
+            </a:solidFill>
+            <a:prstDash val="solid"/>
+          </a:ln>
+        </p:spPr>
+        <p:txBody>
+          <a:bodyPr/>
+          <a:lstStyle/>
+          <a:p>
+            <a:endParaRPr lang="en-US"/>
+          </a:p>
+        </p:txBody>
+      </p:sp>
+      <p:sp>
+        <p:nvSpPr>
+          <p:cNvPr id="61" name="Shape 59"/>
+          <p:cNvSpPr/>
+          <p:nvPr/>
+        </p:nvSpPr>
+        <p:spPr>
+          <a:xfrm>
+            <a:off x="6126480" y="2980944"/>
+            <a:ext cx="777240" cy="155448"/>
+          </a:xfrm>
+          <a:prstGeom prst="roundRect">
+            <a:avLst>
+              <a:gd name="adj" fmla="val 23529"/>
+            </a:avLst>
+          </a:prstGeom>
+          <a:solidFill>
+            <a:srgbClr val="0D1117"/>
+          </a:solidFill>
+          <a:ln/>
+        </p:spPr>
+        <p:txBody>
+          <a:bodyPr/>
+          <a:lstStyle/>
+          <a:p>
+            <a:endParaRPr lang="en-US"/>
+          </a:p>
+        </p:txBody>
+      </p:sp>
+      <p:sp>
+        <p:nvSpPr>
+          <p:cNvPr id="62" name="Text 60"/>
+          <p:cNvSpPr/>
+          <p:nvPr/>
+        </p:nvSpPr>
+        <p:spPr>
+          <a:xfrm>
+            <a:off x="6126480" y="2980944"/>
+            <a:ext cx="777240" cy="155448"/>
+          </a:xfrm>
+          <a:prstGeom prst="rect">
+            <a:avLst/>
+          </a:prstGeom>
+          <a:noFill/>
+          <a:ln/>
+        </p:spPr>
+        <p:txBody>
+          <a:bodyPr wrap="square" rtlCol="0" anchor="ctr"/>
+          <a:lstStyle/>
+          <a:p>
+            <a:pPr marL="0" indent="0" algn="ctr">
+              <a:buNone/>
+            </a:pPr>
+            <a:r>
+              <a:rPr lang="en-US" sz="550" b="1" dirty="0">
+                <a:solidFill>
+                  <a:srgbClr val="79C0FF"/>
+                </a:solidFill>
+                <a:latin typeface="Segoe UI" pitchFamily="34" charset="0"/>
+                <a:ea typeface="Segoe UI" pitchFamily="34" charset="-122"/>
+                <a:cs typeface="Segoe UI" pitchFamily="34" charset="-120"/>
+              </a:rPr>
+              <a:t>EDUCATION</a:t>
+            </a:r>
+            <a:endParaRPr lang="en-US" sz="550" dirty="0"/>
+          </a:p>
+        </p:txBody>
+      </p:sp>
+      <p:sp>
+        <p:nvSpPr>
+          <p:cNvPr id="63" name="Text 61"/>
+          <p:cNvSpPr/>
+          <p:nvPr/>
+        </p:nvSpPr>
+        <p:spPr>
+          <a:xfrm>
+            <a:off x="6126480" y="3182112"/>
+            <a:ext cx="2514600" cy="201168"/>
+          </a:xfrm>
+          <a:prstGeom prst="rect">
+            <a:avLst/>
+          </a:prstGeom>
+          <a:noFill/>
+          <a:ln/>
+        </p:spPr>
+        <p:txBody>
+          <a:bodyPr wrap="square" rtlCol="0" anchor="ctr"/>
+          <a:lstStyle/>
+          <a:p>
+            <a:pPr marL="0" indent="0">
+              <a:buNone/>
+            </a:pPr>
+            <a:r>
+              <a:rPr lang="en-US" sz="1000" b="1" dirty="0">
+                <a:solidFill>
+                  <a:srgbClr val="F0F6FC"/>
+                </a:solidFill>
+                <a:latin typeface="Segoe UI" pitchFamily="34" charset="0"/>
+                <a:ea typeface="Segoe UI" pitchFamily="34" charset="-122"/>
+                <a:cs typeface="Segoe UI" pitchFamily="34" charset="-120"/>
+              </a:rPr>
+              <a:t>🎓  EdTech &amp; Learning</a:t>
+            </a:r>
+            <a:endParaRPr lang="en-US" sz="1000" dirty="0"/>
+          </a:p>
+        </p:txBody>
+      </p:sp>
+      <p:sp>
+        <p:nvSpPr>
+          <p:cNvPr id="64" name="Text 62"/>
+          <p:cNvSpPr/>
+          <p:nvPr/>
+        </p:nvSpPr>
+        <p:spPr>
+          <a:xfrm>
+            <a:off x="6126480" y="3401568"/>
+            <a:ext cx="1371600" cy="164592"/>
+          </a:xfrm>
+          <a:prstGeom prst="rect">
+            <a:avLst/>
+          </a:prstGeom>
+          <a:noFill/>
+          <a:ln/>
+        </p:spPr>
+        <p:txBody>
+          <a:bodyPr wrap="square" rtlCol="0" anchor="ctr"/>
+          <a:lstStyle/>
+          <a:p>
+            <a:pPr marL="0" indent="0">
+              <a:buNone/>
+            </a:pPr>
+            <a:r>
+              <a:rPr lang="en-US" sz="900" b="1" u="sng" dirty="0">
+                <a:solidFill>
+                  <a:srgbClr val="79C0FF"/>
+                </a:solidFill>
+                <a:latin typeface="Segoe UI" pitchFamily="34" charset="0"/>
+                <a:ea typeface="Segoe UI" pitchFamily="34" charset="-122"/>
+                <a:cs typeface="Segoe UI" pitchFamily="34" charset="-120"/>
+                <a:hlinkClick r:id="rId8">
+                  <a:extLst>
+                    <a:ext uri="{A12FA001-AC4F-418D-AE19-62706E023703}">
+                      <ahyp:hlinkClr xmlns:ahyp="http://schemas.microsoft.com/office/drawing/2018/hyperlinkcolor" val="tx"/>
+                    </a:ext>
+                  </a:extLst>
+                </a:hlinkClick>
+              </a:rPr>
+              <a:t>Duolingo</a:t>
+            </a:r>
+            <a:endParaRPr lang="en-US" sz="900" dirty="0"/>
+          </a:p>
+        </p:txBody>
+      </p:sp>
+      <p:sp>
+        <p:nvSpPr>
+          <p:cNvPr id="65" name="Text 63"/>
+          <p:cNvSpPr/>
+          <p:nvPr/>
+        </p:nvSpPr>
+        <p:spPr>
+          <a:xfrm>
+            <a:off x="7406640" y="3401568"/>
+            <a:ext cx="1280160" cy="164592"/>
+          </a:xfrm>
+          <a:prstGeom prst="rect">
+            <a:avLst/>
+          </a:prstGeom>
+          <a:noFill/>
+          <a:ln/>
+        </p:spPr>
+        <p:txBody>
+          <a:bodyPr wrap="square" rtlCol="0" anchor="ctr"/>
+          <a:lstStyle/>
+          <a:p>
+            <a:pPr marL="0" indent="0" algn="r">
+              <a:buNone/>
+            </a:pPr>
+            <a:r>
+              <a:rPr lang="en-US" sz="750" dirty="0">
+                <a:solidFill>
+                  <a:srgbClr val="8B949E"/>
+                </a:solidFill>
+                <a:latin typeface="Segoe UI" pitchFamily="34" charset="0"/>
+                <a:ea typeface="Segoe UI" pitchFamily="34" charset="-122"/>
+                <a:cs typeface="Segoe UI" pitchFamily="34" charset="-120"/>
+              </a:rPr>
+              <a:t>🌏 500M+ users</a:t>
+            </a:r>
+            <a:endParaRPr lang="en-US" sz="750" dirty="0"/>
+          </a:p>
+        </p:txBody>
+      </p:sp>
+      <p:sp>
+        <p:nvSpPr>
+          <p:cNvPr id="66" name="Shape 64"/>
+          <p:cNvSpPr/>
+          <p:nvPr/>
+        </p:nvSpPr>
+        <p:spPr>
+          <a:xfrm>
+            <a:off x="6126480" y="3602736"/>
+            <a:ext cx="2560320" cy="3658"/>
+          </a:xfrm>
+          <a:prstGeom prst="rect">
+            <a:avLst/>
+          </a:prstGeom>
+          <a:solidFill>
+            <a:srgbClr val="30363D"/>
+          </a:solidFill>
+          <a:ln/>
+        </p:spPr>
+        <p:txBody>
+          <a:bodyPr/>
+          <a:lstStyle/>
+          <a:p>
+            <a:endParaRPr lang="en-US"/>
+          </a:p>
+        </p:txBody>
+      </p:sp>
+      <p:sp>
+        <p:nvSpPr>
+          <p:cNvPr id="67" name="Text 65"/>
+          <p:cNvSpPr/>
+          <p:nvPr/>
+        </p:nvSpPr>
+        <p:spPr>
+          <a:xfrm>
+            <a:off x="6126480" y="3657600"/>
+            <a:ext cx="2560320" cy="868680"/>
+          </a:xfrm>
+          <a:prstGeom prst="rect">
+            <a:avLst/>
+          </a:prstGeom>
+          <a:noFill/>
+          <a:ln/>
+        </p:spPr>
+        <p:txBody>
+          <a:bodyPr wrap="square" rtlCol="0" anchor="t"/>
+          <a:lstStyle/>
+          <a:p>
+            <a:pPr marL="0" indent="0">
+              <a:lnSpc>
+                <a:spcPct val="120000"/>
+              </a:lnSpc>
+              <a:buNone/>
+            </a:pPr>
+            <a:r>
+              <a:rPr lang="en-US" sz="700" i="1" dirty="0">
+                <a:solidFill>
+                  <a:srgbClr val="C9D1D9"/>
+                </a:solidFill>
+                <a:latin typeface="Segoe UI" pitchFamily="34" charset="0"/>
+                <a:ea typeface="Segoe UI" pitchFamily="34" charset="-122"/>
+                <a:cs typeface="Segoe UI" pitchFamily="34" charset="-120"/>
+              </a:rPr>
+              <a:t>"Dropped median code review turnaround from 3 hours to 1 hour. 400 repos from innersource growth."</a:t>
+            </a:r>
+            <a:endParaRPr lang="en-US" sz="700" dirty="0"/>
+          </a:p>
+        </p:txBody>
+      </p:sp>
+      <p:sp>
+        <p:nvSpPr>
+          <p:cNvPr id="68" name="Text 66"/>
+          <p:cNvSpPr/>
+          <p:nvPr/>
+        </p:nvSpPr>
+        <p:spPr>
+          <a:xfrm>
+            <a:off x="6126480" y="4663440"/>
+            <a:ext cx="2560320" cy="164592"/>
+          </a:xfrm>
+          <a:prstGeom prst="rect">
+            <a:avLst/>
+          </a:prstGeom>
+          <a:noFill/>
+          <a:ln/>
+        </p:spPr>
+        <p:txBody>
+          <a:bodyPr wrap="square" rtlCol="0" anchor="ctr"/>
+          <a:lstStyle/>
+          <a:p>
+            <a:pPr marL="0" indent="0">
+              <a:buNone/>
+            </a:pPr>
+            <a:r>
+              <a:rPr lang="en-US" sz="650" b="1" dirty="0">
+                <a:solidFill>
+                  <a:srgbClr val="484F58"/>
+                </a:solidFill>
+                <a:latin typeface="Segoe UI" pitchFamily="34" charset="0"/>
+                <a:ea typeface="Segoe UI" pitchFamily="34" charset="-122"/>
+                <a:cs typeface="Segoe UI" pitchFamily="34" charset="-120"/>
+              </a:rPr>
+              <a:t>Enterprise · Copilot · APIs</a:t>
+            </a:r>
+            <a:endParaRPr lang="en-US" sz="650" dirty="0"/>
+          </a:p>
+        </p:txBody>
+      </p:sp>
+      <p:sp>
+        <p:nvSpPr>
+          <p:cNvPr id="69" name="Text 67"/>
+          <p:cNvSpPr/>
+          <p:nvPr/>
+        </p:nvSpPr>
+        <p:spPr>
+          <a:xfrm>
+            <a:off x="7315200" y="4663440"/>
+            <a:ext cx="1371600" cy="164592"/>
+          </a:xfrm>
+          <a:prstGeom prst="rect">
+            <a:avLst/>
+          </a:prstGeom>
+          <a:noFill/>
+          <a:ln/>
+        </p:spPr>
+        <p:txBody>
+          <a:bodyPr wrap="square" rtlCol="0" anchor="ctr"/>
+          <a:lstStyle/>
+          <a:p>
+            <a:pPr marL="0" indent="0" algn="r">
+              <a:buNone/>
+            </a:pPr>
+            <a:r>
+              <a:rPr lang="en-US" sz="650" u="sng" dirty="0">
+                <a:solidFill>
+                  <a:srgbClr val="58A6FF"/>
+                </a:solidFill>
+                <a:latin typeface="Segoe UI" pitchFamily="34" charset="0"/>
+                <a:ea typeface="Segoe UI" pitchFamily="34" charset="-122"/>
+                <a:cs typeface="Segoe UI" pitchFamily="34" charset="-120"/>
+                <a:hlinkClick r:id="rId8">
+                  <a:extLst>
+                    <a:ext uri="{A12FA001-AC4F-418D-AE19-62706E023703}">
+                      <ahyp:hlinkClr xmlns:ahyp="http://schemas.microsoft.com/office/drawing/2018/hyperlinkcolor" val="tx"/>
+                    </a:ext>
+                  </a:extLst>
+                </a:hlinkClick>
+              </a:rPr>
+              <a:t>Read full story →</a:t>
+            </a:r>
+            <a:endParaRPr lang="en-US" sz="650" dirty="0"/>
+          </a:p>
+        </p:txBody>
+      </p:sp>
+      <p:sp>
+        <p:nvSpPr>
+          <p:cNvPr id="70" name="Shape 68"/>
+          <p:cNvSpPr/>
+          <p:nvPr/>
+        </p:nvSpPr>
+        <p:spPr>
+          <a:xfrm>
+            <a:off x="365760" y="4905756"/>
+            <a:ext cx="8412480" cy="3658"/>
+          </a:xfrm>
+          <a:prstGeom prst="rect">
+            <a:avLst/>
+          </a:prstGeom>
+          <a:solidFill>
+            <a:srgbClr val="21262D"/>
+          </a:solidFill>
+          <a:ln/>
+        </p:spPr>
+        <p:txBody>
+          <a:bodyPr/>
+          <a:lstStyle/>
+          <a:p>
+            <a:endParaRPr lang="en-US"/>
+          </a:p>
+        </p:txBody>
+      </p:sp>
+      <p:sp>
+        <p:nvSpPr>
+          <p:cNvPr id="71" name="Text 69"/>
+          <p:cNvSpPr/>
+          <p:nvPr/>
+        </p:nvSpPr>
+        <p:spPr>
+          <a:xfrm>
+            <a:off x="365760" y="4942332"/>
+            <a:ext cx="6400800" cy="137160"/>
+          </a:xfrm>
+          <a:prstGeom prst="rect">
+            <a:avLst/>
+          </a:prstGeom>
+          <a:noFill/>
+          <a:ln/>
+        </p:spPr>
+        <p:txBody>
+          <a:bodyPr wrap="square" rtlCol="0" anchor="ctr"/>
+          <a:lstStyle/>
+          <a:p>
+            <a:pPr marL="0" indent="0">
+              <a:buNone/>
+            </a:pPr>
+            <a:r>
+              <a:rPr lang="en-US" sz="600" dirty="0">
+                <a:solidFill>
+                  <a:srgbClr val="484F58"/>
+                </a:solidFill>
+                <a:latin typeface="Segoe UI" pitchFamily="34" charset="0"/>
+                <a:ea typeface="Segoe UI" pitchFamily="34" charset="-122"/>
+                <a:cs typeface="Segoe UI" pitchFamily="34" charset="-120"/>
+              </a:rPr>
+              <a:t>Sources: github.com/customer-stories  ·  Tokopedia is the only published SE Asian story; others are global parallels for key verticals</a:t>
+            </a:r>
+            <a:endParaRPr lang="en-US" sz="600" dirty="0"/>
+          </a:p>
+        </p:txBody>
+      </p:sp>
+      <p:sp>
+        <p:nvSpPr>
+          <p:cNvPr id="72" name="Text 70"/>
+          <p:cNvSpPr/>
+          <p:nvPr/>
+        </p:nvSpPr>
+        <p:spPr>
+          <a:xfrm>
+            <a:off x="5943600" y="4942332"/>
+            <a:ext cx="2834640" cy="137160"/>
+          </a:xfrm>
+          <a:prstGeom prst="rect">
+            <a:avLst/>
+          </a:prstGeom>
+          <a:noFill/>
+          <a:ln/>
+        </p:spPr>
+        <p:txBody>
+          <a:bodyPr wrap="square" rtlCol="0" anchor="ctr"/>
+          <a:lstStyle/>
+          <a:p>
+            <a:pPr marL="0" indent="0" algn="r">
+              <a:buNone/>
+            </a:pPr>
+            <a:r>
+              <a:rPr lang="en-US" sz="650" u="sng" dirty="0">
+                <a:solidFill>
+                  <a:srgbClr val="58A6FF"/>
+                </a:solidFill>
+                <a:latin typeface="Segoe UI" pitchFamily="34" charset="0"/>
+                <a:ea typeface="Segoe UI" pitchFamily="34" charset="-122"/>
+                <a:cs typeface="Segoe UI" pitchFamily="34" charset="-120"/>
+                <a:hlinkClick r:id="rId9">
+                  <a:extLst>
+                    <a:ext uri="{A12FA001-AC4F-418D-AE19-62706E023703}">
+                      <ahyp:hlinkClr xmlns:ahyp="http://schemas.microsoft.com/office/drawing/2018/hyperlinkcolor" val="tx"/>
+                    </a:ext>
+                  </a:extLst>
+                </a:hlinkClick>
+              </a:rPr>
+              <a:t>github.com/customer-stories</a:t>
+            </a:r>
+            <a:endParaRPr lang="en-US" sz="650" dirty="0"/>
+          </a:p>
+        </p:txBody>
+      </p:sp>
+    </p:spTree>
+    <p:extLst>
+      <p:ext uri="{BB962C8B-B14F-4D97-AF65-F5344CB8AC3E}">
+        <p14:creationId xmlns:p14="http://schemas.microsoft.com/office/powerpoint/2010/main" val="2068637422"/>
+      </p:ext>
+    </p:extLst>
   </p:cSld>
   <p:clrMapOvr>
     <a:masterClrMapping/>
